--- a/Kubernetes - Eget kluster med k3d.pptx
+++ b/Kubernetes - Eget kluster med k3d.pptx
@@ -4,6 +4,9 @@
   <p:sldMasterIdLst>
     <p:sldMasterId id="2147483648" r:id="rId1"/>
   </p:sldMasterIdLst>
+  <p:notesMasterIdLst>
+    <p:notesMasterId r:id="rId37"/>
+  </p:notesMasterIdLst>
   <p:sldIdLst>
     <p:sldId id="256" r:id="rId2"/>
     <p:sldId id="257" r:id="rId3"/>
@@ -41,9 +44,6 @@
     <p:sldId id="289" r:id="rId35"/>
     <p:sldId id="290" r:id="rId36"/>
   </p:sldIdLst>
-  <p:notesMasterIdLst>
-    <p:notesMasterId r:id="rId37"/>
-  </p:notesMasterIdLst>
   <p:sldSz cx="12192000" cy="6858000"/>
   <p:notesSz cx="6858000" cy="12192000"/>
   <p:defaultTextStyle>
@@ -138,6 +138,11 @@
       </a:defRPr>
     </a:lvl9pPr>
   </p:defaultTextStyle>
+  <p:extLst>
+    <p:ext uri="{EFAFB233-063F-42B5-8137-9DF3F51BA10A}">
+      <p15:sldGuideLst xmlns:p15="http://schemas.microsoft.com/office/powerpoint/2012/main"/>
+    </p:ext>
+  </p:extLst>
 </p:presentation>
 </file>
 
@@ -163,234 +168,10 @@
           <a:chExt cx="0" cy="0"/>
         </a:xfrm>
       </p:grpSpPr>
-      <p:sp>
-        <p:nvSpPr>
-          <p:cNvPr id="2" name="Header Placeholder 1"/>
-          <p:cNvSpPr>
-            <a:spLocks noGrp="1"/>
-          </p:cNvSpPr>
-          <p:nvPr>
-            <p:ph type="hdr" sz="quarter"/>
-          </p:nvPr>
-        </p:nvSpPr>
-        <p:spPr>
-          <a:xfrm>
-            <a:off x="0" y="0"/>
-            <a:ext cx="2971800" cy="458788"/>
-          </a:xfrm>
-          <a:prstGeom prst="rect">
-            <a:avLst/>
-          </a:prstGeom>
-        </p:spPr>
-        <p:txBody>
-          <a:bodyPr vert="horz" lIns="91440" tIns="45720" rIns="91440" bIns="45720" rtlCol="0"/>
-          <a:lstStyle>
-            <a:lvl1pPr algn="l">
-              <a:defRPr sz="1200"/>
-            </a:lvl1pPr>
-          </a:lstStyle>
-          <a:p>
-            <a:endParaRPr lang="en-US"/>
-          </a:p>
-        </p:txBody>
-      </p:sp>
-      <p:sp>
-        <p:nvSpPr>
-          <p:cNvPr id="3" name="Date Placeholder 2"/>
-          <p:cNvSpPr>
-            <a:spLocks noGrp="1"/>
-          </p:cNvSpPr>
-          <p:nvPr>
-            <p:ph type="dt" idx="1"/>
-          </p:nvPr>
-        </p:nvSpPr>
-        <p:spPr>
-          <a:xfrm>
-            <a:off x="3884613" y="0"/>
-            <a:ext cx="2971800" cy="458788"/>
-          </a:xfrm>
-          <a:prstGeom prst="rect">
-            <a:avLst/>
-          </a:prstGeom>
-        </p:spPr>
-        <p:txBody>
-          <a:bodyPr vert="horz" lIns="91440" tIns="45720" rIns="91440" bIns="45720" rtlCol="0"/>
-          <a:lstStyle>
-            <a:lvl1pPr algn="r">
-              <a:defRPr sz="1200"/>
-            </a:lvl1pPr>
-          </a:lstStyle>
-          <a:p>
-            <a:fld id="{5282F153-3F37-0F45-9E97-73ACFA13230C}" type="datetimeFigureOut">
-              <a:rPr lang="en-US"/>
-              <a:t>7/23/19</a:t>
-            </a:fld>
-            <a:endParaRPr lang="en-US"/>
-          </a:p>
-        </p:txBody>
-      </p:sp>
-      <p:sp>
-        <p:nvSpPr>
-          <p:cNvPr id="4" name="Slide Image Placeholder 3"/>
-          <p:cNvSpPr>
-            <a:spLocks noGrp="1" noRot="1" noChangeAspect="1"/>
-          </p:cNvSpPr>
-          <p:nvPr>
-            <p:ph type="sldImg" idx="2"/>
-          </p:nvPr>
-        </p:nvSpPr>
-        <p:spPr>
-          <a:xfrm>
-            <a:off x="685800" y="1143000"/>
-            <a:ext cx="5486400" cy="3086100"/>
-          </a:xfrm>
-          <a:prstGeom prst="rect">
-            <a:avLst/>
-          </a:prstGeom>
-          <a:noFill/>
-          <a:ln w="12700">
-            <a:solidFill>
-              <a:prstClr val="black"/>
-            </a:solidFill>
-          </a:ln>
-        </p:spPr>
-        <p:txBody>
-          <a:bodyPr vert="horz" lIns="91440" tIns="45720" rIns="91440" bIns="45720" rtlCol="0" anchor="ctr"/>
-          <a:lstStyle/>
-          <a:p>
-            <a:endParaRPr lang="en-US"/>
-          </a:p>
-        </p:txBody>
-      </p:sp>
-      <p:sp>
-        <p:nvSpPr>
-          <p:cNvPr id="5" name="Notes Placeholder 4"/>
-          <p:cNvSpPr>
-            <a:spLocks noGrp="1"/>
-          </p:cNvSpPr>
-          <p:nvPr>
-            <p:ph type="body" sz="quarter" idx="3"/>
-          </p:nvPr>
-        </p:nvSpPr>
-        <p:spPr>
-          <a:xfrm>
-            <a:off x="685800" y="4400550"/>
-            <a:ext cx="5486400" cy="3600450"/>
-          </a:xfrm>
-          <a:prstGeom prst="rect">
-            <a:avLst/>
-          </a:prstGeom>
-        </p:spPr>
-        <p:txBody>
-          <a:bodyPr vert="horz" lIns="91440" tIns="45720" rIns="91440" bIns="45720" rtlCol="0"/>
-          <a:lstStyle/>
-          <a:p>
-            <a:pPr lvl="0"/>
-            <a:r>
-              <a:rPr lang="en-US"/>
-              <a:t>Click to edit Master text styles</a:t>
-            </a:r>
-          </a:p>
-          <a:p>
-            <a:pPr lvl="1"/>
-            <a:r>
-              <a:rPr lang="en-US"/>
-              <a:t>Second level</a:t>
-            </a:r>
-          </a:p>
-          <a:p>
-            <a:pPr lvl="2"/>
-            <a:r>
-              <a:rPr lang="en-US"/>
-              <a:t>Third level</a:t>
-            </a:r>
-          </a:p>
-          <a:p>
-            <a:pPr lvl="3"/>
-            <a:r>
-              <a:rPr lang="en-US"/>
-              <a:t>Fourth level</a:t>
-            </a:r>
-          </a:p>
-          <a:p>
-            <a:pPr lvl="4"/>
-            <a:r>
-              <a:rPr lang="en-US"/>
-              <a:t>Fifth level</a:t>
-            </a:r>
-          </a:p>
-        </p:txBody>
-      </p:sp>
-      <p:sp>
-        <p:nvSpPr>
-          <p:cNvPr id="6" name="Footer Placeholder 5"/>
-          <p:cNvSpPr>
-            <a:spLocks noGrp="1"/>
-          </p:cNvSpPr>
-          <p:nvPr>
-            <p:ph type="ftr" sz="quarter" idx="4"/>
-          </p:nvPr>
-        </p:nvSpPr>
-        <p:spPr>
-          <a:xfrm>
-            <a:off x="0" y="8685213"/>
-            <a:ext cx="2971800" cy="458787"/>
-          </a:xfrm>
-          <a:prstGeom prst="rect">
-            <a:avLst/>
-          </a:prstGeom>
-        </p:spPr>
-        <p:txBody>
-          <a:bodyPr vert="horz" lIns="91440" tIns="45720" rIns="91440" bIns="45720" rtlCol="0" anchor="b"/>
-          <a:lstStyle>
-            <a:lvl1pPr algn="l">
-              <a:defRPr sz="1200"/>
-            </a:lvl1pPr>
-          </a:lstStyle>
-          <a:p>
-            <a:endParaRPr lang="en-US"/>
-          </a:p>
-        </p:txBody>
-      </p:sp>
-      <p:sp>
-        <p:nvSpPr>
-          <p:cNvPr id="7" name="Slide Number Placeholder 6"/>
-          <p:cNvSpPr>
-            <a:spLocks noGrp="1"/>
-          </p:cNvSpPr>
-          <p:nvPr>
-            <p:ph type="sldNum" sz="quarter" idx="5"/>
-          </p:nvPr>
-        </p:nvSpPr>
-        <p:spPr>
-          <a:xfrm>
-            <a:off x="3884613" y="8685213"/>
-            <a:ext cx="2971800" cy="458787"/>
-          </a:xfrm>
-          <a:prstGeom prst="rect">
-            <a:avLst/>
-          </a:prstGeom>
-        </p:spPr>
-        <p:txBody>
-          <a:bodyPr vert="horz" lIns="91440" tIns="45720" rIns="91440" bIns="45720" rtlCol="0" anchor="b"/>
-          <a:lstStyle>
-            <a:lvl1pPr algn="r">
-              <a:defRPr sz="1200"/>
-            </a:lvl1pPr>
-          </a:lstStyle>
-          <a:p>
-            <a:fld id="{CE5E9CC1-C706-0F49-92D6-E571CC5EEA8F}" type="slidenum">
-              <a:rPr lang="en-US"/>
-              <a:t>‹#›</a:t>
-            </a:fld>
-            <a:endParaRPr lang="en-US"/>
-          </a:p>
-        </p:txBody>
-      </p:sp>
     </p:spTree>
     <p:extLst>
       <p:ext uri="{BB962C8B-B14F-4D97-AF65-F5344CB8AC3E}">
-        <p14:creationId xmlns:p14="http://schemas.microsoft.com/office/powerpoint/2010/main" val="1024086991"/>
+        <p14:creationId xmlns:p14="http://schemas.microsoft.com/office/powerpoint/2010/main" val="2909196542"/>
       </p:ext>
     </p:extLst>
   </p:cSld>
@@ -538,7 +319,6 @@
               <a:rPr lang="en-US" dirty="0"/>
               <a:t>Välkomna tillbaka! I tisdags byggde vi ordförrådet: pod, deployment, service, ingress, control plane. Ikväll blir det praktiskt - ni gör exakt samma sak som jag på er egen dator, och när vi går hem har alla ett fungerande kluster. Be alla att ha en terminal (PowerShell eller Windows Terminal) redo och att säga till direkt om något steg inte fungerar - vi väntar in varandra.</a:t>
             </a:r>
-            <a:endParaRPr lang="en-US" dirty="0"/>
           </a:p>
         </p:txBody>
       </p:sp>
@@ -626,7 +406,6 @@
               <a:rPr lang="en-US" dirty="0"/>
               <a:t>Poängen med nedre raden: kubectl, Helm och k9s är tre olika gränssnitt mot SAMMA API. De hittar klustret via samma fil, kubeconfig (~/.kube/config), som k3d fyller i åt oss. kubectl är markerat för att det är verktyget ni alltid kan falla tillbaka på - finns det bara ett verktyg på en server är det kubectl. Nästa tre bilder tittar lite närmare på kubectl, Helm och k9s.</a:t>
             </a:r>
-            <a:endParaRPr lang="en-US" dirty="0"/>
           </a:p>
         </p:txBody>
       </p:sp>
@@ -714,7 +493,6 @@
               <a:rPr lang="en-US" dirty="0"/>
               <a:t>Visa mönstret verb-resurs-namn - när man ser det blir kubectl förutsägbart. Kommandona till vänster kommer vi köra själva om en stund. Varna redan nu för context: har man Docker Desktops egna Kubernetes eller ett jobbkluster konfigurerat kan kubectl prata med fel kluster. Fråga: vad tror ni händer om ni kör kubectl delete i fel context? Därför kollar vi alltid get-contexts först.</a:t>
             </a:r>
-            <a:endParaRPr lang="en-US" dirty="0"/>
           </a:p>
         </p:txBody>
       </p:sp>
@@ -802,7 +580,6 @@
               <a:rPr lang="en-US" dirty="0"/>
               <a:t>Helm löser problemet att en riktig app ofta består av tio-femton YAML-filer. Med Helm installerar och avinstallerar man dem som en enhet, och kan uppgradera och rulla tillbaka. Kul detalj: k3s använder själv Helm internt för att installera Traefik - det ser vi när vi listar poddarna senare. Kommandona längst ner kör vi i steg 8.</a:t>
             </a:r>
-            <a:endParaRPr lang="en-US" dirty="0"/>
           </a:p>
         </p:txBody>
       </p:sp>
@@ -890,7 +667,6 @@
               <a:rPr lang="en-US" dirty="0"/>
               <a:t>k9s är det verktyg de flesta fastnar för. Det gör inget kubectl inte kan, men det gör det mycket snabbare att få överblick. Markerat: l för loggar - det är den ni kommer använda mest när något inte startar. Varna för Ctrl+D - k9s frågar först, men det är lätt att trycka fel. Nu har vi gått igenom verktygen, dags att samla ihop nedladdningslänkarna.</a:t>
             </a:r>
-            <a:endParaRPr lang="en-US" dirty="0"/>
           </a:p>
         </p:txBody>
       </p:sp>
@@ -978,7 +754,6 @@
               <a:rPr lang="en-US" dirty="0"/>
               <a:t>Den här bilden är referensen de kan gå tillbaka till - dela gärna ut presentationen efteråt. Vi installerar allt via winget ikväll eftersom det är snabbast och ger samma resultat för alla. Den som föredrar Chocolatey eller manuell nedladdning får göra det, men då kan jag inte lova att sökvägarna blir likadana. Nu börjar installationen.</a:t>
             </a:r>
-            <a:endParaRPr lang="en-US" dirty="0"/>
           </a:p>
         </p:txBody>
       </p:sp>
@@ -1066,7 +841,6 @@
               <a:rPr lang="en-US" dirty="0"/>
               <a:t>Nu börjar den gemensamma övningen. Be alla öppna PowerShell (Windows Terminal). En del steg kräver administratörsrättigheter - kör terminalen som administratör för säkerhets skull. Vänta in alla efter varje steg.</a:t>
             </a:r>
-            <a:endParaRPr lang="en-US" dirty="0"/>
           </a:p>
         </p:txBody>
       </p:sp>
@@ -1154,7 +928,6 @@
               <a:rPr lang="en-US" dirty="0"/>
               <a:t>Kontrollera detta innan vi går vidare - det är här de flesta problem uppstår. Portarna är markerade eftersom det är den vanligaste fällan: har man en lokal MySQL installerad ligger den på 3306, och IIS eller Skype kan ta port 80. Då misslyckas klustret att starta. Testa med: netstat -ano | findstr ":3306". Kolla WSL med: wsl --status.</a:t>
             </a:r>
-            <a:endParaRPr lang="en-US" dirty="0"/>
           </a:p>
         </p:txBody>
       </p:sp>
@@ -1242,7 +1015,6 @@
               <a:rPr lang="en-US" dirty="0"/>
               <a:t>Installationen tar några minuter och kan kräva utloggning eller omstart. Medan den laddar ner: förklara att Docker Desktop kör en liten Linux-VM i WSL2, och att alla containrar körs där. Kontrollera att alla har Kubernetes AV i Docker Desktop - annars skapas en context 'docker-desktop' som kubectl kan råka prata med. Vänta in alla tills hello-world fungerar.</a:t>
             </a:r>
-            <a:endParaRPr lang="en-US" dirty="0"/>
           </a:p>
         </p:txBody>
       </p:sp>
@@ -1330,7 +1102,6 @@
               <a:rPr lang="en-US" dirty="0"/>
               <a:t>Fyra rader, en per verktyg. Den vanligaste frågan här blir 'k3d is not recognized' - det beror nästan alltid på att terminalen startades innan installationen och inte har fått den nya PATH:en. Stäng och öppna en ny. Kontrollera sedan att alla fyra versionskommandon fungerar hos alla innan vi går vidare.</a:t>
             </a:r>
-            <a:endParaRPr lang="en-US" dirty="0"/>
           </a:p>
         </p:txBody>
       </p:sp>
@@ -1418,7 +1189,6 @@
               <a:rPr lang="en-US" dirty="0"/>
               <a:t>Mapparna måste finnas innan klustret skapas, annars kan volymmonteringen misslyckas eller skapas med fel rättigheter. Dela ut k3d-install.yaml nu (Teams, USB, Git - vad som passar). Poängtera att klustret beskrivs i en fil - precis som med Kubernetes-YAML är det deklarativt, och alla får exakt samma kluster.</a:t>
             </a:r>
-            <a:endParaRPr lang="en-US" dirty="0"/>
           </a:p>
         </p:txBody>
       </p:sp>
@@ -1506,7 +1276,6 @@
               <a:rPr lang="en-US" dirty="0"/>
               <a:t>Gå snabbt igenom de sex delarna. Första två delarna är kort teori (ca 20 minuter), sedan är resten praktik där alla gör samtidigt. Säg att den som hamnar efter ska räcka upp handen - det är viktigare att alla kommer i mål än att vi håller tidsplanen. Nästa bild visar exakt vad 'i mål' betyder.</a:t>
             </a:r>
-            <a:endParaRPr lang="en-US" dirty="0"/>
           </a:p>
         </p:txBody>
       </p:sp>
@@ -1594,7 +1363,6 @@
               <a:rPr lang="en-US" dirty="0"/>
               <a:t>Nu kommer kvällens huvudmoment. Först förstår vi config-filen - två bilder - sedan en bild om portarna och därefter skapar vi klustret.</a:t>
             </a:r>
-            <a:endParaRPr lang="en-US" dirty="0"/>
           </a:p>
         </p:txBody>
       </p:sp>
@@ -1682,7 +1450,6 @@
               <a:rPr lang="en-US" dirty="0"/>
               <a:t>Känn igen strukturen från förra veckan: apiVersion och kind överst, precis som ett Kubernetes-objekt - men det här är k3d:s egen filtyp. Fokusera på image: vi låser versionen så att alla kör samma Kubernetes (v1.36.3). Observera att image-taggen har bindestreck (-k3s1) medan k3s själv skriver versionen med plus. servers: 1 betyder en nod som är både control plane och worker - det räcker gott på en laptop.</a:t>
             </a:r>
-            <a:endParaRPr lang="en-US" dirty="0"/>
           </a:p>
         </p:txBody>
       </p:sp>
@@ -1770,7 +1537,6 @@
               <a:rPr lang="en-US" dirty="0"/>
               <a:t>Den här delen är förkortad på bilden - visa gärna hela filen i editorn parallellt. Portarna 3306, 4222/8222 och 6379 är förberedda för MySQL, NATS och Redis som vi installerar senare i kursen. Den markerade rutan är den som gör att kubectl, Helm och k9s fungerar direkt efteråt, utan att ni behöver konfigurera något - k3d sköter kubeconfig. Nästa bild visar hur portarna hänger ihop.</a:t>
             </a:r>
-            <a:endParaRPr lang="en-US" dirty="0"/>
           </a:p>
         </p:txBody>
       </p:sp>
@@ -1858,7 +1624,6 @@
               <a:rPr lang="en-US" dirty="0"/>
               <a:t>Gå igenom raderna. Första raden är den vi testar ikväll: http://något.localhost i webbläsaren går till port 80, in i loadbalancern, till Traefik som läser Ingress-reglerna och skickar vidare till rätt pod. Precis det vi pratade om i teorin förra veckan, nu på riktigt. Sista raden: från Windows heter registryt localhost:5000, inifrån klustret heter det registry:5000 - samma registry, två namn.</a:t>
             </a:r>
-            <a:endParaRPr lang="en-US" dirty="0"/>
           </a:p>
         </p:txBody>
       </p:sp>
@@ -1946,7 +1711,6 @@
               <a:rPr lang="en-US" dirty="0"/>
               <a:t>Kör kommandot på storskärm samtidigt som alla andra. Läs upp INFO-raderna när de dyker upp och peka på motsvarande ruta i flödet. Om någon får 'port is already allocated' - hoppa till felsökningsbilden: det är nästan alltid en lokal MySQL eller IIS. Om det tar timeout första gången: kör k3d cluster delete home och sedan create igen - imagen är då redan nedladdad.</a:t>
             </a:r>
-            <a:endParaRPr lang="en-US" dirty="0"/>
           </a:p>
         </p:txBody>
       </p:sp>
@@ -2034,7 +1798,6 @@
               <a:rPr lang="en-US" dirty="0"/>
               <a:t>Tre kontroller: rätt context, noden är Ready, systempoddarna är Running. Lägg märke till helm-install-traefik med status Completed - det är ett Job som k3s använt för att installera Traefik med Helm, precis som vi snart gör själva. Det kan ta en minut innan alla poddar är Running; kör kommandot igen. När alla har Ready på noden: grattis, ni har ett Kubernetes-kluster!</a:t>
             </a:r>
-            <a:endParaRPr lang="en-US" dirty="0"/>
           </a:p>
         </p:txBody>
       </p:sp>
@@ -2122,7 +1885,6 @@
               <a:rPr lang="en-US" dirty="0"/>
               <a:t>Klustret är uppe. Nu gör vi det levande: vi tittar på det i k9s, deployar något själva, installerar något med Helm och kontrollerar att registryt fungerar.</a:t>
             </a:r>
-            <a:endParaRPr lang="en-US" dirty="0"/>
           </a:p>
         </p:txBody>
       </p:sp>
@@ -2210,7 +1972,6 @@
               <a:rPr lang="en-US" dirty="0"/>
               <a:t>Ge dem fem minuter att klicka runt själva. Fråga på uppgift 4: vilken service har typen LoadBalancer och vilken extern IP har den? Svar: traefik, och det är ServiceLB som ger den en adress - det är därför port 80 fungerar. Uppmana alla att ha k9s öppet i ett sidofönster när vi deployar i nästa steg.</a:t>
             </a:r>
-            <a:endParaRPr lang="en-US" dirty="0"/>
           </a:p>
         </p:txBody>
       </p:sp>
@@ -2298,7 +2059,6 @@
               <a:rPr lang="en-US" dirty="0"/>
               <a:t>Det här är kvällens höjdpunkt: tisdagens tre begrepp - Deployment, Service, Ingress - skapade på riktigt. Titta i k9s när deploymenten skapas, podden dyker upp. Chrome och Edge löser alla *.localhost-namn till 127.0.0.1 automatiskt, så vi behöver inte röra hosts-filen. Backticken ` är PowerShells radbrytning. Fallback om ingress strular: kubectl port-forward deploy/hello 8080:80 -n test och öppna http://localhost:8080. Nästa gång gör vi samma sak med YAML-filer istället för kommandon.</a:t>
             </a:r>
-            <a:endParaRPr lang="en-US" dirty="0"/>
           </a:p>
         </p:txBody>
       </p:sp>
@@ -2386,7 +2146,6 @@
               <a:rPr lang="en-US" dirty="0"/>
               <a:t>Jämför med förra steget: där skapade vi tre objekt med tre kommandon, här skapar Helm allt åt oss från en chart. Be dem hitta podinfo i k9s och öppna loggarna medan de laddar om sidan i webbläsaren. port-forward är markerat eftersom det är ett ovärderligt felsökningsverktyg: man kommer åt en tjänst utan Ingress. Avsluta med Ctrl+C.</a:t>
             </a:r>
-            <a:endParaRPr lang="en-US" dirty="0"/>
           </a:p>
         </p:txBody>
       </p:sp>
@@ -2474,7 +2233,6 @@
               <a:rPr lang="en-US" dirty="0"/>
               <a:t>Det här är definitionen av klart för kvällen. De tre första rutorna är installation, den fjärde - markerad - är beviset: något vi själva har deployat syns i webbläsaren. Fråga: vad tror ni är skillnaden mellan att ha Kubernetes installerat och att ha ett fungerande kluster? Svaret är just att något faktiskt körs och går att nå. Nu backar vi och tittar på vad det är vi installerar.</a:t>
             </a:r>
-            <a:endParaRPr lang="en-US" dirty="0"/>
           </a:p>
         </p:txBody>
       </p:sp>
@@ -2562,7 +2320,6 @@
               <a:rPr lang="en-US" dirty="0"/>
               <a:t>Samma registry, två adresser: localhost:5000 från Windows, registry:5000 inifrån klustret. Om podden hamnar i ImagePullBackOff: kör kubectl describe pod regtest -n test och läs Events - det talar om vilket namn som inte gick att nå. Det här steget är grunden för nästa tillfälle, så det är värt att få det grönt hos alla.</a:t>
             </a:r>
-            <a:endParaRPr lang="en-US" dirty="0"/>
           </a:p>
         </p:txBody>
       </p:sp>
@@ -2650,7 +2407,6 @@
               <a:rPr lang="en-US" dirty="0"/>
               <a:t>Poängtera att ett k3d-kluster är billigt: går något sönder kan man radera och skapa om på en minut med samma config-fil - det är styrkan med att beskriva klustret i en fil. stop/start är bra att kunna för att spara batteri och minne. Städa gärna bort namespace test nu, eller låt det ligga kvar och experimentera hemma. Nästa bild: de vanligaste felen.</a:t>
             </a:r>
-            <a:endParaRPr lang="en-US" dirty="0"/>
           </a:p>
         </p:txBody>
       </p:sp>
@@ -2738,7 +2494,6 @@
               <a:rPr lang="en-US" dirty="0"/>
               <a:t>Den här bilden är mest ett uppslagsverk - ha den uppe när någon kör fast. Den överlägset vanligaste är port is already allocated, nästan alltid en lokal MySQL på 3306. Antingen stoppar man tjänsten (services.msc) eller tar bort raden för 3306 i config-filen tills vidare. Generellt råd: läs felmeddelandet noga - k3d och kubectl är oftast väldigt tydliga med vad som gick fel.</a:t>
             </a:r>
-            <a:endParaRPr lang="en-US" dirty="0"/>
           </a:p>
         </p:txBody>
       </p:sp>
@@ -2826,7 +2581,6 @@
               <a:rPr lang="en-US" dirty="0"/>
               <a:t>Kör som snabb muntlig quiz: peka på en ruta och låt någon förklara med egna ord. Den markerade rutan är kvällens viktigaste idé: klustret är beskrivet i en fil, precis som appar i Kubernetes beskrivs i YAML. Går något sönder raderar ni och skapar om - samma resultat varje gång. Det är samma deklarativa tänk som förra veckan, nu tillämpat på själva klustret.</a:t>
             </a:r>
-            <a:endParaRPr lang="en-US" dirty="0"/>
           </a:p>
         </p:txBody>
       </p:sp>
@@ -2914,7 +2668,6 @@
               <a:rPr lang="en-US" dirty="0"/>
               <a:t>Visa kopplingen mellan config-filen och resten av kursen: portarna vi öppnade ikväll är redan förberedda för MySQL, Redis och NATS. Registryt är där våra egna images ska ligga. Nästa gång tar vi SimpleApi - en liten .NET-app - bygger en image, pushar den till registryt och deployar den med riktiga YAML-filer. Be alla se till att klustret fungerar hemma innan dess.</a:t>
             </a:r>
-            <a:endParaRPr lang="en-US" dirty="0"/>
           </a:p>
         </p:txBody>
       </p:sp>
@@ -3002,7 +2755,6 @@
               <a:rPr lang="en-US" dirty="0"/>
               <a:t>Öppna för frågor. Bra avslutande fråga: när ni öppnade http://hello.localhost - vilka steg passerade anropet, från webbläsaren till nginx-podden? (Windows port 80 → k3d-loadbalancern → Traefik → Ingress → Service → Pod.) Kan de svara på det har de förstått både kvällens praktik och förra veckans teori. Påminn: stäng gärna av klustret med k3d cluster stop home när ni inte använder det.</a:t>
             </a:r>
-            <a:endParaRPr lang="en-US" dirty="0"/>
           </a:p>
         </p:txBody>
       </p:sp>
@@ -3090,7 +2842,6 @@
               <a:rPr lang="en-US" dirty="0"/>
               <a:t>Första delen: vad är det för Kubernetes vi kör? Poängen att landa: k3s är inte en leksak eller en simulering, det är certifierad Kubernetes. k3d är bara ett smidigt sätt att köra det i Docker.</a:t>
             </a:r>
-            <a:endParaRPr lang="en-US" dirty="0"/>
           </a:p>
         </p:txBody>
       </p:sp>
@@ -3178,7 +2929,6 @@
               <a:rPr lang="en-US" dirty="0"/>
               <a:t>Koppla till förra veckan: alla komponenter vi pratade om - API-server, scheduler, controller manager, kubelet - finns här, fast i en och samma process. Nedersta raden är det som gör k3s bekvämt: ingress-controllern Traefik, en enkel LoadBalancer (ServiceLB) och lagring (local-path) är installerat direkt. Det är därför vi får port 80 och 443 att fungera utan extra arbete ikväll. Nästa bild: en rak jämförelse mot 'riktig' k8s.</a:t>
             </a:r>
-            <a:endParaRPr lang="en-US" dirty="0"/>
           </a:p>
         </p:txBody>
       </p:sp>
@@ -3266,7 +3016,6 @@
               <a:rPr lang="en-US" dirty="0"/>
               <a:t>Gå igenom raderna uppifrån. Poängtera sista raden, den är viktigast: det som skiljer är paketering och drift, inte API:et. En Deployment-YAML som fungerar i k3s fungerar i AKS och tvärtom. Fråga gruppen: om allt API ser likadant ut, varför kör inte alla k3s i produktion? (Svar: stora organisationer vill ha HA, managed uppgraderingar, molnintegration - det köper man med AKS/EKS/GKE.)</a:t>
             </a:r>
-            <a:endParaRPr lang="en-US" dirty="0"/>
           </a:p>
         </p:txBody>
       </p:sp>
@@ -3354,7 +3103,6 @@
               <a:rPr lang="en-US" dirty="0"/>
               <a:t>En kort men viktig bild: studenterna ska inte känna att de lär sig en 'förenklad' variant. Allt de gör resten av kursen går att ta med till jobbet. Nästa fråga blir: hur får vi k3s att köra på en Windows-laptop? Svaret är k3d.</a:t>
             </a:r>
-            <a:endParaRPr lang="en-US" dirty="0"/>
           </a:p>
         </p:txBody>
       </p:sp>
@@ -3442,7 +3190,6 @@
               <a:rPr lang="en-US" dirty="0"/>
               <a:t>Rita gärna på tavlan: Windows, ovanpå det WSL2, ovanpå det Docker, och i Docker våra tre containrar. Loadbalancern tar emot trafiken från Windows och skickar den vidare till server-noden där Traefik och våra poddar kör. Registryt är en separat container där vi senare lägger våra egna .NET-images. Vi kör bara en nod ikväll, men k3d kan lika gärna skapa tre servrar och fem agenter - det är bara en rad i config-filen.</a:t>
             </a:r>
-            <a:endParaRPr lang="en-US" dirty="0"/>
           </a:p>
         </p:txBody>
       </p:sp>
@@ -3530,7 +3277,6 @@
               <a:rPr lang="en-US" dirty="0"/>
               <a:t>Nu tittar vi på verktygen innan vi installerar dem, så att ni vet vad varje verktyg är till för. Fem verktyg - men bara tre av dem använder ni dagligen: kubectl, Helm och k9s.</a:t>
             </a:r>
-            <a:endParaRPr lang="en-US" dirty="0"/>
           </a:p>
         </p:txBody>
       </p:sp>
@@ -3603,6 +3349,11 @@
 <file path=ppt/slideMasters/slideMaster1.xml><?xml version="1.0" encoding="utf-8"?>
 <p:sldMaster xmlns:a="http://schemas.openxmlformats.org/drawingml/2006/main" xmlns:r="http://schemas.openxmlformats.org/officeDocument/2006/relationships" xmlns:p="http://schemas.openxmlformats.org/presentationml/2006/main">
   <p:cSld>
+    <p:bg>
+      <p:bgRef idx="1001">
+        <a:schemeClr val="bg1"/>
+      </p:bgRef>
+    </p:bg>
     <p:spTree>
       <p:nvGrpSpPr>
         <p:cNvPr id="1" name=""/>
@@ -3885,6 +3636,7 @@
         <a:solidFill>
           <a:srgbClr val="0F1F33"/>
         </a:solidFill>
+        <a:effectLst/>
       </p:bgPr>
     </p:bg>
     <p:spTree>
@@ -3922,11 +3674,11 @@
           <a:bodyPr wrap="square" lIns="0" tIns="0" rIns="0" bIns="0" rtlCol="0" anchor="ctr"/>
           <a:lstStyle/>
           <a:p>
-            <a:pPr indent="0" marL="0">
-              <a:buNone/>
-            </a:pPr>
-            <a:r>
-              <a:rPr lang="en-US" sz="1200" b="1" spc="200" kern="0" dirty="0">
+            <a:pPr marL="0" indent="0">
+              <a:buNone/>
+            </a:pPr>
+            <a:r>
+              <a:rPr lang="en-US" sz="1200" b="1" kern="0" spc="200" dirty="0">
                 <a:solidFill>
                   <a:srgbClr val="7C9CFF"/>
                 </a:solidFill>
@@ -3961,7 +3713,7 @@
           <a:bodyPr wrap="square" lIns="0" tIns="0" rIns="0" bIns="0" rtlCol="0" anchor="ctr"/>
           <a:lstStyle/>
           <a:p>
-            <a:pPr indent="0" marL="0">
+            <a:pPr marL="0" indent="0">
               <a:buNone/>
             </a:pPr>
             <a:r>
@@ -4000,7 +3752,7 @@
           <a:bodyPr wrap="square" lIns="0" tIns="0" rIns="0" bIns="0" rtlCol="0" anchor="t"/>
           <a:lstStyle/>
           <a:p>
-            <a:pPr indent="0" marL="0">
+            <a:pPr marL="0" indent="0">
               <a:lnSpc>
                 <a:spcPct val="130000"/>
               </a:lnSpc>
@@ -4042,7 +3794,7 @@
           <a:bodyPr wrap="square" lIns="0" tIns="0" rIns="0" bIns="0" rtlCol="0" anchor="ctr"/>
           <a:lstStyle/>
           <a:p>
-            <a:pPr indent="0" marL="0">
+            <a:pPr marL="0" indent="0">
               <a:buNone/>
             </a:pPr>
             <a:r>
@@ -4081,7 +3833,7 @@
           <a:bodyPr wrap="square" lIns="0" tIns="0" rIns="0" bIns="0" rtlCol="0" anchor="ctr"/>
           <a:lstStyle/>
           <a:p>
-            <a:pPr algn="r" indent="0" marL="0">
+            <a:pPr marL="0" indent="0" algn="r">
               <a:buNone/>
             </a:pPr>
             <a:r>
@@ -4115,6 +3867,7 @@
         <a:solidFill>
           <a:srgbClr val="F7F7F4"/>
         </a:solidFill>
+        <a:effectLst/>
       </p:bgPr>
     </p:bg>
     <p:spTree>
@@ -4152,11 +3905,11 @@
           <a:bodyPr wrap="square" lIns="0" tIns="0" rIns="0" bIns="0" rtlCol="0" anchor="ctr"/>
           <a:lstStyle/>
           <a:p>
-            <a:pPr indent="0" marL="0">
-              <a:buNone/>
-            </a:pPr>
-            <a:r>
-              <a:rPr lang="en-US" sz="1200" b="1" spc="200" kern="0" dirty="0">
+            <a:pPr marL="0" indent="0">
+              <a:buNone/>
+            </a:pPr>
+            <a:r>
+              <a:rPr lang="en-US" sz="1200" b="1" kern="0" spc="200" dirty="0">
                 <a:solidFill>
                   <a:srgbClr val="3762FF"/>
                 </a:solidFill>
@@ -4191,7 +3944,7 @@
           <a:bodyPr wrap="square" lIns="0" tIns="0" rIns="0" bIns="0" rtlCol="0" anchor="t"/>
           <a:lstStyle/>
           <a:p>
-            <a:pPr indent="0" marL="0">
+            <a:pPr marL="0" indent="0">
               <a:buNone/>
             </a:pPr>
             <a:r>
@@ -4235,7 +3988,7 @@
             <a:prstDash val="solid"/>
           </a:ln>
           <a:effectLst>
-            <a:outerShdw sx="100000" sy="100000" kx="0" ky="0" algn="bl" rotWithShape="0" blurRad="101600" dist="25400" dir="5400000">
+            <a:outerShdw blurRad="101600" dist="25400" dir="5400000" algn="bl" rotWithShape="0">
               <a:srgbClr val="000000">
                 <a:alpha val="10000"/>
               </a:srgbClr>
@@ -4264,11 +4017,11 @@
           <a:bodyPr wrap="square" lIns="0" tIns="0" rIns="0" bIns="0" rtlCol="0" anchor="ctr"/>
           <a:lstStyle/>
           <a:p>
-            <a:pPr indent="0" marL="0">
-              <a:buNone/>
-            </a:pPr>
-            <a:r>
-              <a:rPr lang="en-US" sz="1100" b="1" spc="200" kern="0" dirty="0">
+            <a:pPr marL="0" indent="0">
+              <a:buNone/>
+            </a:pPr>
+            <a:r>
+              <a:rPr lang="en-US" sz="1100" b="1" kern="0" spc="200" dirty="0">
                 <a:solidFill>
                   <a:srgbClr val="3762FF"/>
                 </a:solidFill>
@@ -4303,7 +4056,7 @@
           <a:bodyPr wrap="square" lIns="0" tIns="0" rIns="0" bIns="0" rtlCol="0" anchor="t"/>
           <a:lstStyle/>
           <a:p>
-            <a:pPr indent="0" marL="0">
+            <a:pPr marL="0" indent="0">
               <a:buNone/>
             </a:pPr>
             <a:r>
@@ -4342,7 +4095,7 @@
           <a:bodyPr wrap="square" lIns="0" tIns="0" rIns="0" bIns="0" rtlCol="0" anchor="t"/>
           <a:lstStyle/>
           <a:p>
-            <a:pPr indent="0" marL="0">
+            <a:pPr marL="0" indent="0">
               <a:lnSpc>
                 <a:spcPct val="115000"/>
               </a:lnSpc>
@@ -4389,7 +4142,7 @@
             <a:prstDash val="solid"/>
           </a:ln>
           <a:effectLst>
-            <a:outerShdw sx="100000" sy="100000" kx="0" ky="0" algn="bl" rotWithShape="0" blurRad="101600" dist="25400" dir="5400000">
+            <a:outerShdw blurRad="101600" dist="25400" dir="5400000" algn="bl" rotWithShape="0">
               <a:srgbClr val="000000">
                 <a:alpha val="10000"/>
               </a:srgbClr>
@@ -4418,11 +4171,11 @@
           <a:bodyPr wrap="square" lIns="0" tIns="0" rIns="0" bIns="0" rtlCol="0" anchor="ctr"/>
           <a:lstStyle/>
           <a:p>
-            <a:pPr indent="0" marL="0">
-              <a:buNone/>
-            </a:pPr>
-            <a:r>
-              <a:rPr lang="en-US" sz="1100" b="1" spc="200" kern="0" dirty="0">
+            <a:pPr marL="0" indent="0">
+              <a:buNone/>
+            </a:pPr>
+            <a:r>
+              <a:rPr lang="en-US" sz="1100" b="1" kern="0" spc="200" dirty="0">
                 <a:solidFill>
                   <a:srgbClr val="3762FF"/>
                 </a:solidFill>
@@ -4457,7 +4210,7 @@
           <a:bodyPr wrap="square" lIns="0" tIns="0" rIns="0" bIns="0" rtlCol="0" anchor="t"/>
           <a:lstStyle/>
           <a:p>
-            <a:pPr indent="0" marL="0">
+            <a:pPr marL="0" indent="0">
               <a:buNone/>
             </a:pPr>
             <a:r>
@@ -4496,7 +4249,7 @@
           <a:bodyPr wrap="square" lIns="0" tIns="0" rIns="0" bIns="0" rtlCol="0" anchor="t"/>
           <a:lstStyle/>
           <a:p>
-            <a:pPr indent="0" marL="0">
+            <a:pPr marL="0" indent="0">
               <a:lnSpc>
                 <a:spcPct val="115000"/>
               </a:lnSpc>
@@ -4565,11 +4318,11 @@
           <a:bodyPr wrap="square" lIns="0" tIns="0" rIns="0" bIns="0" rtlCol="0" anchor="ctr"/>
           <a:lstStyle/>
           <a:p>
-            <a:pPr indent="0" marL="0">
-              <a:buNone/>
-            </a:pPr>
-            <a:r>
-              <a:rPr lang="en-US" sz="1100" b="1" spc="200" kern="0" dirty="0">
+            <a:pPr marL="0" indent="0">
+              <a:buNone/>
+            </a:pPr>
+            <a:r>
+              <a:rPr lang="en-US" sz="1100" b="1" kern="0" spc="200" dirty="0">
                 <a:solidFill>
                   <a:srgbClr val="FFFFFF"/>
                 </a:solidFill>
@@ -4604,7 +4357,7 @@
           <a:bodyPr wrap="square" lIns="0" tIns="0" rIns="0" bIns="0" rtlCol="0" anchor="t"/>
           <a:lstStyle/>
           <a:p>
-            <a:pPr indent="0" marL="0">
+            <a:pPr marL="0" indent="0">
               <a:buNone/>
             </a:pPr>
             <a:r>
@@ -4643,7 +4396,7 @@
           <a:bodyPr wrap="square" lIns="0" tIns="0" rIns="0" bIns="0" rtlCol="0" anchor="t"/>
           <a:lstStyle/>
           <a:p>
-            <a:pPr indent="0" marL="0">
+            <a:pPr marL="0" indent="0">
               <a:lnSpc>
                 <a:spcPct val="115000"/>
               </a:lnSpc>
@@ -4690,7 +4443,7 @@
             <a:prstDash val="solid"/>
           </a:ln>
           <a:effectLst>
-            <a:outerShdw sx="100000" sy="100000" kx="0" ky="0" algn="bl" rotWithShape="0" blurRad="101600" dist="25400" dir="5400000">
+            <a:outerShdw blurRad="101600" dist="25400" dir="5400000" algn="bl" rotWithShape="0">
               <a:srgbClr val="000000">
                 <a:alpha val="10000"/>
               </a:srgbClr>
@@ -4719,11 +4472,11 @@
           <a:bodyPr wrap="square" lIns="0" tIns="0" rIns="0" bIns="0" rtlCol="0" anchor="ctr"/>
           <a:lstStyle/>
           <a:p>
-            <a:pPr indent="0" marL="0">
-              <a:buNone/>
-            </a:pPr>
-            <a:r>
-              <a:rPr lang="en-US" sz="1100" b="1" spc="200" kern="0" dirty="0">
+            <a:pPr marL="0" indent="0">
+              <a:buNone/>
+            </a:pPr>
+            <a:r>
+              <a:rPr lang="en-US" sz="1100" b="1" kern="0" spc="200" dirty="0">
                 <a:solidFill>
                   <a:srgbClr val="3762FF"/>
                 </a:solidFill>
@@ -4758,7 +4511,7 @@
           <a:bodyPr wrap="square" lIns="0" tIns="0" rIns="0" bIns="0" rtlCol="0" anchor="t"/>
           <a:lstStyle/>
           <a:p>
-            <a:pPr indent="0" marL="0">
+            <a:pPr marL="0" indent="0">
               <a:buNone/>
             </a:pPr>
             <a:r>
@@ -4797,7 +4550,7 @@
           <a:bodyPr wrap="square" lIns="0" tIns="0" rIns="0" bIns="0" rtlCol="0" anchor="t"/>
           <a:lstStyle/>
           <a:p>
-            <a:pPr indent="0" marL="0">
+            <a:pPr marL="0" indent="0">
               <a:lnSpc>
                 <a:spcPct val="115000"/>
               </a:lnSpc>
@@ -4844,7 +4597,7 @@
             <a:prstDash val="solid"/>
           </a:ln>
           <a:effectLst>
-            <a:outerShdw sx="100000" sy="100000" kx="0" ky="0" algn="bl" rotWithShape="0" blurRad="101600" dist="25400" dir="5400000">
+            <a:outerShdw blurRad="101600" dist="25400" dir="5400000" algn="bl" rotWithShape="0">
               <a:srgbClr val="000000">
                 <a:alpha val="10000"/>
               </a:srgbClr>
@@ -4873,11 +4626,11 @@
           <a:bodyPr wrap="square" lIns="0" tIns="0" rIns="0" bIns="0" rtlCol="0" anchor="ctr"/>
           <a:lstStyle/>
           <a:p>
-            <a:pPr indent="0" marL="0">
-              <a:buNone/>
-            </a:pPr>
-            <a:r>
-              <a:rPr lang="en-US" sz="1100" b="1" spc="200" kern="0" dirty="0">
+            <a:pPr marL="0" indent="0">
+              <a:buNone/>
+            </a:pPr>
+            <a:r>
+              <a:rPr lang="en-US" sz="1100" b="1" kern="0" spc="200" dirty="0">
                 <a:solidFill>
                   <a:srgbClr val="3762FF"/>
                 </a:solidFill>
@@ -4912,7 +4665,7 @@
           <a:bodyPr wrap="square" lIns="0" tIns="0" rIns="0" bIns="0" rtlCol="0" anchor="t"/>
           <a:lstStyle/>
           <a:p>
-            <a:pPr indent="0" marL="0">
+            <a:pPr marL="0" indent="0">
               <a:buNone/>
             </a:pPr>
             <a:r>
@@ -4951,7 +4704,7 @@
           <a:bodyPr wrap="square" lIns="0" tIns="0" rIns="0" bIns="0" rtlCol="0" anchor="t"/>
           <a:lstStyle/>
           <a:p>
-            <a:pPr indent="0" marL="0">
+            <a:pPr marL="0" indent="0">
               <a:lnSpc>
                 <a:spcPct val="115000"/>
               </a:lnSpc>
@@ -5020,7 +4773,7 @@
           <a:bodyPr wrap="square" lIns="0" tIns="0" rIns="0" bIns="0" rtlCol="0" anchor="ctr"/>
           <a:lstStyle/>
           <a:p>
-            <a:pPr algn="ctr" indent="0" marL="0">
+            <a:pPr marL="0" indent="0" algn="ctr">
               <a:buNone/>
             </a:pPr>
             <a:r>
@@ -5088,7 +4841,7 @@
             <a:prstDash val="solid"/>
           </a:ln>
           <a:effectLst>
-            <a:outerShdw sx="100000" sy="100000" kx="0" ky="0" algn="bl" rotWithShape="0" blurRad="101600" dist="25400" dir="5400000">
+            <a:outerShdw blurRad="101600" dist="25400" dir="5400000" algn="bl" rotWithShape="0">
               <a:srgbClr val="000000">
                 <a:alpha val="10000"/>
               </a:srgbClr>
@@ -5117,7 +4870,7 @@
           <a:bodyPr wrap="square" lIns="0" tIns="0" rIns="0" bIns="0" rtlCol="0" anchor="ctr"/>
           <a:lstStyle/>
           <a:p>
-            <a:pPr algn="ctr" indent="0" marL="0">
+            <a:pPr marL="0" indent="0" algn="ctr">
               <a:buNone/>
             </a:pPr>
             <a:r>
@@ -5207,7 +4960,7 @@
           <a:bodyPr wrap="square" lIns="0" tIns="0" rIns="0" bIns="0" rtlCol="0" anchor="ctr"/>
           <a:lstStyle/>
           <a:p>
-            <a:pPr algn="ctr" indent="0" marL="0">
+            <a:pPr marL="0" indent="0" algn="ctr">
               <a:buNone/>
             </a:pPr>
             <a:r>
@@ -5246,7 +4999,7 @@
           <a:bodyPr wrap="square" lIns="0" tIns="0" rIns="0" bIns="0" rtlCol="0" anchor="ctr"/>
           <a:lstStyle/>
           <a:p>
-            <a:pPr indent="0" marL="0">
+            <a:pPr marL="0" indent="0">
               <a:buNone/>
             </a:pPr>
             <a:r>
@@ -5280,6 +5033,7 @@
         <a:solidFill>
           <a:srgbClr val="F7F7F4"/>
         </a:solidFill>
+        <a:effectLst/>
       </p:bgPr>
     </p:bg>
     <p:spTree>
@@ -5317,11 +5071,11 @@
           <a:bodyPr wrap="square" lIns="0" tIns="0" rIns="0" bIns="0" rtlCol="0" anchor="ctr"/>
           <a:lstStyle/>
           <a:p>
-            <a:pPr indent="0" marL="0">
-              <a:buNone/>
-            </a:pPr>
-            <a:r>
-              <a:rPr lang="en-US" sz="1200" b="1" spc="200" kern="0" dirty="0">
+            <a:pPr marL="0" indent="0">
+              <a:buNone/>
+            </a:pPr>
+            <a:r>
+              <a:rPr lang="en-US" sz="1200" b="1" kern="0" spc="200" dirty="0">
                 <a:solidFill>
                   <a:srgbClr val="3762FF"/>
                 </a:solidFill>
@@ -5356,7 +5110,7 @@
           <a:bodyPr wrap="square" lIns="0" tIns="0" rIns="0" bIns="0" rtlCol="0" anchor="t"/>
           <a:lstStyle/>
           <a:p>
-            <a:pPr indent="0" marL="0">
+            <a:pPr marL="0" indent="0">
               <a:buNone/>
             </a:pPr>
             <a:r>
@@ -5400,7 +5154,7 @@
             <a:prstDash val="solid"/>
           </a:ln>
           <a:effectLst>
-            <a:outerShdw sx="100000" sy="100000" kx="0" ky="0" algn="bl" rotWithShape="0" blurRad="101600" dist="25400" dir="5400000">
+            <a:outerShdw blurRad="101600" dist="25400" dir="5400000" algn="bl" rotWithShape="0">
               <a:srgbClr val="000000">
                 <a:alpha val="10000"/>
               </a:srgbClr>
@@ -5504,7 +5258,7 @@
           <a:bodyPr wrap="square" lIns="0" tIns="0" rIns="0" bIns="0" rtlCol="0" anchor="ctr"/>
           <a:lstStyle/>
           <a:p>
-            <a:pPr indent="0" marL="0">
+            <a:pPr marL="0" indent="0">
               <a:buNone/>
             </a:pPr>
             <a:r>
@@ -5543,7 +5297,7 @@
           <a:bodyPr wrap="square" lIns="0" tIns="0" rIns="0" bIns="0" rtlCol="0" anchor="t"/>
           <a:lstStyle/>
           <a:p>
-            <a:pPr indent="0" marL="0">
+            <a:pPr marL="0" indent="0">
               <a:lnSpc>
                 <a:spcPct val="110000"/>
               </a:lnSpc>
@@ -5563,7 +5317,7 @@
             <a:endParaRPr lang="en-US" sz="1300" dirty="0"/>
           </a:p>
           <a:p>
-            <a:pPr indent="0" marL="0">
+            <a:pPr marL="0" indent="0">
               <a:lnSpc>
                 <a:spcPct val="110000"/>
               </a:lnSpc>
@@ -5583,7 +5337,7 @@
             <a:endParaRPr lang="en-US" sz="1300" dirty="0"/>
           </a:p>
           <a:p>
-            <a:pPr indent="0" marL="0">
+            <a:pPr marL="0" indent="0">
               <a:lnSpc>
                 <a:spcPct val="110000"/>
               </a:lnSpc>
@@ -5603,7 +5357,7 @@
             <a:endParaRPr lang="en-US" sz="1300" dirty="0"/>
           </a:p>
           <a:p>
-            <a:pPr indent="0" marL="0">
+            <a:pPr marL="0" indent="0">
               <a:lnSpc>
                 <a:spcPct val="110000"/>
               </a:lnSpc>
@@ -5623,7 +5377,7 @@
             <a:endParaRPr lang="en-US" sz="1300" dirty="0"/>
           </a:p>
           <a:p>
-            <a:pPr indent="0" marL="0">
+            <a:pPr marL="0" indent="0">
               <a:lnSpc>
                 <a:spcPct val="110000"/>
               </a:lnSpc>
@@ -5643,7 +5397,7 @@
             <a:endParaRPr lang="en-US" sz="1300" dirty="0"/>
           </a:p>
           <a:p>
-            <a:pPr indent="0" marL="0">
+            <a:pPr marL="0" indent="0">
               <a:lnSpc>
                 <a:spcPct val="110000"/>
               </a:lnSpc>
@@ -5663,7 +5417,7 @@
             <a:endParaRPr lang="en-US" sz="1300" dirty="0"/>
           </a:p>
           <a:p>
-            <a:pPr indent="0" marL="0">
+            <a:pPr marL="0" indent="0">
               <a:lnSpc>
                 <a:spcPct val="110000"/>
               </a:lnSpc>
@@ -5683,7 +5437,7 @@
             <a:endParaRPr lang="en-US" sz="1300" dirty="0"/>
           </a:p>
           <a:p>
-            <a:pPr indent="0" marL="0">
+            <a:pPr marL="0" indent="0">
               <a:lnSpc>
                 <a:spcPct val="110000"/>
               </a:lnSpc>
@@ -5703,7 +5457,7 @@
             <a:endParaRPr lang="en-US" sz="1300" dirty="0"/>
           </a:p>
           <a:p>
-            <a:pPr indent="0" marL="0">
+            <a:pPr marL="0" indent="0">
               <a:lnSpc>
                 <a:spcPct val="110000"/>
               </a:lnSpc>
@@ -5723,7 +5477,7 @@
             <a:endParaRPr lang="en-US" sz="1300" dirty="0"/>
           </a:p>
           <a:p>
-            <a:pPr indent="0" marL="0">
+            <a:pPr marL="0" indent="0">
               <a:lnSpc>
                 <a:spcPct val="110000"/>
               </a:lnSpc>
@@ -5743,7 +5497,7 @@
             <a:endParaRPr lang="en-US" sz="1300" dirty="0"/>
           </a:p>
           <a:p>
-            <a:pPr indent="0" marL="0">
+            <a:pPr marL="0" indent="0">
               <a:lnSpc>
                 <a:spcPct val="110000"/>
               </a:lnSpc>
@@ -5763,7 +5517,7 @@
             <a:endParaRPr lang="en-US" sz="1300" dirty="0"/>
           </a:p>
           <a:p>
-            <a:pPr indent="0" marL="0">
+            <a:pPr marL="0" indent="0">
               <a:lnSpc>
                 <a:spcPct val="110000"/>
               </a:lnSpc>
@@ -5783,7 +5537,7 @@
             <a:endParaRPr lang="en-US" sz="1300" dirty="0"/>
           </a:p>
           <a:p>
-            <a:pPr indent="0" marL="0">
+            <a:pPr marL="0" indent="0">
               <a:lnSpc>
                 <a:spcPct val="110000"/>
               </a:lnSpc>
@@ -5830,7 +5584,7 @@
             <a:prstDash val="solid"/>
           </a:ln>
           <a:effectLst>
-            <a:outerShdw sx="100000" sy="100000" kx="0" ky="0" algn="bl" rotWithShape="0" blurRad="101600" dist="25400" dir="5400000">
+            <a:outerShdw blurRad="101600" dist="25400" dir="5400000" algn="bl" rotWithShape="0">
               <a:srgbClr val="000000">
                 <a:alpha val="10000"/>
               </a:srgbClr>
@@ -5859,7 +5613,7 @@
           <a:bodyPr wrap="square" lIns="0" tIns="0" rIns="0" bIns="0" rtlCol="0" anchor="t"/>
           <a:lstStyle/>
           <a:p>
-            <a:pPr indent="0" marL="0">
+            <a:pPr marL="0" indent="0">
               <a:buNone/>
             </a:pPr>
             <a:r>
@@ -5898,7 +5652,7 @@
           <a:bodyPr wrap="square" lIns="0" tIns="0" rIns="0" bIns="0" rtlCol="0" anchor="t"/>
           <a:lstStyle/>
           <a:p>
-            <a:pPr indent="0" marL="0">
+            <a:pPr marL="0" indent="0">
               <a:lnSpc>
                 <a:spcPct val="115000"/>
               </a:lnSpc>
@@ -5945,7 +5699,7 @@
             <a:prstDash val="solid"/>
           </a:ln>
           <a:effectLst>
-            <a:outerShdw sx="100000" sy="100000" kx="0" ky="0" algn="bl" rotWithShape="0" blurRad="101600" dist="25400" dir="5400000">
+            <a:outerShdw blurRad="101600" dist="25400" dir="5400000" algn="bl" rotWithShape="0">
               <a:srgbClr val="000000">
                 <a:alpha val="10000"/>
               </a:srgbClr>
@@ -5974,7 +5728,7 @@
           <a:bodyPr wrap="square" lIns="0" tIns="0" rIns="0" bIns="0" rtlCol="0" anchor="t"/>
           <a:lstStyle/>
           <a:p>
-            <a:pPr indent="0" marL="0">
+            <a:pPr marL="0" indent="0">
               <a:buNone/>
             </a:pPr>
             <a:r>
@@ -6013,7 +5767,7 @@
           <a:bodyPr wrap="square" lIns="0" tIns="0" rIns="0" bIns="0" rtlCol="0" anchor="t"/>
           <a:lstStyle/>
           <a:p>
-            <a:pPr indent="0" marL="0">
+            <a:pPr marL="0" indent="0">
               <a:lnSpc>
                 <a:spcPct val="115000"/>
               </a:lnSpc>
@@ -6060,7 +5814,7 @@
             <a:prstDash val="solid"/>
           </a:ln>
           <a:effectLst>
-            <a:outerShdw sx="100000" sy="100000" kx="0" ky="0" algn="bl" rotWithShape="0" blurRad="101600" dist="25400" dir="5400000">
+            <a:outerShdw blurRad="101600" dist="25400" dir="5400000" algn="bl" rotWithShape="0">
               <a:srgbClr val="000000">
                 <a:alpha val="10000"/>
               </a:srgbClr>
@@ -6089,7 +5843,7 @@
           <a:bodyPr wrap="square" lIns="0" tIns="0" rIns="0" bIns="0" rtlCol="0" anchor="t"/>
           <a:lstStyle/>
           <a:p>
-            <a:pPr indent="0" marL="0">
+            <a:pPr marL="0" indent="0">
               <a:buNone/>
             </a:pPr>
             <a:r>
@@ -6128,7 +5882,7 @@
           <a:bodyPr wrap="square" lIns="0" tIns="0" rIns="0" bIns="0" rtlCol="0" anchor="t"/>
           <a:lstStyle/>
           <a:p>
-            <a:pPr indent="0" marL="0">
+            <a:pPr marL="0" indent="0">
               <a:lnSpc>
                 <a:spcPct val="115000"/>
               </a:lnSpc>
@@ -6165,6 +5919,7 @@
         <a:solidFill>
           <a:srgbClr val="F7F7F4"/>
         </a:solidFill>
+        <a:effectLst/>
       </p:bgPr>
     </p:bg>
     <p:spTree>
@@ -6202,11 +5957,11 @@
           <a:bodyPr wrap="square" lIns="0" tIns="0" rIns="0" bIns="0" rtlCol="0" anchor="ctr"/>
           <a:lstStyle/>
           <a:p>
-            <a:pPr indent="0" marL="0">
-              <a:buNone/>
-            </a:pPr>
-            <a:r>
-              <a:rPr lang="en-US" sz="1200" b="1" spc="200" kern="0" dirty="0">
+            <a:pPr marL="0" indent="0">
+              <a:buNone/>
+            </a:pPr>
+            <a:r>
+              <a:rPr lang="en-US" sz="1200" b="1" kern="0" spc="200" dirty="0">
                 <a:solidFill>
                   <a:srgbClr val="3762FF"/>
                 </a:solidFill>
@@ -6241,7 +5996,7 @@
           <a:bodyPr wrap="square" lIns="0" tIns="0" rIns="0" bIns="0" rtlCol="0" anchor="t"/>
           <a:lstStyle/>
           <a:p>
-            <a:pPr indent="0" marL="0">
+            <a:pPr marL="0" indent="0">
               <a:buNone/>
             </a:pPr>
             <a:r>
@@ -6280,7 +6035,7 @@
           <a:bodyPr wrap="square" lIns="0" tIns="0" rIns="0" bIns="0" rtlCol="0" anchor="t"/>
           <a:lstStyle/>
           <a:p>
-            <a:pPr indent="0" marL="0">
+            <a:pPr marL="0" indent="0">
               <a:lnSpc>
                 <a:spcPct val="120000"/>
               </a:lnSpc>
@@ -6327,7 +6082,7 @@
             <a:prstDash val="solid"/>
           </a:ln>
           <a:effectLst>
-            <a:outerShdw sx="100000" sy="100000" kx="0" ky="0" algn="bl" rotWithShape="0" blurRad="101600" dist="25400" dir="5400000">
+            <a:outerShdw blurRad="101600" dist="25400" dir="5400000" algn="bl" rotWithShape="0">
               <a:srgbClr val="000000">
                 <a:alpha val="10000"/>
               </a:srgbClr>
@@ -6356,7 +6111,7 @@
           <a:bodyPr wrap="square" lIns="0" tIns="0" rIns="0" bIns="0" rtlCol="0" anchor="t"/>
           <a:lstStyle/>
           <a:p>
-            <a:pPr indent="0" marL="0">
+            <a:pPr marL="0" indent="0">
               <a:buNone/>
             </a:pPr>
             <a:r>
@@ -6395,7 +6150,7 @@
           <a:bodyPr wrap="square" lIns="0" tIns="0" rIns="0" bIns="0" rtlCol="0" anchor="t"/>
           <a:lstStyle/>
           <a:p>
-            <a:pPr indent="0" marL="0">
+            <a:pPr marL="0" indent="0">
               <a:lnSpc>
                 <a:spcPct val="115000"/>
               </a:lnSpc>
@@ -6415,7 +6170,7 @@
             <a:endParaRPr lang="en-US" sz="1300" dirty="0"/>
           </a:p>
           <a:p>
-            <a:pPr indent="0" marL="0">
+            <a:pPr marL="0" indent="0">
               <a:lnSpc>
                 <a:spcPct val="115000"/>
               </a:lnSpc>
@@ -6486,7 +6241,7 @@
             <a:prstDash val="solid"/>
           </a:ln>
           <a:effectLst>
-            <a:outerShdw sx="100000" sy="100000" kx="0" ky="0" algn="bl" rotWithShape="0" blurRad="101600" dist="25400" dir="5400000">
+            <a:outerShdw blurRad="101600" dist="25400" dir="5400000" algn="bl" rotWithShape="0">
               <a:srgbClr val="000000">
                 <a:alpha val="10000"/>
               </a:srgbClr>
@@ -6515,7 +6270,7 @@
           <a:bodyPr wrap="square" lIns="0" tIns="0" rIns="0" bIns="0" rtlCol="0" anchor="t"/>
           <a:lstStyle/>
           <a:p>
-            <a:pPr indent="0" marL="0">
+            <a:pPr marL="0" indent="0">
               <a:buNone/>
             </a:pPr>
             <a:r>
@@ -6554,7 +6309,7 @@
           <a:bodyPr wrap="square" lIns="0" tIns="0" rIns="0" bIns="0" rtlCol="0" anchor="t"/>
           <a:lstStyle/>
           <a:p>
-            <a:pPr indent="0" marL="0">
+            <a:pPr marL="0" indent="0">
               <a:lnSpc>
                 <a:spcPct val="115000"/>
               </a:lnSpc>
@@ -6647,7 +6402,7 @@
           <a:bodyPr wrap="square" lIns="0" tIns="0" rIns="0" bIns="0" rtlCol="0" anchor="t"/>
           <a:lstStyle/>
           <a:p>
-            <a:pPr indent="0" marL="0">
+            <a:pPr marL="0" indent="0">
               <a:buNone/>
             </a:pPr>
             <a:r>
@@ -6686,7 +6441,7 @@
           <a:bodyPr wrap="square" lIns="0" tIns="0" rIns="0" bIns="0" rtlCol="0" anchor="t"/>
           <a:lstStyle/>
           <a:p>
-            <a:pPr indent="0" marL="0">
+            <a:pPr marL="0" indent="0">
               <a:lnSpc>
                 <a:spcPct val="115000"/>
               </a:lnSpc>
@@ -6706,7 +6461,7 @@
             <a:endParaRPr lang="en-US" sz="1300" dirty="0"/>
           </a:p>
           <a:p>
-            <a:pPr indent="0" marL="0">
+            <a:pPr marL="0" indent="0">
               <a:lnSpc>
                 <a:spcPct val="115000"/>
               </a:lnSpc>
@@ -6753,7 +6508,7 @@
             <a:prstDash val="solid"/>
           </a:ln>
           <a:effectLst>
-            <a:outerShdw sx="100000" sy="100000" kx="0" ky="0" algn="bl" rotWithShape="0" blurRad="101600" dist="25400" dir="5400000">
+            <a:outerShdw blurRad="101600" dist="25400" dir="5400000" algn="bl" rotWithShape="0">
               <a:srgbClr val="000000">
                 <a:alpha val="10000"/>
               </a:srgbClr>
@@ -6857,7 +6612,7 @@
           <a:bodyPr wrap="square" lIns="0" tIns="0" rIns="0" bIns="0" rtlCol="0" anchor="ctr"/>
           <a:lstStyle/>
           <a:p>
-            <a:pPr indent="0" marL="0">
+            <a:pPr marL="0" indent="0">
               <a:buNone/>
             </a:pPr>
             <a:r>
@@ -6896,7 +6651,7 @@
           <a:bodyPr wrap="square" lIns="0" tIns="0" rIns="0" bIns="0" rtlCol="0" anchor="t"/>
           <a:lstStyle/>
           <a:p>
-            <a:pPr indent="0" marL="0">
+            <a:pPr marL="0" indent="0">
               <a:lnSpc>
                 <a:spcPct val="110000"/>
               </a:lnSpc>
@@ -6916,7 +6671,7 @@
             <a:endParaRPr lang="en-US" sz="1300" dirty="0"/>
           </a:p>
           <a:p>
-            <a:pPr indent="0" marL="0">
+            <a:pPr marL="0" indent="0">
               <a:lnSpc>
                 <a:spcPct val="110000"/>
               </a:lnSpc>
@@ -6936,7 +6691,7 @@
             <a:endParaRPr lang="en-US" sz="1300" dirty="0"/>
           </a:p>
           <a:p>
-            <a:pPr indent="0" marL="0">
+            <a:pPr marL="0" indent="0">
               <a:lnSpc>
                 <a:spcPct val="110000"/>
               </a:lnSpc>
@@ -6956,7 +6711,7 @@
             <a:endParaRPr lang="en-US" sz="1300" dirty="0"/>
           </a:p>
           <a:p>
-            <a:pPr indent="0" marL="0">
+            <a:pPr marL="0" indent="0">
               <a:lnSpc>
                 <a:spcPct val="110000"/>
               </a:lnSpc>
@@ -6993,6 +6748,7 @@
         <a:solidFill>
           <a:srgbClr val="0F1F33"/>
         </a:solidFill>
+        <a:effectLst/>
       </p:bgPr>
     </p:bg>
     <p:spTree>
@@ -7030,11 +6786,11 @@
           <a:bodyPr wrap="square" lIns="0" tIns="0" rIns="0" bIns="0" rtlCol="0" anchor="ctr"/>
           <a:lstStyle/>
           <a:p>
-            <a:pPr indent="0" marL="0">
-              <a:buNone/>
-            </a:pPr>
-            <a:r>
-              <a:rPr lang="en-US" sz="1200" b="1" spc="200" kern="0" dirty="0">
+            <a:pPr marL="0" indent="0">
+              <a:buNone/>
+            </a:pPr>
+            <a:r>
+              <a:rPr lang="en-US" sz="1200" b="1" kern="0" spc="200" dirty="0">
                 <a:solidFill>
                   <a:srgbClr val="7C9CFF"/>
                 </a:solidFill>
@@ -7069,7 +6825,7 @@
           <a:bodyPr wrap="square" lIns="0" tIns="0" rIns="0" bIns="0" rtlCol="0" anchor="t"/>
           <a:lstStyle/>
           <a:p>
-            <a:pPr indent="0" marL="0">
+            <a:pPr marL="0" indent="0">
               <a:buNone/>
             </a:pPr>
             <a:r>
@@ -7108,7 +6864,7 @@
           <a:bodyPr wrap="square" lIns="0" tIns="0" rIns="0" bIns="0" rtlCol="0" anchor="t"/>
           <a:lstStyle/>
           <a:p>
-            <a:pPr indent="0" marL="0">
+            <a:pPr marL="0" indent="0">
               <a:lnSpc>
                 <a:spcPct val="120000"/>
               </a:lnSpc>
@@ -7177,7 +6933,7 @@
           <a:bodyPr wrap="square" lIns="0" tIns="0" rIns="0" bIns="0" rtlCol="0" anchor="ctr"/>
           <a:lstStyle/>
           <a:p>
-            <a:pPr indent="0" marL="0">
+            <a:pPr marL="0" indent="0">
               <a:buNone/>
             </a:pPr>
             <a:r>
@@ -7216,7 +6972,7 @@
           <a:bodyPr wrap="square" lIns="0" tIns="0" rIns="0" bIns="0" rtlCol="0" anchor="ctr"/>
           <a:lstStyle/>
           <a:p>
-            <a:pPr indent="0" marL="0">
+            <a:pPr marL="0" indent="0">
               <a:buNone/>
             </a:pPr>
             <a:r>
@@ -7282,7 +7038,7 @@
           <a:bodyPr wrap="square" lIns="0" tIns="0" rIns="0" bIns="0" rtlCol="0" anchor="ctr"/>
           <a:lstStyle/>
           <a:p>
-            <a:pPr indent="0" marL="0">
+            <a:pPr marL="0" indent="0">
               <a:buNone/>
             </a:pPr>
             <a:r>
@@ -7321,7 +7077,7 @@
           <a:bodyPr wrap="square" lIns="0" tIns="0" rIns="0" bIns="0" rtlCol="0" anchor="ctr"/>
           <a:lstStyle/>
           <a:p>
-            <a:pPr indent="0" marL="0">
+            <a:pPr marL="0" indent="0">
               <a:buNone/>
             </a:pPr>
             <a:r>
@@ -7387,7 +7143,7 @@
           <a:bodyPr wrap="square" lIns="0" tIns="0" rIns="0" bIns="0" rtlCol="0" anchor="ctr"/>
           <a:lstStyle/>
           <a:p>
-            <a:pPr indent="0" marL="0">
+            <a:pPr marL="0" indent="0">
               <a:buNone/>
             </a:pPr>
             <a:r>
@@ -7426,7 +7182,7 @@
           <a:bodyPr wrap="square" lIns="0" tIns="0" rIns="0" bIns="0" rtlCol="0" anchor="ctr"/>
           <a:lstStyle/>
           <a:p>
-            <a:pPr indent="0" marL="0">
+            <a:pPr marL="0" indent="0">
               <a:buNone/>
             </a:pPr>
             <a:r>
@@ -7492,7 +7248,7 @@
           <a:bodyPr wrap="square" lIns="0" tIns="0" rIns="0" bIns="0" rtlCol="0" anchor="ctr"/>
           <a:lstStyle/>
           <a:p>
-            <a:pPr indent="0" marL="0">
+            <a:pPr marL="0" indent="0">
               <a:buNone/>
             </a:pPr>
             <a:r>
@@ -7531,7 +7287,7 @@
           <a:bodyPr wrap="square" lIns="0" tIns="0" rIns="0" bIns="0" rtlCol="0" anchor="ctr"/>
           <a:lstStyle/>
           <a:p>
-            <a:pPr indent="0" marL="0">
+            <a:pPr marL="0" indent="0">
               <a:buNone/>
             </a:pPr>
             <a:r>
@@ -7597,7 +7353,7 @@
           <a:bodyPr wrap="square" lIns="0" tIns="0" rIns="0" bIns="0" rtlCol="0" anchor="ctr"/>
           <a:lstStyle/>
           <a:p>
-            <a:pPr indent="0" marL="0">
+            <a:pPr marL="0" indent="0">
               <a:buNone/>
             </a:pPr>
             <a:r>
@@ -7636,7 +7392,7 @@
           <a:bodyPr wrap="square" lIns="0" tIns="0" rIns="0" bIns="0" rtlCol="0" anchor="ctr"/>
           <a:lstStyle/>
           <a:p>
-            <a:pPr indent="0" marL="0">
+            <a:pPr marL="0" indent="0">
               <a:buNone/>
             </a:pPr>
             <a:r>
@@ -7702,7 +7458,7 @@
           <a:bodyPr wrap="square" lIns="0" tIns="0" rIns="0" bIns="0" rtlCol="0" anchor="ctr"/>
           <a:lstStyle/>
           <a:p>
-            <a:pPr indent="0" marL="0">
+            <a:pPr marL="0" indent="0">
               <a:buNone/>
             </a:pPr>
             <a:r>
@@ -7741,7 +7497,7 @@
           <a:bodyPr wrap="square" lIns="0" tIns="0" rIns="0" bIns="0" rtlCol="0" anchor="ctr"/>
           <a:lstStyle/>
           <a:p>
-            <a:pPr indent="0" marL="0">
+            <a:pPr marL="0" indent="0">
               <a:buNone/>
             </a:pPr>
             <a:r>
@@ -7807,7 +7563,7 @@
           <a:bodyPr wrap="square" lIns="0" tIns="0" rIns="0" bIns="0" rtlCol="0" anchor="ctr"/>
           <a:lstStyle/>
           <a:p>
-            <a:pPr indent="0" marL="0">
+            <a:pPr marL="0" indent="0">
               <a:buNone/>
             </a:pPr>
             <a:r>
@@ -7846,7 +7602,7 @@
           <a:bodyPr wrap="square" lIns="0" tIns="0" rIns="0" bIns="0" rtlCol="0" anchor="ctr"/>
           <a:lstStyle/>
           <a:p>
-            <a:pPr indent="0" marL="0">
+            <a:pPr marL="0" indent="0">
               <a:buNone/>
             </a:pPr>
             <a:r>
@@ -7912,7 +7668,7 @@
           <a:bodyPr wrap="square" lIns="0" tIns="0" rIns="0" bIns="0" rtlCol="0" anchor="ctr"/>
           <a:lstStyle/>
           <a:p>
-            <a:pPr indent="0" marL="0">
+            <a:pPr marL="0" indent="0">
               <a:buNone/>
             </a:pPr>
             <a:r>
@@ -7951,7 +7707,7 @@
           <a:bodyPr wrap="square" lIns="0" tIns="0" rIns="0" bIns="0" rtlCol="0" anchor="ctr"/>
           <a:lstStyle/>
           <a:p>
-            <a:pPr indent="0" marL="0">
+            <a:pPr marL="0" indent="0">
               <a:buNone/>
             </a:pPr>
             <a:r>
@@ -8017,7 +7773,7 @@
           <a:bodyPr wrap="square" lIns="0" tIns="0" rIns="0" bIns="0" rtlCol="0" anchor="ctr"/>
           <a:lstStyle/>
           <a:p>
-            <a:pPr indent="0" marL="0">
+            <a:pPr marL="0" indent="0">
               <a:buNone/>
             </a:pPr>
             <a:r>
@@ -8056,7 +7812,7 @@
           <a:bodyPr wrap="square" lIns="0" tIns="0" rIns="0" bIns="0" rtlCol="0" anchor="ctr"/>
           <a:lstStyle/>
           <a:p>
-            <a:pPr indent="0" marL="0">
+            <a:pPr marL="0" indent="0">
               <a:buNone/>
             </a:pPr>
             <a:r>
@@ -8122,7 +7878,7 @@
           <a:bodyPr wrap="square" lIns="0" tIns="0" rIns="0" bIns="0" rtlCol="0" anchor="ctr"/>
           <a:lstStyle/>
           <a:p>
-            <a:pPr indent="0" marL="0">
+            <a:pPr marL="0" indent="0">
               <a:buNone/>
             </a:pPr>
             <a:r>
@@ -8161,7 +7917,7 @@
           <a:bodyPr wrap="square" lIns="0" tIns="0" rIns="0" bIns="0" rtlCol="0" anchor="ctr"/>
           <a:lstStyle/>
           <a:p>
-            <a:pPr indent="0" marL="0">
+            <a:pPr marL="0" indent="0">
               <a:buNone/>
             </a:pPr>
             <a:r>
@@ -8227,7 +7983,7 @@
           <a:bodyPr wrap="square" lIns="0" tIns="0" rIns="0" bIns="0" rtlCol="0" anchor="ctr"/>
           <a:lstStyle/>
           <a:p>
-            <a:pPr indent="0" marL="0">
+            <a:pPr marL="0" indent="0">
               <a:buNone/>
             </a:pPr>
             <a:r>
@@ -8266,7 +8022,7 @@
           <a:bodyPr wrap="square" lIns="0" tIns="0" rIns="0" bIns="0" rtlCol="0" anchor="ctr"/>
           <a:lstStyle/>
           <a:p>
-            <a:pPr indent="0" marL="0">
+            <a:pPr marL="0" indent="0">
               <a:buNone/>
             </a:pPr>
             <a:r>
@@ -8332,7 +8088,7 @@
           <a:bodyPr wrap="square" lIns="0" tIns="0" rIns="0" bIns="0" rtlCol="0" anchor="ctr"/>
           <a:lstStyle/>
           <a:p>
-            <a:pPr indent="0" marL="0">
+            <a:pPr marL="0" indent="0">
               <a:buNone/>
             </a:pPr>
             <a:r>
@@ -8371,7 +8127,7 @@
           <a:bodyPr wrap="square" lIns="0" tIns="0" rIns="0" bIns="0" rtlCol="0" anchor="ctr"/>
           <a:lstStyle/>
           <a:p>
-            <a:pPr indent="0" marL="0">
+            <a:pPr marL="0" indent="0">
               <a:buNone/>
             </a:pPr>
             <a:r>
@@ -8405,6 +8161,7 @@
         <a:solidFill>
           <a:srgbClr val="F7F7F4"/>
         </a:solidFill>
+        <a:effectLst/>
       </p:bgPr>
     </p:bg>
     <p:spTree>
@@ -8442,11 +8199,11 @@
           <a:bodyPr wrap="square" lIns="0" tIns="0" rIns="0" bIns="0" rtlCol="0" anchor="ctr"/>
           <a:lstStyle/>
           <a:p>
-            <a:pPr indent="0" marL="0">
-              <a:buNone/>
-            </a:pPr>
-            <a:r>
-              <a:rPr lang="en-US" sz="1200" b="1" spc="200" kern="0" dirty="0">
+            <a:pPr marL="0" indent="0">
+              <a:buNone/>
+            </a:pPr>
+            <a:r>
+              <a:rPr lang="en-US" sz="1200" b="1" kern="0" spc="200" dirty="0">
                 <a:solidFill>
                   <a:srgbClr val="3762FF"/>
                 </a:solidFill>
@@ -8481,7 +8238,7 @@
           <a:bodyPr wrap="square" lIns="0" tIns="0" rIns="0" bIns="0" rtlCol="0" anchor="t"/>
           <a:lstStyle/>
           <a:p>
-            <a:pPr indent="0" marL="0">
+            <a:pPr marL="0" indent="0">
               <a:buNone/>
             </a:pPr>
             <a:r>
@@ -8525,7 +8282,7 @@
             <a:prstDash val="solid"/>
           </a:ln>
           <a:effectLst>
-            <a:outerShdw sx="100000" sy="100000" kx="0" ky="0" algn="bl" rotWithShape="0" blurRad="101600" dist="25400" dir="5400000">
+            <a:outerShdw blurRad="101600" dist="25400" dir="5400000" algn="bl" rotWithShape="0">
               <a:srgbClr val="000000">
                 <a:alpha val="10000"/>
               </a:srgbClr>
@@ -8554,7 +8311,7 @@
           <a:bodyPr wrap="square" lIns="0" tIns="0" rIns="0" bIns="0" rtlCol="0" anchor="ctr"/>
           <a:lstStyle/>
           <a:p>
-            <a:pPr indent="0" marL="0">
+            <a:pPr marL="0" indent="0">
               <a:buNone/>
             </a:pPr>
             <a:r>
@@ -8575,7 +8332,7 @@
       <p:sp>
         <p:nvSpPr>
           <p:cNvPr id="6" name="Text 4">
-            <a:hlinkClick r:id="rId1" tooltip=""/>
+            <a:hlinkClick r:id="rId3"/>
           </p:cNvPr>
           <p:cNvSpPr txBox="1"/>
           <p:nvPr/>
@@ -8595,7 +8352,7 @@
           <a:bodyPr wrap="square" lIns="0" tIns="0" rIns="0" bIns="0" rtlCol="0" anchor="ctr"/>
           <a:lstStyle/>
           <a:p>
-            <a:pPr indent="0" marL="0">
+            <a:pPr marL="0" indent="0">
               <a:buNone/>
             </a:pPr>
             <a:r>
@@ -8606,7 +8363,7 @@
                 <a:latin typeface="Arial" pitchFamily="34" charset="0"/>
                 <a:ea typeface="Arial" pitchFamily="34" charset="-122"/>
                 <a:cs typeface="Arial" pitchFamily="34" charset="-120"/>
-                <a:hlinkClick r:id="rId1" invalidUrl="" action="" tgtFrame="" tooltip="" history="1" highlightClick="0" endSnd="0">
+                <a:hlinkClick r:id="rId3">
                   <a:extLst>
                     <a:ext uri="{A12FA001-AC4F-418D-AE19-62706E023703}">
                       <ahyp:hlinkClr xmlns:ahyp="http://schemas.microsoft.com/office/drawing/2018/hyperlinkcolor" val="tx"/>
@@ -8641,7 +8398,7 @@
           <a:bodyPr wrap="square" lIns="0" tIns="0" rIns="0" bIns="0" rtlCol="0" anchor="ctr"/>
           <a:lstStyle/>
           <a:p>
-            <a:pPr indent="0" marL="0">
+            <a:pPr marL="0" indent="0">
               <a:buNone/>
             </a:pPr>
             <a:r>
@@ -8685,7 +8442,7 @@
             <a:prstDash val="solid"/>
           </a:ln>
           <a:effectLst>
-            <a:outerShdw sx="100000" sy="100000" kx="0" ky="0" algn="bl" rotWithShape="0" blurRad="101600" dist="25400" dir="5400000">
+            <a:outerShdw blurRad="101600" dist="25400" dir="5400000" algn="bl" rotWithShape="0">
               <a:srgbClr val="000000">
                 <a:alpha val="10000"/>
               </a:srgbClr>
@@ -8714,7 +8471,7 @@
           <a:bodyPr wrap="square" lIns="0" tIns="0" rIns="0" bIns="0" rtlCol="0" anchor="ctr"/>
           <a:lstStyle/>
           <a:p>
-            <a:pPr indent="0" marL="0">
+            <a:pPr marL="0" indent="0">
               <a:buNone/>
             </a:pPr>
             <a:r>
@@ -8735,7 +8492,7 @@
       <p:sp>
         <p:nvSpPr>
           <p:cNvPr id="10" name="Text 8">
-            <a:hlinkClick r:id="rId2" tooltip=""/>
+            <a:hlinkClick r:id="rId4"/>
           </p:cNvPr>
           <p:cNvSpPr txBox="1"/>
           <p:nvPr/>
@@ -8755,7 +8512,7 @@
           <a:bodyPr wrap="square" lIns="0" tIns="0" rIns="0" bIns="0" rtlCol="0" anchor="ctr"/>
           <a:lstStyle/>
           <a:p>
-            <a:pPr indent="0" marL="0">
+            <a:pPr marL="0" indent="0">
               <a:buNone/>
             </a:pPr>
             <a:r>
@@ -8766,7 +8523,7 @@
                 <a:latin typeface="Arial" pitchFamily="34" charset="0"/>
                 <a:ea typeface="Arial" pitchFamily="34" charset="-122"/>
                 <a:cs typeface="Arial" pitchFamily="34" charset="-120"/>
-                <a:hlinkClick r:id="rId2" invalidUrl="" action="" tgtFrame="" tooltip="" history="1" highlightClick="0" endSnd="0">
+                <a:hlinkClick r:id="rId4">
                   <a:extLst>
                     <a:ext uri="{A12FA001-AC4F-418D-AE19-62706E023703}">
                       <ahyp:hlinkClr xmlns:ahyp="http://schemas.microsoft.com/office/drawing/2018/hyperlinkcolor" val="tx"/>
@@ -8801,7 +8558,7 @@
           <a:bodyPr wrap="square" lIns="0" tIns="0" rIns="0" bIns="0" rtlCol="0" anchor="ctr"/>
           <a:lstStyle/>
           <a:p>
-            <a:pPr indent="0" marL="0">
+            <a:pPr marL="0" indent="0">
               <a:buNone/>
             </a:pPr>
             <a:r>
@@ -8845,7 +8602,7 @@
             <a:prstDash val="solid"/>
           </a:ln>
           <a:effectLst>
-            <a:outerShdw sx="100000" sy="100000" kx="0" ky="0" algn="bl" rotWithShape="0" blurRad="101600" dist="25400" dir="5400000">
+            <a:outerShdw blurRad="101600" dist="25400" dir="5400000" algn="bl" rotWithShape="0">
               <a:srgbClr val="000000">
                 <a:alpha val="10000"/>
               </a:srgbClr>
@@ -8874,7 +8631,7 @@
           <a:bodyPr wrap="square" lIns="0" tIns="0" rIns="0" bIns="0" rtlCol="0" anchor="ctr"/>
           <a:lstStyle/>
           <a:p>
-            <a:pPr indent="0" marL="0">
+            <a:pPr marL="0" indent="0">
               <a:buNone/>
             </a:pPr>
             <a:r>
@@ -8895,7 +8652,7 @@
       <p:sp>
         <p:nvSpPr>
           <p:cNvPr id="14" name="Text 12">
-            <a:hlinkClick r:id="rId3" tooltip=""/>
+            <a:hlinkClick r:id="rId5"/>
           </p:cNvPr>
           <p:cNvSpPr txBox="1"/>
           <p:nvPr/>
@@ -8915,7 +8672,7 @@
           <a:bodyPr wrap="square" lIns="0" tIns="0" rIns="0" bIns="0" rtlCol="0" anchor="ctr"/>
           <a:lstStyle/>
           <a:p>
-            <a:pPr indent="0" marL="0">
+            <a:pPr marL="0" indent="0">
               <a:buNone/>
             </a:pPr>
             <a:r>
@@ -8926,7 +8683,7 @@
                 <a:latin typeface="Arial" pitchFamily="34" charset="0"/>
                 <a:ea typeface="Arial" pitchFamily="34" charset="-122"/>
                 <a:cs typeface="Arial" pitchFamily="34" charset="-120"/>
-                <a:hlinkClick r:id="rId3" invalidUrl="" action="" tgtFrame="" tooltip="" history="1" highlightClick="0" endSnd="0">
+                <a:hlinkClick r:id="rId5">
                   <a:extLst>
                     <a:ext uri="{A12FA001-AC4F-418D-AE19-62706E023703}">
                       <ahyp:hlinkClr xmlns:ahyp="http://schemas.microsoft.com/office/drawing/2018/hyperlinkcolor" val="tx"/>
@@ -8961,7 +8718,7 @@
           <a:bodyPr wrap="square" lIns="0" tIns="0" rIns="0" bIns="0" rtlCol="0" anchor="ctr"/>
           <a:lstStyle/>
           <a:p>
-            <a:pPr indent="0" marL="0">
+            <a:pPr marL="0" indent="0">
               <a:buNone/>
             </a:pPr>
             <a:r>
@@ -9005,7 +8762,7 @@
             <a:prstDash val="solid"/>
           </a:ln>
           <a:effectLst>
-            <a:outerShdw sx="100000" sy="100000" kx="0" ky="0" algn="bl" rotWithShape="0" blurRad="101600" dist="25400" dir="5400000">
+            <a:outerShdw blurRad="101600" dist="25400" dir="5400000" algn="bl" rotWithShape="0">
               <a:srgbClr val="000000">
                 <a:alpha val="10000"/>
               </a:srgbClr>
@@ -9034,7 +8791,7 @@
           <a:bodyPr wrap="square" lIns="0" tIns="0" rIns="0" bIns="0" rtlCol="0" anchor="ctr"/>
           <a:lstStyle/>
           <a:p>
-            <a:pPr indent="0" marL="0">
+            <a:pPr marL="0" indent="0">
               <a:buNone/>
             </a:pPr>
             <a:r>
@@ -9055,7 +8812,7 @@
       <p:sp>
         <p:nvSpPr>
           <p:cNvPr id="18" name="Text 16">
-            <a:hlinkClick r:id="rId4" tooltip=""/>
+            <a:hlinkClick r:id="rId6"/>
           </p:cNvPr>
           <p:cNvSpPr txBox="1"/>
           <p:nvPr/>
@@ -9075,7 +8832,7 @@
           <a:bodyPr wrap="square" lIns="0" tIns="0" rIns="0" bIns="0" rtlCol="0" anchor="ctr"/>
           <a:lstStyle/>
           <a:p>
-            <a:pPr indent="0" marL="0">
+            <a:pPr marL="0" indent="0">
               <a:buNone/>
             </a:pPr>
             <a:r>
@@ -9086,7 +8843,7 @@
                 <a:latin typeface="Arial" pitchFamily="34" charset="0"/>
                 <a:ea typeface="Arial" pitchFamily="34" charset="-122"/>
                 <a:cs typeface="Arial" pitchFamily="34" charset="-120"/>
-                <a:hlinkClick r:id="rId4" invalidUrl="" action="" tgtFrame="" tooltip="" history="1" highlightClick="0" endSnd="0">
+                <a:hlinkClick r:id="rId6">
                   <a:extLst>
                     <a:ext uri="{A12FA001-AC4F-418D-AE19-62706E023703}">
                       <ahyp:hlinkClr xmlns:ahyp="http://schemas.microsoft.com/office/drawing/2018/hyperlinkcolor" val="tx"/>
@@ -9121,7 +8878,7 @@
           <a:bodyPr wrap="square" lIns="0" tIns="0" rIns="0" bIns="0" rtlCol="0" anchor="ctr"/>
           <a:lstStyle/>
           <a:p>
-            <a:pPr indent="0" marL="0">
+            <a:pPr marL="0" indent="0">
               <a:buNone/>
             </a:pPr>
             <a:r>
@@ -9165,7 +8922,7 @@
             <a:prstDash val="solid"/>
           </a:ln>
           <a:effectLst>
-            <a:outerShdw sx="100000" sy="100000" kx="0" ky="0" algn="bl" rotWithShape="0" blurRad="101600" dist="25400" dir="5400000">
+            <a:outerShdw blurRad="101600" dist="25400" dir="5400000" algn="bl" rotWithShape="0">
               <a:srgbClr val="000000">
                 <a:alpha val="10000"/>
               </a:srgbClr>
@@ -9194,7 +8951,7 @@
           <a:bodyPr wrap="square" lIns="0" tIns="0" rIns="0" bIns="0" rtlCol="0" anchor="ctr"/>
           <a:lstStyle/>
           <a:p>
-            <a:pPr indent="0" marL="0">
+            <a:pPr marL="0" indent="0">
               <a:buNone/>
             </a:pPr>
             <a:r>
@@ -9215,7 +8972,7 @@
       <p:sp>
         <p:nvSpPr>
           <p:cNvPr id="22" name="Text 20">
-            <a:hlinkClick r:id="rId5" tooltip=""/>
+            <a:hlinkClick r:id="rId7"/>
           </p:cNvPr>
           <p:cNvSpPr txBox="1"/>
           <p:nvPr/>
@@ -9235,7 +8992,7 @@
           <a:bodyPr wrap="square" lIns="0" tIns="0" rIns="0" bIns="0" rtlCol="0" anchor="ctr"/>
           <a:lstStyle/>
           <a:p>
-            <a:pPr indent="0" marL="0">
+            <a:pPr marL="0" indent="0">
               <a:buNone/>
             </a:pPr>
             <a:r>
@@ -9246,7 +9003,7 @@
                 <a:latin typeface="Arial" pitchFamily="34" charset="0"/>
                 <a:ea typeface="Arial" pitchFamily="34" charset="-122"/>
                 <a:cs typeface="Arial" pitchFamily="34" charset="-120"/>
-                <a:hlinkClick r:id="rId5" invalidUrl="" action="" tgtFrame="" tooltip="" history="1" highlightClick="0" endSnd="0">
+                <a:hlinkClick r:id="rId7">
                   <a:extLst>
                     <a:ext uri="{A12FA001-AC4F-418D-AE19-62706E023703}">
                       <ahyp:hlinkClr xmlns:ahyp="http://schemas.microsoft.com/office/drawing/2018/hyperlinkcolor" val="tx"/>
@@ -9281,7 +9038,7 @@
           <a:bodyPr wrap="square" lIns="0" tIns="0" rIns="0" bIns="0" rtlCol="0" anchor="ctr"/>
           <a:lstStyle/>
           <a:p>
-            <a:pPr indent="0" marL="0">
+            <a:pPr marL="0" indent="0">
               <a:buNone/>
             </a:pPr>
             <a:r>
@@ -9320,7 +9077,7 @@
           <a:bodyPr wrap="square" lIns="0" tIns="0" rIns="0" bIns="0" rtlCol="0" anchor="t"/>
           <a:lstStyle/>
           <a:p>
-            <a:pPr indent="0" marL="0">
+            <a:pPr marL="0" indent="0">
               <a:lnSpc>
                 <a:spcPct val="120000"/>
               </a:lnSpc>
@@ -9357,6 +9114,7 @@
         <a:solidFill>
           <a:srgbClr val="0F1F33"/>
         </a:solidFill>
+        <a:effectLst/>
       </p:bgPr>
     </p:bg>
     <p:spTree>
@@ -9394,7 +9152,7 @@
           <a:bodyPr wrap="square" lIns="0" tIns="0" rIns="0" bIns="0" rtlCol="0" anchor="ctr"/>
           <a:lstStyle/>
           <a:p>
-            <a:pPr indent="0" marL="0">
+            <a:pPr marL="0" indent="0">
               <a:buNone/>
             </a:pPr>
             <a:r>
@@ -9433,7 +9191,7 @@
           <a:bodyPr wrap="square" lIns="0" tIns="0" rIns="0" bIns="0" rtlCol="0" anchor="ctr"/>
           <a:lstStyle/>
           <a:p>
-            <a:pPr indent="0" marL="0">
+            <a:pPr marL="0" indent="0">
               <a:buNone/>
             </a:pPr>
             <a:r>
@@ -9472,7 +9230,7 @@
           <a:bodyPr wrap="square" lIns="0" tIns="0" rIns="0" bIns="0" rtlCol="0" anchor="t"/>
           <a:lstStyle/>
           <a:p>
-            <a:pPr indent="0" marL="0">
+            <a:pPr marL="0" indent="0">
               <a:lnSpc>
                 <a:spcPct val="120000"/>
               </a:lnSpc>
@@ -9509,6 +9267,7 @@
         <a:solidFill>
           <a:srgbClr val="F7F7F4"/>
         </a:solidFill>
+        <a:effectLst/>
       </p:bgPr>
     </p:bg>
     <p:spTree>
@@ -9546,11 +9305,11 @@
           <a:bodyPr wrap="square" lIns="0" tIns="0" rIns="0" bIns="0" rtlCol="0" anchor="ctr"/>
           <a:lstStyle/>
           <a:p>
-            <a:pPr indent="0" marL="0">
-              <a:buNone/>
-            </a:pPr>
-            <a:r>
-              <a:rPr lang="en-US" sz="1200" b="1" spc="200" kern="0" dirty="0">
+            <a:pPr marL="0" indent="0">
+              <a:buNone/>
+            </a:pPr>
+            <a:r>
+              <a:rPr lang="en-US" sz="1200" b="1" kern="0" spc="200" dirty="0">
                 <a:solidFill>
                   <a:srgbClr val="3762FF"/>
                 </a:solidFill>
@@ -9585,7 +9344,7 @@
           <a:bodyPr wrap="square" lIns="0" tIns="0" rIns="0" bIns="0" rtlCol="0" anchor="t"/>
           <a:lstStyle/>
           <a:p>
-            <a:pPr indent="0" marL="0">
+            <a:pPr marL="0" indent="0">
               <a:buNone/>
             </a:pPr>
             <a:r>
@@ -9629,7 +9388,7 @@
             <a:prstDash val="solid"/>
           </a:ln>
           <a:effectLst>
-            <a:outerShdw sx="100000" sy="100000" kx="0" ky="0" algn="bl" rotWithShape="0" blurRad="101600" dist="25400" dir="5400000">
+            <a:outerShdw blurRad="101600" dist="25400" dir="5400000" algn="bl" rotWithShape="0">
               <a:srgbClr val="000000">
                 <a:alpha val="10000"/>
               </a:srgbClr>
@@ -9658,7 +9417,7 @@
           <a:bodyPr wrap="square" lIns="0" tIns="0" rIns="0" bIns="0" rtlCol="0" anchor="t"/>
           <a:lstStyle/>
           <a:p>
-            <a:pPr indent="0" marL="0">
+            <a:pPr marL="0" indent="0">
               <a:buNone/>
             </a:pPr>
             <a:r>
@@ -9697,7 +9456,7 @@
           <a:bodyPr wrap="square" lIns="0" tIns="0" rIns="0" bIns="0" rtlCol="0" anchor="t"/>
           <a:lstStyle/>
           <a:p>
-            <a:pPr indent="0" marL="0">
+            <a:pPr marL="0" indent="0">
               <a:lnSpc>
                 <a:spcPct val="115000"/>
               </a:lnSpc>
@@ -9744,7 +9503,7 @@
             <a:prstDash val="solid"/>
           </a:ln>
           <a:effectLst>
-            <a:outerShdw sx="100000" sy="100000" kx="0" ky="0" algn="bl" rotWithShape="0" blurRad="101600" dist="25400" dir="5400000">
+            <a:outerShdw blurRad="101600" dist="25400" dir="5400000" algn="bl" rotWithShape="0">
               <a:srgbClr val="000000">
                 <a:alpha val="10000"/>
               </a:srgbClr>
@@ -9773,7 +9532,7 @@
           <a:bodyPr wrap="square" lIns="0" tIns="0" rIns="0" bIns="0" rtlCol="0" anchor="t"/>
           <a:lstStyle/>
           <a:p>
-            <a:pPr indent="0" marL="0">
+            <a:pPr marL="0" indent="0">
               <a:buNone/>
             </a:pPr>
             <a:r>
@@ -9812,7 +9571,7 @@
           <a:bodyPr wrap="square" lIns="0" tIns="0" rIns="0" bIns="0" rtlCol="0" anchor="t"/>
           <a:lstStyle/>
           <a:p>
-            <a:pPr indent="0" marL="0">
+            <a:pPr marL="0" indent="0">
               <a:lnSpc>
                 <a:spcPct val="115000"/>
               </a:lnSpc>
@@ -9859,7 +9618,7 @@
             <a:prstDash val="solid"/>
           </a:ln>
           <a:effectLst>
-            <a:outerShdw sx="100000" sy="100000" kx="0" ky="0" algn="bl" rotWithShape="0" blurRad="101600" dist="25400" dir="5400000">
+            <a:outerShdw blurRad="101600" dist="25400" dir="5400000" algn="bl" rotWithShape="0">
               <a:srgbClr val="000000">
                 <a:alpha val="10000"/>
               </a:srgbClr>
@@ -9888,7 +9647,7 @@
           <a:bodyPr wrap="square" lIns="0" tIns="0" rIns="0" bIns="0" rtlCol="0" anchor="t"/>
           <a:lstStyle/>
           <a:p>
-            <a:pPr indent="0" marL="0">
+            <a:pPr marL="0" indent="0">
               <a:buNone/>
             </a:pPr>
             <a:r>
@@ -9927,7 +9686,7 @@
           <a:bodyPr wrap="square" lIns="0" tIns="0" rIns="0" bIns="0" rtlCol="0" anchor="t"/>
           <a:lstStyle/>
           <a:p>
-            <a:pPr indent="0" marL="0">
+            <a:pPr marL="0" indent="0">
               <a:lnSpc>
                 <a:spcPct val="115000"/>
               </a:lnSpc>
@@ -9974,7 +9733,7 @@
             <a:prstDash val="solid"/>
           </a:ln>
           <a:effectLst>
-            <a:outerShdw sx="100000" sy="100000" kx="0" ky="0" algn="bl" rotWithShape="0" blurRad="101600" dist="25400" dir="5400000">
+            <a:outerShdw blurRad="101600" dist="25400" dir="5400000" algn="bl" rotWithShape="0">
               <a:srgbClr val="000000">
                 <a:alpha val="10000"/>
               </a:srgbClr>
@@ -10003,7 +9762,7 @@
           <a:bodyPr wrap="square" lIns="0" tIns="0" rIns="0" bIns="0" rtlCol="0" anchor="t"/>
           <a:lstStyle/>
           <a:p>
-            <a:pPr indent="0" marL="0">
+            <a:pPr marL="0" indent="0">
               <a:buNone/>
             </a:pPr>
             <a:r>
@@ -10042,7 +9801,7 @@
           <a:bodyPr wrap="square" lIns="0" tIns="0" rIns="0" bIns="0" rtlCol="0" anchor="t"/>
           <a:lstStyle/>
           <a:p>
-            <a:pPr indent="0" marL="0">
+            <a:pPr marL="0" indent="0">
               <a:lnSpc>
                 <a:spcPct val="115000"/>
               </a:lnSpc>
@@ -10111,7 +9870,7 @@
           <a:bodyPr wrap="square" lIns="0" tIns="0" rIns="0" bIns="0" rtlCol="0" anchor="t"/>
           <a:lstStyle/>
           <a:p>
-            <a:pPr indent="0" marL="0">
+            <a:pPr marL="0" indent="0">
               <a:buNone/>
             </a:pPr>
             <a:r>
@@ -10150,7 +9909,7 @@
           <a:bodyPr wrap="square" lIns="0" tIns="0" rIns="0" bIns="0" rtlCol="0" anchor="t"/>
           <a:lstStyle/>
           <a:p>
-            <a:pPr indent="0" marL="0">
+            <a:pPr marL="0" indent="0">
               <a:lnSpc>
                 <a:spcPct val="115000"/>
               </a:lnSpc>
@@ -10197,7 +9956,7 @@
             <a:prstDash val="solid"/>
           </a:ln>
           <a:effectLst>
-            <a:outerShdw sx="100000" sy="100000" kx="0" ky="0" algn="bl" rotWithShape="0" blurRad="101600" dist="25400" dir="5400000">
+            <a:outerShdw blurRad="101600" dist="25400" dir="5400000" algn="bl" rotWithShape="0">
               <a:srgbClr val="000000">
                 <a:alpha val="10000"/>
               </a:srgbClr>
@@ -10226,7 +9985,7 @@
           <a:bodyPr wrap="square" lIns="0" tIns="0" rIns="0" bIns="0" rtlCol="0" anchor="t"/>
           <a:lstStyle/>
           <a:p>
-            <a:pPr indent="0" marL="0">
+            <a:pPr marL="0" indent="0">
               <a:buNone/>
             </a:pPr>
             <a:r>
@@ -10265,7 +10024,7 @@
           <a:bodyPr wrap="square" lIns="0" tIns="0" rIns="0" bIns="0" rtlCol="0" anchor="t"/>
           <a:lstStyle/>
           <a:p>
-            <a:pPr indent="0" marL="0">
+            <a:pPr marL="0" indent="0">
               <a:lnSpc>
                 <a:spcPct val="115000"/>
               </a:lnSpc>
@@ -10302,6 +10061,7 @@
         <a:solidFill>
           <a:srgbClr val="F7F7F4"/>
         </a:solidFill>
+        <a:effectLst/>
       </p:bgPr>
     </p:bg>
     <p:spTree>
@@ -10339,11 +10099,11 @@
           <a:bodyPr wrap="square" lIns="0" tIns="0" rIns="0" bIns="0" rtlCol="0" anchor="ctr"/>
           <a:lstStyle/>
           <a:p>
-            <a:pPr indent="0" marL="0">
-              <a:buNone/>
-            </a:pPr>
-            <a:r>
-              <a:rPr lang="en-US" sz="1200" b="1" spc="200" kern="0" dirty="0">
+            <a:pPr marL="0" indent="0">
+              <a:buNone/>
+            </a:pPr>
+            <a:r>
+              <a:rPr lang="en-US" sz="1200" b="1" kern="0" spc="200" dirty="0">
                 <a:solidFill>
                   <a:srgbClr val="3762FF"/>
                 </a:solidFill>
@@ -10378,7 +10138,7 @@
           <a:bodyPr wrap="square" lIns="0" tIns="0" rIns="0" bIns="0" rtlCol="0" anchor="t"/>
           <a:lstStyle/>
           <a:p>
-            <a:pPr indent="0" marL="0">
+            <a:pPr marL="0" indent="0">
               <a:buNone/>
             </a:pPr>
             <a:r>
@@ -10422,7 +10182,7 @@
             <a:prstDash val="solid"/>
           </a:ln>
           <a:effectLst>
-            <a:outerShdw sx="100000" sy="100000" kx="0" ky="0" algn="bl" rotWithShape="0" blurRad="101600" dist="25400" dir="5400000">
+            <a:outerShdw blurRad="101600" dist="25400" dir="5400000" algn="bl" rotWithShape="0">
               <a:srgbClr val="000000">
                 <a:alpha val="10000"/>
               </a:srgbClr>
@@ -10526,7 +10286,7 @@
           <a:bodyPr wrap="square" lIns="0" tIns="0" rIns="0" bIns="0" rtlCol="0" anchor="ctr"/>
           <a:lstStyle/>
           <a:p>
-            <a:pPr indent="0" marL="0">
+            <a:pPr marL="0" indent="0">
               <a:buNone/>
             </a:pPr>
             <a:r>
@@ -10565,7 +10325,7 @@
           <a:bodyPr wrap="square" lIns="0" tIns="0" rIns="0" bIns="0" rtlCol="0" anchor="t"/>
           <a:lstStyle/>
           <a:p>
-            <a:pPr indent="0" marL="0">
+            <a:pPr marL="0" indent="0">
               <a:lnSpc>
                 <a:spcPct val="110000"/>
               </a:lnSpc>
@@ -10585,7 +10345,7 @@
             <a:endParaRPr lang="en-US" sz="1300" dirty="0"/>
           </a:p>
           <a:p>
-            <a:pPr indent="0" marL="0">
+            <a:pPr marL="0" indent="0">
               <a:lnSpc>
                 <a:spcPct val="110000"/>
               </a:lnSpc>
@@ -10605,7 +10365,7 @@
             <a:endParaRPr lang="en-US" sz="1300" dirty="0"/>
           </a:p>
           <a:p>
-            <a:pPr indent="0" marL="0">
+            <a:pPr marL="0" indent="0">
               <a:lnSpc>
                 <a:spcPct val="110000"/>
               </a:lnSpc>
@@ -10625,7 +10385,7 @@
             <a:endParaRPr lang="en-US" sz="1300" dirty="0"/>
           </a:p>
           <a:p>
-            <a:pPr indent="0" marL="0">
+            <a:pPr marL="0" indent="0">
               <a:lnSpc>
                 <a:spcPct val="110000"/>
               </a:lnSpc>
@@ -10645,7 +10405,7 @@
             <a:endParaRPr lang="en-US" sz="1300" dirty="0"/>
           </a:p>
           <a:p>
-            <a:pPr indent="0" marL="0">
+            <a:pPr marL="0" indent="0">
               <a:lnSpc>
                 <a:spcPct val="110000"/>
               </a:lnSpc>
@@ -10665,7 +10425,7 @@
             <a:endParaRPr lang="en-US" sz="1300" dirty="0"/>
           </a:p>
           <a:p>
-            <a:pPr indent="0" marL="0">
+            <a:pPr marL="0" indent="0">
               <a:lnSpc>
                 <a:spcPct val="110000"/>
               </a:lnSpc>
@@ -10712,7 +10472,7 @@
             <a:prstDash val="solid"/>
           </a:ln>
           <a:effectLst>
-            <a:outerShdw sx="100000" sy="100000" kx="0" ky="0" algn="bl" rotWithShape="0" blurRad="101600" dist="25400" dir="5400000">
+            <a:outerShdw blurRad="101600" dist="25400" dir="5400000" algn="bl" rotWithShape="0">
               <a:srgbClr val="000000">
                 <a:alpha val="10000"/>
               </a:srgbClr>
@@ -10741,7 +10501,7 @@
           <a:bodyPr wrap="square" lIns="0" tIns="0" rIns="0" bIns="0" rtlCol="0" anchor="t"/>
           <a:lstStyle/>
           <a:p>
-            <a:pPr indent="0" marL="0">
+            <a:pPr marL="0" indent="0">
               <a:buNone/>
             </a:pPr>
             <a:r>
@@ -10780,7 +10540,7 @@
           <a:bodyPr wrap="square" lIns="0" tIns="0" rIns="0" bIns="0" rtlCol="0" anchor="t"/>
           <a:lstStyle/>
           <a:p>
-            <a:pPr indent="0" marL="0">
+            <a:pPr marL="0" indent="0">
               <a:lnSpc>
                 <a:spcPct val="115000"/>
               </a:lnSpc>
@@ -10849,7 +10609,7 @@
           <a:bodyPr wrap="square" lIns="0" tIns="0" rIns="0" bIns="0" rtlCol="0" anchor="t"/>
           <a:lstStyle/>
           <a:p>
-            <a:pPr indent="0" marL="0">
+            <a:pPr marL="0" indent="0">
               <a:buNone/>
             </a:pPr>
             <a:r>
@@ -10888,7 +10648,7 @@
           <a:bodyPr wrap="square" lIns="0" tIns="0" rIns="0" bIns="0" rtlCol="0" anchor="t"/>
           <a:lstStyle/>
           <a:p>
-            <a:pPr indent="0" marL="0">
+            <a:pPr marL="0" indent="0">
               <a:lnSpc>
                 <a:spcPct val="115000"/>
               </a:lnSpc>
@@ -10957,7 +10717,7 @@
           <a:bodyPr wrap="square" lIns="0" tIns="0" rIns="0" bIns="0" rtlCol="0" anchor="ctr"/>
           <a:lstStyle/>
           <a:p>
-            <a:pPr indent="0" marL="0">
+            <a:pPr marL="0" indent="0">
               <a:buNone/>
             </a:pPr>
             <a:r>
@@ -10971,9 +10731,6 @@
               </a:rPr>
               <a:t>Klart när: </a:t>
             </a:r>
-            <a:pPr indent="0" marL="0">
-              <a:buNone/>
-            </a:pPr>
             <a:r>
               <a:rPr lang="en-US" sz="1500" dirty="0">
                 <a:solidFill>
@@ -11005,6 +10762,7 @@
         <a:solidFill>
           <a:srgbClr val="F7F7F4"/>
         </a:solidFill>
+        <a:effectLst/>
       </p:bgPr>
     </p:bg>
     <p:spTree>
@@ -11042,11 +10800,11 @@
           <a:bodyPr wrap="square" lIns="0" tIns="0" rIns="0" bIns="0" rtlCol="0" anchor="ctr"/>
           <a:lstStyle/>
           <a:p>
-            <a:pPr indent="0" marL="0">
-              <a:buNone/>
-            </a:pPr>
-            <a:r>
-              <a:rPr lang="en-US" sz="1200" b="1" spc="200" kern="0" dirty="0">
+            <a:pPr marL="0" indent="0">
+              <a:buNone/>
+            </a:pPr>
+            <a:r>
+              <a:rPr lang="en-US" sz="1200" b="1" kern="0" spc="200" dirty="0">
                 <a:solidFill>
                   <a:srgbClr val="3762FF"/>
                 </a:solidFill>
@@ -11081,7 +10839,7 @@
           <a:bodyPr wrap="square" lIns="0" tIns="0" rIns="0" bIns="0" rtlCol="0" anchor="t"/>
           <a:lstStyle/>
           <a:p>
-            <a:pPr indent="0" marL="0">
+            <a:pPr marL="0" indent="0">
               <a:buNone/>
             </a:pPr>
             <a:r>
@@ -11125,7 +10883,7 @@
             <a:prstDash val="solid"/>
           </a:ln>
           <a:effectLst>
-            <a:outerShdw sx="100000" sy="100000" kx="0" ky="0" algn="bl" rotWithShape="0" blurRad="101600" dist="25400" dir="5400000">
+            <a:outerShdw blurRad="101600" dist="25400" dir="5400000" algn="bl" rotWithShape="0">
               <a:srgbClr val="000000">
                 <a:alpha val="10000"/>
               </a:srgbClr>
@@ -11229,7 +10987,7 @@
           <a:bodyPr wrap="square" lIns="0" tIns="0" rIns="0" bIns="0" rtlCol="0" anchor="ctr"/>
           <a:lstStyle/>
           <a:p>
-            <a:pPr indent="0" marL="0">
+            <a:pPr marL="0" indent="0">
               <a:buNone/>
             </a:pPr>
             <a:r>
@@ -11268,7 +11026,7 @@
           <a:bodyPr wrap="square" lIns="0" tIns="0" rIns="0" bIns="0" rtlCol="0" anchor="t"/>
           <a:lstStyle/>
           <a:p>
-            <a:pPr indent="0" marL="0">
+            <a:pPr marL="0" indent="0">
               <a:lnSpc>
                 <a:spcPct val="110000"/>
               </a:lnSpc>
@@ -11288,7 +11046,7 @@
             <a:endParaRPr lang="en-US" sz="1300" dirty="0"/>
           </a:p>
           <a:p>
-            <a:pPr indent="0" marL="0">
+            <a:pPr marL="0" indent="0">
               <a:lnSpc>
                 <a:spcPct val="110000"/>
               </a:lnSpc>
@@ -11308,7 +11066,7 @@
             <a:endParaRPr lang="en-US" sz="1300" dirty="0"/>
           </a:p>
           <a:p>
-            <a:pPr indent="0" marL="0">
+            <a:pPr marL="0" indent="0">
               <a:lnSpc>
                 <a:spcPct val="110000"/>
               </a:lnSpc>
@@ -11328,7 +11086,7 @@
             <a:endParaRPr lang="en-US" sz="1300" dirty="0"/>
           </a:p>
           <a:p>
-            <a:pPr indent="0" marL="0">
+            <a:pPr marL="0" indent="0">
               <a:lnSpc>
                 <a:spcPct val="110000"/>
               </a:lnSpc>
@@ -11348,47 +11106,120 @@
             <a:endParaRPr lang="en-US" sz="1300" dirty="0"/>
           </a:p>
           <a:p>
-            <a:pPr indent="0" marL="0">
+            <a:r>
+              <a:rPr lang="sv-SE" sz="1300" dirty="0" err="1">
+                <a:solidFill>
+                  <a:srgbClr val="DDE3EA"/>
+                </a:solidFill>
+                <a:latin typeface="Courier New" pitchFamily="34" charset="0"/>
+                <a:cs typeface="Courier New" pitchFamily="34" charset="-120"/>
+              </a:rPr>
+              <a:t>winget</a:t>
+            </a:r>
+            <a:r>
+              <a:rPr lang="sv-SE" sz="1300" dirty="0">
+                <a:solidFill>
+                  <a:srgbClr val="DDE3EA"/>
+                </a:solidFill>
+                <a:latin typeface="Courier New" pitchFamily="34" charset="0"/>
+                <a:cs typeface="Courier New" pitchFamily="34" charset="-120"/>
+              </a:rPr>
+              <a:t> </a:t>
+            </a:r>
+            <a:r>
+              <a:rPr lang="sv-SE" sz="1300" dirty="0" err="1">
+                <a:solidFill>
+                  <a:srgbClr val="DDE3EA"/>
+                </a:solidFill>
+                <a:latin typeface="Courier New" pitchFamily="34" charset="0"/>
+                <a:cs typeface="Courier New" pitchFamily="34" charset="-120"/>
+              </a:rPr>
+              <a:t>install</a:t>
+            </a:r>
+            <a:r>
+              <a:rPr lang="sv-SE" sz="1300" dirty="0">
+                <a:solidFill>
+                  <a:srgbClr val="DDE3EA"/>
+                </a:solidFill>
+                <a:latin typeface="Courier New" pitchFamily="34" charset="0"/>
+                <a:cs typeface="Courier New" pitchFamily="34" charset="-120"/>
+              </a:rPr>
+              <a:t> --id </a:t>
+            </a:r>
+            <a:r>
+              <a:rPr lang="sv-SE" sz="1300" dirty="0" err="1">
+                <a:solidFill>
+                  <a:srgbClr val="DDE3EA"/>
+                </a:solidFill>
+                <a:latin typeface="Courier New" pitchFamily="34" charset="0"/>
+                <a:cs typeface="Courier New" pitchFamily="34" charset="-120"/>
+              </a:rPr>
+              <a:t>Microsoft.PowerShell</a:t>
+            </a:r>
+            <a:r>
+              <a:rPr lang="sv-SE" sz="1300" dirty="0">
+                <a:solidFill>
+                  <a:srgbClr val="DDE3EA"/>
+                </a:solidFill>
+                <a:latin typeface="Courier New" pitchFamily="34" charset="0"/>
+                <a:cs typeface="Courier New" pitchFamily="34" charset="-120"/>
+              </a:rPr>
+              <a:t> --source </a:t>
+            </a:r>
+            <a:r>
+              <a:rPr lang="sv-SE" sz="1300" dirty="0" err="1">
+                <a:solidFill>
+                  <a:srgbClr val="DDE3EA"/>
+                </a:solidFill>
+                <a:latin typeface="Courier New" pitchFamily="34" charset="0"/>
+                <a:cs typeface="Courier New" pitchFamily="34" charset="-120"/>
+              </a:rPr>
+              <a:t>winget</a:t>
+            </a:r>
+            <a:endParaRPr lang="sv-SE" sz="1300" dirty="0">
+              <a:solidFill>
+                <a:srgbClr val="DDE3EA"/>
+              </a:solidFill>
+              <a:latin typeface="Courier New" pitchFamily="34" charset="0"/>
+              <a:cs typeface="Courier New" pitchFamily="34" charset="-120"/>
+            </a:endParaRPr>
+          </a:p>
+          <a:p>
+            <a:r>
+              <a:rPr lang="en-US" sz="1300" dirty="0">
+                <a:solidFill>
+                  <a:srgbClr val="DDE3EA"/>
+                </a:solidFill>
+                <a:latin typeface="Courier New" pitchFamily="34" charset="0"/>
+                <a:ea typeface="Courier New" pitchFamily="34" charset="-122"/>
+                <a:cs typeface="Courier New" pitchFamily="34" charset="-120"/>
+              </a:rPr>
+              <a:t> </a:t>
+            </a:r>
+            <a:endParaRPr lang="en-US" sz="1300" dirty="0"/>
+          </a:p>
+          <a:p>
+            <a:pPr marL="0" indent="0">
               <a:lnSpc>
                 <a:spcPct val="110000"/>
               </a:lnSpc>
               <a:buNone/>
             </a:pPr>
             <a:r>
-              <a:rPr lang="en-US" sz="1300" dirty="0">
-                <a:solidFill>
-                  <a:srgbClr val="DDE3EA"/>
+              <a:rPr lang="en-US" sz="1300" i="1" dirty="0">
+                <a:solidFill>
+                  <a:srgbClr val="B9C4D1"/>
                 </a:solidFill>
                 <a:latin typeface="Courier New" pitchFamily="34" charset="0"/>
                 <a:ea typeface="Courier New" pitchFamily="34" charset="-122"/>
                 <a:cs typeface="Courier New" pitchFamily="34" charset="-120"/>
               </a:rPr>
-              <a:t> </a:t>
+              <a:t># Stäng terminalen, öppna en ny</a:t>
             </a:r>
             <a:endParaRPr lang="en-US" sz="1300" dirty="0"/>
           </a:p>
           <a:p>
-            <a:pPr indent="0" marL="0">
-              <a:lnSpc>
-                <a:spcPct val="110000"/>
-              </a:lnSpc>
-              <a:buNone/>
-            </a:pPr>
-            <a:r>
-              <a:rPr lang="en-US" sz="1300" i="1" dirty="0">
-                <a:solidFill>
-                  <a:srgbClr val="B9C4D1"/>
-                </a:solidFill>
-                <a:latin typeface="Courier New" pitchFamily="34" charset="0"/>
-                <a:ea typeface="Courier New" pitchFamily="34" charset="-122"/>
-                <a:cs typeface="Courier New" pitchFamily="34" charset="-120"/>
-              </a:rPr>
-              <a:t># Stäng terminalen, öppna en ny</a:t>
-            </a:r>
-            <a:endParaRPr lang="en-US" sz="1300" dirty="0"/>
-          </a:p>
-          <a:p>
-            <a:pPr indent="0" marL="0">
+            <a:pPr marL="0" indent="0">
               <a:lnSpc>
                 <a:spcPct val="110000"/>
               </a:lnSpc>
@@ -11435,7 +11266,7 @@
             <a:prstDash val="solid"/>
           </a:ln>
           <a:effectLst>
-            <a:outerShdw sx="100000" sy="100000" kx="0" ky="0" algn="bl" rotWithShape="0" blurRad="101600" dist="25400" dir="5400000">
+            <a:outerShdw blurRad="101600" dist="25400" dir="5400000" algn="bl" rotWithShape="0">
               <a:srgbClr val="000000">
                 <a:alpha val="10000"/>
               </a:srgbClr>
@@ -11539,7 +11370,7 @@
           <a:bodyPr wrap="square" lIns="0" tIns="0" rIns="0" bIns="0" rtlCol="0" anchor="ctr"/>
           <a:lstStyle/>
           <a:p>
-            <a:pPr indent="0" marL="0">
+            <a:pPr marL="0" indent="0">
               <a:buNone/>
             </a:pPr>
             <a:r>
@@ -11578,7 +11409,7 @@
           <a:bodyPr wrap="square" lIns="0" tIns="0" rIns="0" bIns="0" rtlCol="0" anchor="t"/>
           <a:lstStyle/>
           <a:p>
-            <a:pPr indent="0" marL="0">
+            <a:pPr marL="0" indent="0">
               <a:lnSpc>
                 <a:spcPct val="110000"/>
               </a:lnSpc>
@@ -11598,7 +11429,7 @@
             <a:endParaRPr lang="en-US" sz="1300" dirty="0"/>
           </a:p>
           <a:p>
-            <a:pPr indent="0" marL="0">
+            <a:pPr marL="0" indent="0">
               <a:lnSpc>
                 <a:spcPct val="110000"/>
               </a:lnSpc>
@@ -11618,7 +11449,7 @@
             <a:endParaRPr lang="en-US" sz="1300" dirty="0"/>
           </a:p>
           <a:p>
-            <a:pPr indent="0" marL="0">
+            <a:pPr marL="0" indent="0">
               <a:lnSpc>
                 <a:spcPct val="110000"/>
               </a:lnSpc>
@@ -11638,7 +11469,7 @@
             <a:endParaRPr lang="en-US" sz="1300" dirty="0"/>
           </a:p>
           <a:p>
-            <a:pPr indent="0" marL="0">
+            <a:pPr marL="0" indent="0">
               <a:lnSpc>
                 <a:spcPct val="110000"/>
               </a:lnSpc>
@@ -11658,7 +11489,7 @@
             <a:endParaRPr lang="en-US" sz="1300" dirty="0"/>
           </a:p>
           <a:p>
-            <a:pPr indent="0" marL="0">
+            <a:pPr marL="0" indent="0">
               <a:lnSpc>
                 <a:spcPct val="110000"/>
               </a:lnSpc>
@@ -11678,7 +11509,7 @@
             <a:endParaRPr lang="en-US" sz="1300" dirty="0"/>
           </a:p>
           <a:p>
-            <a:pPr indent="0" marL="0">
+            <a:pPr marL="0" indent="0">
               <a:lnSpc>
                 <a:spcPct val="110000"/>
               </a:lnSpc>
@@ -11698,7 +11529,7 @@
             <a:endParaRPr lang="en-US" sz="1300" dirty="0"/>
           </a:p>
           <a:p>
-            <a:pPr indent="0" marL="0">
+            <a:pPr marL="0" indent="0">
               <a:lnSpc>
                 <a:spcPct val="110000"/>
               </a:lnSpc>
@@ -11791,7 +11622,7 @@
           <a:bodyPr wrap="square" lIns="0" tIns="0" rIns="0" bIns="0" rtlCol="0" anchor="ctr"/>
           <a:lstStyle/>
           <a:p>
-            <a:pPr indent="0" marL="0">
+            <a:pPr marL="0" indent="0">
               <a:buNone/>
             </a:pPr>
             <a:r>
@@ -11805,9 +11636,6 @@
               </a:rPr>
               <a:t>Klart när: </a:t>
             </a:r>
-            <a:pPr indent="0" marL="0">
-              <a:buNone/>
-            </a:pPr>
             <a:r>
               <a:rPr lang="en-US" sz="1500" dirty="0">
                 <a:solidFill>
@@ -11839,6 +11667,7 @@
         <a:solidFill>
           <a:srgbClr val="F7F7F4"/>
         </a:solidFill>
+        <a:effectLst/>
       </p:bgPr>
     </p:bg>
     <p:spTree>
@@ -11876,11 +11705,11 @@
           <a:bodyPr wrap="square" lIns="0" tIns="0" rIns="0" bIns="0" rtlCol="0" anchor="ctr"/>
           <a:lstStyle/>
           <a:p>
-            <a:pPr indent="0" marL="0">
-              <a:buNone/>
-            </a:pPr>
-            <a:r>
-              <a:rPr lang="en-US" sz="1200" b="1" spc="200" kern="0" dirty="0">
+            <a:pPr marL="0" indent="0">
+              <a:buNone/>
+            </a:pPr>
+            <a:r>
+              <a:rPr lang="en-US" sz="1200" b="1" kern="0" spc="200" dirty="0">
                 <a:solidFill>
                   <a:srgbClr val="3762FF"/>
                 </a:solidFill>
@@ -11915,7 +11744,7 @@
           <a:bodyPr wrap="square" lIns="0" tIns="0" rIns="0" bIns="0" rtlCol="0" anchor="t"/>
           <a:lstStyle/>
           <a:p>
-            <a:pPr indent="0" marL="0">
+            <a:pPr marL="0" indent="0">
               <a:buNone/>
             </a:pPr>
             <a:r>
@@ -11959,7 +11788,7 @@
             <a:prstDash val="solid"/>
           </a:ln>
           <a:effectLst>
-            <a:outerShdw sx="100000" sy="100000" kx="0" ky="0" algn="bl" rotWithShape="0" blurRad="101600" dist="25400" dir="5400000">
+            <a:outerShdw blurRad="101600" dist="25400" dir="5400000" algn="bl" rotWithShape="0">
               <a:srgbClr val="000000">
                 <a:alpha val="10000"/>
               </a:srgbClr>
@@ -12063,7 +11892,7 @@
           <a:bodyPr wrap="square" lIns="0" tIns="0" rIns="0" bIns="0" rtlCol="0" anchor="ctr"/>
           <a:lstStyle/>
           <a:p>
-            <a:pPr indent="0" marL="0">
+            <a:pPr marL="0" indent="0">
               <a:buNone/>
             </a:pPr>
             <a:r>
@@ -12102,7 +11931,7 @@
           <a:bodyPr wrap="square" lIns="0" tIns="0" rIns="0" bIns="0" rtlCol="0" anchor="t"/>
           <a:lstStyle/>
           <a:p>
-            <a:pPr indent="0" marL="0">
+            <a:pPr marL="0" indent="0">
               <a:lnSpc>
                 <a:spcPct val="110000"/>
               </a:lnSpc>
@@ -12122,7 +11951,7 @@
             <a:endParaRPr lang="en-US" sz="1300" dirty="0"/>
           </a:p>
           <a:p>
-            <a:pPr indent="0" marL="0">
+            <a:pPr marL="0" indent="0">
               <a:lnSpc>
                 <a:spcPct val="110000"/>
               </a:lnSpc>
@@ -12142,7 +11971,7 @@
             <a:endParaRPr lang="en-US" sz="1300" dirty="0"/>
           </a:p>
           <a:p>
-            <a:pPr indent="0" marL="0">
+            <a:pPr marL="0" indent="0">
               <a:lnSpc>
                 <a:spcPct val="110000"/>
               </a:lnSpc>
@@ -12162,7 +11991,7 @@
             <a:endParaRPr lang="en-US" sz="1300" dirty="0"/>
           </a:p>
           <a:p>
-            <a:pPr indent="0" marL="0">
+            <a:pPr marL="0" indent="0">
               <a:lnSpc>
                 <a:spcPct val="110000"/>
               </a:lnSpc>
@@ -12182,7 +12011,7 @@
             <a:endParaRPr lang="en-US" sz="1300" dirty="0"/>
           </a:p>
           <a:p>
-            <a:pPr indent="0" marL="0">
+            <a:pPr marL="0" indent="0">
               <a:lnSpc>
                 <a:spcPct val="110000"/>
               </a:lnSpc>
@@ -12202,7 +12031,7 @@
             <a:endParaRPr lang="en-US" sz="1300" dirty="0"/>
           </a:p>
           <a:p>
-            <a:pPr indent="0" marL="0">
+            <a:pPr marL="0" indent="0">
               <a:lnSpc>
                 <a:spcPct val="110000"/>
               </a:lnSpc>
@@ -12249,7 +12078,7 @@
             <a:prstDash val="solid"/>
           </a:ln>
           <a:effectLst>
-            <a:outerShdw sx="100000" sy="100000" kx="0" ky="0" algn="bl" rotWithShape="0" blurRad="101600" dist="25400" dir="5400000">
+            <a:outerShdw blurRad="101600" dist="25400" dir="5400000" algn="bl" rotWithShape="0">
               <a:srgbClr val="000000">
                 <a:alpha val="10000"/>
               </a:srgbClr>
@@ -12278,7 +12107,7 @@
           <a:bodyPr wrap="square" lIns="0" tIns="0" rIns="0" bIns="0" rtlCol="0" anchor="t"/>
           <a:lstStyle/>
           <a:p>
-            <a:pPr indent="0" marL="0">
+            <a:pPr marL="0" indent="0">
               <a:buNone/>
             </a:pPr>
             <a:r>
@@ -12317,7 +12146,7 @@
           <a:bodyPr wrap="square" lIns="0" tIns="0" rIns="0" bIns="0" rtlCol="0" anchor="t"/>
           <a:lstStyle/>
           <a:p>
-            <a:pPr indent="0" marL="0">
+            <a:pPr marL="0" indent="0">
               <a:lnSpc>
                 <a:spcPct val="115000"/>
               </a:lnSpc>
@@ -12364,7 +12193,7 @@
             <a:prstDash val="solid"/>
           </a:ln>
           <a:effectLst>
-            <a:outerShdw sx="100000" sy="100000" kx="0" ky="0" algn="bl" rotWithShape="0" blurRad="101600" dist="25400" dir="5400000">
+            <a:outerShdw blurRad="101600" dist="25400" dir="5400000" algn="bl" rotWithShape="0">
               <a:srgbClr val="000000">
                 <a:alpha val="10000"/>
               </a:srgbClr>
@@ -12393,7 +12222,7 @@
           <a:bodyPr wrap="square" lIns="0" tIns="0" rIns="0" bIns="0" rtlCol="0" anchor="t"/>
           <a:lstStyle/>
           <a:p>
-            <a:pPr indent="0" marL="0">
+            <a:pPr marL="0" indent="0">
               <a:buNone/>
             </a:pPr>
             <a:r>
@@ -12432,7 +12261,7 @@
           <a:bodyPr wrap="square" lIns="0" tIns="0" rIns="0" bIns="0" rtlCol="0" anchor="t"/>
           <a:lstStyle/>
           <a:p>
-            <a:pPr indent="0" marL="0">
+            <a:pPr marL="0" indent="0">
               <a:lnSpc>
                 <a:spcPct val="115000"/>
               </a:lnSpc>
@@ -12501,7 +12330,7 @@
           <a:bodyPr wrap="square" lIns="0" tIns="0" rIns="0" bIns="0" rtlCol="0" anchor="ctr"/>
           <a:lstStyle/>
           <a:p>
-            <a:pPr indent="0" marL="0">
+            <a:pPr marL="0" indent="0">
               <a:buNone/>
             </a:pPr>
             <a:r>
@@ -12515,9 +12344,6 @@
               </a:rPr>
               <a:t>Kopiera k3d-install.yaml till C:\k3d</a:t>
             </a:r>
-            <a:pPr indent="0" marL="0">
-              <a:buNone/>
-            </a:pPr>
             <a:r>
               <a:rPr lang="en-US" sz="1400" dirty="0">
                 <a:solidFill>
@@ -12549,6 +12375,7 @@
         <a:solidFill>
           <a:srgbClr val="F7F7F4"/>
         </a:solidFill>
+        <a:effectLst/>
       </p:bgPr>
     </p:bg>
     <p:spTree>
@@ -12586,11 +12413,11 @@
           <a:bodyPr wrap="square" lIns="0" tIns="0" rIns="0" bIns="0" rtlCol="0" anchor="ctr"/>
           <a:lstStyle/>
           <a:p>
-            <a:pPr indent="0" marL="0">
-              <a:buNone/>
-            </a:pPr>
-            <a:r>
-              <a:rPr lang="en-US" sz="1200" b="1" spc="200" kern="0" dirty="0">
+            <a:pPr marL="0" indent="0">
+              <a:buNone/>
+            </a:pPr>
+            <a:r>
+              <a:rPr lang="en-US" sz="1200" b="1" kern="0" spc="200" dirty="0">
                 <a:solidFill>
                   <a:srgbClr val="3762FF"/>
                 </a:solidFill>
@@ -12625,7 +12452,7 @@
           <a:bodyPr wrap="square" lIns="0" tIns="0" rIns="0" bIns="0" rtlCol="0" anchor="t"/>
           <a:lstStyle/>
           <a:p>
-            <a:pPr indent="0" marL="0">
+            <a:pPr marL="0" indent="0">
               <a:buNone/>
             </a:pPr>
             <a:r>
@@ -12669,7 +12496,7 @@
             <a:prstDash val="solid"/>
           </a:ln>
           <a:effectLst>
-            <a:outerShdw sx="100000" sy="100000" kx="0" ky="0" algn="bl" rotWithShape="0" blurRad="101600" dist="25400" dir="5400000">
+            <a:outerShdw blurRad="101600" dist="25400" dir="5400000" algn="bl" rotWithShape="0">
               <a:srgbClr val="000000">
                 <a:alpha val="10000"/>
               </a:srgbClr>
@@ -12698,7 +12525,7 @@
           <a:bodyPr wrap="square" lIns="0" tIns="0" rIns="0" bIns="0" rtlCol="0" anchor="t"/>
           <a:lstStyle/>
           <a:p>
-            <a:pPr indent="0" marL="0">
+            <a:pPr marL="0" indent="0">
               <a:buNone/>
             </a:pPr>
             <a:r>
@@ -12737,7 +12564,7 @@
           <a:bodyPr wrap="square" lIns="0" tIns="0" rIns="0" bIns="0" rtlCol="0" anchor="t"/>
           <a:lstStyle/>
           <a:p>
-            <a:pPr indent="0" marL="0">
+            <a:pPr marL="0" indent="0">
               <a:lnSpc>
                 <a:spcPct val="115000"/>
               </a:lnSpc>
@@ -12784,7 +12611,7 @@
             <a:prstDash val="solid"/>
           </a:ln>
           <a:effectLst>
-            <a:outerShdw sx="100000" sy="100000" kx="0" ky="0" algn="bl" rotWithShape="0" blurRad="101600" dist="25400" dir="5400000">
+            <a:outerShdw blurRad="101600" dist="25400" dir="5400000" algn="bl" rotWithShape="0">
               <a:srgbClr val="000000">
                 <a:alpha val="10000"/>
               </a:srgbClr>
@@ -12813,7 +12640,7 @@
           <a:bodyPr wrap="square" lIns="0" tIns="0" rIns="0" bIns="0" rtlCol="0" anchor="t"/>
           <a:lstStyle/>
           <a:p>
-            <a:pPr indent="0" marL="0">
+            <a:pPr marL="0" indent="0">
               <a:buNone/>
             </a:pPr>
             <a:r>
@@ -12852,7 +12679,7 @@
           <a:bodyPr wrap="square" lIns="0" tIns="0" rIns="0" bIns="0" rtlCol="0" anchor="t"/>
           <a:lstStyle/>
           <a:p>
-            <a:pPr indent="0" marL="0">
+            <a:pPr marL="0" indent="0">
               <a:lnSpc>
                 <a:spcPct val="115000"/>
               </a:lnSpc>
@@ -12899,7 +12726,7 @@
             <a:prstDash val="solid"/>
           </a:ln>
           <a:effectLst>
-            <a:outerShdw sx="100000" sy="100000" kx="0" ky="0" algn="bl" rotWithShape="0" blurRad="101600" dist="25400" dir="5400000">
+            <a:outerShdw blurRad="101600" dist="25400" dir="5400000" algn="bl" rotWithShape="0">
               <a:srgbClr val="000000">
                 <a:alpha val="10000"/>
               </a:srgbClr>
@@ -12928,7 +12755,7 @@
           <a:bodyPr wrap="square" lIns="0" tIns="0" rIns="0" bIns="0" rtlCol="0" anchor="t"/>
           <a:lstStyle/>
           <a:p>
-            <a:pPr indent="0" marL="0">
+            <a:pPr marL="0" indent="0">
               <a:buNone/>
             </a:pPr>
             <a:r>
@@ -12967,7 +12794,7 @@
           <a:bodyPr wrap="square" lIns="0" tIns="0" rIns="0" bIns="0" rtlCol="0" anchor="t"/>
           <a:lstStyle/>
           <a:p>
-            <a:pPr indent="0" marL="0">
+            <a:pPr marL="0" indent="0">
               <a:lnSpc>
                 <a:spcPct val="115000"/>
               </a:lnSpc>
@@ -13014,7 +12841,7 @@
             <a:prstDash val="solid"/>
           </a:ln>
           <a:effectLst>
-            <a:outerShdw sx="100000" sy="100000" kx="0" ky="0" algn="bl" rotWithShape="0" blurRad="101600" dist="25400" dir="5400000">
+            <a:outerShdw blurRad="101600" dist="25400" dir="5400000" algn="bl" rotWithShape="0">
               <a:srgbClr val="000000">
                 <a:alpha val="10000"/>
               </a:srgbClr>
@@ -13043,7 +12870,7 @@
           <a:bodyPr wrap="square" lIns="0" tIns="0" rIns="0" bIns="0" rtlCol="0" anchor="t"/>
           <a:lstStyle/>
           <a:p>
-            <a:pPr indent="0" marL="0">
+            <a:pPr marL="0" indent="0">
               <a:buNone/>
             </a:pPr>
             <a:r>
@@ -13082,7 +12909,7 @@
           <a:bodyPr wrap="square" lIns="0" tIns="0" rIns="0" bIns="0" rtlCol="0" anchor="t"/>
           <a:lstStyle/>
           <a:p>
-            <a:pPr indent="0" marL="0">
+            <a:pPr marL="0" indent="0">
               <a:lnSpc>
                 <a:spcPct val="115000"/>
               </a:lnSpc>
@@ -13129,7 +12956,7 @@
             <a:prstDash val="solid"/>
           </a:ln>
           <a:effectLst>
-            <a:outerShdw sx="100000" sy="100000" kx="0" ky="0" algn="bl" rotWithShape="0" blurRad="101600" dist="25400" dir="5400000">
+            <a:outerShdw blurRad="101600" dist="25400" dir="5400000" algn="bl" rotWithShape="0">
               <a:srgbClr val="000000">
                 <a:alpha val="10000"/>
               </a:srgbClr>
@@ -13158,7 +12985,7 @@
           <a:bodyPr wrap="square" lIns="0" tIns="0" rIns="0" bIns="0" rtlCol="0" anchor="t"/>
           <a:lstStyle/>
           <a:p>
-            <a:pPr indent="0" marL="0">
+            <a:pPr marL="0" indent="0">
               <a:buNone/>
             </a:pPr>
             <a:r>
@@ -13197,7 +13024,7 @@
           <a:bodyPr wrap="square" lIns="0" tIns="0" rIns="0" bIns="0" rtlCol="0" anchor="t"/>
           <a:lstStyle/>
           <a:p>
-            <a:pPr indent="0" marL="0">
+            <a:pPr marL="0" indent="0">
               <a:lnSpc>
                 <a:spcPct val="115000"/>
               </a:lnSpc>
@@ -13244,7 +13071,7 @@
             <a:prstDash val="solid"/>
           </a:ln>
           <a:effectLst>
-            <a:outerShdw sx="100000" sy="100000" kx="0" ky="0" algn="bl" rotWithShape="0" blurRad="101600" dist="25400" dir="5400000">
+            <a:outerShdw blurRad="101600" dist="25400" dir="5400000" algn="bl" rotWithShape="0">
               <a:srgbClr val="000000">
                 <a:alpha val="10000"/>
               </a:srgbClr>
@@ -13273,7 +13100,7 @@
           <a:bodyPr wrap="square" lIns="0" tIns="0" rIns="0" bIns="0" rtlCol="0" anchor="t"/>
           <a:lstStyle/>
           <a:p>
-            <a:pPr indent="0" marL="0">
+            <a:pPr marL="0" indent="0">
               <a:buNone/>
             </a:pPr>
             <a:r>
@@ -13312,7 +13139,7 @@
           <a:bodyPr wrap="square" lIns="0" tIns="0" rIns="0" bIns="0" rtlCol="0" anchor="t"/>
           <a:lstStyle/>
           <a:p>
-            <a:pPr indent="0" marL="0">
+            <a:pPr marL="0" indent="0">
               <a:lnSpc>
                 <a:spcPct val="115000"/>
               </a:lnSpc>
@@ -13354,7 +13181,7 @@
           <a:bodyPr wrap="square" lIns="0" tIns="0" rIns="0" bIns="0" rtlCol="0" anchor="t"/>
           <a:lstStyle/>
           <a:p>
-            <a:pPr indent="0" marL="0">
+            <a:pPr marL="0" indent="0">
               <a:lnSpc>
                 <a:spcPct val="120000"/>
               </a:lnSpc>
@@ -13391,6 +13218,7 @@
         <a:solidFill>
           <a:srgbClr val="0F1F33"/>
         </a:solidFill>
+        <a:effectLst/>
       </p:bgPr>
     </p:bg>
     <p:spTree>
@@ -13428,7 +13256,7 @@
           <a:bodyPr wrap="square" lIns="0" tIns="0" rIns="0" bIns="0" rtlCol="0" anchor="ctr"/>
           <a:lstStyle/>
           <a:p>
-            <a:pPr indent="0" marL="0">
+            <a:pPr marL="0" indent="0">
               <a:buNone/>
             </a:pPr>
             <a:r>
@@ -13467,7 +13295,7 @@
           <a:bodyPr wrap="square" lIns="0" tIns="0" rIns="0" bIns="0" rtlCol="0" anchor="ctr"/>
           <a:lstStyle/>
           <a:p>
-            <a:pPr indent="0" marL="0">
+            <a:pPr marL="0" indent="0">
               <a:buNone/>
             </a:pPr>
             <a:r>
@@ -13506,7 +13334,7 @@
           <a:bodyPr wrap="square" lIns="0" tIns="0" rIns="0" bIns="0" rtlCol="0" anchor="t"/>
           <a:lstStyle/>
           <a:p>
-            <a:pPr indent="0" marL="0">
+            <a:pPr marL="0" indent="0">
               <a:lnSpc>
                 <a:spcPct val="120000"/>
               </a:lnSpc>
@@ -13543,6 +13371,7 @@
         <a:solidFill>
           <a:srgbClr val="F7F7F4"/>
         </a:solidFill>
+        <a:effectLst/>
       </p:bgPr>
     </p:bg>
     <p:spTree>
@@ -13580,11 +13409,11 @@
           <a:bodyPr wrap="square" lIns="0" tIns="0" rIns="0" bIns="0" rtlCol="0" anchor="ctr"/>
           <a:lstStyle/>
           <a:p>
-            <a:pPr indent="0" marL="0">
-              <a:buNone/>
-            </a:pPr>
-            <a:r>
-              <a:rPr lang="en-US" sz="1200" b="1" spc="200" kern="0" dirty="0">
+            <a:pPr marL="0" indent="0">
+              <a:buNone/>
+            </a:pPr>
+            <a:r>
+              <a:rPr lang="en-US" sz="1200" b="1" kern="0" spc="200" dirty="0">
                 <a:solidFill>
                   <a:srgbClr val="3762FF"/>
                 </a:solidFill>
@@ -13619,7 +13448,7 @@
           <a:bodyPr wrap="square" lIns="0" tIns="0" rIns="0" bIns="0" rtlCol="0" anchor="t"/>
           <a:lstStyle/>
           <a:p>
-            <a:pPr indent="0" marL="0">
+            <a:pPr marL="0" indent="0">
               <a:buNone/>
             </a:pPr>
             <a:r>
@@ -13663,7 +13492,7 @@
             <a:prstDash val="solid"/>
           </a:ln>
           <a:effectLst>
-            <a:outerShdw sx="100000" sy="100000" kx="0" ky="0" algn="bl" rotWithShape="0" blurRad="101600" dist="25400" dir="5400000">
+            <a:outerShdw blurRad="101600" dist="25400" dir="5400000" algn="bl" rotWithShape="0">
               <a:srgbClr val="000000">
                 <a:alpha val="10000"/>
               </a:srgbClr>
@@ -13767,7 +13596,7 @@
           <a:bodyPr wrap="square" lIns="0" tIns="0" rIns="0" bIns="0" rtlCol="0" anchor="ctr"/>
           <a:lstStyle/>
           <a:p>
-            <a:pPr indent="0" marL="0">
+            <a:pPr marL="0" indent="0">
               <a:buNone/>
             </a:pPr>
             <a:r>
@@ -13806,13 +13635,38 @@
           <a:bodyPr wrap="square" lIns="0" tIns="0" rIns="0" bIns="0" rtlCol="0" anchor="t"/>
           <a:lstStyle/>
           <a:p>
-            <a:pPr indent="0" marL="0">
+            <a:pPr marL="0" indent="0">
               <a:lnSpc>
                 <a:spcPct val="110000"/>
               </a:lnSpc>
               <a:buNone/>
             </a:pPr>
-            <a:pPr indent="0" marL="0">
+            <a:r>
+              <a:rPr lang="en-US" sz="1200" dirty="0">
+                <a:solidFill>
+                  <a:srgbClr val="7C9CFF"/>
+                </a:solidFill>
+                <a:latin typeface="Courier New" pitchFamily="34" charset="0"/>
+                <a:ea typeface="Courier New" pitchFamily="34" charset="-122"/>
+                <a:cs typeface="Courier New" pitchFamily="34" charset="-120"/>
+              </a:rPr>
+              <a:t>apiVersion:</a:t>
+            </a:r>
+            <a:r>
+              <a:rPr lang="en-US" sz="1200" dirty="0">
+                <a:solidFill>
+                  <a:srgbClr val="DDE3EA"/>
+                </a:solidFill>
+                <a:latin typeface="Courier New" pitchFamily="34" charset="0"/>
+                <a:ea typeface="Courier New" pitchFamily="34" charset="-122"/>
+                <a:cs typeface="Courier New" pitchFamily="34" charset="-120"/>
+              </a:rPr>
+              <a:t> k3d.io/v1alpha5</a:t>
+            </a:r>
+            <a:endParaRPr lang="en-US" sz="1200" dirty="0"/>
+          </a:p>
+          <a:p>
+            <a:pPr marL="0" indent="0">
               <a:lnSpc>
                 <a:spcPct val="110000"/>
               </a:lnSpc>
@@ -13827,9 +13681,23 @@
                 <a:ea typeface="Courier New" pitchFamily="34" charset="-122"/>
                 <a:cs typeface="Courier New" pitchFamily="34" charset="-120"/>
               </a:rPr>
-              <a:t>apiVersion:</a:t>
-            </a:r>
-            <a:pPr indent="0" marL="0">
+              <a:t>kind:</a:t>
+            </a:r>
+            <a:r>
+              <a:rPr lang="en-US" sz="1200" dirty="0">
+                <a:solidFill>
+                  <a:srgbClr val="DDE3EA"/>
+                </a:solidFill>
+                <a:latin typeface="Courier New" pitchFamily="34" charset="0"/>
+                <a:ea typeface="Courier New" pitchFamily="34" charset="-122"/>
+                <a:cs typeface="Courier New" pitchFamily="34" charset="-120"/>
+              </a:rPr>
+              <a:t> Simple</a:t>
+            </a:r>
+            <a:endParaRPr lang="en-US" sz="1200" dirty="0"/>
+          </a:p>
+          <a:p>
+            <a:pPr marL="0" indent="0">
               <a:lnSpc>
                 <a:spcPct val="110000"/>
               </a:lnSpc>
@@ -13838,24 +13706,71 @@
             <a:r>
               <a:rPr lang="en-US" sz="1200" dirty="0">
                 <a:solidFill>
-                  <a:srgbClr val="DDE3EA"/>
+                  <a:srgbClr val="7C9CFF"/>
                 </a:solidFill>
                 <a:latin typeface="Courier New" pitchFamily="34" charset="0"/>
                 <a:ea typeface="Courier New" pitchFamily="34" charset="-122"/>
                 <a:cs typeface="Courier New" pitchFamily="34" charset="-120"/>
               </a:rPr>
-              <a:t> k3d.io/v1alpha5</a:t>
+              <a:t>metadata:</a:t>
+            </a:r>
+            <a:r>
+              <a:rPr lang="en-US" sz="1200" dirty="0">
+                <a:solidFill>
+                  <a:srgbClr val="DDE3EA"/>
+                </a:solidFill>
+                <a:latin typeface="Courier New" pitchFamily="34" charset="0"/>
+                <a:ea typeface="Courier New" pitchFamily="34" charset="-122"/>
+                <a:cs typeface="Courier New" pitchFamily="34" charset="-120"/>
+              </a:rPr>
+              <a:t> </a:t>
             </a:r>
             <a:endParaRPr lang="en-US" sz="1200" dirty="0"/>
           </a:p>
           <a:p>
-            <a:pPr indent="0" marL="0">
+            <a:pPr marL="0" indent="0">
               <a:lnSpc>
                 <a:spcPct val="110000"/>
               </a:lnSpc>
               <a:buNone/>
             </a:pPr>
-            <a:pPr indent="0" marL="0">
+            <a:r>
+              <a:rPr lang="en-US" sz="1200" dirty="0">
+                <a:solidFill>
+                  <a:srgbClr val="DDE3EA"/>
+                </a:solidFill>
+                <a:latin typeface="Courier New" pitchFamily="34" charset="0"/>
+                <a:ea typeface="Courier New" pitchFamily="34" charset="-122"/>
+                <a:cs typeface="Courier New" pitchFamily="34" charset="-120"/>
+              </a:rPr>
+              <a:t>  </a:t>
+            </a:r>
+            <a:r>
+              <a:rPr lang="en-US" sz="1200" dirty="0">
+                <a:solidFill>
+                  <a:srgbClr val="7C9CFF"/>
+                </a:solidFill>
+                <a:latin typeface="Courier New" pitchFamily="34" charset="0"/>
+                <a:ea typeface="Courier New" pitchFamily="34" charset="-122"/>
+                <a:cs typeface="Courier New" pitchFamily="34" charset="-120"/>
+              </a:rPr>
+              <a:t>name:</a:t>
+            </a:r>
+            <a:r>
+              <a:rPr lang="en-US" sz="1200" dirty="0">
+                <a:solidFill>
+                  <a:srgbClr val="DDE3EA"/>
+                </a:solidFill>
+                <a:latin typeface="Courier New" pitchFamily="34" charset="0"/>
+                <a:ea typeface="Courier New" pitchFamily="34" charset="-122"/>
+                <a:cs typeface="Courier New" pitchFamily="34" charset="-120"/>
+              </a:rPr>
+              <a:t> home</a:t>
+            </a:r>
+            <a:endParaRPr lang="en-US" sz="1200" dirty="0"/>
+          </a:p>
+          <a:p>
+            <a:pPr marL="0" indent="0">
               <a:lnSpc>
                 <a:spcPct val="110000"/>
               </a:lnSpc>
@@ -13870,9 +13785,23 @@
                 <a:ea typeface="Courier New" pitchFamily="34" charset="-122"/>
                 <a:cs typeface="Courier New" pitchFamily="34" charset="-120"/>
               </a:rPr>
-              <a:t>kind:</a:t>
-            </a:r>
-            <a:pPr indent="0" marL="0">
+              <a:t>image:</a:t>
+            </a:r>
+            <a:r>
+              <a:rPr lang="en-US" sz="1200" dirty="0">
+                <a:solidFill>
+                  <a:srgbClr val="DDE3EA"/>
+                </a:solidFill>
+                <a:latin typeface="Courier New" pitchFamily="34" charset="0"/>
+                <a:ea typeface="Courier New" pitchFamily="34" charset="-122"/>
+                <a:cs typeface="Courier New" pitchFamily="34" charset="-120"/>
+              </a:rPr>
+              <a:t> rancher/k3s:v1.36.3-k3s1</a:t>
+            </a:r>
+            <a:endParaRPr lang="en-US" sz="1200" dirty="0"/>
+          </a:p>
+          <a:p>
+            <a:pPr marL="0" indent="0">
               <a:lnSpc>
                 <a:spcPct val="110000"/>
               </a:lnSpc>
@@ -13881,24 +13810,60 @@
             <a:r>
               <a:rPr lang="en-US" sz="1200" dirty="0">
                 <a:solidFill>
-                  <a:srgbClr val="DDE3EA"/>
+                  <a:srgbClr val="7C9CFF"/>
                 </a:solidFill>
                 <a:latin typeface="Courier New" pitchFamily="34" charset="0"/>
                 <a:ea typeface="Courier New" pitchFamily="34" charset="-122"/>
                 <a:cs typeface="Courier New" pitchFamily="34" charset="-120"/>
               </a:rPr>
-              <a:t> Simple</a:t>
+              <a:t>servers:</a:t>
+            </a:r>
+            <a:r>
+              <a:rPr lang="en-US" sz="1200" dirty="0">
+                <a:solidFill>
+                  <a:srgbClr val="DDE3EA"/>
+                </a:solidFill>
+                <a:latin typeface="Courier New" pitchFamily="34" charset="0"/>
+                <a:ea typeface="Courier New" pitchFamily="34" charset="-122"/>
+                <a:cs typeface="Courier New" pitchFamily="34" charset="-120"/>
+              </a:rPr>
+              <a:t> 1</a:t>
             </a:r>
             <a:endParaRPr lang="en-US" sz="1200" dirty="0"/>
           </a:p>
           <a:p>
-            <a:pPr indent="0" marL="0">
+            <a:pPr marL="0" indent="0">
               <a:lnSpc>
                 <a:spcPct val="110000"/>
               </a:lnSpc>
               <a:buNone/>
             </a:pPr>
-            <a:pPr indent="0" marL="0">
+            <a:r>
+              <a:rPr lang="en-US" sz="1200" dirty="0">
+                <a:solidFill>
+                  <a:srgbClr val="7C9CFF"/>
+                </a:solidFill>
+                <a:latin typeface="Courier New" pitchFamily="34" charset="0"/>
+                <a:ea typeface="Courier New" pitchFamily="34" charset="-122"/>
+                <a:cs typeface="Courier New" pitchFamily="34" charset="-120"/>
+              </a:rPr>
+              <a:t>kubeAPI:</a:t>
+            </a:r>
+            <a:r>
+              <a:rPr lang="en-US" sz="1200" dirty="0">
+                <a:solidFill>
+                  <a:srgbClr val="DDE3EA"/>
+                </a:solidFill>
+                <a:latin typeface="Courier New" pitchFamily="34" charset="0"/>
+                <a:ea typeface="Courier New" pitchFamily="34" charset="-122"/>
+                <a:cs typeface="Courier New" pitchFamily="34" charset="-120"/>
+              </a:rPr>
+              <a:t> </a:t>
+            </a:r>
+            <a:endParaRPr lang="en-US" sz="1200" dirty="0"/>
+          </a:p>
+          <a:p>
+            <a:pPr marL="0" indent="0">
               <a:lnSpc>
                 <a:spcPct val="110000"/>
               </a:lnSpc>
@@ -13907,15 +13872,40 @@
             <a:r>
               <a:rPr lang="en-US" sz="1200" dirty="0">
                 <a:solidFill>
-                  <a:srgbClr val="7C9CFF"/>
+                  <a:srgbClr val="DDE3EA"/>
                 </a:solidFill>
                 <a:latin typeface="Courier New" pitchFamily="34" charset="0"/>
                 <a:ea typeface="Courier New" pitchFamily="34" charset="-122"/>
                 <a:cs typeface="Courier New" pitchFamily="34" charset="-120"/>
               </a:rPr>
-              <a:t>metadata:</a:t>
-            </a:r>
-            <a:pPr indent="0" marL="0">
+              <a:t>  </a:t>
+            </a:r>
+            <a:r>
+              <a:rPr lang="en-US" sz="1200" dirty="0">
+                <a:solidFill>
+                  <a:srgbClr val="7C9CFF"/>
+                </a:solidFill>
+                <a:latin typeface="Courier New" pitchFamily="34" charset="0"/>
+                <a:ea typeface="Courier New" pitchFamily="34" charset="-122"/>
+                <a:cs typeface="Courier New" pitchFamily="34" charset="-120"/>
+              </a:rPr>
+              <a:t>hostIP:</a:t>
+            </a:r>
+            <a:r>
+              <a:rPr lang="en-US" sz="1200" dirty="0">
+                <a:solidFill>
+                  <a:srgbClr val="DDE3EA"/>
+                </a:solidFill>
+                <a:latin typeface="Courier New" pitchFamily="34" charset="0"/>
+                <a:ea typeface="Courier New" pitchFamily="34" charset="-122"/>
+                <a:cs typeface="Courier New" pitchFamily="34" charset="-120"/>
+              </a:rPr>
+              <a:t> "127.0.0.1"</a:t>
+            </a:r>
+            <a:endParaRPr lang="en-US" sz="1200" dirty="0"/>
+          </a:p>
+          <a:p>
+            <a:pPr marL="0" indent="0">
               <a:lnSpc>
                 <a:spcPct val="110000"/>
               </a:lnSpc>
@@ -13930,12 +13920,34 @@
                 <a:ea typeface="Courier New" pitchFamily="34" charset="-122"/>
                 <a:cs typeface="Courier New" pitchFamily="34" charset="-120"/>
               </a:rPr>
-              <a:t> </a:t>
+              <a:t>  </a:t>
+            </a:r>
+            <a:r>
+              <a:rPr lang="en-US" sz="1200" dirty="0">
+                <a:solidFill>
+                  <a:srgbClr val="7C9CFF"/>
+                </a:solidFill>
+                <a:latin typeface="Courier New" pitchFamily="34" charset="0"/>
+                <a:ea typeface="Courier New" pitchFamily="34" charset="-122"/>
+                <a:cs typeface="Courier New" pitchFamily="34" charset="-120"/>
+              </a:rPr>
+              <a:t>hostPort:</a:t>
+            </a:r>
+            <a:r>
+              <a:rPr lang="en-US" sz="1200" dirty="0">
+                <a:solidFill>
+                  <a:srgbClr val="DDE3EA"/>
+                </a:solidFill>
+                <a:latin typeface="Courier New" pitchFamily="34" charset="0"/>
+                <a:ea typeface="Courier New" pitchFamily="34" charset="-122"/>
+                <a:cs typeface="Courier New" pitchFamily="34" charset="-120"/>
+              </a:rPr>
+              <a:t> "6443"</a:t>
             </a:r>
             <a:endParaRPr lang="en-US" sz="1200" dirty="0"/>
           </a:p>
           <a:p>
-            <a:pPr indent="0" marL="0">
+            <a:pPr marL="0" indent="0">
               <a:lnSpc>
                 <a:spcPct val="110000"/>
               </a:lnSpc>
@@ -13944,15 +13956,29 @@
             <a:r>
               <a:rPr lang="en-US" sz="1200" dirty="0">
                 <a:solidFill>
-                  <a:srgbClr val="DDE3EA"/>
+                  <a:srgbClr val="7C9CFF"/>
                 </a:solidFill>
                 <a:latin typeface="Courier New" pitchFamily="34" charset="0"/>
                 <a:ea typeface="Courier New" pitchFamily="34" charset="-122"/>
                 <a:cs typeface="Courier New" pitchFamily="34" charset="-120"/>
               </a:rPr>
-              <a:t>  </a:t>
-            </a:r>
-            <a:pPr indent="0" marL="0">
+              <a:t>subnet:</a:t>
+            </a:r>
+            <a:r>
+              <a:rPr lang="en-US" sz="1200" dirty="0">
+                <a:solidFill>
+                  <a:srgbClr val="DDE3EA"/>
+                </a:solidFill>
+                <a:latin typeface="Courier New" pitchFamily="34" charset="0"/>
+                <a:ea typeface="Courier New" pitchFamily="34" charset="-122"/>
+                <a:cs typeface="Courier New" pitchFamily="34" charset="-120"/>
+              </a:rPr>
+              <a:t> "172.29.0.0/16"</a:t>
+            </a:r>
+            <a:endParaRPr lang="en-US" sz="1200" dirty="0"/>
+          </a:p>
+          <a:p>
+            <a:pPr marL="0" indent="0">
               <a:lnSpc>
                 <a:spcPct val="110000"/>
               </a:lnSpc>
@@ -13967,9 +13993,23 @@
                 <a:ea typeface="Courier New" pitchFamily="34" charset="-122"/>
                 <a:cs typeface="Courier New" pitchFamily="34" charset="-120"/>
               </a:rPr>
-              <a:t>name:</a:t>
-            </a:r>
-            <a:pPr indent="0" marL="0">
+              <a:t>volumes:</a:t>
+            </a:r>
+            <a:r>
+              <a:rPr lang="en-US" sz="1200" dirty="0">
+                <a:solidFill>
+                  <a:srgbClr val="DDE3EA"/>
+                </a:solidFill>
+                <a:latin typeface="Courier New" pitchFamily="34" charset="0"/>
+                <a:ea typeface="Courier New" pitchFamily="34" charset="-122"/>
+                <a:cs typeface="Courier New" pitchFamily="34" charset="-120"/>
+              </a:rPr>
+              <a:t> </a:t>
+            </a:r>
+            <a:endParaRPr lang="en-US" sz="1200" dirty="0"/>
+          </a:p>
+          <a:p>
+            <a:pPr marL="0" indent="0">
               <a:lnSpc>
                 <a:spcPct val="110000"/>
               </a:lnSpc>
@@ -13984,428 +14024,61 @@
                 <a:ea typeface="Courier New" pitchFamily="34" charset="-122"/>
                 <a:cs typeface="Courier New" pitchFamily="34" charset="-120"/>
               </a:rPr>
-              <a:t> home</a:t>
+              <a:t>  - </a:t>
+            </a:r>
+            <a:r>
+              <a:rPr lang="en-US" sz="1200" dirty="0">
+                <a:solidFill>
+                  <a:srgbClr val="7C9CFF"/>
+                </a:solidFill>
+                <a:latin typeface="Courier New" pitchFamily="34" charset="0"/>
+                <a:ea typeface="Courier New" pitchFamily="34" charset="-122"/>
+                <a:cs typeface="Courier New" pitchFamily="34" charset="-120"/>
+              </a:rPr>
+              <a:t>volume:</a:t>
+            </a:r>
+            <a:r>
+              <a:rPr lang="en-US" sz="1200" dirty="0">
+                <a:solidFill>
+                  <a:srgbClr val="DDE3EA"/>
+                </a:solidFill>
+                <a:latin typeface="Courier New" pitchFamily="34" charset="0"/>
+                <a:ea typeface="Courier New" pitchFamily="34" charset="-122"/>
+                <a:cs typeface="Courier New" pitchFamily="34" charset="-120"/>
+              </a:rPr>
+              <a:t> C:\data\shared\k8s:/data/shared/k8s</a:t>
             </a:r>
             <a:endParaRPr lang="en-US" sz="1200" dirty="0"/>
           </a:p>
           <a:p>
-            <a:pPr indent="0" marL="0">
+            <a:pPr marL="0" indent="0">
               <a:lnSpc>
                 <a:spcPct val="110000"/>
               </a:lnSpc>
               <a:buNone/>
             </a:pPr>
-            <a:pPr indent="0" marL="0">
-              <a:lnSpc>
-                <a:spcPct val="110000"/>
-              </a:lnSpc>
-              <a:buNone/>
-            </a:pPr>
             <a:r>
               <a:rPr lang="en-US" sz="1200" dirty="0">
                 <a:solidFill>
-                  <a:srgbClr val="7C9CFF"/>
+                  <a:srgbClr val="DDE3EA"/>
                 </a:solidFill>
                 <a:latin typeface="Courier New" pitchFamily="34" charset="0"/>
                 <a:ea typeface="Courier New" pitchFamily="34" charset="-122"/>
                 <a:cs typeface="Courier New" pitchFamily="34" charset="-120"/>
               </a:rPr>
-              <a:t>image:</a:t>
-            </a:r>
-            <a:pPr indent="0" marL="0">
-              <a:lnSpc>
-                <a:spcPct val="110000"/>
-              </a:lnSpc>
-              <a:buNone/>
-            </a:pPr>
+              <a:t>    </a:t>
+            </a:r>
             <a:r>
               <a:rPr lang="en-US" sz="1200" dirty="0">
                 <a:solidFill>
-                  <a:srgbClr val="DDE3EA"/>
+                  <a:srgbClr val="7C9CFF"/>
                 </a:solidFill>
                 <a:latin typeface="Courier New" pitchFamily="34" charset="0"/>
                 <a:ea typeface="Courier New" pitchFamily="34" charset="-122"/>
                 <a:cs typeface="Courier New" pitchFamily="34" charset="-120"/>
               </a:rPr>
-              <a:t> rancher/k3s:v1.36.3-k3s1</a:t>
-            </a:r>
-            <a:endParaRPr lang="en-US" sz="1200" dirty="0"/>
-          </a:p>
-          <a:p>
-            <a:pPr indent="0" marL="0">
-              <a:lnSpc>
-                <a:spcPct val="110000"/>
-              </a:lnSpc>
-              <a:buNone/>
-            </a:pPr>
-            <a:pPr indent="0" marL="0">
-              <a:lnSpc>
-                <a:spcPct val="110000"/>
-              </a:lnSpc>
-              <a:buNone/>
-            </a:pPr>
-            <a:r>
-              <a:rPr lang="en-US" sz="1200" dirty="0">
-                <a:solidFill>
-                  <a:srgbClr val="7C9CFF"/>
-                </a:solidFill>
-                <a:latin typeface="Courier New" pitchFamily="34" charset="0"/>
-                <a:ea typeface="Courier New" pitchFamily="34" charset="-122"/>
-                <a:cs typeface="Courier New" pitchFamily="34" charset="-120"/>
-              </a:rPr>
-              <a:t>servers:</a:t>
-            </a:r>
-            <a:pPr indent="0" marL="0">
-              <a:lnSpc>
-                <a:spcPct val="110000"/>
-              </a:lnSpc>
-              <a:buNone/>
-            </a:pPr>
-            <a:r>
-              <a:rPr lang="en-US" sz="1200" dirty="0">
-                <a:solidFill>
-                  <a:srgbClr val="DDE3EA"/>
-                </a:solidFill>
-                <a:latin typeface="Courier New" pitchFamily="34" charset="0"/>
-                <a:ea typeface="Courier New" pitchFamily="34" charset="-122"/>
-                <a:cs typeface="Courier New" pitchFamily="34" charset="-120"/>
-              </a:rPr>
-              <a:t> 1</a:t>
-            </a:r>
-            <a:endParaRPr lang="en-US" sz="1200" dirty="0"/>
-          </a:p>
-          <a:p>
-            <a:pPr indent="0" marL="0">
-              <a:lnSpc>
-                <a:spcPct val="110000"/>
-              </a:lnSpc>
-              <a:buNone/>
-            </a:pPr>
-            <a:pPr indent="0" marL="0">
-              <a:lnSpc>
-                <a:spcPct val="110000"/>
-              </a:lnSpc>
-              <a:buNone/>
-            </a:pPr>
-            <a:r>
-              <a:rPr lang="en-US" sz="1200" dirty="0">
-                <a:solidFill>
-                  <a:srgbClr val="7C9CFF"/>
-                </a:solidFill>
-                <a:latin typeface="Courier New" pitchFamily="34" charset="0"/>
-                <a:ea typeface="Courier New" pitchFamily="34" charset="-122"/>
-                <a:cs typeface="Courier New" pitchFamily="34" charset="-120"/>
-              </a:rPr>
-              <a:t>kubeAPI:</a:t>
-            </a:r>
-            <a:pPr indent="0" marL="0">
-              <a:lnSpc>
-                <a:spcPct val="110000"/>
-              </a:lnSpc>
-              <a:buNone/>
-            </a:pPr>
-            <a:r>
-              <a:rPr lang="en-US" sz="1200" dirty="0">
-                <a:solidFill>
-                  <a:srgbClr val="DDE3EA"/>
-                </a:solidFill>
-                <a:latin typeface="Courier New" pitchFamily="34" charset="0"/>
-                <a:ea typeface="Courier New" pitchFamily="34" charset="-122"/>
-                <a:cs typeface="Courier New" pitchFamily="34" charset="-120"/>
-              </a:rPr>
-              <a:t> </a:t>
-            </a:r>
-            <a:endParaRPr lang="en-US" sz="1200" dirty="0"/>
-          </a:p>
-          <a:p>
-            <a:pPr indent="0" marL="0">
-              <a:lnSpc>
-                <a:spcPct val="110000"/>
-              </a:lnSpc>
-              <a:buNone/>
-            </a:pPr>
-            <a:r>
-              <a:rPr lang="en-US" sz="1200" dirty="0">
-                <a:solidFill>
-                  <a:srgbClr val="DDE3EA"/>
-                </a:solidFill>
-                <a:latin typeface="Courier New" pitchFamily="34" charset="0"/>
-                <a:ea typeface="Courier New" pitchFamily="34" charset="-122"/>
-                <a:cs typeface="Courier New" pitchFamily="34" charset="-120"/>
-              </a:rPr>
-              <a:t>  </a:t>
-            </a:r>
-            <a:pPr indent="0" marL="0">
-              <a:lnSpc>
-                <a:spcPct val="110000"/>
-              </a:lnSpc>
-              <a:buNone/>
-            </a:pPr>
-            <a:r>
-              <a:rPr lang="en-US" sz="1200" dirty="0">
-                <a:solidFill>
-                  <a:srgbClr val="7C9CFF"/>
-                </a:solidFill>
-                <a:latin typeface="Courier New" pitchFamily="34" charset="0"/>
-                <a:ea typeface="Courier New" pitchFamily="34" charset="-122"/>
-                <a:cs typeface="Courier New" pitchFamily="34" charset="-120"/>
-              </a:rPr>
-              <a:t>hostIP:</a:t>
-            </a:r>
-            <a:pPr indent="0" marL="0">
-              <a:lnSpc>
-                <a:spcPct val="110000"/>
-              </a:lnSpc>
-              <a:buNone/>
-            </a:pPr>
-            <a:r>
-              <a:rPr lang="en-US" sz="1200" dirty="0">
-                <a:solidFill>
-                  <a:srgbClr val="DDE3EA"/>
-                </a:solidFill>
-                <a:latin typeface="Courier New" pitchFamily="34" charset="0"/>
-                <a:ea typeface="Courier New" pitchFamily="34" charset="-122"/>
-                <a:cs typeface="Courier New" pitchFamily="34" charset="-120"/>
-              </a:rPr>
-              <a:t> "127.0.0.1"</a:t>
-            </a:r>
-            <a:endParaRPr lang="en-US" sz="1200" dirty="0"/>
-          </a:p>
-          <a:p>
-            <a:pPr indent="0" marL="0">
-              <a:lnSpc>
-                <a:spcPct val="110000"/>
-              </a:lnSpc>
-              <a:buNone/>
-            </a:pPr>
-            <a:r>
-              <a:rPr lang="en-US" sz="1200" dirty="0">
-                <a:solidFill>
-                  <a:srgbClr val="DDE3EA"/>
-                </a:solidFill>
-                <a:latin typeface="Courier New" pitchFamily="34" charset="0"/>
-                <a:ea typeface="Courier New" pitchFamily="34" charset="-122"/>
-                <a:cs typeface="Courier New" pitchFamily="34" charset="-120"/>
-              </a:rPr>
-              <a:t>  </a:t>
-            </a:r>
-            <a:pPr indent="0" marL="0">
-              <a:lnSpc>
-                <a:spcPct val="110000"/>
-              </a:lnSpc>
-              <a:buNone/>
-            </a:pPr>
-            <a:r>
-              <a:rPr lang="en-US" sz="1200" dirty="0">
-                <a:solidFill>
-                  <a:srgbClr val="7C9CFF"/>
-                </a:solidFill>
-                <a:latin typeface="Courier New" pitchFamily="34" charset="0"/>
-                <a:ea typeface="Courier New" pitchFamily="34" charset="-122"/>
-                <a:cs typeface="Courier New" pitchFamily="34" charset="-120"/>
-              </a:rPr>
-              <a:t>hostPort:</a:t>
-            </a:r>
-            <a:pPr indent="0" marL="0">
-              <a:lnSpc>
-                <a:spcPct val="110000"/>
-              </a:lnSpc>
-              <a:buNone/>
-            </a:pPr>
-            <a:r>
-              <a:rPr lang="en-US" sz="1200" dirty="0">
-                <a:solidFill>
-                  <a:srgbClr val="DDE3EA"/>
-                </a:solidFill>
-                <a:latin typeface="Courier New" pitchFamily="34" charset="0"/>
-                <a:ea typeface="Courier New" pitchFamily="34" charset="-122"/>
-                <a:cs typeface="Courier New" pitchFamily="34" charset="-120"/>
-              </a:rPr>
-              <a:t> "6443"</a:t>
-            </a:r>
-            <a:endParaRPr lang="en-US" sz="1200" dirty="0"/>
-          </a:p>
-          <a:p>
-            <a:pPr indent="0" marL="0">
-              <a:lnSpc>
-                <a:spcPct val="110000"/>
-              </a:lnSpc>
-              <a:buNone/>
-            </a:pPr>
-            <a:pPr indent="0" marL="0">
-              <a:lnSpc>
-                <a:spcPct val="110000"/>
-              </a:lnSpc>
-              <a:buNone/>
-            </a:pPr>
-            <a:r>
-              <a:rPr lang="en-US" sz="1200" dirty="0">
-                <a:solidFill>
-                  <a:srgbClr val="7C9CFF"/>
-                </a:solidFill>
-                <a:latin typeface="Courier New" pitchFamily="34" charset="0"/>
-                <a:ea typeface="Courier New" pitchFamily="34" charset="-122"/>
-                <a:cs typeface="Courier New" pitchFamily="34" charset="-120"/>
-              </a:rPr>
-              <a:t>subnet:</a:t>
-            </a:r>
-            <a:pPr indent="0" marL="0">
-              <a:lnSpc>
-                <a:spcPct val="110000"/>
-              </a:lnSpc>
-              <a:buNone/>
-            </a:pPr>
-            <a:r>
-              <a:rPr lang="en-US" sz="1200" dirty="0">
-                <a:solidFill>
-                  <a:srgbClr val="DDE3EA"/>
-                </a:solidFill>
-                <a:latin typeface="Courier New" pitchFamily="34" charset="0"/>
-                <a:ea typeface="Courier New" pitchFamily="34" charset="-122"/>
-                <a:cs typeface="Courier New" pitchFamily="34" charset="-120"/>
-              </a:rPr>
-              <a:t> "172.29.0.0/16"</a:t>
-            </a:r>
-            <a:endParaRPr lang="en-US" sz="1200" dirty="0"/>
-          </a:p>
-          <a:p>
-            <a:pPr indent="0" marL="0">
-              <a:lnSpc>
-                <a:spcPct val="110000"/>
-              </a:lnSpc>
-              <a:buNone/>
-            </a:pPr>
-            <a:pPr indent="0" marL="0">
-              <a:lnSpc>
-                <a:spcPct val="110000"/>
-              </a:lnSpc>
-              <a:buNone/>
-            </a:pPr>
-            <a:r>
-              <a:rPr lang="en-US" sz="1200" dirty="0">
-                <a:solidFill>
-                  <a:srgbClr val="7C9CFF"/>
-                </a:solidFill>
-                <a:latin typeface="Courier New" pitchFamily="34" charset="0"/>
-                <a:ea typeface="Courier New" pitchFamily="34" charset="-122"/>
-                <a:cs typeface="Courier New" pitchFamily="34" charset="-120"/>
-              </a:rPr>
-              <a:t>volumes:</a:t>
-            </a:r>
-            <a:pPr indent="0" marL="0">
-              <a:lnSpc>
-                <a:spcPct val="110000"/>
-              </a:lnSpc>
-              <a:buNone/>
-            </a:pPr>
-            <a:r>
-              <a:rPr lang="en-US" sz="1200" dirty="0">
-                <a:solidFill>
-                  <a:srgbClr val="DDE3EA"/>
-                </a:solidFill>
-                <a:latin typeface="Courier New" pitchFamily="34" charset="0"/>
-                <a:ea typeface="Courier New" pitchFamily="34" charset="-122"/>
-                <a:cs typeface="Courier New" pitchFamily="34" charset="-120"/>
-              </a:rPr>
-              <a:t> </a:t>
-            </a:r>
-            <a:endParaRPr lang="en-US" sz="1200" dirty="0"/>
-          </a:p>
-          <a:p>
-            <a:pPr indent="0" marL="0">
-              <a:lnSpc>
-                <a:spcPct val="110000"/>
-              </a:lnSpc>
-              <a:buNone/>
-            </a:pPr>
-            <a:r>
-              <a:rPr lang="en-US" sz="1200" dirty="0">
-                <a:solidFill>
-                  <a:srgbClr val="DDE3EA"/>
-                </a:solidFill>
-                <a:latin typeface="Courier New" pitchFamily="34" charset="0"/>
-                <a:ea typeface="Courier New" pitchFamily="34" charset="-122"/>
-                <a:cs typeface="Courier New" pitchFamily="34" charset="-120"/>
-              </a:rPr>
-              <a:t>  - </a:t>
-            </a:r>
-            <a:pPr indent="0" marL="0">
-              <a:lnSpc>
-                <a:spcPct val="110000"/>
-              </a:lnSpc>
-              <a:buNone/>
-            </a:pPr>
-            <a:r>
-              <a:rPr lang="en-US" sz="1200" dirty="0">
-                <a:solidFill>
-                  <a:srgbClr val="7C9CFF"/>
-                </a:solidFill>
-                <a:latin typeface="Courier New" pitchFamily="34" charset="0"/>
-                <a:ea typeface="Courier New" pitchFamily="34" charset="-122"/>
-                <a:cs typeface="Courier New" pitchFamily="34" charset="-120"/>
-              </a:rPr>
-              <a:t>volume:</a:t>
-            </a:r>
-            <a:pPr indent="0" marL="0">
-              <a:lnSpc>
-                <a:spcPct val="110000"/>
-              </a:lnSpc>
-              <a:buNone/>
-            </a:pPr>
-            <a:r>
-              <a:rPr lang="en-US" sz="1200" dirty="0">
-                <a:solidFill>
-                  <a:srgbClr val="DDE3EA"/>
-                </a:solidFill>
-                <a:latin typeface="Courier New" pitchFamily="34" charset="0"/>
-                <a:ea typeface="Courier New" pitchFamily="34" charset="-122"/>
-                <a:cs typeface="Courier New" pitchFamily="34" charset="-120"/>
-              </a:rPr>
-              <a:t> C:\data\shared\k8s:/data/shared/k8s</a:t>
-            </a:r>
-            <a:endParaRPr lang="en-US" sz="1200" dirty="0"/>
-          </a:p>
-          <a:p>
-            <a:pPr indent="0" marL="0">
-              <a:lnSpc>
-                <a:spcPct val="110000"/>
-              </a:lnSpc>
-              <a:buNone/>
-            </a:pPr>
-            <a:r>
-              <a:rPr lang="en-US" sz="1200" dirty="0">
-                <a:solidFill>
-                  <a:srgbClr val="DDE3EA"/>
-                </a:solidFill>
-                <a:latin typeface="Courier New" pitchFamily="34" charset="0"/>
-                <a:ea typeface="Courier New" pitchFamily="34" charset="-122"/>
-                <a:cs typeface="Courier New" pitchFamily="34" charset="-120"/>
-              </a:rPr>
-              <a:t>    </a:t>
-            </a:r>
-            <a:pPr indent="0" marL="0">
-              <a:lnSpc>
-                <a:spcPct val="110000"/>
-              </a:lnSpc>
-              <a:buNone/>
-            </a:pPr>
-            <a:r>
-              <a:rPr lang="en-US" sz="1200" dirty="0">
-                <a:solidFill>
-                  <a:srgbClr val="7C9CFF"/>
-                </a:solidFill>
-                <a:latin typeface="Courier New" pitchFamily="34" charset="0"/>
-                <a:ea typeface="Courier New" pitchFamily="34" charset="-122"/>
-                <a:cs typeface="Courier New" pitchFamily="34" charset="-120"/>
-              </a:rPr>
               <a:t>nodeFilters:</a:t>
             </a:r>
-            <a:pPr indent="0" marL="0">
-              <a:lnSpc>
-                <a:spcPct val="110000"/>
-              </a:lnSpc>
-              <a:buNone/>
-            </a:pPr>
             <a:r>
               <a:rPr lang="en-US" sz="1200" dirty="0">
                 <a:solidFill>
@@ -14447,7 +14120,7 @@
             <a:prstDash val="solid"/>
           </a:ln>
           <a:effectLst>
-            <a:outerShdw sx="100000" sy="100000" kx="0" ky="0" algn="bl" rotWithShape="0" blurRad="101600" dist="25400" dir="5400000">
+            <a:outerShdw blurRad="101600" dist="25400" dir="5400000" algn="bl" rotWithShape="0">
               <a:srgbClr val="000000">
                 <a:alpha val="10000"/>
               </a:srgbClr>
@@ -14476,7 +14149,7 @@
           <a:bodyPr wrap="square" lIns="0" tIns="0" rIns="0" bIns="0" rtlCol="0" anchor="t"/>
           <a:lstStyle/>
           <a:p>
-            <a:pPr indent="0" marL="0">
+            <a:pPr marL="0" indent="0">
               <a:buNone/>
             </a:pPr>
             <a:r>
@@ -14515,7 +14188,7 @@
           <a:bodyPr wrap="square" lIns="0" tIns="0" rIns="0" bIns="0" rtlCol="0" anchor="ctr"/>
           <a:lstStyle/>
           <a:p>
-            <a:pPr indent="0" marL="0">
+            <a:pPr marL="0" indent="0">
               <a:buNone/>
             </a:pPr>
             <a:r>
@@ -14559,7 +14232,7 @@
             <a:prstDash val="solid"/>
           </a:ln>
           <a:effectLst>
-            <a:outerShdw sx="100000" sy="100000" kx="0" ky="0" algn="bl" rotWithShape="0" blurRad="101600" dist="25400" dir="5400000">
+            <a:outerShdw blurRad="101600" dist="25400" dir="5400000" algn="bl" rotWithShape="0">
               <a:srgbClr val="000000">
                 <a:alpha val="10000"/>
               </a:srgbClr>
@@ -14588,7 +14261,7 @@
           <a:bodyPr wrap="square" lIns="0" tIns="0" rIns="0" bIns="0" rtlCol="0" anchor="t"/>
           <a:lstStyle/>
           <a:p>
-            <a:pPr indent="0" marL="0">
+            <a:pPr marL="0" indent="0">
               <a:buNone/>
             </a:pPr>
             <a:r>
@@ -14627,7 +14300,7 @@
           <a:bodyPr wrap="square" lIns="0" tIns="0" rIns="0" bIns="0" rtlCol="0" anchor="ctr"/>
           <a:lstStyle/>
           <a:p>
-            <a:pPr indent="0" marL="0">
+            <a:pPr marL="0" indent="0">
               <a:buNone/>
             </a:pPr>
             <a:r>
@@ -14671,7 +14344,7 @@
             <a:prstDash val="solid"/>
           </a:ln>
           <a:effectLst>
-            <a:outerShdw sx="100000" sy="100000" kx="0" ky="0" algn="bl" rotWithShape="0" blurRad="101600" dist="25400" dir="5400000">
+            <a:outerShdw blurRad="101600" dist="25400" dir="5400000" algn="bl" rotWithShape="0">
               <a:srgbClr val="000000">
                 <a:alpha val="10000"/>
               </a:srgbClr>
@@ -14700,7 +14373,7 @@
           <a:bodyPr wrap="square" lIns="0" tIns="0" rIns="0" bIns="0" rtlCol="0" anchor="t"/>
           <a:lstStyle/>
           <a:p>
-            <a:pPr indent="0" marL="0">
+            <a:pPr marL="0" indent="0">
               <a:buNone/>
             </a:pPr>
             <a:r>
@@ -14739,7 +14412,7 @@
           <a:bodyPr wrap="square" lIns="0" tIns="0" rIns="0" bIns="0" rtlCol="0" anchor="ctr"/>
           <a:lstStyle/>
           <a:p>
-            <a:pPr indent="0" marL="0">
+            <a:pPr marL="0" indent="0">
               <a:buNone/>
             </a:pPr>
             <a:r>
@@ -14783,7 +14456,7 @@
             <a:prstDash val="solid"/>
           </a:ln>
           <a:effectLst>
-            <a:outerShdw sx="100000" sy="100000" kx="0" ky="0" algn="bl" rotWithShape="0" blurRad="101600" dist="25400" dir="5400000">
+            <a:outerShdw blurRad="101600" dist="25400" dir="5400000" algn="bl" rotWithShape="0">
               <a:srgbClr val="000000">
                 <a:alpha val="10000"/>
               </a:srgbClr>
@@ -14812,7 +14485,7 @@
           <a:bodyPr wrap="square" lIns="0" tIns="0" rIns="0" bIns="0" rtlCol="0" anchor="t"/>
           <a:lstStyle/>
           <a:p>
-            <a:pPr indent="0" marL="0">
+            <a:pPr marL="0" indent="0">
               <a:buNone/>
             </a:pPr>
             <a:r>
@@ -14851,7 +14524,7 @@
           <a:bodyPr wrap="square" lIns="0" tIns="0" rIns="0" bIns="0" rtlCol="0" anchor="ctr"/>
           <a:lstStyle/>
           <a:p>
-            <a:pPr indent="0" marL="0">
+            <a:pPr marL="0" indent="0">
               <a:buNone/>
             </a:pPr>
             <a:r>
@@ -14895,7 +14568,7 @@
             <a:prstDash val="solid"/>
           </a:ln>
           <a:effectLst>
-            <a:outerShdw sx="100000" sy="100000" kx="0" ky="0" algn="bl" rotWithShape="0" blurRad="101600" dist="25400" dir="5400000">
+            <a:outerShdw blurRad="101600" dist="25400" dir="5400000" algn="bl" rotWithShape="0">
               <a:srgbClr val="000000">
                 <a:alpha val="10000"/>
               </a:srgbClr>
@@ -14924,7 +14597,7 @@
           <a:bodyPr wrap="square" lIns="0" tIns="0" rIns="0" bIns="0" rtlCol="0" anchor="t"/>
           <a:lstStyle/>
           <a:p>
-            <a:pPr indent="0" marL="0">
+            <a:pPr marL="0" indent="0">
               <a:buNone/>
             </a:pPr>
             <a:r>
@@ -14963,7 +14636,7 @@
           <a:bodyPr wrap="square" lIns="0" tIns="0" rIns="0" bIns="0" rtlCol="0" anchor="ctr"/>
           <a:lstStyle/>
           <a:p>
-            <a:pPr indent="0" marL="0">
+            <a:pPr marL="0" indent="0">
               <a:buNone/>
             </a:pPr>
             <a:r>
@@ -14997,6 +14670,7 @@
         <a:solidFill>
           <a:srgbClr val="F7F7F4"/>
         </a:solidFill>
+        <a:effectLst/>
       </p:bgPr>
     </p:bg>
     <p:spTree>
@@ -15034,11 +14708,11 @@
           <a:bodyPr wrap="square" lIns="0" tIns="0" rIns="0" bIns="0" rtlCol="0" anchor="ctr"/>
           <a:lstStyle/>
           <a:p>
-            <a:pPr indent="0" marL="0">
-              <a:buNone/>
-            </a:pPr>
-            <a:r>
-              <a:rPr lang="en-US" sz="1200" b="1" spc="200" kern="0" dirty="0">
+            <a:pPr marL="0" indent="0">
+              <a:buNone/>
+            </a:pPr>
+            <a:r>
+              <a:rPr lang="en-US" sz="1200" b="1" kern="0" spc="200" dirty="0">
                 <a:solidFill>
                   <a:srgbClr val="3762FF"/>
                 </a:solidFill>
@@ -15073,7 +14747,7 @@
           <a:bodyPr wrap="square" lIns="0" tIns="0" rIns="0" bIns="0" rtlCol="0" anchor="t"/>
           <a:lstStyle/>
           <a:p>
-            <a:pPr indent="0" marL="0">
+            <a:pPr marL="0" indent="0">
               <a:buNone/>
             </a:pPr>
             <a:r>
@@ -15117,7 +14791,7 @@
             <a:prstDash val="solid"/>
           </a:ln>
           <a:effectLst>
-            <a:outerShdw sx="100000" sy="100000" kx="0" ky="0" algn="bl" rotWithShape="0" blurRad="101600" dist="25400" dir="5400000">
+            <a:outerShdw blurRad="101600" dist="25400" dir="5400000" algn="bl" rotWithShape="0">
               <a:srgbClr val="000000">
                 <a:alpha val="10000"/>
               </a:srgbClr>
@@ -15221,7 +14895,7 @@
           <a:bodyPr wrap="square" lIns="0" tIns="0" rIns="0" bIns="0" rtlCol="0" anchor="ctr"/>
           <a:lstStyle/>
           <a:p>
-            <a:pPr indent="0" marL="0">
+            <a:pPr marL="0" indent="0">
               <a:buNone/>
             </a:pPr>
             <a:r>
@@ -15260,13 +14934,38 @@
           <a:bodyPr wrap="square" lIns="0" tIns="0" rIns="0" bIns="0" rtlCol="0" anchor="t"/>
           <a:lstStyle/>
           <a:p>
-            <a:pPr indent="0" marL="0">
+            <a:pPr marL="0" indent="0">
               <a:lnSpc>
                 <a:spcPct val="110000"/>
               </a:lnSpc>
               <a:buNone/>
             </a:pPr>
-            <a:pPr indent="0" marL="0">
+            <a:r>
+              <a:rPr lang="en-US" sz="1200" dirty="0">
+                <a:solidFill>
+                  <a:srgbClr val="7C9CFF"/>
+                </a:solidFill>
+                <a:latin typeface="Courier New" pitchFamily="34" charset="0"/>
+                <a:ea typeface="Courier New" pitchFamily="34" charset="-122"/>
+                <a:cs typeface="Courier New" pitchFamily="34" charset="-120"/>
+              </a:rPr>
+              <a:t>ports:</a:t>
+            </a:r>
+            <a:r>
+              <a:rPr lang="en-US" sz="1200" dirty="0">
+                <a:solidFill>
+                  <a:srgbClr val="DDE3EA"/>
+                </a:solidFill>
+                <a:latin typeface="Courier New" pitchFamily="34" charset="0"/>
+                <a:ea typeface="Courier New" pitchFamily="34" charset="-122"/>
+                <a:cs typeface="Courier New" pitchFamily="34" charset="-120"/>
+              </a:rPr>
+              <a:t> </a:t>
+            </a:r>
+            <a:endParaRPr lang="en-US" sz="1200" dirty="0"/>
+          </a:p>
+          <a:p>
+            <a:pPr marL="0" indent="0">
               <a:lnSpc>
                 <a:spcPct val="110000"/>
               </a:lnSpc>
@@ -15275,15 +14974,40 @@
             <a:r>
               <a:rPr lang="en-US" sz="1200" dirty="0">
                 <a:solidFill>
-                  <a:srgbClr val="7C9CFF"/>
+                  <a:srgbClr val="DDE3EA"/>
                 </a:solidFill>
                 <a:latin typeface="Courier New" pitchFamily="34" charset="0"/>
                 <a:ea typeface="Courier New" pitchFamily="34" charset="-122"/>
                 <a:cs typeface="Courier New" pitchFamily="34" charset="-120"/>
               </a:rPr>
-              <a:t>ports:</a:t>
-            </a:r>
-            <a:pPr indent="0" marL="0">
+              <a:t>  - </a:t>
+            </a:r>
+            <a:r>
+              <a:rPr lang="en-US" sz="1200" dirty="0">
+                <a:solidFill>
+                  <a:srgbClr val="7C9CFF"/>
+                </a:solidFill>
+                <a:latin typeface="Courier New" pitchFamily="34" charset="0"/>
+                <a:ea typeface="Courier New" pitchFamily="34" charset="-122"/>
+                <a:cs typeface="Courier New" pitchFamily="34" charset="-120"/>
+              </a:rPr>
+              <a:t>port:</a:t>
+            </a:r>
+            <a:r>
+              <a:rPr lang="en-US" sz="1200" dirty="0">
+                <a:solidFill>
+                  <a:srgbClr val="DDE3EA"/>
+                </a:solidFill>
+                <a:latin typeface="Courier New" pitchFamily="34" charset="0"/>
+                <a:ea typeface="Courier New" pitchFamily="34" charset="-122"/>
+                <a:cs typeface="Courier New" pitchFamily="34" charset="-120"/>
+              </a:rPr>
+              <a:t> 80:80        # + 443 → loadbalancer</a:t>
+            </a:r>
+            <a:endParaRPr lang="en-US" sz="1200" dirty="0"/>
+          </a:p>
+          <a:p>
+            <a:pPr marL="0" indent="0">
               <a:lnSpc>
                 <a:spcPct val="110000"/>
               </a:lnSpc>
@@ -15298,12 +15022,34 @@
                 <a:ea typeface="Courier New" pitchFamily="34" charset="-122"/>
                 <a:cs typeface="Courier New" pitchFamily="34" charset="-120"/>
               </a:rPr>
-              <a:t> </a:t>
+              <a:t>  - </a:t>
+            </a:r>
+            <a:r>
+              <a:rPr lang="en-US" sz="1200" dirty="0">
+                <a:solidFill>
+                  <a:srgbClr val="7C9CFF"/>
+                </a:solidFill>
+                <a:latin typeface="Courier New" pitchFamily="34" charset="0"/>
+                <a:ea typeface="Courier New" pitchFamily="34" charset="-122"/>
+                <a:cs typeface="Courier New" pitchFamily="34" charset="-120"/>
+              </a:rPr>
+              <a:t>port:</a:t>
+            </a:r>
+            <a:r>
+              <a:rPr lang="en-US" sz="1200" dirty="0">
+                <a:solidFill>
+                  <a:srgbClr val="DDE3EA"/>
+                </a:solidFill>
+                <a:latin typeface="Courier New" pitchFamily="34" charset="0"/>
+                <a:ea typeface="Courier New" pitchFamily="34" charset="-122"/>
+                <a:cs typeface="Courier New" pitchFamily="34" charset="-120"/>
+              </a:rPr>
+              <a:t> 3306:3306    # + 4222, 8222, 6379</a:t>
             </a:r>
             <a:endParaRPr lang="en-US" sz="1200" dirty="0"/>
           </a:p>
           <a:p>
-            <a:pPr indent="0" marL="0">
+            <a:pPr marL="0" indent="0">
               <a:lnSpc>
                 <a:spcPct val="110000"/>
               </a:lnSpc>
@@ -15318,9 +15064,34 @@
                 <a:ea typeface="Courier New" pitchFamily="34" charset="-122"/>
                 <a:cs typeface="Courier New" pitchFamily="34" charset="-120"/>
               </a:rPr>
-              <a:t>  - </a:t>
-            </a:r>
-            <a:pPr indent="0" marL="0">
+              <a:t>    </a:t>
+            </a:r>
+            <a:r>
+              <a:rPr lang="en-US" sz="1200" dirty="0">
+                <a:solidFill>
+                  <a:srgbClr val="7C9CFF"/>
+                </a:solidFill>
+                <a:latin typeface="Courier New" pitchFamily="34" charset="0"/>
+                <a:ea typeface="Courier New" pitchFamily="34" charset="-122"/>
+                <a:cs typeface="Courier New" pitchFamily="34" charset="-120"/>
+              </a:rPr>
+              <a:t>nodeFilters:</a:t>
+            </a:r>
+            <a:r>
+              <a:rPr lang="en-US" sz="1200" dirty="0">
+                <a:solidFill>
+                  <a:srgbClr val="DDE3EA"/>
+                </a:solidFill>
+                <a:latin typeface="Courier New" pitchFamily="34" charset="0"/>
+                <a:ea typeface="Courier New" pitchFamily="34" charset="-122"/>
+                <a:cs typeface="Courier New" pitchFamily="34" charset="-120"/>
+              </a:rPr>
+              <a:t> [server:0]</a:t>
+            </a:r>
+            <a:endParaRPr lang="en-US" sz="1200" dirty="0"/>
+          </a:p>
+          <a:p>
+            <a:pPr marL="0" indent="0">
               <a:lnSpc>
                 <a:spcPct val="110000"/>
               </a:lnSpc>
@@ -15335,9 +15106,23 @@
                 <a:ea typeface="Courier New" pitchFamily="34" charset="-122"/>
                 <a:cs typeface="Courier New" pitchFamily="34" charset="-120"/>
               </a:rPr>
-              <a:t>port:</a:t>
-            </a:r>
-            <a:pPr indent="0" marL="0">
+              <a:t>registries:</a:t>
+            </a:r>
+            <a:r>
+              <a:rPr lang="en-US" sz="1200" dirty="0">
+                <a:solidFill>
+                  <a:srgbClr val="DDE3EA"/>
+                </a:solidFill>
+                <a:latin typeface="Courier New" pitchFamily="34" charset="0"/>
+                <a:ea typeface="Courier New" pitchFamily="34" charset="-122"/>
+                <a:cs typeface="Courier New" pitchFamily="34" charset="-120"/>
+              </a:rPr>
+              <a:t> </a:t>
+            </a:r>
+            <a:endParaRPr lang="en-US" sz="1200" dirty="0"/>
+          </a:p>
+          <a:p>
+            <a:pPr marL="0" indent="0">
               <a:lnSpc>
                 <a:spcPct val="110000"/>
               </a:lnSpc>
@@ -15352,12 +15137,34 @@
                 <a:ea typeface="Courier New" pitchFamily="34" charset="-122"/>
                 <a:cs typeface="Courier New" pitchFamily="34" charset="-120"/>
               </a:rPr>
-              <a:t> 80:80        # + 443 → loadbalancer</a:t>
+              <a:t>  </a:t>
+            </a:r>
+            <a:r>
+              <a:rPr lang="en-US" sz="1200" dirty="0">
+                <a:solidFill>
+                  <a:srgbClr val="7C9CFF"/>
+                </a:solidFill>
+                <a:latin typeface="Courier New" pitchFamily="34" charset="0"/>
+                <a:ea typeface="Courier New" pitchFamily="34" charset="-122"/>
+                <a:cs typeface="Courier New" pitchFamily="34" charset="-120"/>
+              </a:rPr>
+              <a:t>create:</a:t>
+            </a:r>
+            <a:r>
+              <a:rPr lang="en-US" sz="1200" dirty="0">
+                <a:solidFill>
+                  <a:srgbClr val="DDE3EA"/>
+                </a:solidFill>
+                <a:latin typeface="Courier New" pitchFamily="34" charset="0"/>
+                <a:ea typeface="Courier New" pitchFamily="34" charset="-122"/>
+                <a:cs typeface="Courier New" pitchFamily="34" charset="-120"/>
+              </a:rPr>
+              <a:t> </a:t>
             </a:r>
             <a:endParaRPr lang="en-US" sz="1200" dirty="0"/>
           </a:p>
           <a:p>
-            <a:pPr indent="0" marL="0">
+            <a:pPr marL="0" indent="0">
               <a:lnSpc>
                 <a:spcPct val="110000"/>
               </a:lnSpc>
@@ -15372,9 +15179,34 @@
                 <a:ea typeface="Courier New" pitchFamily="34" charset="-122"/>
                 <a:cs typeface="Courier New" pitchFamily="34" charset="-120"/>
               </a:rPr>
-              <a:t>  - </a:t>
-            </a:r>
-            <a:pPr indent="0" marL="0">
+              <a:t>    </a:t>
+            </a:r>
+            <a:r>
+              <a:rPr lang="en-US" sz="1200" dirty="0">
+                <a:solidFill>
+                  <a:srgbClr val="7C9CFF"/>
+                </a:solidFill>
+                <a:latin typeface="Courier New" pitchFamily="34" charset="0"/>
+                <a:ea typeface="Courier New" pitchFamily="34" charset="-122"/>
+                <a:cs typeface="Courier New" pitchFamily="34" charset="-120"/>
+              </a:rPr>
+              <a:t>name:</a:t>
+            </a:r>
+            <a:r>
+              <a:rPr lang="en-US" sz="1200" dirty="0">
+                <a:solidFill>
+                  <a:srgbClr val="DDE3EA"/>
+                </a:solidFill>
+                <a:latin typeface="Courier New" pitchFamily="34" charset="0"/>
+                <a:ea typeface="Courier New" pitchFamily="34" charset="-122"/>
+                <a:cs typeface="Courier New" pitchFamily="34" charset="-120"/>
+              </a:rPr>
+              <a:t> registry</a:t>
+            </a:r>
+            <a:endParaRPr lang="en-US" sz="1200" dirty="0"/>
+          </a:p>
+          <a:p>
+            <a:pPr marL="0" indent="0">
               <a:lnSpc>
                 <a:spcPct val="110000"/>
               </a:lnSpc>
@@ -15383,15 +15215,40 @@
             <a:r>
               <a:rPr lang="en-US" sz="1200" dirty="0">
                 <a:solidFill>
-                  <a:srgbClr val="7C9CFF"/>
+                  <a:srgbClr val="DDE3EA"/>
                 </a:solidFill>
                 <a:latin typeface="Courier New" pitchFamily="34" charset="0"/>
                 <a:ea typeface="Courier New" pitchFamily="34" charset="-122"/>
                 <a:cs typeface="Courier New" pitchFamily="34" charset="-120"/>
               </a:rPr>
-              <a:t>port:</a:t>
-            </a:r>
-            <a:pPr indent="0" marL="0">
+              <a:t>    </a:t>
+            </a:r>
+            <a:r>
+              <a:rPr lang="en-US" sz="1200" dirty="0">
+                <a:solidFill>
+                  <a:srgbClr val="7C9CFF"/>
+                </a:solidFill>
+                <a:latin typeface="Courier New" pitchFamily="34" charset="0"/>
+                <a:ea typeface="Courier New" pitchFamily="34" charset="-122"/>
+                <a:cs typeface="Courier New" pitchFamily="34" charset="-120"/>
+              </a:rPr>
+              <a:t>hostPort:</a:t>
+            </a:r>
+            <a:r>
+              <a:rPr lang="en-US" sz="1200" dirty="0">
+                <a:solidFill>
+                  <a:srgbClr val="DDE3EA"/>
+                </a:solidFill>
+                <a:latin typeface="Courier New" pitchFamily="34" charset="0"/>
+                <a:ea typeface="Courier New" pitchFamily="34" charset="-122"/>
+                <a:cs typeface="Courier New" pitchFamily="34" charset="-120"/>
+              </a:rPr>
+              <a:t> "5000"</a:t>
+            </a:r>
+            <a:endParaRPr lang="en-US" sz="1200" dirty="0"/>
+          </a:p>
+          <a:p>
+            <a:pPr marL="0" indent="0">
               <a:lnSpc>
                 <a:spcPct val="110000"/>
               </a:lnSpc>
@@ -15400,18 +15257,29 @@
             <a:r>
               <a:rPr lang="en-US" sz="1200" dirty="0">
                 <a:solidFill>
-                  <a:srgbClr val="DDE3EA"/>
+                  <a:srgbClr val="7C9CFF"/>
                 </a:solidFill>
                 <a:latin typeface="Courier New" pitchFamily="34" charset="0"/>
                 <a:ea typeface="Courier New" pitchFamily="34" charset="-122"/>
                 <a:cs typeface="Courier New" pitchFamily="34" charset="-120"/>
               </a:rPr>
-              <a:t> 3306:3306    # + 4222, 8222, 6379</a:t>
+              <a:t>options:</a:t>
+            </a:r>
+            <a:r>
+              <a:rPr lang="en-US" sz="1200" dirty="0">
+                <a:solidFill>
+                  <a:srgbClr val="DDE3EA"/>
+                </a:solidFill>
+                <a:latin typeface="Courier New" pitchFamily="34" charset="0"/>
+                <a:ea typeface="Courier New" pitchFamily="34" charset="-122"/>
+                <a:cs typeface="Courier New" pitchFamily="34" charset="-120"/>
+              </a:rPr>
+              <a:t> </a:t>
             </a:r>
             <a:endParaRPr lang="en-US" sz="1200" dirty="0"/>
           </a:p>
           <a:p>
-            <a:pPr indent="0" marL="0">
+            <a:pPr marL="0" indent="0">
               <a:lnSpc>
                 <a:spcPct val="110000"/>
               </a:lnSpc>
@@ -15426,9 +15294,34 @@
                 <a:ea typeface="Courier New" pitchFamily="34" charset="-122"/>
                 <a:cs typeface="Courier New" pitchFamily="34" charset="-120"/>
               </a:rPr>
-              <a:t>    </a:t>
-            </a:r>
-            <a:pPr indent="0" marL="0">
+              <a:t>  </a:t>
+            </a:r>
+            <a:r>
+              <a:rPr lang="en-US" sz="1200" dirty="0">
+                <a:solidFill>
+                  <a:srgbClr val="7C9CFF"/>
+                </a:solidFill>
+                <a:latin typeface="Courier New" pitchFamily="34" charset="0"/>
+                <a:ea typeface="Courier New" pitchFamily="34" charset="-122"/>
+                <a:cs typeface="Courier New" pitchFamily="34" charset="-120"/>
+              </a:rPr>
+              <a:t>k3d:</a:t>
+            </a:r>
+            <a:r>
+              <a:rPr lang="en-US" sz="1200" dirty="0">
+                <a:solidFill>
+                  <a:srgbClr val="DDE3EA"/>
+                </a:solidFill>
+                <a:latin typeface="Courier New" pitchFamily="34" charset="0"/>
+                <a:ea typeface="Courier New" pitchFamily="34" charset="-122"/>
+                <a:cs typeface="Courier New" pitchFamily="34" charset="-120"/>
+              </a:rPr>
+              <a:t> { wait: true, timeout: "60s" }</a:t>
+            </a:r>
+            <a:endParaRPr lang="en-US" sz="1200" dirty="0"/>
+          </a:p>
+          <a:p>
+            <a:pPr marL="0" indent="0">
               <a:lnSpc>
                 <a:spcPct val="110000"/>
               </a:lnSpc>
@@ -15437,15 +15330,40 @@
             <a:r>
               <a:rPr lang="en-US" sz="1200" dirty="0">
                 <a:solidFill>
-                  <a:srgbClr val="7C9CFF"/>
+                  <a:srgbClr val="DDE3EA"/>
                 </a:solidFill>
                 <a:latin typeface="Courier New" pitchFamily="34" charset="0"/>
                 <a:ea typeface="Courier New" pitchFamily="34" charset="-122"/>
                 <a:cs typeface="Courier New" pitchFamily="34" charset="-120"/>
               </a:rPr>
-              <a:t>nodeFilters:</a:t>
-            </a:r>
-            <a:pPr indent="0" marL="0">
+              <a:t>  </a:t>
+            </a:r>
+            <a:r>
+              <a:rPr lang="en-US" sz="1200" dirty="0">
+                <a:solidFill>
+                  <a:srgbClr val="7C9CFF"/>
+                </a:solidFill>
+                <a:latin typeface="Courier New" pitchFamily="34" charset="0"/>
+                <a:ea typeface="Courier New" pitchFamily="34" charset="-122"/>
+                <a:cs typeface="Courier New" pitchFamily="34" charset="-120"/>
+              </a:rPr>
+              <a:t>k3s:</a:t>
+            </a:r>
+            <a:r>
+              <a:rPr lang="en-US" sz="1200" dirty="0">
+                <a:solidFill>
+                  <a:srgbClr val="DDE3EA"/>
+                </a:solidFill>
+                <a:latin typeface="Courier New" pitchFamily="34" charset="0"/>
+                <a:ea typeface="Courier New" pitchFamily="34" charset="-122"/>
+                <a:cs typeface="Courier New" pitchFamily="34" charset="-120"/>
+              </a:rPr>
+              <a:t> </a:t>
+            </a:r>
+            <a:endParaRPr lang="en-US" sz="1200" dirty="0"/>
+          </a:p>
+          <a:p>
+            <a:pPr marL="0" indent="0">
               <a:lnSpc>
                 <a:spcPct val="110000"/>
               </a:lnSpc>
@@ -15460,18 +15378,76 @@
                 <a:ea typeface="Courier New" pitchFamily="34" charset="-122"/>
                 <a:cs typeface="Courier New" pitchFamily="34" charset="-120"/>
               </a:rPr>
-              <a:t> [server:0]</a:t>
+              <a:t>    </a:t>
+            </a:r>
+            <a:r>
+              <a:rPr lang="en-US" sz="1200" dirty="0">
+                <a:solidFill>
+                  <a:srgbClr val="7C9CFF"/>
+                </a:solidFill>
+                <a:latin typeface="Courier New" pitchFamily="34" charset="0"/>
+                <a:ea typeface="Courier New" pitchFamily="34" charset="-122"/>
+                <a:cs typeface="Courier New" pitchFamily="34" charset="-120"/>
+              </a:rPr>
+              <a:t>extraArgs:</a:t>
+            </a:r>
+            <a:r>
+              <a:rPr lang="en-US" sz="1200" dirty="0">
+                <a:solidFill>
+                  <a:srgbClr val="DDE3EA"/>
+                </a:solidFill>
+                <a:latin typeface="Courier New" pitchFamily="34" charset="0"/>
+                <a:ea typeface="Courier New" pitchFamily="34" charset="-122"/>
+                <a:cs typeface="Courier New" pitchFamily="34" charset="-120"/>
+              </a:rPr>
+              <a:t> </a:t>
             </a:r>
             <a:endParaRPr lang="en-US" sz="1200" dirty="0"/>
           </a:p>
           <a:p>
-            <a:pPr indent="0" marL="0">
+            <a:pPr marL="0" indent="0">
               <a:lnSpc>
                 <a:spcPct val="110000"/>
               </a:lnSpc>
               <a:buNone/>
             </a:pPr>
-            <a:pPr indent="0" marL="0">
+            <a:r>
+              <a:rPr lang="en-US" sz="1200" dirty="0">
+                <a:solidFill>
+                  <a:srgbClr val="DDE3EA"/>
+                </a:solidFill>
+                <a:latin typeface="Courier New" pitchFamily="34" charset="0"/>
+                <a:ea typeface="Courier New" pitchFamily="34" charset="-122"/>
+                <a:cs typeface="Courier New" pitchFamily="34" charset="-120"/>
+              </a:rPr>
+              <a:t>      - </a:t>
+            </a:r>
+            <a:r>
+              <a:rPr lang="en-US" sz="1200" dirty="0">
+                <a:solidFill>
+                  <a:srgbClr val="7C9CFF"/>
+                </a:solidFill>
+                <a:latin typeface="Courier New" pitchFamily="34" charset="0"/>
+                <a:ea typeface="Courier New" pitchFamily="34" charset="-122"/>
+                <a:cs typeface="Courier New" pitchFamily="34" charset="-120"/>
+              </a:rPr>
+              <a:t>arg:</a:t>
+            </a:r>
+            <a:r>
+              <a:rPr lang="en-US" sz="1200" dirty="0">
+                <a:solidFill>
+                  <a:srgbClr val="DDE3EA"/>
+                </a:solidFill>
+                <a:latin typeface="Courier New" pitchFamily="34" charset="0"/>
+                <a:ea typeface="Courier New" pitchFamily="34" charset="-122"/>
+                <a:cs typeface="Courier New" pitchFamily="34" charset="-120"/>
+              </a:rPr>
+              <a:t> "--default-local-storage-path=..."</a:t>
+            </a:r>
+            <a:endParaRPr lang="en-US" sz="1200" dirty="0"/>
+          </a:p>
+          <a:p>
+            <a:pPr marL="0" indent="0">
               <a:lnSpc>
                 <a:spcPct val="110000"/>
               </a:lnSpc>
@@ -15480,15 +15456,40 @@
             <a:r>
               <a:rPr lang="en-US" sz="1200" dirty="0">
                 <a:solidFill>
-                  <a:srgbClr val="7C9CFF"/>
+                  <a:srgbClr val="DDE3EA"/>
                 </a:solidFill>
                 <a:latin typeface="Courier New" pitchFamily="34" charset="0"/>
                 <a:ea typeface="Courier New" pitchFamily="34" charset="-122"/>
                 <a:cs typeface="Courier New" pitchFamily="34" charset="-120"/>
               </a:rPr>
-              <a:t>registries:</a:t>
-            </a:r>
-            <a:pPr indent="0" marL="0">
+              <a:t>  </a:t>
+            </a:r>
+            <a:r>
+              <a:rPr lang="en-US" sz="1200" dirty="0">
+                <a:solidFill>
+                  <a:srgbClr val="7C9CFF"/>
+                </a:solidFill>
+                <a:latin typeface="Courier New" pitchFamily="34" charset="0"/>
+                <a:ea typeface="Courier New" pitchFamily="34" charset="-122"/>
+                <a:cs typeface="Courier New" pitchFamily="34" charset="-120"/>
+              </a:rPr>
+              <a:t>kubeconfig:</a:t>
+            </a:r>
+            <a:r>
+              <a:rPr lang="en-US" sz="1200" dirty="0">
+                <a:solidFill>
+                  <a:srgbClr val="DDE3EA"/>
+                </a:solidFill>
+                <a:latin typeface="Courier New" pitchFamily="34" charset="0"/>
+                <a:ea typeface="Courier New" pitchFamily="34" charset="-122"/>
+                <a:cs typeface="Courier New" pitchFamily="34" charset="-120"/>
+              </a:rPr>
+              <a:t> </a:t>
+            </a:r>
+            <a:endParaRPr lang="en-US" sz="1200" dirty="0"/>
+          </a:p>
+          <a:p>
+            <a:pPr marL="0" indent="0">
               <a:lnSpc>
                 <a:spcPct val="110000"/>
               </a:lnSpc>
@@ -15503,12 +15504,34 @@
                 <a:ea typeface="Courier New" pitchFamily="34" charset="-122"/>
                 <a:cs typeface="Courier New" pitchFamily="34" charset="-120"/>
               </a:rPr>
-              <a:t> </a:t>
+              <a:t>    </a:t>
+            </a:r>
+            <a:r>
+              <a:rPr lang="en-US" sz="1200" dirty="0">
+                <a:solidFill>
+                  <a:srgbClr val="7C9CFF"/>
+                </a:solidFill>
+                <a:latin typeface="Courier New" pitchFamily="34" charset="0"/>
+                <a:ea typeface="Courier New" pitchFamily="34" charset="-122"/>
+                <a:cs typeface="Courier New" pitchFamily="34" charset="-120"/>
+              </a:rPr>
+              <a:t>updateDefaultKubeconfig:</a:t>
+            </a:r>
+            <a:r>
+              <a:rPr lang="en-US" sz="1200" dirty="0">
+                <a:solidFill>
+                  <a:srgbClr val="DDE3EA"/>
+                </a:solidFill>
+                <a:latin typeface="Courier New" pitchFamily="34" charset="0"/>
+                <a:ea typeface="Courier New" pitchFamily="34" charset="-122"/>
+                <a:cs typeface="Courier New" pitchFamily="34" charset="-120"/>
+              </a:rPr>
+              <a:t> true</a:t>
             </a:r>
             <a:endParaRPr lang="en-US" sz="1200" dirty="0"/>
           </a:p>
           <a:p>
-            <a:pPr indent="0" marL="0">
+            <a:pPr marL="0" indent="0">
               <a:lnSpc>
                 <a:spcPct val="110000"/>
               </a:lnSpc>
@@ -15523,14 +15546,8 @@
                 <a:ea typeface="Courier New" pitchFamily="34" charset="-122"/>
                 <a:cs typeface="Courier New" pitchFamily="34" charset="-120"/>
               </a:rPr>
-              <a:t>  </a:t>
-            </a:r>
-            <a:pPr indent="0" marL="0">
-              <a:lnSpc>
-                <a:spcPct val="110000"/>
-              </a:lnSpc>
-              <a:buNone/>
-            </a:pPr>
+              <a:t>    </a:t>
+            </a:r>
             <a:r>
               <a:rPr lang="en-US" sz="1200" dirty="0">
                 <a:solidFill>
@@ -15540,543 +15557,8 @@
                 <a:ea typeface="Courier New" pitchFamily="34" charset="-122"/>
                 <a:cs typeface="Courier New" pitchFamily="34" charset="-120"/>
               </a:rPr>
-              <a:t>create:</a:t>
-            </a:r>
-            <a:pPr indent="0" marL="0">
-              <a:lnSpc>
-                <a:spcPct val="110000"/>
-              </a:lnSpc>
-              <a:buNone/>
-            </a:pPr>
-            <a:r>
-              <a:rPr lang="en-US" sz="1200" dirty="0">
-                <a:solidFill>
-                  <a:srgbClr val="DDE3EA"/>
-                </a:solidFill>
-                <a:latin typeface="Courier New" pitchFamily="34" charset="0"/>
-                <a:ea typeface="Courier New" pitchFamily="34" charset="-122"/>
-                <a:cs typeface="Courier New" pitchFamily="34" charset="-120"/>
-              </a:rPr>
-              <a:t> </a:t>
-            </a:r>
-            <a:endParaRPr lang="en-US" sz="1200" dirty="0"/>
-          </a:p>
-          <a:p>
-            <a:pPr indent="0" marL="0">
-              <a:lnSpc>
-                <a:spcPct val="110000"/>
-              </a:lnSpc>
-              <a:buNone/>
-            </a:pPr>
-            <a:r>
-              <a:rPr lang="en-US" sz="1200" dirty="0">
-                <a:solidFill>
-                  <a:srgbClr val="DDE3EA"/>
-                </a:solidFill>
-                <a:latin typeface="Courier New" pitchFamily="34" charset="0"/>
-                <a:ea typeface="Courier New" pitchFamily="34" charset="-122"/>
-                <a:cs typeface="Courier New" pitchFamily="34" charset="-120"/>
-              </a:rPr>
-              <a:t>    </a:t>
-            </a:r>
-            <a:pPr indent="0" marL="0">
-              <a:lnSpc>
-                <a:spcPct val="110000"/>
-              </a:lnSpc>
-              <a:buNone/>
-            </a:pPr>
-            <a:r>
-              <a:rPr lang="en-US" sz="1200" dirty="0">
-                <a:solidFill>
-                  <a:srgbClr val="7C9CFF"/>
-                </a:solidFill>
-                <a:latin typeface="Courier New" pitchFamily="34" charset="0"/>
-                <a:ea typeface="Courier New" pitchFamily="34" charset="-122"/>
-                <a:cs typeface="Courier New" pitchFamily="34" charset="-120"/>
-              </a:rPr>
-              <a:t>name:</a:t>
-            </a:r>
-            <a:pPr indent="0" marL="0">
-              <a:lnSpc>
-                <a:spcPct val="110000"/>
-              </a:lnSpc>
-              <a:buNone/>
-            </a:pPr>
-            <a:r>
-              <a:rPr lang="en-US" sz="1200" dirty="0">
-                <a:solidFill>
-                  <a:srgbClr val="DDE3EA"/>
-                </a:solidFill>
-                <a:latin typeface="Courier New" pitchFamily="34" charset="0"/>
-                <a:ea typeface="Courier New" pitchFamily="34" charset="-122"/>
-                <a:cs typeface="Courier New" pitchFamily="34" charset="-120"/>
-              </a:rPr>
-              <a:t> registry</a:t>
-            </a:r>
-            <a:endParaRPr lang="en-US" sz="1200" dirty="0"/>
-          </a:p>
-          <a:p>
-            <a:pPr indent="0" marL="0">
-              <a:lnSpc>
-                <a:spcPct val="110000"/>
-              </a:lnSpc>
-              <a:buNone/>
-            </a:pPr>
-            <a:r>
-              <a:rPr lang="en-US" sz="1200" dirty="0">
-                <a:solidFill>
-                  <a:srgbClr val="DDE3EA"/>
-                </a:solidFill>
-                <a:latin typeface="Courier New" pitchFamily="34" charset="0"/>
-                <a:ea typeface="Courier New" pitchFamily="34" charset="-122"/>
-                <a:cs typeface="Courier New" pitchFamily="34" charset="-120"/>
-              </a:rPr>
-              <a:t>    </a:t>
-            </a:r>
-            <a:pPr indent="0" marL="0">
-              <a:lnSpc>
-                <a:spcPct val="110000"/>
-              </a:lnSpc>
-              <a:buNone/>
-            </a:pPr>
-            <a:r>
-              <a:rPr lang="en-US" sz="1200" dirty="0">
-                <a:solidFill>
-                  <a:srgbClr val="7C9CFF"/>
-                </a:solidFill>
-                <a:latin typeface="Courier New" pitchFamily="34" charset="0"/>
-                <a:ea typeface="Courier New" pitchFamily="34" charset="-122"/>
-                <a:cs typeface="Courier New" pitchFamily="34" charset="-120"/>
-              </a:rPr>
-              <a:t>hostPort:</a:t>
-            </a:r>
-            <a:pPr indent="0" marL="0">
-              <a:lnSpc>
-                <a:spcPct val="110000"/>
-              </a:lnSpc>
-              <a:buNone/>
-            </a:pPr>
-            <a:r>
-              <a:rPr lang="en-US" sz="1200" dirty="0">
-                <a:solidFill>
-                  <a:srgbClr val="DDE3EA"/>
-                </a:solidFill>
-                <a:latin typeface="Courier New" pitchFamily="34" charset="0"/>
-                <a:ea typeface="Courier New" pitchFamily="34" charset="-122"/>
-                <a:cs typeface="Courier New" pitchFamily="34" charset="-120"/>
-              </a:rPr>
-              <a:t> "5000"</a:t>
-            </a:r>
-            <a:endParaRPr lang="en-US" sz="1200" dirty="0"/>
-          </a:p>
-          <a:p>
-            <a:pPr indent="0" marL="0">
-              <a:lnSpc>
-                <a:spcPct val="110000"/>
-              </a:lnSpc>
-              <a:buNone/>
-            </a:pPr>
-            <a:pPr indent="0" marL="0">
-              <a:lnSpc>
-                <a:spcPct val="110000"/>
-              </a:lnSpc>
-              <a:buNone/>
-            </a:pPr>
-            <a:r>
-              <a:rPr lang="en-US" sz="1200" dirty="0">
-                <a:solidFill>
-                  <a:srgbClr val="7C9CFF"/>
-                </a:solidFill>
-                <a:latin typeface="Courier New" pitchFamily="34" charset="0"/>
-                <a:ea typeface="Courier New" pitchFamily="34" charset="-122"/>
-                <a:cs typeface="Courier New" pitchFamily="34" charset="-120"/>
-              </a:rPr>
-              <a:t>options:</a:t>
-            </a:r>
-            <a:pPr indent="0" marL="0">
-              <a:lnSpc>
-                <a:spcPct val="110000"/>
-              </a:lnSpc>
-              <a:buNone/>
-            </a:pPr>
-            <a:r>
-              <a:rPr lang="en-US" sz="1200" dirty="0">
-                <a:solidFill>
-                  <a:srgbClr val="DDE3EA"/>
-                </a:solidFill>
-                <a:latin typeface="Courier New" pitchFamily="34" charset="0"/>
-                <a:ea typeface="Courier New" pitchFamily="34" charset="-122"/>
-                <a:cs typeface="Courier New" pitchFamily="34" charset="-120"/>
-              </a:rPr>
-              <a:t> </a:t>
-            </a:r>
-            <a:endParaRPr lang="en-US" sz="1200" dirty="0"/>
-          </a:p>
-          <a:p>
-            <a:pPr indent="0" marL="0">
-              <a:lnSpc>
-                <a:spcPct val="110000"/>
-              </a:lnSpc>
-              <a:buNone/>
-            </a:pPr>
-            <a:r>
-              <a:rPr lang="en-US" sz="1200" dirty="0">
-                <a:solidFill>
-                  <a:srgbClr val="DDE3EA"/>
-                </a:solidFill>
-                <a:latin typeface="Courier New" pitchFamily="34" charset="0"/>
-                <a:ea typeface="Courier New" pitchFamily="34" charset="-122"/>
-                <a:cs typeface="Courier New" pitchFamily="34" charset="-120"/>
-              </a:rPr>
-              <a:t>  </a:t>
-            </a:r>
-            <a:pPr indent="0" marL="0">
-              <a:lnSpc>
-                <a:spcPct val="110000"/>
-              </a:lnSpc>
-              <a:buNone/>
-            </a:pPr>
-            <a:r>
-              <a:rPr lang="en-US" sz="1200" dirty="0">
-                <a:solidFill>
-                  <a:srgbClr val="7C9CFF"/>
-                </a:solidFill>
-                <a:latin typeface="Courier New" pitchFamily="34" charset="0"/>
-                <a:ea typeface="Courier New" pitchFamily="34" charset="-122"/>
-                <a:cs typeface="Courier New" pitchFamily="34" charset="-120"/>
-              </a:rPr>
-              <a:t>k3d:</a:t>
-            </a:r>
-            <a:pPr indent="0" marL="0">
-              <a:lnSpc>
-                <a:spcPct val="110000"/>
-              </a:lnSpc>
-              <a:buNone/>
-            </a:pPr>
-            <a:r>
-              <a:rPr lang="en-US" sz="1200" dirty="0">
-                <a:solidFill>
-                  <a:srgbClr val="DDE3EA"/>
-                </a:solidFill>
-                <a:latin typeface="Courier New" pitchFamily="34" charset="0"/>
-                <a:ea typeface="Courier New" pitchFamily="34" charset="-122"/>
-                <a:cs typeface="Courier New" pitchFamily="34" charset="-120"/>
-              </a:rPr>
-              <a:t> { wait: true, timeout: "60s" }</a:t>
-            </a:r>
-            <a:endParaRPr lang="en-US" sz="1200" dirty="0"/>
-          </a:p>
-          <a:p>
-            <a:pPr indent="0" marL="0">
-              <a:lnSpc>
-                <a:spcPct val="110000"/>
-              </a:lnSpc>
-              <a:buNone/>
-            </a:pPr>
-            <a:r>
-              <a:rPr lang="en-US" sz="1200" dirty="0">
-                <a:solidFill>
-                  <a:srgbClr val="DDE3EA"/>
-                </a:solidFill>
-                <a:latin typeface="Courier New" pitchFamily="34" charset="0"/>
-                <a:ea typeface="Courier New" pitchFamily="34" charset="-122"/>
-                <a:cs typeface="Courier New" pitchFamily="34" charset="-120"/>
-              </a:rPr>
-              <a:t>  </a:t>
-            </a:r>
-            <a:pPr indent="0" marL="0">
-              <a:lnSpc>
-                <a:spcPct val="110000"/>
-              </a:lnSpc>
-              <a:buNone/>
-            </a:pPr>
-            <a:r>
-              <a:rPr lang="en-US" sz="1200" dirty="0">
-                <a:solidFill>
-                  <a:srgbClr val="7C9CFF"/>
-                </a:solidFill>
-                <a:latin typeface="Courier New" pitchFamily="34" charset="0"/>
-                <a:ea typeface="Courier New" pitchFamily="34" charset="-122"/>
-                <a:cs typeface="Courier New" pitchFamily="34" charset="-120"/>
-              </a:rPr>
-              <a:t>k3s:</a:t>
-            </a:r>
-            <a:pPr indent="0" marL="0">
-              <a:lnSpc>
-                <a:spcPct val="110000"/>
-              </a:lnSpc>
-              <a:buNone/>
-            </a:pPr>
-            <a:r>
-              <a:rPr lang="en-US" sz="1200" dirty="0">
-                <a:solidFill>
-                  <a:srgbClr val="DDE3EA"/>
-                </a:solidFill>
-                <a:latin typeface="Courier New" pitchFamily="34" charset="0"/>
-                <a:ea typeface="Courier New" pitchFamily="34" charset="-122"/>
-                <a:cs typeface="Courier New" pitchFamily="34" charset="-120"/>
-              </a:rPr>
-              <a:t> </a:t>
-            </a:r>
-            <a:endParaRPr lang="en-US" sz="1200" dirty="0"/>
-          </a:p>
-          <a:p>
-            <a:pPr indent="0" marL="0">
-              <a:lnSpc>
-                <a:spcPct val="110000"/>
-              </a:lnSpc>
-              <a:buNone/>
-            </a:pPr>
-            <a:r>
-              <a:rPr lang="en-US" sz="1200" dirty="0">
-                <a:solidFill>
-                  <a:srgbClr val="DDE3EA"/>
-                </a:solidFill>
-                <a:latin typeface="Courier New" pitchFamily="34" charset="0"/>
-                <a:ea typeface="Courier New" pitchFamily="34" charset="-122"/>
-                <a:cs typeface="Courier New" pitchFamily="34" charset="-120"/>
-              </a:rPr>
-              <a:t>    </a:t>
-            </a:r>
-            <a:pPr indent="0" marL="0">
-              <a:lnSpc>
-                <a:spcPct val="110000"/>
-              </a:lnSpc>
-              <a:buNone/>
-            </a:pPr>
-            <a:r>
-              <a:rPr lang="en-US" sz="1200" dirty="0">
-                <a:solidFill>
-                  <a:srgbClr val="7C9CFF"/>
-                </a:solidFill>
-                <a:latin typeface="Courier New" pitchFamily="34" charset="0"/>
-                <a:ea typeface="Courier New" pitchFamily="34" charset="-122"/>
-                <a:cs typeface="Courier New" pitchFamily="34" charset="-120"/>
-              </a:rPr>
-              <a:t>extraArgs:</a:t>
-            </a:r>
-            <a:pPr indent="0" marL="0">
-              <a:lnSpc>
-                <a:spcPct val="110000"/>
-              </a:lnSpc>
-              <a:buNone/>
-            </a:pPr>
-            <a:r>
-              <a:rPr lang="en-US" sz="1200" dirty="0">
-                <a:solidFill>
-                  <a:srgbClr val="DDE3EA"/>
-                </a:solidFill>
-                <a:latin typeface="Courier New" pitchFamily="34" charset="0"/>
-                <a:ea typeface="Courier New" pitchFamily="34" charset="-122"/>
-                <a:cs typeface="Courier New" pitchFamily="34" charset="-120"/>
-              </a:rPr>
-              <a:t> </a:t>
-            </a:r>
-            <a:endParaRPr lang="en-US" sz="1200" dirty="0"/>
-          </a:p>
-          <a:p>
-            <a:pPr indent="0" marL="0">
-              <a:lnSpc>
-                <a:spcPct val="110000"/>
-              </a:lnSpc>
-              <a:buNone/>
-            </a:pPr>
-            <a:r>
-              <a:rPr lang="en-US" sz="1200" dirty="0">
-                <a:solidFill>
-                  <a:srgbClr val="DDE3EA"/>
-                </a:solidFill>
-                <a:latin typeface="Courier New" pitchFamily="34" charset="0"/>
-                <a:ea typeface="Courier New" pitchFamily="34" charset="-122"/>
-                <a:cs typeface="Courier New" pitchFamily="34" charset="-120"/>
-              </a:rPr>
-              <a:t>      - </a:t>
-            </a:r>
-            <a:pPr indent="0" marL="0">
-              <a:lnSpc>
-                <a:spcPct val="110000"/>
-              </a:lnSpc>
-              <a:buNone/>
-            </a:pPr>
-            <a:r>
-              <a:rPr lang="en-US" sz="1200" dirty="0">
-                <a:solidFill>
-                  <a:srgbClr val="7C9CFF"/>
-                </a:solidFill>
-                <a:latin typeface="Courier New" pitchFamily="34" charset="0"/>
-                <a:ea typeface="Courier New" pitchFamily="34" charset="-122"/>
-                <a:cs typeface="Courier New" pitchFamily="34" charset="-120"/>
-              </a:rPr>
-              <a:t>arg:</a:t>
-            </a:r>
-            <a:pPr indent="0" marL="0">
-              <a:lnSpc>
-                <a:spcPct val="110000"/>
-              </a:lnSpc>
-              <a:buNone/>
-            </a:pPr>
-            <a:r>
-              <a:rPr lang="en-US" sz="1200" dirty="0">
-                <a:solidFill>
-                  <a:srgbClr val="DDE3EA"/>
-                </a:solidFill>
-                <a:latin typeface="Courier New" pitchFamily="34" charset="0"/>
-                <a:ea typeface="Courier New" pitchFamily="34" charset="-122"/>
-                <a:cs typeface="Courier New" pitchFamily="34" charset="-120"/>
-              </a:rPr>
-              <a:t> "--default-local-storage-path=..."</a:t>
-            </a:r>
-            <a:endParaRPr lang="en-US" sz="1200" dirty="0"/>
-          </a:p>
-          <a:p>
-            <a:pPr indent="0" marL="0">
-              <a:lnSpc>
-                <a:spcPct val="110000"/>
-              </a:lnSpc>
-              <a:buNone/>
-            </a:pPr>
-            <a:r>
-              <a:rPr lang="en-US" sz="1200" dirty="0">
-                <a:solidFill>
-                  <a:srgbClr val="DDE3EA"/>
-                </a:solidFill>
-                <a:latin typeface="Courier New" pitchFamily="34" charset="0"/>
-                <a:ea typeface="Courier New" pitchFamily="34" charset="-122"/>
-                <a:cs typeface="Courier New" pitchFamily="34" charset="-120"/>
-              </a:rPr>
-              <a:t>  </a:t>
-            </a:r>
-            <a:pPr indent="0" marL="0">
-              <a:lnSpc>
-                <a:spcPct val="110000"/>
-              </a:lnSpc>
-              <a:buNone/>
-            </a:pPr>
-            <a:r>
-              <a:rPr lang="en-US" sz="1200" dirty="0">
-                <a:solidFill>
-                  <a:srgbClr val="7C9CFF"/>
-                </a:solidFill>
-                <a:latin typeface="Courier New" pitchFamily="34" charset="0"/>
-                <a:ea typeface="Courier New" pitchFamily="34" charset="-122"/>
-                <a:cs typeface="Courier New" pitchFamily="34" charset="-120"/>
-              </a:rPr>
-              <a:t>kubeconfig:</a:t>
-            </a:r>
-            <a:pPr indent="0" marL="0">
-              <a:lnSpc>
-                <a:spcPct val="110000"/>
-              </a:lnSpc>
-              <a:buNone/>
-            </a:pPr>
-            <a:r>
-              <a:rPr lang="en-US" sz="1200" dirty="0">
-                <a:solidFill>
-                  <a:srgbClr val="DDE3EA"/>
-                </a:solidFill>
-                <a:latin typeface="Courier New" pitchFamily="34" charset="0"/>
-                <a:ea typeface="Courier New" pitchFamily="34" charset="-122"/>
-                <a:cs typeface="Courier New" pitchFamily="34" charset="-120"/>
-              </a:rPr>
-              <a:t> </a:t>
-            </a:r>
-            <a:endParaRPr lang="en-US" sz="1200" dirty="0"/>
-          </a:p>
-          <a:p>
-            <a:pPr indent="0" marL="0">
-              <a:lnSpc>
-                <a:spcPct val="110000"/>
-              </a:lnSpc>
-              <a:buNone/>
-            </a:pPr>
-            <a:r>
-              <a:rPr lang="en-US" sz="1200" dirty="0">
-                <a:solidFill>
-                  <a:srgbClr val="DDE3EA"/>
-                </a:solidFill>
-                <a:latin typeface="Courier New" pitchFamily="34" charset="0"/>
-                <a:ea typeface="Courier New" pitchFamily="34" charset="-122"/>
-                <a:cs typeface="Courier New" pitchFamily="34" charset="-120"/>
-              </a:rPr>
-              <a:t>    </a:t>
-            </a:r>
-            <a:pPr indent="0" marL="0">
-              <a:lnSpc>
-                <a:spcPct val="110000"/>
-              </a:lnSpc>
-              <a:buNone/>
-            </a:pPr>
-            <a:r>
-              <a:rPr lang="en-US" sz="1200" dirty="0">
-                <a:solidFill>
-                  <a:srgbClr val="7C9CFF"/>
-                </a:solidFill>
-                <a:latin typeface="Courier New" pitchFamily="34" charset="0"/>
-                <a:ea typeface="Courier New" pitchFamily="34" charset="-122"/>
-                <a:cs typeface="Courier New" pitchFamily="34" charset="-120"/>
-              </a:rPr>
-              <a:t>updateDefaultKubeconfig:</a:t>
-            </a:r>
-            <a:pPr indent="0" marL="0">
-              <a:lnSpc>
-                <a:spcPct val="110000"/>
-              </a:lnSpc>
-              <a:buNone/>
-            </a:pPr>
-            <a:r>
-              <a:rPr lang="en-US" sz="1200" dirty="0">
-                <a:solidFill>
-                  <a:srgbClr val="DDE3EA"/>
-                </a:solidFill>
-                <a:latin typeface="Courier New" pitchFamily="34" charset="0"/>
-                <a:ea typeface="Courier New" pitchFamily="34" charset="-122"/>
-                <a:cs typeface="Courier New" pitchFamily="34" charset="-120"/>
-              </a:rPr>
-              <a:t> true</a:t>
-            </a:r>
-            <a:endParaRPr lang="en-US" sz="1200" dirty="0"/>
-          </a:p>
-          <a:p>
-            <a:pPr indent="0" marL="0">
-              <a:lnSpc>
-                <a:spcPct val="110000"/>
-              </a:lnSpc>
-              <a:buNone/>
-            </a:pPr>
-            <a:r>
-              <a:rPr lang="en-US" sz="1200" dirty="0">
-                <a:solidFill>
-                  <a:srgbClr val="DDE3EA"/>
-                </a:solidFill>
-                <a:latin typeface="Courier New" pitchFamily="34" charset="0"/>
-                <a:ea typeface="Courier New" pitchFamily="34" charset="-122"/>
-                <a:cs typeface="Courier New" pitchFamily="34" charset="-120"/>
-              </a:rPr>
-              <a:t>    </a:t>
-            </a:r>
-            <a:pPr indent="0" marL="0">
-              <a:lnSpc>
-                <a:spcPct val="110000"/>
-              </a:lnSpc>
-              <a:buNone/>
-            </a:pPr>
-            <a:r>
-              <a:rPr lang="en-US" sz="1200" dirty="0">
-                <a:solidFill>
-                  <a:srgbClr val="7C9CFF"/>
-                </a:solidFill>
-                <a:latin typeface="Courier New" pitchFamily="34" charset="0"/>
-                <a:ea typeface="Courier New" pitchFamily="34" charset="-122"/>
-                <a:cs typeface="Courier New" pitchFamily="34" charset="-120"/>
-              </a:rPr>
               <a:t>switchCurrentContext:</a:t>
             </a:r>
-            <a:pPr indent="0" marL="0">
-              <a:lnSpc>
-                <a:spcPct val="110000"/>
-              </a:lnSpc>
-              <a:buNone/>
-            </a:pPr>
             <a:r>
               <a:rPr lang="en-US" sz="1200" dirty="0">
                 <a:solidFill>
@@ -16118,7 +15600,7 @@
             <a:prstDash val="solid"/>
           </a:ln>
           <a:effectLst>
-            <a:outerShdw sx="100000" sy="100000" kx="0" ky="0" algn="bl" rotWithShape="0" blurRad="101600" dist="25400" dir="5400000">
+            <a:outerShdw blurRad="101600" dist="25400" dir="5400000" algn="bl" rotWithShape="0">
               <a:srgbClr val="000000">
                 <a:alpha val="10000"/>
               </a:srgbClr>
@@ -16147,7 +15629,7 @@
           <a:bodyPr wrap="square" lIns="0" tIns="0" rIns="0" bIns="0" rtlCol="0" anchor="t"/>
           <a:lstStyle/>
           <a:p>
-            <a:pPr indent="0" marL="0">
+            <a:pPr marL="0" indent="0">
               <a:buNone/>
             </a:pPr>
             <a:r>
@@ -16186,7 +15668,7 @@
           <a:bodyPr wrap="square" lIns="0" tIns="0" rIns="0" bIns="0" rtlCol="0" anchor="t"/>
           <a:lstStyle/>
           <a:p>
-            <a:pPr indent="0" marL="0">
+            <a:pPr marL="0" indent="0">
               <a:buNone/>
             </a:pPr>
             <a:r>
@@ -16230,7 +15712,7 @@
             <a:prstDash val="solid"/>
           </a:ln>
           <a:effectLst>
-            <a:outerShdw sx="100000" sy="100000" kx="0" ky="0" algn="bl" rotWithShape="0" blurRad="101600" dist="25400" dir="5400000">
+            <a:outerShdw blurRad="101600" dist="25400" dir="5400000" algn="bl" rotWithShape="0">
               <a:srgbClr val="000000">
                 <a:alpha val="10000"/>
               </a:srgbClr>
@@ -16259,7 +15741,7 @@
           <a:bodyPr wrap="square" lIns="0" tIns="0" rIns="0" bIns="0" rtlCol="0" anchor="t"/>
           <a:lstStyle/>
           <a:p>
-            <a:pPr indent="0" marL="0">
+            <a:pPr marL="0" indent="0">
               <a:buNone/>
             </a:pPr>
             <a:r>
@@ -16298,7 +15780,7 @@
           <a:bodyPr wrap="square" lIns="0" tIns="0" rIns="0" bIns="0" rtlCol="0" anchor="t"/>
           <a:lstStyle/>
           <a:p>
-            <a:pPr indent="0" marL="0">
+            <a:pPr marL="0" indent="0">
               <a:buNone/>
             </a:pPr>
             <a:r>
@@ -16342,7 +15824,7 @@
             <a:prstDash val="solid"/>
           </a:ln>
           <a:effectLst>
-            <a:outerShdw sx="100000" sy="100000" kx="0" ky="0" algn="bl" rotWithShape="0" blurRad="101600" dist="25400" dir="5400000">
+            <a:outerShdw blurRad="101600" dist="25400" dir="5400000" algn="bl" rotWithShape="0">
               <a:srgbClr val="000000">
                 <a:alpha val="10000"/>
               </a:srgbClr>
@@ -16371,7 +15853,7 @@
           <a:bodyPr wrap="square" lIns="0" tIns="0" rIns="0" bIns="0" rtlCol="0" anchor="t"/>
           <a:lstStyle/>
           <a:p>
-            <a:pPr indent="0" marL="0">
+            <a:pPr marL="0" indent="0">
               <a:buNone/>
             </a:pPr>
             <a:r>
@@ -16410,7 +15892,7 @@
           <a:bodyPr wrap="square" lIns="0" tIns="0" rIns="0" bIns="0" rtlCol="0" anchor="t"/>
           <a:lstStyle/>
           <a:p>
-            <a:pPr indent="0" marL="0">
+            <a:pPr marL="0" indent="0">
               <a:buNone/>
             </a:pPr>
             <a:r>
@@ -16476,7 +15958,7 @@
           <a:bodyPr wrap="square" lIns="0" tIns="0" rIns="0" bIns="0" rtlCol="0" anchor="t"/>
           <a:lstStyle/>
           <a:p>
-            <a:pPr indent="0" marL="0">
+            <a:pPr marL="0" indent="0">
               <a:buNone/>
             </a:pPr>
             <a:r>
@@ -16515,7 +15997,7 @@
           <a:bodyPr wrap="square" lIns="0" tIns="0" rIns="0" bIns="0" rtlCol="0" anchor="t"/>
           <a:lstStyle/>
           <a:p>
-            <a:pPr indent="0" marL="0">
+            <a:pPr marL="0" indent="0">
               <a:buNone/>
             </a:pPr>
             <a:r>
@@ -16549,6 +16031,7 @@
         <a:solidFill>
           <a:srgbClr val="0F1F33"/>
         </a:solidFill>
+        <a:effectLst/>
       </p:bgPr>
     </p:bg>
     <p:spTree>
@@ -16586,11 +16069,11 @@
           <a:bodyPr wrap="square" lIns="0" tIns="0" rIns="0" bIns="0" rtlCol="0" anchor="ctr"/>
           <a:lstStyle/>
           <a:p>
-            <a:pPr indent="0" marL="0">
-              <a:buNone/>
-            </a:pPr>
-            <a:r>
-              <a:rPr lang="en-US" sz="1200" b="1" spc="200" kern="0" dirty="0">
+            <a:pPr marL="0" indent="0">
+              <a:buNone/>
+            </a:pPr>
+            <a:r>
+              <a:rPr lang="en-US" sz="1200" b="1" kern="0" spc="200" dirty="0">
                 <a:solidFill>
                   <a:srgbClr val="7C9CFF"/>
                 </a:solidFill>
@@ -16625,7 +16108,7 @@
           <a:bodyPr wrap="square" lIns="0" tIns="0" rIns="0" bIns="0" rtlCol="0" anchor="t"/>
           <a:lstStyle/>
           <a:p>
-            <a:pPr indent="0" marL="0">
+            <a:pPr marL="0" indent="0">
               <a:buNone/>
             </a:pPr>
             <a:r>
@@ -16664,11 +16147,11 @@
           <a:bodyPr wrap="square" lIns="0" tIns="0" rIns="0" bIns="0" rtlCol="0" anchor="ctr"/>
           <a:lstStyle/>
           <a:p>
-            <a:pPr indent="0" marL="0">
-              <a:buNone/>
-            </a:pPr>
-            <a:r>
-              <a:rPr lang="en-US" sz="1100" b="1" spc="200" kern="0" dirty="0">
+            <a:pPr marL="0" indent="0">
+              <a:buNone/>
+            </a:pPr>
+            <a:r>
+              <a:rPr lang="en-US" sz="1100" b="1" kern="0" spc="200" dirty="0">
                 <a:solidFill>
                   <a:srgbClr val="7C9CFF"/>
                 </a:solidFill>
@@ -16703,11 +16186,11 @@
           <a:bodyPr wrap="square" lIns="0" tIns="0" rIns="0" bIns="0" rtlCol="0" anchor="ctr"/>
           <a:lstStyle/>
           <a:p>
-            <a:pPr indent="0" marL="0">
-              <a:buNone/>
-            </a:pPr>
-            <a:r>
-              <a:rPr lang="en-US" sz="1100" b="1" spc="200" kern="0" dirty="0">
+            <a:pPr marL="0" indent="0">
+              <a:buNone/>
+            </a:pPr>
+            <a:r>
+              <a:rPr lang="en-US" sz="1100" b="1" kern="0" spc="200" dirty="0">
                 <a:solidFill>
                   <a:srgbClr val="7C9CFF"/>
                 </a:solidFill>
@@ -16742,11 +16225,11 @@
           <a:bodyPr wrap="square" lIns="0" tIns="0" rIns="0" bIns="0" rtlCol="0" anchor="ctr"/>
           <a:lstStyle/>
           <a:p>
-            <a:pPr indent="0" marL="0">
-              <a:buNone/>
-            </a:pPr>
-            <a:r>
-              <a:rPr lang="en-US" sz="1100" b="1" spc="200" kern="0" dirty="0">
+            <a:pPr marL="0" indent="0">
+              <a:buNone/>
+            </a:pPr>
+            <a:r>
+              <a:rPr lang="en-US" sz="1100" b="1" kern="0" spc="200" dirty="0">
                 <a:solidFill>
                   <a:srgbClr val="7C9CFF"/>
                 </a:solidFill>
@@ -16808,7 +16291,7 @@
           <a:bodyPr wrap="square" lIns="0" tIns="0" rIns="0" bIns="0" rtlCol="0" anchor="ctr"/>
           <a:lstStyle/>
           <a:p>
-            <a:pPr algn="ctr" indent="0" marL="0">
+            <a:pPr marL="0" indent="0" algn="ctr">
               <a:buNone/>
             </a:pPr>
             <a:r>
@@ -16898,7 +16381,7 @@
           <a:bodyPr wrap="square" lIns="0" tIns="0" rIns="0" bIns="0" rtlCol="0" anchor="ctr"/>
           <a:lstStyle/>
           <a:p>
-            <a:pPr algn="ctr" indent="0" marL="0">
+            <a:pPr marL="0" indent="0" algn="ctr">
               <a:buNone/>
             </a:pPr>
             <a:r>
@@ -16961,7 +16444,7 @@
           <a:bodyPr wrap="square" lIns="0" tIns="0" rIns="0" bIns="0" rtlCol="0" anchor="ctr"/>
           <a:lstStyle/>
           <a:p>
-            <a:pPr indent="0" marL="0">
+            <a:pPr marL="0" indent="0">
               <a:buNone/>
             </a:pPr>
             <a:r>
@@ -17027,7 +16510,7 @@
           <a:bodyPr wrap="square" lIns="0" tIns="0" rIns="0" bIns="0" rtlCol="0" anchor="ctr"/>
           <a:lstStyle/>
           <a:p>
-            <a:pPr algn="ctr" indent="0" marL="0">
+            <a:pPr marL="0" indent="0" algn="ctr">
               <a:buNone/>
             </a:pPr>
             <a:r>
@@ -17117,7 +16600,7 @@
           <a:bodyPr wrap="square" lIns="0" tIns="0" rIns="0" bIns="0" rtlCol="0" anchor="ctr"/>
           <a:lstStyle/>
           <a:p>
-            <a:pPr algn="ctr" indent="0" marL="0">
+            <a:pPr marL="0" indent="0" algn="ctr">
               <a:buNone/>
             </a:pPr>
             <a:r>
@@ -17180,7 +16663,7 @@
           <a:bodyPr wrap="square" lIns="0" tIns="0" rIns="0" bIns="0" rtlCol="0" anchor="ctr"/>
           <a:lstStyle/>
           <a:p>
-            <a:pPr indent="0" marL="0">
+            <a:pPr marL="0" indent="0">
               <a:buNone/>
             </a:pPr>
             <a:r>
@@ -17246,7 +16729,7 @@
           <a:bodyPr wrap="square" lIns="0" tIns="0" rIns="0" bIns="0" rtlCol="0" anchor="ctr"/>
           <a:lstStyle/>
           <a:p>
-            <a:pPr algn="ctr" indent="0" marL="0">
+            <a:pPr marL="0" indent="0" algn="ctr">
               <a:buNone/>
             </a:pPr>
             <a:r>
@@ -17336,7 +16819,7 @@
           <a:bodyPr wrap="square" lIns="0" tIns="0" rIns="0" bIns="0" rtlCol="0" anchor="ctr"/>
           <a:lstStyle/>
           <a:p>
-            <a:pPr algn="ctr" indent="0" marL="0">
+            <a:pPr marL="0" indent="0" algn="ctr">
               <a:buNone/>
             </a:pPr>
             <a:r>
@@ -17399,7 +16882,7 @@
           <a:bodyPr wrap="square" lIns="0" tIns="0" rIns="0" bIns="0" rtlCol="0" anchor="ctr"/>
           <a:lstStyle/>
           <a:p>
-            <a:pPr indent="0" marL="0">
+            <a:pPr marL="0" indent="0">
               <a:buNone/>
             </a:pPr>
             <a:r>
@@ -17465,7 +16948,7 @@
           <a:bodyPr wrap="square" lIns="0" tIns="0" rIns="0" bIns="0" rtlCol="0" anchor="ctr"/>
           <a:lstStyle/>
           <a:p>
-            <a:pPr algn="ctr" indent="0" marL="0">
+            <a:pPr marL="0" indent="0" algn="ctr">
               <a:buNone/>
             </a:pPr>
             <a:r>
@@ -17555,7 +17038,7 @@
           <a:bodyPr wrap="square" lIns="0" tIns="0" rIns="0" bIns="0" rtlCol="0" anchor="ctr"/>
           <a:lstStyle/>
           <a:p>
-            <a:pPr algn="ctr" indent="0" marL="0">
+            <a:pPr marL="0" indent="0" algn="ctr">
               <a:buNone/>
             </a:pPr>
             <a:r>
@@ -17618,7 +17101,7 @@
           <a:bodyPr wrap="square" lIns="0" tIns="0" rIns="0" bIns="0" rtlCol="0" anchor="ctr"/>
           <a:lstStyle/>
           <a:p>
-            <a:pPr indent="0" marL="0">
+            <a:pPr marL="0" indent="0">
               <a:buNone/>
             </a:pPr>
             <a:r>
@@ -17652,6 +17135,7 @@
         <a:solidFill>
           <a:srgbClr val="F7F7F4"/>
         </a:solidFill>
+        <a:effectLst/>
       </p:bgPr>
     </p:bg>
     <p:spTree>
@@ -17689,11 +17173,11 @@
           <a:bodyPr wrap="square" lIns="0" tIns="0" rIns="0" bIns="0" rtlCol="0" anchor="ctr"/>
           <a:lstStyle/>
           <a:p>
-            <a:pPr indent="0" marL="0">
-              <a:buNone/>
-            </a:pPr>
-            <a:r>
-              <a:rPr lang="en-US" sz="1200" b="1" spc="200" kern="0" dirty="0">
+            <a:pPr marL="0" indent="0">
+              <a:buNone/>
+            </a:pPr>
+            <a:r>
+              <a:rPr lang="en-US" sz="1200" b="1" kern="0" spc="200" dirty="0">
                 <a:solidFill>
                   <a:srgbClr val="3762FF"/>
                 </a:solidFill>
@@ -17728,7 +17212,7 @@
           <a:bodyPr wrap="square" lIns="0" tIns="0" rIns="0" bIns="0" rtlCol="0" anchor="t"/>
           <a:lstStyle/>
           <a:p>
-            <a:pPr indent="0" marL="0">
+            <a:pPr marL="0" indent="0">
               <a:buNone/>
             </a:pPr>
             <a:r>
@@ -17772,7 +17256,7 @@
             <a:prstDash val="solid"/>
           </a:ln>
           <a:effectLst>
-            <a:outerShdw sx="100000" sy="100000" kx="0" ky="0" algn="bl" rotWithShape="0" blurRad="101600" dist="25400" dir="5400000">
+            <a:outerShdw blurRad="101600" dist="25400" dir="5400000" algn="bl" rotWithShape="0">
               <a:srgbClr val="000000">
                 <a:alpha val="10000"/>
               </a:srgbClr>
@@ -17876,7 +17360,7 @@
           <a:bodyPr wrap="square" lIns="0" tIns="0" rIns="0" bIns="0" rtlCol="0" anchor="ctr"/>
           <a:lstStyle/>
           <a:p>
-            <a:pPr indent="0" marL="0">
+            <a:pPr marL="0" indent="0">
               <a:buNone/>
             </a:pPr>
             <a:r>
@@ -17915,7 +17399,7 @@
           <a:bodyPr wrap="square" lIns="0" tIns="0" rIns="0" bIns="0" rtlCol="0" anchor="t"/>
           <a:lstStyle/>
           <a:p>
-            <a:pPr indent="0" marL="0">
+            <a:pPr marL="0" indent="0">
               <a:lnSpc>
                 <a:spcPct val="110000"/>
               </a:lnSpc>
@@ -17935,7 +17419,7 @@
             <a:endParaRPr lang="en-US" sz="1500" dirty="0"/>
           </a:p>
           <a:p>
-            <a:pPr indent="0" marL="0">
+            <a:pPr marL="0" indent="0">
               <a:lnSpc>
                 <a:spcPct val="110000"/>
               </a:lnSpc>
@@ -17982,7 +17466,7 @@
             <a:prstDash val="solid"/>
           </a:ln>
           <a:effectLst>
-            <a:outerShdw sx="100000" sy="100000" kx="0" ky="0" algn="bl" rotWithShape="0" blurRad="101600" dist="25400" dir="5400000">
+            <a:outerShdw blurRad="101600" dist="25400" dir="5400000" algn="bl" rotWithShape="0">
               <a:srgbClr val="000000">
                 <a:alpha val="10000"/>
               </a:srgbClr>
@@ -18011,7 +17495,7 @@
           <a:bodyPr wrap="square" lIns="0" tIns="0" rIns="0" bIns="0" rtlCol="0" anchor="ctr"/>
           <a:lstStyle/>
           <a:p>
-            <a:pPr algn="ctr" indent="0" marL="0">
+            <a:pPr marL="0" indent="0" algn="ctr">
               <a:buNone/>
             </a:pPr>
             <a:r>
@@ -18028,7 +17512,7 @@
             <a:endParaRPr lang="en-US" sz="1400" dirty="0"/>
           </a:p>
           <a:p>
-            <a:pPr algn="ctr" indent="0" marL="0">
+            <a:pPr marL="0" indent="0" algn="ctr">
               <a:buNone/>
             </a:pPr>
             <a:r>
@@ -18096,7 +17580,7 @@
             <a:prstDash val="solid"/>
           </a:ln>
           <a:effectLst>
-            <a:outerShdw sx="100000" sy="100000" kx="0" ky="0" algn="bl" rotWithShape="0" blurRad="101600" dist="25400" dir="5400000">
+            <a:outerShdw blurRad="101600" dist="25400" dir="5400000" algn="bl" rotWithShape="0">
               <a:srgbClr val="000000">
                 <a:alpha val="10000"/>
               </a:srgbClr>
@@ -18125,7 +17609,7 @@
           <a:bodyPr wrap="square" lIns="0" tIns="0" rIns="0" bIns="0" rtlCol="0" anchor="ctr"/>
           <a:lstStyle/>
           <a:p>
-            <a:pPr algn="ctr" indent="0" marL="0">
+            <a:pPr marL="0" indent="0" algn="ctr">
               <a:buNone/>
             </a:pPr>
             <a:r>
@@ -18142,7 +17626,7 @@
             <a:endParaRPr lang="en-US" sz="1400" dirty="0"/>
           </a:p>
           <a:p>
-            <a:pPr algn="ctr" indent="0" marL="0">
+            <a:pPr marL="0" indent="0" algn="ctr">
               <a:buNone/>
             </a:pPr>
             <a:r>
@@ -18210,7 +17694,7 @@
             <a:prstDash val="solid"/>
           </a:ln>
           <a:effectLst>
-            <a:outerShdw sx="100000" sy="100000" kx="0" ky="0" algn="bl" rotWithShape="0" blurRad="101600" dist="25400" dir="5400000">
+            <a:outerShdw blurRad="101600" dist="25400" dir="5400000" algn="bl" rotWithShape="0">
               <a:srgbClr val="000000">
                 <a:alpha val="10000"/>
               </a:srgbClr>
@@ -18239,7 +17723,7 @@
           <a:bodyPr wrap="square" lIns="0" tIns="0" rIns="0" bIns="0" rtlCol="0" anchor="ctr"/>
           <a:lstStyle/>
           <a:p>
-            <a:pPr algn="ctr" indent="0" marL="0">
+            <a:pPr marL="0" indent="0" algn="ctr">
               <a:buNone/>
             </a:pPr>
             <a:r>
@@ -18256,7 +17740,7 @@
             <a:endParaRPr lang="en-US" sz="1400" dirty="0"/>
           </a:p>
           <a:p>
-            <a:pPr algn="ctr" indent="0" marL="0">
+            <a:pPr marL="0" indent="0" algn="ctr">
               <a:buNone/>
             </a:pPr>
             <a:r>
@@ -18324,7 +17808,7 @@
             <a:prstDash val="solid"/>
           </a:ln>
           <a:effectLst>
-            <a:outerShdw sx="100000" sy="100000" kx="0" ky="0" algn="bl" rotWithShape="0" blurRad="101600" dist="25400" dir="5400000">
+            <a:outerShdw blurRad="101600" dist="25400" dir="5400000" algn="bl" rotWithShape="0">
               <a:srgbClr val="000000">
                 <a:alpha val="10000"/>
               </a:srgbClr>
@@ -18353,7 +17837,7 @@
           <a:bodyPr wrap="square" lIns="0" tIns="0" rIns="0" bIns="0" rtlCol="0" anchor="ctr"/>
           <a:lstStyle/>
           <a:p>
-            <a:pPr algn="ctr" indent="0" marL="0">
+            <a:pPr marL="0" indent="0" algn="ctr">
               <a:buNone/>
             </a:pPr>
             <a:r>
@@ -18370,7 +17854,7 @@
             <a:endParaRPr lang="en-US" sz="1400" dirty="0"/>
           </a:p>
           <a:p>
-            <a:pPr algn="ctr" indent="0" marL="0">
+            <a:pPr marL="0" indent="0" algn="ctr">
               <a:buNone/>
             </a:pPr>
             <a:r>
@@ -18460,7 +17944,7 @@
           <a:bodyPr wrap="square" lIns="0" tIns="0" rIns="0" bIns="0" rtlCol="0" anchor="ctr"/>
           <a:lstStyle/>
           <a:p>
-            <a:pPr algn="ctr" indent="0" marL="0">
+            <a:pPr marL="0" indent="0" algn="ctr">
               <a:buNone/>
             </a:pPr>
             <a:r>
@@ -18477,7 +17961,7 @@
             <a:endParaRPr lang="en-US" sz="1400" dirty="0"/>
           </a:p>
           <a:p>
-            <a:pPr algn="ctr" indent="0" marL="0">
+            <a:pPr marL="0" indent="0" algn="ctr">
               <a:buNone/>
             </a:pPr>
             <a:r>
@@ -18516,7 +18000,7 @@
           <a:bodyPr wrap="square" lIns="0" tIns="0" rIns="0" bIns="0" rtlCol="0" anchor="t"/>
           <a:lstStyle/>
           <a:p>
-            <a:pPr indent="0" marL="0">
+            <a:pPr marL="0" indent="0">
               <a:lnSpc>
                 <a:spcPct val="120000"/>
               </a:lnSpc>
@@ -18585,7 +18069,7 @@
           <a:bodyPr wrap="square" lIns="0" tIns="0" rIns="0" bIns="0" rtlCol="0" anchor="ctr"/>
           <a:lstStyle/>
           <a:p>
-            <a:pPr indent="0" marL="0">
+            <a:pPr marL="0" indent="0">
               <a:buNone/>
             </a:pPr>
             <a:r>
@@ -18599,9 +18083,6 @@
               </a:rPr>
               <a:t>Klart när: </a:t>
             </a:r>
-            <a:pPr indent="0" marL="0">
-              <a:buNone/>
-            </a:pPr>
             <a:r>
               <a:rPr lang="en-US" sz="1500" dirty="0">
                 <a:solidFill>
@@ -18633,6 +18114,7 @@
         <a:solidFill>
           <a:srgbClr val="F7F7F4"/>
         </a:solidFill>
+        <a:effectLst/>
       </p:bgPr>
     </p:bg>
     <p:spTree>
@@ -18670,11 +18152,11 @@
           <a:bodyPr wrap="square" lIns="0" tIns="0" rIns="0" bIns="0" rtlCol="0" anchor="ctr"/>
           <a:lstStyle/>
           <a:p>
-            <a:pPr indent="0" marL="0">
-              <a:buNone/>
-            </a:pPr>
-            <a:r>
-              <a:rPr lang="en-US" sz="1200" b="1" spc="200" kern="0" dirty="0">
+            <a:pPr marL="0" indent="0">
+              <a:buNone/>
+            </a:pPr>
+            <a:r>
+              <a:rPr lang="en-US" sz="1200" b="1" kern="0" spc="200" dirty="0">
                 <a:solidFill>
                   <a:srgbClr val="3762FF"/>
                 </a:solidFill>
@@ -18709,7 +18191,7 @@
           <a:bodyPr wrap="square" lIns="0" tIns="0" rIns="0" bIns="0" rtlCol="0" anchor="t"/>
           <a:lstStyle/>
           <a:p>
-            <a:pPr indent="0" marL="0">
+            <a:pPr marL="0" indent="0">
               <a:buNone/>
             </a:pPr>
             <a:r>
@@ -18753,7 +18235,7 @@
             <a:prstDash val="solid"/>
           </a:ln>
           <a:effectLst>
-            <a:outerShdw sx="100000" sy="100000" kx="0" ky="0" algn="bl" rotWithShape="0" blurRad="101600" dist="25400" dir="5400000">
+            <a:outerShdw blurRad="101600" dist="25400" dir="5400000" algn="bl" rotWithShape="0">
               <a:srgbClr val="000000">
                 <a:alpha val="10000"/>
               </a:srgbClr>
@@ -18857,7 +18339,7 @@
           <a:bodyPr wrap="square" lIns="0" tIns="0" rIns="0" bIns="0" rtlCol="0" anchor="ctr"/>
           <a:lstStyle/>
           <a:p>
-            <a:pPr indent="0" marL="0">
+            <a:pPr marL="0" indent="0">
               <a:buNone/>
             </a:pPr>
             <a:r>
@@ -18896,7 +18378,7 @@
           <a:bodyPr wrap="square" lIns="0" tIns="0" rIns="0" bIns="0" rtlCol="0" anchor="t"/>
           <a:lstStyle/>
           <a:p>
-            <a:pPr indent="0" marL="0">
+            <a:pPr marL="0" indent="0">
               <a:lnSpc>
                 <a:spcPct val="110000"/>
               </a:lnSpc>
@@ -18916,7 +18398,7 @@
             <a:endParaRPr lang="en-US" sz="1300" dirty="0"/>
           </a:p>
           <a:p>
-            <a:pPr indent="0" marL="0">
+            <a:pPr marL="0" indent="0">
               <a:lnSpc>
                 <a:spcPct val="110000"/>
               </a:lnSpc>
@@ -18936,7 +18418,7 @@
             <a:endParaRPr lang="en-US" sz="1300" dirty="0"/>
           </a:p>
           <a:p>
-            <a:pPr indent="0" marL="0">
+            <a:pPr marL="0" indent="0">
               <a:lnSpc>
                 <a:spcPct val="110000"/>
               </a:lnSpc>
@@ -18956,7 +18438,7 @@
             <a:endParaRPr lang="en-US" sz="1300" dirty="0"/>
           </a:p>
           <a:p>
-            <a:pPr indent="0" marL="0">
+            <a:pPr marL="0" indent="0">
               <a:lnSpc>
                 <a:spcPct val="110000"/>
               </a:lnSpc>
@@ -18976,7 +18458,7 @@
             <a:endParaRPr lang="en-US" sz="1300" dirty="0"/>
           </a:p>
           <a:p>
-            <a:pPr indent="0" marL="0">
+            <a:pPr marL="0" indent="0">
               <a:lnSpc>
                 <a:spcPct val="110000"/>
               </a:lnSpc>
@@ -18996,7 +18478,7 @@
             <a:endParaRPr lang="en-US" sz="1300" dirty="0"/>
           </a:p>
           <a:p>
-            <a:pPr indent="0" marL="0">
+            <a:pPr marL="0" indent="0">
               <a:lnSpc>
                 <a:spcPct val="110000"/>
               </a:lnSpc>
@@ -19016,7 +18498,7 @@
             <a:endParaRPr lang="en-US" sz="1300" dirty="0"/>
           </a:p>
           <a:p>
-            <a:pPr indent="0" marL="0">
+            <a:pPr marL="0" indent="0">
               <a:lnSpc>
                 <a:spcPct val="110000"/>
               </a:lnSpc>
@@ -19036,7 +18518,7 @@
             <a:endParaRPr lang="en-US" sz="1300" dirty="0"/>
           </a:p>
           <a:p>
-            <a:pPr indent="0" marL="0">
+            <a:pPr marL="0" indent="0">
               <a:lnSpc>
                 <a:spcPct val="110000"/>
               </a:lnSpc>
@@ -19056,7 +18538,7 @@
             <a:endParaRPr lang="en-US" sz="1300" dirty="0"/>
           </a:p>
           <a:p>
-            <a:pPr indent="0" marL="0">
+            <a:pPr marL="0" indent="0">
               <a:lnSpc>
                 <a:spcPct val="110000"/>
               </a:lnSpc>
@@ -19076,7 +18558,7 @@
             <a:endParaRPr lang="en-US" sz="1300" dirty="0"/>
           </a:p>
           <a:p>
-            <a:pPr indent="0" marL="0">
+            <a:pPr marL="0" indent="0">
               <a:lnSpc>
                 <a:spcPct val="110000"/>
               </a:lnSpc>
@@ -19096,7 +18578,7 @@
             <a:endParaRPr lang="en-US" sz="1300" dirty="0"/>
           </a:p>
           <a:p>
-            <a:pPr indent="0" marL="0">
+            <a:pPr marL="0" indent="0">
               <a:lnSpc>
                 <a:spcPct val="110000"/>
               </a:lnSpc>
@@ -19116,7 +18598,7 @@
             <a:endParaRPr lang="en-US" sz="1300" dirty="0"/>
           </a:p>
           <a:p>
-            <a:pPr indent="0" marL="0">
+            <a:pPr marL="0" indent="0">
               <a:lnSpc>
                 <a:spcPct val="110000"/>
               </a:lnSpc>
@@ -19136,7 +18618,7 @@
             <a:endParaRPr lang="en-US" sz="1300" dirty="0"/>
           </a:p>
           <a:p>
-            <a:pPr indent="0" marL="0">
+            <a:pPr marL="0" indent="0">
               <a:lnSpc>
                 <a:spcPct val="110000"/>
               </a:lnSpc>
@@ -19173,6 +18655,7 @@
         <a:solidFill>
           <a:srgbClr val="0F1F33"/>
         </a:solidFill>
+        <a:effectLst/>
       </p:bgPr>
     </p:bg>
     <p:spTree>
@@ -19210,7 +18693,7 @@
           <a:bodyPr wrap="square" lIns="0" tIns="0" rIns="0" bIns="0" rtlCol="0" anchor="ctr"/>
           <a:lstStyle/>
           <a:p>
-            <a:pPr indent="0" marL="0">
+            <a:pPr marL="0" indent="0">
               <a:buNone/>
             </a:pPr>
             <a:r>
@@ -19249,7 +18732,7 @@
           <a:bodyPr wrap="square" lIns="0" tIns="0" rIns="0" bIns="0" rtlCol="0" anchor="ctr"/>
           <a:lstStyle/>
           <a:p>
-            <a:pPr indent="0" marL="0">
+            <a:pPr marL="0" indent="0">
               <a:buNone/>
             </a:pPr>
             <a:r>
@@ -19288,7 +18771,7 @@
           <a:bodyPr wrap="square" lIns="0" tIns="0" rIns="0" bIns="0" rtlCol="0" anchor="t"/>
           <a:lstStyle/>
           <a:p>
-            <a:pPr indent="0" marL="0">
+            <a:pPr marL="0" indent="0">
               <a:lnSpc>
                 <a:spcPct val="120000"/>
               </a:lnSpc>
@@ -19325,6 +18808,7 @@
         <a:solidFill>
           <a:srgbClr val="0F1F33"/>
         </a:solidFill>
+        <a:effectLst/>
       </p:bgPr>
     </p:bg>
     <p:spTree>
@@ -19362,11 +18846,11 @@
           <a:bodyPr wrap="square" lIns="0" tIns="0" rIns="0" bIns="0" rtlCol="0" anchor="ctr"/>
           <a:lstStyle/>
           <a:p>
-            <a:pPr indent="0" marL="0">
-              <a:buNone/>
-            </a:pPr>
-            <a:r>
-              <a:rPr lang="en-US" sz="1200" b="1" spc="200" kern="0" dirty="0">
+            <a:pPr marL="0" indent="0">
+              <a:buNone/>
+            </a:pPr>
+            <a:r>
+              <a:rPr lang="en-US" sz="1200" b="1" kern="0" spc="200" dirty="0">
                 <a:solidFill>
                   <a:srgbClr val="7C9CFF"/>
                 </a:solidFill>
@@ -19401,7 +18885,7 @@
           <a:bodyPr wrap="square" lIns="0" tIns="0" rIns="0" bIns="0" rtlCol="0" anchor="t"/>
           <a:lstStyle/>
           <a:p>
-            <a:pPr indent="0" marL="0">
+            <a:pPr marL="0" indent="0">
               <a:buNone/>
             </a:pPr>
             <a:r>
@@ -19542,7 +19026,7 @@
           <a:bodyPr wrap="square" lIns="0" tIns="0" rIns="0" bIns="0" rtlCol="0" anchor="ctr"/>
           <a:lstStyle/>
           <a:p>
-            <a:pPr indent="0" marL="0">
+            <a:pPr marL="0" indent="0">
               <a:buNone/>
             </a:pPr>
             <a:r>
@@ -19581,7 +19065,7 @@
           <a:bodyPr wrap="square" lIns="0" tIns="0" rIns="0" bIns="0" rtlCol="0" anchor="t"/>
           <a:lstStyle/>
           <a:p>
-            <a:pPr indent="0" marL="0">
+            <a:pPr marL="0" indent="0">
               <a:lnSpc>
                 <a:spcPct val="110000"/>
               </a:lnSpc>
@@ -19650,11 +19134,11 @@
           <a:bodyPr wrap="square" lIns="0" tIns="0" rIns="0" bIns="0" rtlCol="0" anchor="ctr"/>
           <a:lstStyle/>
           <a:p>
-            <a:pPr indent="0" marL="0">
-              <a:buNone/>
-            </a:pPr>
-            <a:r>
-              <a:rPr lang="en-US" sz="1100" b="1" spc="200" kern="0" dirty="0">
+            <a:pPr marL="0" indent="0">
+              <a:buNone/>
+            </a:pPr>
+            <a:r>
+              <a:rPr lang="en-US" sz="1100" b="1" kern="0" spc="200" dirty="0">
                 <a:solidFill>
                   <a:srgbClr val="7C9CFF"/>
                 </a:solidFill>
@@ -19689,7 +19173,7 @@
           <a:bodyPr wrap="square" lIns="0" tIns="0" rIns="0" bIns="0" rtlCol="0" anchor="t"/>
           <a:lstStyle/>
           <a:p>
-            <a:pPr indent="0" marL="0">
+            <a:pPr marL="0" indent="0">
               <a:buNone/>
             </a:pPr>
             <a:r>
@@ -19728,7 +19212,7 @@
           <a:bodyPr wrap="square" lIns="0" tIns="0" rIns="0" bIns="0" rtlCol="0" anchor="t"/>
           <a:lstStyle/>
           <a:p>
-            <a:pPr indent="0" marL="0">
+            <a:pPr marL="0" indent="0">
               <a:lnSpc>
                 <a:spcPct val="115000"/>
               </a:lnSpc>
@@ -19797,11 +19281,11 @@
           <a:bodyPr wrap="square" lIns="0" tIns="0" rIns="0" bIns="0" rtlCol="0" anchor="ctr"/>
           <a:lstStyle/>
           <a:p>
-            <a:pPr indent="0" marL="0">
-              <a:buNone/>
-            </a:pPr>
-            <a:r>
-              <a:rPr lang="en-US" sz="1100" b="1" spc="200" kern="0" dirty="0">
+            <a:pPr marL="0" indent="0">
+              <a:buNone/>
+            </a:pPr>
+            <a:r>
+              <a:rPr lang="en-US" sz="1100" b="1" kern="0" spc="200" dirty="0">
                 <a:solidFill>
                   <a:srgbClr val="7C9CFF"/>
                 </a:solidFill>
@@ -19836,7 +19320,7 @@
           <a:bodyPr wrap="square" lIns="0" tIns="0" rIns="0" bIns="0" rtlCol="0" anchor="t"/>
           <a:lstStyle/>
           <a:p>
-            <a:pPr indent="0" marL="0">
+            <a:pPr marL="0" indent="0">
               <a:buNone/>
             </a:pPr>
             <a:r>
@@ -19875,7 +19359,7 @@
           <a:bodyPr wrap="square" lIns="0" tIns="0" rIns="0" bIns="0" rtlCol="0" anchor="t"/>
           <a:lstStyle/>
           <a:p>
-            <a:pPr indent="0" marL="0">
+            <a:pPr marL="0" indent="0">
               <a:lnSpc>
                 <a:spcPct val="115000"/>
               </a:lnSpc>
@@ -19944,11 +19428,11 @@
           <a:bodyPr wrap="square" lIns="0" tIns="0" rIns="0" bIns="0" rtlCol="0" anchor="ctr"/>
           <a:lstStyle/>
           <a:p>
-            <a:pPr indent="0" marL="0">
-              <a:buNone/>
-            </a:pPr>
-            <a:r>
-              <a:rPr lang="en-US" sz="1100" b="1" spc="200" kern="0" dirty="0">
+            <a:pPr marL="0" indent="0">
+              <a:buNone/>
+            </a:pPr>
+            <a:r>
+              <a:rPr lang="en-US" sz="1100" b="1" kern="0" spc="200" dirty="0">
                 <a:solidFill>
                   <a:srgbClr val="7C9CFF"/>
                 </a:solidFill>
@@ -19983,7 +19467,7 @@
           <a:bodyPr wrap="square" lIns="0" tIns="0" rIns="0" bIns="0" rtlCol="0" anchor="t"/>
           <a:lstStyle/>
           <a:p>
-            <a:pPr indent="0" marL="0">
+            <a:pPr marL="0" indent="0">
               <a:buNone/>
             </a:pPr>
             <a:r>
@@ -20022,7 +19506,7 @@
           <a:bodyPr wrap="square" lIns="0" tIns="0" rIns="0" bIns="0" rtlCol="0" anchor="t"/>
           <a:lstStyle/>
           <a:p>
-            <a:pPr indent="0" marL="0">
+            <a:pPr marL="0" indent="0">
               <a:lnSpc>
                 <a:spcPct val="115000"/>
               </a:lnSpc>
@@ -20091,11 +19575,11 @@
           <a:bodyPr wrap="square" lIns="0" tIns="0" rIns="0" bIns="0" rtlCol="0" anchor="ctr"/>
           <a:lstStyle/>
           <a:p>
-            <a:pPr indent="0" marL="0">
-              <a:buNone/>
-            </a:pPr>
-            <a:r>
-              <a:rPr lang="en-US" sz="1100" b="1" spc="200" kern="0" dirty="0">
+            <a:pPr marL="0" indent="0">
+              <a:buNone/>
+            </a:pPr>
+            <a:r>
+              <a:rPr lang="en-US" sz="1100" b="1" kern="0" spc="200" dirty="0">
                 <a:solidFill>
                   <a:srgbClr val="7C9CFF"/>
                 </a:solidFill>
@@ -20130,7 +19614,7 @@
           <a:bodyPr wrap="square" lIns="0" tIns="0" rIns="0" bIns="0" rtlCol="0" anchor="t"/>
           <a:lstStyle/>
           <a:p>
-            <a:pPr indent="0" marL="0">
+            <a:pPr marL="0" indent="0">
               <a:buNone/>
             </a:pPr>
             <a:r>
@@ -20169,7 +19653,7 @@
           <a:bodyPr wrap="square" lIns="0" tIns="0" rIns="0" bIns="0" rtlCol="0" anchor="t"/>
           <a:lstStyle/>
           <a:p>
-            <a:pPr indent="0" marL="0">
+            <a:pPr marL="0" indent="0">
               <a:lnSpc>
                 <a:spcPct val="115000"/>
               </a:lnSpc>
@@ -20211,7 +19695,7 @@
           <a:bodyPr wrap="square" lIns="0" tIns="0" rIns="0" bIns="0" rtlCol="0" anchor="t"/>
           <a:lstStyle/>
           <a:p>
-            <a:pPr indent="0" marL="0">
+            <a:pPr marL="0" indent="0">
               <a:lnSpc>
                 <a:spcPct val="120000"/>
               </a:lnSpc>
@@ -20248,6 +19732,7 @@
         <a:solidFill>
           <a:srgbClr val="F7F7F4"/>
         </a:solidFill>
+        <a:effectLst/>
       </p:bgPr>
     </p:bg>
     <p:spTree>
@@ -20285,11 +19770,11 @@
           <a:bodyPr wrap="square" lIns="0" tIns="0" rIns="0" bIns="0" rtlCol="0" anchor="ctr"/>
           <a:lstStyle/>
           <a:p>
-            <a:pPr indent="0" marL="0">
-              <a:buNone/>
-            </a:pPr>
-            <a:r>
-              <a:rPr lang="en-US" sz="1200" b="1" spc="200" kern="0" dirty="0">
+            <a:pPr marL="0" indent="0">
+              <a:buNone/>
+            </a:pPr>
+            <a:r>
+              <a:rPr lang="en-US" sz="1200" b="1" kern="0" spc="200" dirty="0">
                 <a:solidFill>
                   <a:srgbClr val="3762FF"/>
                 </a:solidFill>
@@ -20324,7 +19809,7 @@
           <a:bodyPr wrap="square" lIns="0" tIns="0" rIns="0" bIns="0" rtlCol="0" anchor="t"/>
           <a:lstStyle/>
           <a:p>
-            <a:pPr indent="0" marL="0">
+            <a:pPr marL="0" indent="0">
               <a:buNone/>
             </a:pPr>
             <a:r>
@@ -20368,7 +19853,7 @@
             <a:prstDash val="solid"/>
           </a:ln>
           <a:effectLst>
-            <a:outerShdw sx="100000" sy="100000" kx="0" ky="0" algn="bl" rotWithShape="0" blurRad="101600" dist="25400" dir="5400000">
+            <a:outerShdw blurRad="101600" dist="25400" dir="5400000" algn="bl" rotWithShape="0">
               <a:srgbClr val="000000">
                 <a:alpha val="10000"/>
               </a:srgbClr>
@@ -20472,7 +19957,7 @@
           <a:bodyPr wrap="square" lIns="0" tIns="0" rIns="0" bIns="0" rtlCol="0" anchor="ctr"/>
           <a:lstStyle/>
           <a:p>
-            <a:pPr indent="0" marL="0">
+            <a:pPr marL="0" indent="0">
               <a:buNone/>
             </a:pPr>
             <a:r>
@@ -20511,7 +19996,7 @@
           <a:bodyPr wrap="square" lIns="0" tIns="0" rIns="0" bIns="0" rtlCol="0" anchor="t"/>
           <a:lstStyle/>
           <a:p>
-            <a:pPr indent="0" marL="0">
+            <a:pPr marL="0" indent="0">
               <a:lnSpc>
                 <a:spcPct val="110000"/>
               </a:lnSpc>
@@ -20531,7 +20016,7 @@
             <a:endParaRPr lang="en-US" sz="1300" dirty="0"/>
           </a:p>
           <a:p>
-            <a:pPr indent="0" marL="0">
+            <a:pPr marL="0" indent="0">
               <a:lnSpc>
                 <a:spcPct val="110000"/>
               </a:lnSpc>
@@ -20551,7 +20036,7 @@
             <a:endParaRPr lang="en-US" sz="1300" dirty="0"/>
           </a:p>
           <a:p>
-            <a:pPr indent="0" marL="0">
+            <a:pPr marL="0" indent="0">
               <a:lnSpc>
                 <a:spcPct val="110000"/>
               </a:lnSpc>
@@ -20571,7 +20056,7 @@
             <a:endParaRPr lang="en-US" sz="1300" dirty="0"/>
           </a:p>
           <a:p>
-            <a:pPr indent="0" marL="0">
+            <a:pPr marL="0" indent="0">
               <a:lnSpc>
                 <a:spcPct val="110000"/>
               </a:lnSpc>
@@ -20591,7 +20076,7 @@
             <a:endParaRPr lang="en-US" sz="1300" dirty="0"/>
           </a:p>
           <a:p>
-            <a:pPr indent="0" marL="0">
+            <a:pPr marL="0" indent="0">
               <a:lnSpc>
                 <a:spcPct val="110000"/>
               </a:lnSpc>
@@ -20611,7 +20096,7 @@
             <a:endParaRPr lang="en-US" sz="1300" dirty="0"/>
           </a:p>
           <a:p>
-            <a:pPr indent="0" marL="0">
+            <a:pPr marL="0" indent="0">
               <a:lnSpc>
                 <a:spcPct val="110000"/>
               </a:lnSpc>
@@ -20631,7 +20116,7 @@
             <a:endParaRPr lang="en-US" sz="1300" dirty="0"/>
           </a:p>
           <a:p>
-            <a:pPr indent="0" marL="0">
+            <a:pPr marL="0" indent="0">
               <a:lnSpc>
                 <a:spcPct val="110000"/>
               </a:lnSpc>
@@ -20651,7 +20136,7 @@
             <a:endParaRPr lang="en-US" sz="1300" dirty="0"/>
           </a:p>
           <a:p>
-            <a:pPr indent="0" marL="0">
+            <a:pPr marL="0" indent="0">
               <a:lnSpc>
                 <a:spcPct val="110000"/>
               </a:lnSpc>
@@ -20698,7 +20183,7 @@
             <a:prstDash val="solid"/>
           </a:ln>
           <a:effectLst>
-            <a:outerShdw sx="100000" sy="100000" kx="0" ky="0" algn="bl" rotWithShape="0" blurRad="101600" dist="25400" dir="5400000">
+            <a:outerShdw blurRad="101600" dist="25400" dir="5400000" algn="bl" rotWithShape="0">
               <a:srgbClr val="000000">
                 <a:alpha val="10000"/>
               </a:srgbClr>
@@ -20727,7 +20212,7 @@
           <a:bodyPr wrap="square" lIns="0" tIns="0" rIns="0" bIns="0" rtlCol="0" anchor="ctr"/>
           <a:lstStyle/>
           <a:p>
-            <a:pPr algn="ctr" indent="0" marL="0">
+            <a:pPr marL="0" indent="0" algn="ctr">
               <a:buNone/>
             </a:pPr>
             <a:r>
@@ -20795,7 +20280,7 @@
             <a:prstDash val="solid"/>
           </a:ln>
           <a:effectLst>
-            <a:outerShdw sx="100000" sy="100000" kx="0" ky="0" algn="bl" rotWithShape="0" blurRad="101600" dist="25400" dir="5400000">
+            <a:outerShdw blurRad="101600" dist="25400" dir="5400000" algn="bl" rotWithShape="0">
               <a:srgbClr val="000000">
                 <a:alpha val="10000"/>
               </a:srgbClr>
@@ -20824,7 +20309,7 @@
           <a:bodyPr wrap="square" lIns="0" tIns="0" rIns="0" bIns="0" rtlCol="0" anchor="ctr"/>
           <a:lstStyle/>
           <a:p>
-            <a:pPr algn="ctr" indent="0" marL="0">
+            <a:pPr marL="0" indent="0" algn="ctr">
               <a:buNone/>
             </a:pPr>
             <a:r>
@@ -20892,7 +20377,7 @@
             <a:prstDash val="solid"/>
           </a:ln>
           <a:effectLst>
-            <a:outerShdw sx="100000" sy="100000" kx="0" ky="0" algn="bl" rotWithShape="0" blurRad="101600" dist="25400" dir="5400000">
+            <a:outerShdw blurRad="101600" dist="25400" dir="5400000" algn="bl" rotWithShape="0">
               <a:srgbClr val="000000">
                 <a:alpha val="10000"/>
               </a:srgbClr>
@@ -20921,7 +20406,7 @@
           <a:bodyPr wrap="square" lIns="0" tIns="0" rIns="0" bIns="0" rtlCol="0" anchor="ctr"/>
           <a:lstStyle/>
           <a:p>
-            <a:pPr algn="ctr" indent="0" marL="0">
+            <a:pPr marL="0" indent="0" algn="ctr">
               <a:buNone/>
             </a:pPr>
             <a:r>
@@ -20987,7 +20472,7 @@
           <a:bodyPr wrap="square" lIns="0" tIns="0" rIns="0" bIns="0" rtlCol="0" anchor="ctr"/>
           <a:lstStyle/>
           <a:p>
-            <a:pPr algn="ctr" indent="0" marL="0">
+            <a:pPr marL="0" indent="0" algn="ctr">
               <a:buNone/>
             </a:pPr>
             <a:r>
@@ -21053,7 +20538,7 @@
           <a:bodyPr wrap="square" lIns="0" tIns="0" rIns="0" bIns="0" rtlCol="0" anchor="ctr"/>
           <a:lstStyle/>
           <a:p>
-            <a:pPr indent="0" marL="0">
+            <a:pPr marL="0" indent="0">
               <a:buNone/>
             </a:pPr>
             <a:r>
@@ -21067,9 +20552,6 @@
               </a:rPr>
               <a:t>Öppna http://hello.localhost </a:t>
             </a:r>
-            <a:pPr indent="0" marL="0">
-              <a:buNone/>
-            </a:pPr>
             <a:r>
               <a:rPr lang="en-US" sz="1600" dirty="0">
                 <a:solidFill>
@@ -21101,6 +20583,7 @@
         <a:solidFill>
           <a:srgbClr val="F7F7F4"/>
         </a:solidFill>
+        <a:effectLst/>
       </p:bgPr>
     </p:bg>
     <p:spTree>
@@ -21138,11 +20621,11 @@
           <a:bodyPr wrap="square" lIns="0" tIns="0" rIns="0" bIns="0" rtlCol="0" anchor="ctr"/>
           <a:lstStyle/>
           <a:p>
-            <a:pPr indent="0" marL="0">
-              <a:buNone/>
-            </a:pPr>
-            <a:r>
-              <a:rPr lang="en-US" sz="1200" b="1" spc="200" kern="0" dirty="0">
+            <a:pPr marL="0" indent="0">
+              <a:buNone/>
+            </a:pPr>
+            <a:r>
+              <a:rPr lang="en-US" sz="1200" b="1" kern="0" spc="200" dirty="0">
                 <a:solidFill>
                   <a:srgbClr val="3762FF"/>
                 </a:solidFill>
@@ -21177,7 +20660,7 @@
           <a:bodyPr wrap="square" lIns="0" tIns="0" rIns="0" bIns="0" rtlCol="0" anchor="t"/>
           <a:lstStyle/>
           <a:p>
-            <a:pPr indent="0" marL="0">
+            <a:pPr marL="0" indent="0">
               <a:buNone/>
             </a:pPr>
             <a:r>
@@ -21221,7 +20704,7 @@
             <a:prstDash val="solid"/>
           </a:ln>
           <a:effectLst>
-            <a:outerShdw sx="100000" sy="100000" kx="0" ky="0" algn="bl" rotWithShape="0" blurRad="101600" dist="25400" dir="5400000">
+            <a:outerShdw blurRad="101600" dist="25400" dir="5400000" algn="bl" rotWithShape="0">
               <a:srgbClr val="000000">
                 <a:alpha val="10000"/>
               </a:srgbClr>
@@ -21325,7 +20808,7 @@
           <a:bodyPr wrap="square" lIns="0" tIns="0" rIns="0" bIns="0" rtlCol="0" anchor="ctr"/>
           <a:lstStyle/>
           <a:p>
-            <a:pPr indent="0" marL="0">
+            <a:pPr marL="0" indent="0">
               <a:buNone/>
             </a:pPr>
             <a:r>
@@ -21364,7 +20847,7 @@
           <a:bodyPr wrap="square" lIns="0" tIns="0" rIns="0" bIns="0" rtlCol="0" anchor="t"/>
           <a:lstStyle/>
           <a:p>
-            <a:pPr indent="0" marL="0">
+            <a:pPr marL="0" indent="0">
               <a:lnSpc>
                 <a:spcPct val="110000"/>
               </a:lnSpc>
@@ -21384,7 +20867,7 @@
             <a:endParaRPr lang="en-US" sz="1250" dirty="0"/>
           </a:p>
           <a:p>
-            <a:pPr indent="0" marL="0">
+            <a:pPr marL="0" indent="0">
               <a:lnSpc>
                 <a:spcPct val="110000"/>
               </a:lnSpc>
@@ -21404,7 +20887,7 @@
             <a:endParaRPr lang="en-US" sz="1250" dirty="0"/>
           </a:p>
           <a:p>
-            <a:pPr indent="0" marL="0">
+            <a:pPr marL="0" indent="0">
               <a:lnSpc>
                 <a:spcPct val="110000"/>
               </a:lnSpc>
@@ -21424,7 +20907,7 @@
             <a:endParaRPr lang="en-US" sz="1250" dirty="0"/>
           </a:p>
           <a:p>
-            <a:pPr indent="0" marL="0">
+            <a:pPr marL="0" indent="0">
               <a:lnSpc>
                 <a:spcPct val="110000"/>
               </a:lnSpc>
@@ -21444,7 +20927,7 @@
             <a:endParaRPr lang="en-US" sz="1250" dirty="0"/>
           </a:p>
           <a:p>
-            <a:pPr indent="0" marL="0">
+            <a:pPr marL="0" indent="0">
               <a:lnSpc>
                 <a:spcPct val="110000"/>
               </a:lnSpc>
@@ -21464,7 +20947,7 @@
             <a:endParaRPr lang="en-US" sz="1250" dirty="0"/>
           </a:p>
           <a:p>
-            <a:pPr indent="0" marL="0">
+            <a:pPr marL="0" indent="0">
               <a:lnSpc>
                 <a:spcPct val="110000"/>
               </a:lnSpc>
@@ -21484,7 +20967,7 @@
             <a:endParaRPr lang="en-US" sz="1250" dirty="0"/>
           </a:p>
           <a:p>
-            <a:pPr indent="0" marL="0">
+            <a:pPr marL="0" indent="0">
               <a:lnSpc>
                 <a:spcPct val="110000"/>
               </a:lnSpc>
@@ -21504,7 +20987,7 @@
             <a:endParaRPr lang="en-US" sz="1250" dirty="0"/>
           </a:p>
           <a:p>
-            <a:pPr indent="0" marL="0">
+            <a:pPr marL="0" indent="0">
               <a:lnSpc>
                 <a:spcPct val="110000"/>
               </a:lnSpc>
@@ -21551,7 +21034,7 @@
             <a:prstDash val="solid"/>
           </a:ln>
           <a:effectLst>
-            <a:outerShdw sx="100000" sy="100000" kx="0" ky="0" algn="bl" rotWithShape="0" blurRad="101600" dist="25400" dir="5400000">
+            <a:outerShdw blurRad="101600" dist="25400" dir="5400000" algn="bl" rotWithShape="0">
               <a:srgbClr val="000000">
                 <a:alpha val="10000"/>
               </a:srgbClr>
@@ -21580,7 +21063,7 @@
           <a:bodyPr wrap="square" lIns="0" tIns="0" rIns="0" bIns="0" rtlCol="0" anchor="t"/>
           <a:lstStyle/>
           <a:p>
-            <a:pPr indent="0" marL="0">
+            <a:pPr marL="0" indent="0">
               <a:buNone/>
             </a:pPr>
             <a:r>
@@ -21619,7 +21102,7 @@
           <a:bodyPr wrap="square" lIns="0" tIns="0" rIns="0" bIns="0" rtlCol="0" anchor="t"/>
           <a:lstStyle/>
           <a:p>
-            <a:pPr indent="0" marL="0">
+            <a:pPr marL="0" indent="0">
               <a:lnSpc>
                 <a:spcPct val="115000"/>
               </a:lnSpc>
@@ -21666,7 +21149,7 @@
             <a:prstDash val="solid"/>
           </a:ln>
           <a:effectLst>
-            <a:outerShdw sx="100000" sy="100000" kx="0" ky="0" algn="bl" rotWithShape="0" blurRad="101600" dist="25400" dir="5400000">
+            <a:outerShdw blurRad="101600" dist="25400" dir="5400000" algn="bl" rotWithShape="0">
               <a:srgbClr val="000000">
                 <a:alpha val="10000"/>
               </a:srgbClr>
@@ -21695,7 +21178,7 @@
           <a:bodyPr wrap="square" lIns="0" tIns="0" rIns="0" bIns="0" rtlCol="0" anchor="t"/>
           <a:lstStyle/>
           <a:p>
-            <a:pPr indent="0" marL="0">
+            <a:pPr marL="0" indent="0">
               <a:buNone/>
             </a:pPr>
             <a:r>
@@ -21734,7 +21217,7 @@
           <a:bodyPr wrap="square" lIns="0" tIns="0" rIns="0" bIns="0" rtlCol="0" anchor="t"/>
           <a:lstStyle/>
           <a:p>
-            <a:pPr indent="0" marL="0">
+            <a:pPr marL="0" indent="0">
               <a:lnSpc>
                 <a:spcPct val="115000"/>
               </a:lnSpc>
@@ -21803,7 +21286,7 @@
           <a:bodyPr wrap="square" lIns="0" tIns="0" rIns="0" bIns="0" rtlCol="0" anchor="t"/>
           <a:lstStyle/>
           <a:p>
-            <a:pPr indent="0" marL="0">
+            <a:pPr marL="0" indent="0">
               <a:buNone/>
             </a:pPr>
             <a:r>
@@ -21842,7 +21325,7 @@
           <a:bodyPr wrap="square" lIns="0" tIns="0" rIns="0" bIns="0" rtlCol="0" anchor="t"/>
           <a:lstStyle/>
           <a:p>
-            <a:pPr indent="0" marL="0">
+            <a:pPr marL="0" indent="0">
               <a:lnSpc>
                 <a:spcPct val="115000"/>
               </a:lnSpc>
@@ -21879,6 +21362,7 @@
         <a:solidFill>
           <a:srgbClr val="0F1F33"/>
         </a:solidFill>
+        <a:effectLst/>
       </p:bgPr>
     </p:bg>
     <p:spTree>
@@ -21916,11 +21400,11 @@
           <a:bodyPr wrap="square" lIns="0" tIns="0" rIns="0" bIns="0" rtlCol="0" anchor="ctr"/>
           <a:lstStyle/>
           <a:p>
-            <a:pPr indent="0" marL="0">
-              <a:buNone/>
-            </a:pPr>
-            <a:r>
-              <a:rPr lang="en-US" sz="1200" b="1" spc="200" kern="0" dirty="0">
+            <a:pPr marL="0" indent="0">
+              <a:buNone/>
+            </a:pPr>
+            <a:r>
+              <a:rPr lang="en-US" sz="1200" b="1" kern="0" spc="200" dirty="0">
                 <a:solidFill>
                   <a:srgbClr val="7C9CFF"/>
                 </a:solidFill>
@@ -21955,7 +21439,7 @@
           <a:bodyPr wrap="square" lIns="0" tIns="0" rIns="0" bIns="0" rtlCol="0" anchor="t"/>
           <a:lstStyle/>
           <a:p>
-            <a:pPr indent="0" marL="0">
+            <a:pPr marL="0" indent="0">
               <a:buNone/>
             </a:pPr>
             <a:r>
@@ -22021,11 +21505,11 @@
           <a:bodyPr wrap="square" lIns="0" tIns="0" rIns="0" bIns="0" rtlCol="0" anchor="ctr"/>
           <a:lstStyle/>
           <a:p>
-            <a:pPr indent="0" marL="0">
-              <a:buNone/>
-            </a:pPr>
-            <a:r>
-              <a:rPr lang="en-US" sz="1100" b="1" spc="200" kern="0" dirty="0">
+            <a:pPr marL="0" indent="0">
+              <a:buNone/>
+            </a:pPr>
+            <a:r>
+              <a:rPr lang="en-US" sz="1100" b="1" kern="0" spc="200" dirty="0">
                 <a:solidFill>
                   <a:srgbClr val="7C9CFF"/>
                 </a:solidFill>
@@ -22060,7 +21544,7 @@
           <a:bodyPr wrap="square" lIns="0" tIns="0" rIns="0" bIns="0" rtlCol="0" anchor="t"/>
           <a:lstStyle/>
           <a:p>
-            <a:pPr indent="0" marL="0">
+            <a:pPr marL="0" indent="0">
               <a:buNone/>
             </a:pPr>
             <a:r>
@@ -22099,7 +21583,7 @@
           <a:bodyPr wrap="square" lIns="0" tIns="0" rIns="0" bIns="0" rtlCol="0" anchor="t"/>
           <a:lstStyle/>
           <a:p>
-            <a:pPr indent="0" marL="0">
+            <a:pPr marL="0" indent="0">
               <a:lnSpc>
                 <a:spcPct val="115000"/>
               </a:lnSpc>
@@ -22168,11 +21652,11 @@
           <a:bodyPr wrap="square" lIns="0" tIns="0" rIns="0" bIns="0" rtlCol="0" anchor="ctr"/>
           <a:lstStyle/>
           <a:p>
-            <a:pPr indent="0" marL="0">
-              <a:buNone/>
-            </a:pPr>
-            <a:r>
-              <a:rPr lang="en-US" sz="1100" b="1" spc="200" kern="0" dirty="0">
+            <a:pPr marL="0" indent="0">
+              <a:buNone/>
+            </a:pPr>
+            <a:r>
+              <a:rPr lang="en-US" sz="1100" b="1" kern="0" spc="200" dirty="0">
                 <a:solidFill>
                   <a:srgbClr val="7C9CFF"/>
                 </a:solidFill>
@@ -22207,7 +21691,7 @@
           <a:bodyPr wrap="square" lIns="0" tIns="0" rIns="0" bIns="0" rtlCol="0" anchor="t"/>
           <a:lstStyle/>
           <a:p>
-            <a:pPr indent="0" marL="0">
+            <a:pPr marL="0" indent="0">
               <a:buNone/>
             </a:pPr>
             <a:r>
@@ -22246,7 +21730,7 @@
           <a:bodyPr wrap="square" lIns="0" tIns="0" rIns="0" bIns="0" rtlCol="0" anchor="t"/>
           <a:lstStyle/>
           <a:p>
-            <a:pPr indent="0" marL="0">
+            <a:pPr marL="0" indent="0">
               <a:lnSpc>
                 <a:spcPct val="115000"/>
               </a:lnSpc>
@@ -22315,11 +21799,11 @@
           <a:bodyPr wrap="square" lIns="0" tIns="0" rIns="0" bIns="0" rtlCol="0" anchor="ctr"/>
           <a:lstStyle/>
           <a:p>
-            <a:pPr indent="0" marL="0">
-              <a:buNone/>
-            </a:pPr>
-            <a:r>
-              <a:rPr lang="en-US" sz="1100" b="1" spc="200" kern="0" dirty="0">
+            <a:pPr marL="0" indent="0">
+              <a:buNone/>
+            </a:pPr>
+            <a:r>
+              <a:rPr lang="en-US" sz="1100" b="1" kern="0" spc="200" dirty="0">
                 <a:solidFill>
                   <a:srgbClr val="7C9CFF"/>
                 </a:solidFill>
@@ -22354,7 +21838,7 @@
           <a:bodyPr wrap="square" lIns="0" tIns="0" rIns="0" bIns="0" rtlCol="0" anchor="t"/>
           <a:lstStyle/>
           <a:p>
-            <a:pPr indent="0" marL="0">
+            <a:pPr marL="0" indent="0">
               <a:buNone/>
             </a:pPr>
             <a:r>
@@ -22393,7 +21877,7 @@
           <a:bodyPr wrap="square" lIns="0" tIns="0" rIns="0" bIns="0" rtlCol="0" anchor="t"/>
           <a:lstStyle/>
           <a:p>
-            <a:pPr indent="0" marL="0">
+            <a:pPr marL="0" indent="0">
               <a:lnSpc>
                 <a:spcPct val="115000"/>
               </a:lnSpc>
@@ -22462,11 +21946,11 @@
           <a:bodyPr wrap="square" lIns="0" tIns="0" rIns="0" bIns="0" rtlCol="0" anchor="ctr"/>
           <a:lstStyle/>
           <a:p>
-            <a:pPr indent="0" marL="0">
-              <a:buNone/>
-            </a:pPr>
-            <a:r>
-              <a:rPr lang="en-US" sz="1100" b="1" spc="200" kern="0" dirty="0">
+            <a:pPr marL="0" indent="0">
+              <a:buNone/>
+            </a:pPr>
+            <a:r>
+              <a:rPr lang="en-US" sz="1100" b="1" kern="0" spc="200" dirty="0">
                 <a:solidFill>
                   <a:srgbClr val="FFFFFF"/>
                 </a:solidFill>
@@ -22501,7 +21985,7 @@
           <a:bodyPr wrap="square" lIns="0" tIns="0" rIns="0" bIns="0" rtlCol="0" anchor="t"/>
           <a:lstStyle/>
           <a:p>
-            <a:pPr indent="0" marL="0">
+            <a:pPr marL="0" indent="0">
               <a:buNone/>
             </a:pPr>
             <a:r>
@@ -22540,7 +22024,7 @@
           <a:bodyPr wrap="square" lIns="0" tIns="0" rIns="0" bIns="0" rtlCol="0" anchor="t"/>
           <a:lstStyle/>
           <a:p>
-            <a:pPr indent="0" marL="0">
+            <a:pPr marL="0" indent="0">
               <a:lnSpc>
                 <a:spcPct val="115000"/>
               </a:lnSpc>
@@ -22582,7 +22066,7 @@
           <a:bodyPr wrap="square" lIns="0" tIns="0" rIns="0" bIns="0" rtlCol="0" anchor="t"/>
           <a:lstStyle/>
           <a:p>
-            <a:pPr indent="0" marL="0">
+            <a:pPr marL="0" indent="0">
               <a:lnSpc>
                 <a:spcPct val="120000"/>
               </a:lnSpc>
@@ -22619,6 +22103,7 @@
         <a:solidFill>
           <a:srgbClr val="0F1F33"/>
         </a:solidFill>
+        <a:effectLst/>
       </p:bgPr>
     </p:bg>
     <p:spTree>
@@ -22656,11 +22141,11 @@
           <a:bodyPr wrap="square" lIns="0" tIns="0" rIns="0" bIns="0" rtlCol="0" anchor="ctr"/>
           <a:lstStyle/>
           <a:p>
-            <a:pPr indent="0" marL="0">
-              <a:buNone/>
-            </a:pPr>
-            <a:r>
-              <a:rPr lang="en-US" sz="1200" b="1" spc="200" kern="0" dirty="0">
+            <a:pPr marL="0" indent="0">
+              <a:buNone/>
+            </a:pPr>
+            <a:r>
+              <a:rPr lang="en-US" sz="1200" b="1" kern="0" spc="200" dirty="0">
                 <a:solidFill>
                   <a:srgbClr val="7C9CFF"/>
                 </a:solidFill>
@@ -22695,7 +22180,7 @@
           <a:bodyPr wrap="square" lIns="0" tIns="0" rIns="0" bIns="0" rtlCol="0" anchor="t"/>
           <a:lstStyle/>
           <a:p>
-            <a:pPr indent="0" marL="0">
+            <a:pPr marL="0" indent="0">
               <a:buNone/>
             </a:pPr>
             <a:r>
@@ -22836,7 +22321,7 @@
           <a:bodyPr wrap="square" lIns="0" tIns="0" rIns="0" bIns="0" rtlCol="0" anchor="ctr"/>
           <a:lstStyle/>
           <a:p>
-            <a:pPr indent="0" marL="0">
+            <a:pPr marL="0" indent="0">
               <a:buNone/>
             </a:pPr>
             <a:r>
@@ -22875,7 +22360,7 @@
           <a:bodyPr wrap="square" lIns="0" tIns="0" rIns="0" bIns="0" rtlCol="0" anchor="t"/>
           <a:lstStyle/>
           <a:p>
-            <a:pPr indent="0" marL="0">
+            <a:pPr marL="0" indent="0">
               <a:lnSpc>
                 <a:spcPct val="110000"/>
               </a:lnSpc>
@@ -22895,7 +22380,7 @@
             <a:endParaRPr lang="en-US" sz="1250" dirty="0"/>
           </a:p>
           <a:p>
-            <a:pPr indent="0" marL="0">
+            <a:pPr marL="0" indent="0">
               <a:lnSpc>
                 <a:spcPct val="110000"/>
               </a:lnSpc>
@@ -22915,7 +22400,7 @@
             <a:endParaRPr lang="en-US" sz="1250" dirty="0"/>
           </a:p>
           <a:p>
-            <a:pPr indent="0" marL="0">
+            <a:pPr marL="0" indent="0">
               <a:lnSpc>
                 <a:spcPct val="110000"/>
               </a:lnSpc>
@@ -22935,7 +22420,7 @@
             <a:endParaRPr lang="en-US" sz="1250" dirty="0"/>
           </a:p>
           <a:p>
-            <a:pPr indent="0" marL="0">
+            <a:pPr marL="0" indent="0">
               <a:lnSpc>
                 <a:spcPct val="110000"/>
               </a:lnSpc>
@@ -22955,7 +22440,7 @@
             <a:endParaRPr lang="en-US" sz="1250" dirty="0"/>
           </a:p>
           <a:p>
-            <a:pPr indent="0" marL="0">
+            <a:pPr marL="0" indent="0">
               <a:lnSpc>
                 <a:spcPct val="110000"/>
               </a:lnSpc>
@@ -22975,7 +22460,7 @@
             <a:endParaRPr lang="en-US" sz="1250" dirty="0"/>
           </a:p>
           <a:p>
-            <a:pPr indent="0" marL="0">
+            <a:pPr marL="0" indent="0">
               <a:lnSpc>
                 <a:spcPct val="110000"/>
               </a:lnSpc>
@@ -22995,7 +22480,7 @@
             <a:endParaRPr lang="en-US" sz="1250" dirty="0"/>
           </a:p>
           <a:p>
-            <a:pPr indent="0" marL="0">
+            <a:pPr marL="0" indent="0">
               <a:lnSpc>
                 <a:spcPct val="110000"/>
               </a:lnSpc>
@@ -23015,7 +22500,7 @@
             <a:endParaRPr lang="en-US" sz="1250" dirty="0"/>
           </a:p>
           <a:p>
-            <a:pPr indent="0" marL="0">
+            <a:pPr marL="0" indent="0">
               <a:lnSpc>
                 <a:spcPct val="110000"/>
               </a:lnSpc>
@@ -23035,7 +22520,7 @@
             <a:endParaRPr lang="en-US" sz="1250" dirty="0"/>
           </a:p>
           <a:p>
-            <a:pPr indent="0" marL="0">
+            <a:pPr marL="0" indent="0">
               <a:lnSpc>
                 <a:spcPct val="110000"/>
               </a:lnSpc>
@@ -23104,7 +22589,7 @@
           <a:bodyPr wrap="square" lIns="0" tIns="0" rIns="0" bIns="0" rtlCol="0" anchor="t"/>
           <a:lstStyle/>
           <a:p>
-            <a:pPr indent="0" marL="0">
+            <a:pPr marL="0" indent="0">
               <a:buNone/>
             </a:pPr>
             <a:r>
@@ -23143,7 +22628,7 @@
           <a:bodyPr wrap="square" lIns="0" tIns="0" rIns="0" bIns="0" rtlCol="0" anchor="t"/>
           <a:lstStyle/>
           <a:p>
-            <a:pPr indent="0" marL="0">
+            <a:pPr marL="0" indent="0">
               <a:lnSpc>
                 <a:spcPct val="115000"/>
               </a:lnSpc>
@@ -23212,7 +22697,7 @@
           <a:bodyPr wrap="square" lIns="0" tIns="0" rIns="0" bIns="0" rtlCol="0" anchor="t"/>
           <a:lstStyle/>
           <a:p>
-            <a:pPr indent="0" marL="0">
+            <a:pPr marL="0" indent="0">
               <a:buNone/>
             </a:pPr>
             <a:r>
@@ -23251,7 +22736,7 @@
           <a:bodyPr wrap="square" lIns="0" tIns="0" rIns="0" bIns="0" rtlCol="0" anchor="t"/>
           <a:lstStyle/>
           <a:p>
-            <a:pPr indent="0" marL="0">
+            <a:pPr marL="0" indent="0">
               <a:lnSpc>
                 <a:spcPct val="115000"/>
               </a:lnSpc>
@@ -23288,6 +22773,7 @@
         <a:solidFill>
           <a:srgbClr val="F7F7F4"/>
         </a:solidFill>
+        <a:effectLst/>
       </p:bgPr>
     </p:bg>
     <p:spTree>
@@ -23325,11 +22811,11 @@
           <a:bodyPr wrap="square" lIns="0" tIns="0" rIns="0" bIns="0" rtlCol="0" anchor="ctr"/>
           <a:lstStyle/>
           <a:p>
-            <a:pPr indent="0" marL="0">
-              <a:buNone/>
-            </a:pPr>
-            <a:r>
-              <a:rPr lang="en-US" sz="1200" b="1" spc="200" kern="0" dirty="0">
+            <a:pPr marL="0" indent="0">
+              <a:buNone/>
+            </a:pPr>
+            <a:r>
+              <a:rPr lang="en-US" sz="1200" b="1" kern="0" spc="200" dirty="0">
                 <a:solidFill>
                   <a:srgbClr val="3762FF"/>
                 </a:solidFill>
@@ -23364,7 +22850,7 @@
           <a:bodyPr wrap="square" lIns="0" tIns="0" rIns="0" bIns="0" rtlCol="0" anchor="t"/>
           <a:lstStyle/>
           <a:p>
-            <a:pPr indent="0" marL="0">
+            <a:pPr marL="0" indent="0">
               <a:buNone/>
             </a:pPr>
             <a:r>
@@ -23408,7 +22894,7 @@
             <a:prstDash val="solid"/>
           </a:ln>
           <a:effectLst>
-            <a:outerShdw sx="100000" sy="100000" kx="0" ky="0" algn="bl" rotWithShape="0" blurRad="101600" dist="25400" dir="5400000">
+            <a:outerShdw blurRad="101600" dist="25400" dir="5400000" algn="bl" rotWithShape="0">
               <a:srgbClr val="000000">
                 <a:alpha val="10000"/>
               </a:srgbClr>
@@ -23437,7 +22923,7 @@
           <a:bodyPr wrap="square" lIns="0" tIns="0" rIns="0" bIns="0" rtlCol="0" anchor="ctr"/>
           <a:lstStyle/>
           <a:p>
-            <a:pPr indent="0" marL="0">
+            <a:pPr marL="0" indent="0">
               <a:buNone/>
             </a:pPr>
             <a:r>
@@ -23476,7 +22962,7 @@
           <a:bodyPr wrap="square" lIns="0" tIns="0" rIns="0" bIns="0" rtlCol="0" anchor="ctr"/>
           <a:lstStyle/>
           <a:p>
-            <a:pPr indent="0" marL="0">
+            <a:pPr marL="0" indent="0">
               <a:buNone/>
             </a:pPr>
             <a:r>
@@ -23520,7 +23006,7 @@
             <a:prstDash val="solid"/>
           </a:ln>
           <a:effectLst>
-            <a:outerShdw sx="100000" sy="100000" kx="0" ky="0" algn="bl" rotWithShape="0" blurRad="101600" dist="25400" dir="5400000">
+            <a:outerShdw blurRad="101600" dist="25400" dir="5400000" algn="bl" rotWithShape="0">
               <a:srgbClr val="000000">
                 <a:alpha val="10000"/>
               </a:srgbClr>
@@ -23549,7 +23035,7 @@
           <a:bodyPr wrap="square" lIns="0" tIns="0" rIns="0" bIns="0" rtlCol="0" anchor="ctr"/>
           <a:lstStyle/>
           <a:p>
-            <a:pPr indent="0" marL="0">
+            <a:pPr marL="0" indent="0">
               <a:buNone/>
             </a:pPr>
             <a:r>
@@ -23588,7 +23074,7 @@
           <a:bodyPr wrap="square" lIns="0" tIns="0" rIns="0" bIns="0" rtlCol="0" anchor="ctr"/>
           <a:lstStyle/>
           <a:p>
-            <a:pPr indent="0" marL="0">
+            <a:pPr marL="0" indent="0">
               <a:buNone/>
             </a:pPr>
             <a:r>
@@ -23632,7 +23118,7 @@
             <a:prstDash val="solid"/>
           </a:ln>
           <a:effectLst>
-            <a:outerShdw sx="100000" sy="100000" kx="0" ky="0" algn="bl" rotWithShape="0" blurRad="101600" dist="25400" dir="5400000">
+            <a:outerShdw blurRad="101600" dist="25400" dir="5400000" algn="bl" rotWithShape="0">
               <a:srgbClr val="000000">
                 <a:alpha val="10000"/>
               </a:srgbClr>
@@ -23661,7 +23147,7 @@
           <a:bodyPr wrap="square" lIns="0" tIns="0" rIns="0" bIns="0" rtlCol="0" anchor="ctr"/>
           <a:lstStyle/>
           <a:p>
-            <a:pPr indent="0" marL="0">
+            <a:pPr marL="0" indent="0">
               <a:buNone/>
             </a:pPr>
             <a:r>
@@ -23700,7 +23186,7 @@
           <a:bodyPr wrap="square" lIns="0" tIns="0" rIns="0" bIns="0" rtlCol="0" anchor="ctr"/>
           <a:lstStyle/>
           <a:p>
-            <a:pPr indent="0" marL="0">
+            <a:pPr marL="0" indent="0">
               <a:buNone/>
             </a:pPr>
             <a:r>
@@ -23766,7 +23252,7 @@
           <a:bodyPr wrap="square" lIns="0" tIns="0" rIns="0" bIns="0" rtlCol="0" anchor="ctr"/>
           <a:lstStyle/>
           <a:p>
-            <a:pPr indent="0" marL="0">
+            <a:pPr marL="0" indent="0">
               <a:buNone/>
             </a:pPr>
             <a:r>
@@ -23805,7 +23291,7 @@
           <a:bodyPr wrap="square" lIns="0" tIns="0" rIns="0" bIns="0" rtlCol="0" anchor="ctr"/>
           <a:lstStyle/>
           <a:p>
-            <a:pPr indent="0" marL="0">
+            <a:pPr marL="0" indent="0">
               <a:buNone/>
             </a:pPr>
             <a:r>
@@ -23849,7 +23335,7 @@
             <a:prstDash val="solid"/>
           </a:ln>
           <a:effectLst>
-            <a:outerShdw sx="100000" sy="100000" kx="0" ky="0" algn="bl" rotWithShape="0" blurRad="101600" dist="25400" dir="5400000">
+            <a:outerShdw blurRad="101600" dist="25400" dir="5400000" algn="bl" rotWithShape="0">
               <a:srgbClr val="000000">
                 <a:alpha val="10000"/>
               </a:srgbClr>
@@ -23953,7 +23439,7 @@
           <a:bodyPr wrap="square" lIns="0" tIns="0" rIns="0" bIns="0" rtlCol="0" anchor="ctr"/>
           <a:lstStyle/>
           <a:p>
-            <a:pPr indent="0" marL="0">
+            <a:pPr marL="0" indent="0">
               <a:buNone/>
             </a:pPr>
             <a:r>
@@ -23992,7 +23478,7 @@
           <a:bodyPr wrap="square" lIns="0" tIns="0" rIns="0" bIns="0" rtlCol="0" anchor="t"/>
           <a:lstStyle/>
           <a:p>
-            <a:pPr indent="0" marL="0">
+            <a:pPr marL="0" indent="0">
               <a:lnSpc>
                 <a:spcPct val="110000"/>
               </a:lnSpc>
@@ -24029,6 +23515,7 @@
         <a:solidFill>
           <a:srgbClr val="F7F7F4"/>
         </a:solidFill>
+        <a:effectLst/>
       </p:bgPr>
     </p:bg>
     <p:spTree>
@@ -24066,11 +23553,11 @@
           <a:bodyPr wrap="square" lIns="0" tIns="0" rIns="0" bIns="0" rtlCol="0" anchor="ctr"/>
           <a:lstStyle/>
           <a:p>
-            <a:pPr indent="0" marL="0">
-              <a:buNone/>
-            </a:pPr>
-            <a:r>
-              <a:rPr lang="en-US" sz="1200" b="1" spc="200" kern="0" dirty="0">
+            <a:pPr marL="0" indent="0">
+              <a:buNone/>
+            </a:pPr>
+            <a:r>
+              <a:rPr lang="en-US" sz="1200" b="1" kern="0" spc="200" dirty="0">
                 <a:solidFill>
                   <a:srgbClr val="3762FF"/>
                 </a:solidFill>
@@ -24105,7 +23592,7 @@
           <a:bodyPr wrap="square" lIns="0" tIns="0" rIns="0" bIns="0" rtlCol="0" anchor="t"/>
           <a:lstStyle/>
           <a:p>
-            <a:pPr indent="0" marL="0">
+            <a:pPr marL="0" indent="0">
               <a:buNone/>
             </a:pPr>
             <a:r>
@@ -24139,16 +23626,34 @@
         </p:nvGraphicFramePr>
         <p:xfrm>
           <a:off x="548640" y="1600200"/>
-          <a:ext cx="11094415" cy="914400"/>
+          <a:ext cx="11091672" cy="3968496"/>
         </p:xfrm>
         <a:graphic>
           <a:graphicData uri="http://schemas.openxmlformats.org/drawingml/2006/table">
             <a:tbl>
               <a:tblPr/>
               <a:tblGrid>
-                <a:gridCol w="3474720"/>
-                <a:gridCol w="3566160"/>
-                <a:gridCol w="4050792"/>
+                <a:gridCol w="3474720">
+                  <a:extLst>
+                    <a:ext uri="{9D8B030D-6E8A-4147-A177-3AD203B41FA5}">
+                      <a16:colId xmlns:a16="http://schemas.microsoft.com/office/drawing/2014/main" val="20000"/>
+                    </a:ext>
+                  </a:extLst>
+                </a:gridCol>
+                <a:gridCol w="3566160">
+                  <a:extLst>
+                    <a:ext uri="{9D8B030D-6E8A-4147-A177-3AD203B41FA5}">
+                      <a16:colId xmlns:a16="http://schemas.microsoft.com/office/drawing/2014/main" val="20001"/>
+                    </a:ext>
+                  </a:extLst>
+                </a:gridCol>
+                <a:gridCol w="4050792">
+                  <a:extLst>
+                    <a:ext uri="{9D8B030D-6E8A-4147-A177-3AD203B41FA5}">
+                      <a16:colId xmlns:a16="http://schemas.microsoft.com/office/drawing/2014/main" val="20002"/>
+                    </a:ext>
+                  </a:extLst>
+                </a:gridCol>
               </a:tblGrid>
               <a:tr h="566928">
                 <a:tc>
@@ -24156,7 +23661,7 @@
                     <a:bodyPr/>
                     <a:lstStyle/>
                     <a:p>
-                      <a:pPr indent="0" marL="0">
+                      <a:pPr marL="0" indent="0">
                         <a:buNone/>
                       </a:pPr>
                       <a:r>
@@ -24177,7 +23682,7 @@
                       </a:endParaRPr>
                     </a:p>
                   </a:txBody>
-                  <a:tcPr marL="109728" marR="109728" marT="45720" marB="45720" anchor="ctr">
+                  <a:tcPr marL="109728" marR="109728" anchor="ctr">
                     <a:lnL w="9525" cap="flat" cmpd="sng" algn="ctr">
                       <a:solidFill>
                         <a:srgbClr val="DDE3EA"/>
@@ -24224,7 +23729,7 @@
                     <a:bodyPr/>
                     <a:lstStyle/>
                     <a:p>
-                      <a:pPr indent="0" marL="0">
+                      <a:pPr marL="0" indent="0">
                         <a:buNone/>
                       </a:pPr>
                       <a:r>
@@ -24245,7 +23750,7 @@
                       </a:endParaRPr>
                     </a:p>
                   </a:txBody>
-                  <a:tcPr marL="109728" marR="109728" marT="45720" marB="45720" anchor="ctr">
+                  <a:tcPr marL="109728" marR="109728" anchor="ctr">
                     <a:lnL w="9525" cap="flat" cmpd="sng" algn="ctr">
                       <a:solidFill>
                         <a:srgbClr val="DDE3EA"/>
@@ -24292,7 +23797,7 @@
                     <a:bodyPr/>
                     <a:lstStyle/>
                     <a:p>
-                      <a:pPr indent="0" marL="0">
+                      <a:pPr marL="0" indent="0">
                         <a:buNone/>
                       </a:pPr>
                       <a:r>
@@ -24313,7 +23818,7 @@
                       </a:endParaRPr>
                     </a:p>
                   </a:txBody>
-                  <a:tcPr marL="109728" marR="109728" marT="45720" marB="45720" anchor="ctr">
+                  <a:tcPr marL="109728" marR="109728" anchor="ctr">
                     <a:lnL w="9525" cap="flat" cmpd="sng" algn="ctr">
                       <a:solidFill>
                         <a:srgbClr val="DDE3EA"/>
@@ -24355,6 +23860,11 @@
                     </a:solidFill>
                   </a:tcPr>
                 </a:tc>
+                <a:extLst>
+                  <a:ext uri="{0D108BD9-81ED-4DB2-BD59-A6C34878D82A}">
+                    <a16:rowId xmlns:a16="http://schemas.microsoft.com/office/drawing/2014/main" val="10000"/>
+                  </a:ext>
+                </a:extLst>
               </a:tr>
               <a:tr h="566928">
                 <a:tc>
@@ -24362,7 +23872,7 @@
                     <a:bodyPr/>
                     <a:lstStyle/>
                     <a:p>
-                      <a:pPr indent="0" marL="0">
+                      <a:pPr marL="0" indent="0">
                         <a:buNone/>
                       </a:pPr>
                       <a:r>
@@ -24383,7 +23893,7 @@
                       </a:endParaRPr>
                     </a:p>
                   </a:txBody>
-                  <a:tcPr marL="109728" marR="109728" marT="45720" marB="45720" anchor="ctr">
+                  <a:tcPr marL="109728" marR="109728" anchor="ctr">
                     <a:lnL w="9525" cap="flat" cmpd="sng" algn="ctr">
                       <a:solidFill>
                         <a:srgbClr val="DDE3EA"/>
@@ -24427,7 +23937,7 @@
                     <a:bodyPr/>
                     <a:lstStyle/>
                     <a:p>
-                      <a:pPr indent="0" marL="0">
+                      <a:pPr marL="0" indent="0">
                         <a:buNone/>
                       </a:pPr>
                       <a:r>
@@ -24448,7 +23958,7 @@
                       </a:endParaRPr>
                     </a:p>
                   </a:txBody>
-                  <a:tcPr marL="109728" marR="109728" marT="45720" marB="45720" anchor="ctr">
+                  <a:tcPr marL="109728" marR="109728" anchor="ctr">
                     <a:lnL w="9525" cap="flat" cmpd="sng" algn="ctr">
                       <a:solidFill>
                         <a:srgbClr val="DDE3EA"/>
@@ -24492,7 +24002,7 @@
                     <a:bodyPr/>
                     <a:lstStyle/>
                     <a:p>
-                      <a:pPr indent="0" marL="0">
+                      <a:pPr marL="0" indent="0">
                         <a:buNone/>
                       </a:pPr>
                       <a:r>
@@ -24513,7 +24023,7 @@
                       </a:endParaRPr>
                     </a:p>
                   </a:txBody>
-                  <a:tcPr marL="109728" marR="109728" marT="45720" marB="45720" anchor="ctr">
+                  <a:tcPr marL="109728" marR="109728" anchor="ctr">
                     <a:lnL w="9525" cap="flat" cmpd="sng" algn="ctr">
                       <a:solidFill>
                         <a:srgbClr val="DDE3EA"/>
@@ -24552,6 +24062,11 @@
                     </a:lnB>
                   </a:tcPr>
                 </a:tc>
+                <a:extLst>
+                  <a:ext uri="{0D108BD9-81ED-4DB2-BD59-A6C34878D82A}">
+                    <a16:rowId xmlns:a16="http://schemas.microsoft.com/office/drawing/2014/main" val="10001"/>
+                  </a:ext>
+                </a:extLst>
               </a:tr>
               <a:tr h="566928">
                 <a:tc>
@@ -24559,7 +24074,7 @@
                     <a:bodyPr/>
                     <a:lstStyle/>
                     <a:p>
-                      <a:pPr indent="0" marL="0">
+                      <a:pPr marL="0" indent="0">
                         <a:buNone/>
                       </a:pPr>
                       <a:r>
@@ -24580,7 +24095,7 @@
                       </a:endParaRPr>
                     </a:p>
                   </a:txBody>
-                  <a:tcPr marL="109728" marR="109728" marT="45720" marB="45720" anchor="ctr">
+                  <a:tcPr marL="109728" marR="109728" anchor="ctr">
                     <a:lnL w="9525" cap="flat" cmpd="sng" algn="ctr">
                       <a:solidFill>
                         <a:srgbClr val="DDE3EA"/>
@@ -24624,7 +24139,7 @@
                     <a:bodyPr/>
                     <a:lstStyle/>
                     <a:p>
-                      <a:pPr indent="0" marL="0">
+                      <a:pPr marL="0" indent="0">
                         <a:buNone/>
                       </a:pPr>
                       <a:r>
@@ -24645,7 +24160,7 @@
                       </a:endParaRPr>
                     </a:p>
                   </a:txBody>
-                  <a:tcPr marL="109728" marR="109728" marT="45720" marB="45720" anchor="ctr">
+                  <a:tcPr marL="109728" marR="109728" anchor="ctr">
                     <a:lnL w="9525" cap="flat" cmpd="sng" algn="ctr">
                       <a:solidFill>
                         <a:srgbClr val="DDE3EA"/>
@@ -24689,7 +24204,7 @@
                     <a:bodyPr/>
                     <a:lstStyle/>
                     <a:p>
-                      <a:pPr indent="0" marL="0">
+                      <a:pPr marL="0" indent="0">
                         <a:buNone/>
                       </a:pPr>
                       <a:r>
@@ -24710,7 +24225,7 @@
                       </a:endParaRPr>
                     </a:p>
                   </a:txBody>
-                  <a:tcPr marL="109728" marR="109728" marT="45720" marB="45720" anchor="ctr">
+                  <a:tcPr marL="109728" marR="109728" anchor="ctr">
                     <a:lnL w="9525" cap="flat" cmpd="sng" algn="ctr">
                       <a:solidFill>
                         <a:srgbClr val="DDE3EA"/>
@@ -24749,6 +24264,11 @@
                     </a:lnB>
                   </a:tcPr>
                 </a:tc>
+                <a:extLst>
+                  <a:ext uri="{0D108BD9-81ED-4DB2-BD59-A6C34878D82A}">
+                    <a16:rowId xmlns:a16="http://schemas.microsoft.com/office/drawing/2014/main" val="10002"/>
+                  </a:ext>
+                </a:extLst>
               </a:tr>
               <a:tr h="566928">
                 <a:tc>
@@ -24756,7 +24276,7 @@
                     <a:bodyPr/>
                     <a:lstStyle/>
                     <a:p>
-                      <a:pPr indent="0" marL="0">
+                      <a:pPr marL="0" indent="0">
                         <a:buNone/>
                       </a:pPr>
                       <a:r>
@@ -24777,7 +24297,7 @@
                       </a:endParaRPr>
                     </a:p>
                   </a:txBody>
-                  <a:tcPr marL="109728" marR="109728" marT="45720" marB="45720" anchor="ctr">
+                  <a:tcPr marL="109728" marR="109728" anchor="ctr">
                     <a:lnL w="9525" cap="flat" cmpd="sng" algn="ctr">
                       <a:solidFill>
                         <a:srgbClr val="DDE3EA"/>
@@ -24821,7 +24341,7 @@
                     <a:bodyPr/>
                     <a:lstStyle/>
                     <a:p>
-                      <a:pPr indent="0" marL="0">
+                      <a:pPr marL="0" indent="0">
                         <a:buNone/>
                       </a:pPr>
                       <a:r>
@@ -24842,7 +24362,7 @@
                       </a:endParaRPr>
                     </a:p>
                   </a:txBody>
-                  <a:tcPr marL="109728" marR="109728" marT="45720" marB="45720" anchor="ctr">
+                  <a:tcPr marL="109728" marR="109728" anchor="ctr">
                     <a:lnL w="9525" cap="flat" cmpd="sng" algn="ctr">
                       <a:solidFill>
                         <a:srgbClr val="DDE3EA"/>
@@ -24886,7 +24406,7 @@
                     <a:bodyPr/>
                     <a:lstStyle/>
                     <a:p>
-                      <a:pPr indent="0" marL="0">
+                      <a:pPr marL="0" indent="0">
                         <a:buNone/>
                       </a:pPr>
                       <a:r>
@@ -24907,7 +24427,7 @@
                       </a:endParaRPr>
                     </a:p>
                   </a:txBody>
-                  <a:tcPr marL="109728" marR="109728" marT="45720" marB="45720" anchor="ctr">
+                  <a:tcPr marL="109728" marR="109728" anchor="ctr">
                     <a:lnL w="9525" cap="flat" cmpd="sng" algn="ctr">
                       <a:solidFill>
                         <a:srgbClr val="DDE3EA"/>
@@ -24946,6 +24466,11 @@
                     </a:lnB>
                   </a:tcPr>
                 </a:tc>
+                <a:extLst>
+                  <a:ext uri="{0D108BD9-81ED-4DB2-BD59-A6C34878D82A}">
+                    <a16:rowId xmlns:a16="http://schemas.microsoft.com/office/drawing/2014/main" val="10003"/>
+                  </a:ext>
+                </a:extLst>
               </a:tr>
               <a:tr h="566928">
                 <a:tc>
@@ -24953,7 +24478,7 @@
                     <a:bodyPr/>
                     <a:lstStyle/>
                     <a:p>
-                      <a:pPr indent="0" marL="0">
+                      <a:pPr marL="0" indent="0">
                         <a:buNone/>
                       </a:pPr>
                       <a:r>
@@ -24974,7 +24499,7 @@
                       </a:endParaRPr>
                     </a:p>
                   </a:txBody>
-                  <a:tcPr marL="109728" marR="109728" marT="45720" marB="45720" anchor="ctr">
+                  <a:tcPr marL="109728" marR="109728" anchor="ctr">
                     <a:lnL w="9525" cap="flat" cmpd="sng" algn="ctr">
                       <a:solidFill>
                         <a:srgbClr val="DDE3EA"/>
@@ -25018,7 +24543,7 @@
                     <a:bodyPr/>
                     <a:lstStyle/>
                     <a:p>
-                      <a:pPr indent="0" marL="0">
+                      <a:pPr marL="0" indent="0">
                         <a:buNone/>
                       </a:pPr>
                       <a:r>
@@ -25039,7 +24564,7 @@
                       </a:endParaRPr>
                     </a:p>
                   </a:txBody>
-                  <a:tcPr marL="109728" marR="109728" marT="45720" marB="45720" anchor="ctr">
+                  <a:tcPr marL="109728" marR="109728" anchor="ctr">
                     <a:lnL w="9525" cap="flat" cmpd="sng" algn="ctr">
                       <a:solidFill>
                         <a:srgbClr val="DDE3EA"/>
@@ -25083,7 +24608,7 @@
                     <a:bodyPr/>
                     <a:lstStyle/>
                     <a:p>
-                      <a:pPr indent="0" marL="0">
+                      <a:pPr marL="0" indent="0">
                         <a:buNone/>
                       </a:pPr>
                       <a:r>
@@ -25104,7 +24629,7 @@
                       </a:endParaRPr>
                     </a:p>
                   </a:txBody>
-                  <a:tcPr marL="109728" marR="109728" marT="45720" marB="45720" anchor="ctr">
+                  <a:tcPr marL="109728" marR="109728" anchor="ctr">
                     <a:lnL w="9525" cap="flat" cmpd="sng" algn="ctr">
                       <a:solidFill>
                         <a:srgbClr val="DDE3EA"/>
@@ -25143,6 +24668,11 @@
                     </a:lnB>
                   </a:tcPr>
                 </a:tc>
+                <a:extLst>
+                  <a:ext uri="{0D108BD9-81ED-4DB2-BD59-A6C34878D82A}">
+                    <a16:rowId xmlns:a16="http://schemas.microsoft.com/office/drawing/2014/main" val="10004"/>
+                  </a:ext>
+                </a:extLst>
               </a:tr>
               <a:tr h="566928">
                 <a:tc>
@@ -25150,7 +24680,7 @@
                     <a:bodyPr/>
                     <a:lstStyle/>
                     <a:p>
-                      <a:pPr indent="0" marL="0">
+                      <a:pPr marL="0" indent="0">
                         <a:buNone/>
                       </a:pPr>
                       <a:r>
@@ -25171,7 +24701,7 @@
                       </a:endParaRPr>
                     </a:p>
                   </a:txBody>
-                  <a:tcPr marL="109728" marR="109728" marT="45720" marB="45720" anchor="ctr">
+                  <a:tcPr marL="109728" marR="109728" anchor="ctr">
                     <a:lnL w="9525" cap="flat" cmpd="sng" algn="ctr">
                       <a:solidFill>
                         <a:srgbClr val="DDE3EA"/>
@@ -25215,7 +24745,7 @@
                     <a:bodyPr/>
                     <a:lstStyle/>
                     <a:p>
-                      <a:pPr indent="0" marL="0">
+                      <a:pPr marL="0" indent="0">
                         <a:buNone/>
                       </a:pPr>
                       <a:r>
@@ -25236,7 +24766,7 @@
                       </a:endParaRPr>
                     </a:p>
                   </a:txBody>
-                  <a:tcPr marL="109728" marR="109728" marT="45720" marB="45720" anchor="ctr">
+                  <a:tcPr marL="109728" marR="109728" anchor="ctr">
                     <a:lnL w="9525" cap="flat" cmpd="sng" algn="ctr">
                       <a:solidFill>
                         <a:srgbClr val="DDE3EA"/>
@@ -25280,7 +24810,7 @@
                     <a:bodyPr/>
                     <a:lstStyle/>
                     <a:p>
-                      <a:pPr indent="0" marL="0">
+                      <a:pPr marL="0" indent="0">
                         <a:buNone/>
                       </a:pPr>
                       <a:r>
@@ -25301,7 +24831,7 @@
                       </a:endParaRPr>
                     </a:p>
                   </a:txBody>
-                  <a:tcPr marL="109728" marR="109728" marT="45720" marB="45720" anchor="ctr">
+                  <a:tcPr marL="109728" marR="109728" anchor="ctr">
                     <a:lnL w="9525" cap="flat" cmpd="sng" algn="ctr">
                       <a:solidFill>
                         <a:srgbClr val="DDE3EA"/>
@@ -25340,6 +24870,11 @@
                     </a:lnB>
                   </a:tcPr>
                 </a:tc>
+                <a:extLst>
+                  <a:ext uri="{0D108BD9-81ED-4DB2-BD59-A6C34878D82A}">
+                    <a16:rowId xmlns:a16="http://schemas.microsoft.com/office/drawing/2014/main" val="10005"/>
+                  </a:ext>
+                </a:extLst>
               </a:tr>
               <a:tr h="566928">
                 <a:tc>
@@ -25347,7 +24882,7 @@
                     <a:bodyPr/>
                     <a:lstStyle/>
                     <a:p>
-                      <a:pPr indent="0" marL="0">
+                      <a:pPr marL="0" indent="0">
                         <a:buNone/>
                       </a:pPr>
                       <a:r>
@@ -25368,7 +24903,7 @@
                       </a:endParaRPr>
                     </a:p>
                   </a:txBody>
-                  <a:tcPr marL="109728" marR="109728" marT="45720" marB="45720" anchor="ctr">
+                  <a:tcPr marL="109728" marR="109728" anchor="ctr">
                     <a:lnL w="9525" cap="flat" cmpd="sng" algn="ctr">
                       <a:solidFill>
                         <a:srgbClr val="DDE3EA"/>
@@ -25412,7 +24947,7 @@
                     <a:bodyPr/>
                     <a:lstStyle/>
                     <a:p>
-                      <a:pPr indent="0" marL="0">
+                      <a:pPr marL="0" indent="0">
                         <a:buNone/>
                       </a:pPr>
                       <a:r>
@@ -25433,7 +24968,7 @@
                       </a:endParaRPr>
                     </a:p>
                   </a:txBody>
-                  <a:tcPr marL="109728" marR="109728" marT="45720" marB="45720" anchor="ctr">
+                  <a:tcPr marL="109728" marR="109728" anchor="ctr">
                     <a:lnL w="9525" cap="flat" cmpd="sng" algn="ctr">
                       <a:solidFill>
                         <a:srgbClr val="DDE3EA"/>
@@ -25477,7 +25012,7 @@
                     <a:bodyPr/>
                     <a:lstStyle/>
                     <a:p>
-                      <a:pPr indent="0" marL="0">
+                      <a:pPr marL="0" indent="0">
                         <a:buNone/>
                       </a:pPr>
                       <a:r>
@@ -25498,7 +25033,7 @@
                       </a:endParaRPr>
                     </a:p>
                   </a:txBody>
-                  <a:tcPr marL="109728" marR="109728" marT="45720" marB="45720" anchor="ctr">
+                  <a:tcPr marL="109728" marR="109728" anchor="ctr">
                     <a:lnL w="9525" cap="flat" cmpd="sng" algn="ctr">
                       <a:solidFill>
                         <a:srgbClr val="DDE3EA"/>
@@ -25537,6 +25072,11 @@
                     </a:lnB>
                   </a:tcPr>
                 </a:tc>
+                <a:extLst>
+                  <a:ext uri="{0D108BD9-81ED-4DB2-BD59-A6C34878D82A}">
+                    <a16:rowId xmlns:a16="http://schemas.microsoft.com/office/drawing/2014/main" val="10006"/>
+                  </a:ext>
+                </a:extLst>
               </a:tr>
             </a:tbl>
           </a:graphicData>
@@ -25558,6 +25098,7 @@
         <a:solidFill>
           <a:srgbClr val="F7F7F4"/>
         </a:solidFill>
+        <a:effectLst/>
       </p:bgPr>
     </p:bg>
     <p:spTree>
@@ -25595,11 +25136,11 @@
           <a:bodyPr wrap="square" lIns="0" tIns="0" rIns="0" bIns="0" rtlCol="0" anchor="ctr"/>
           <a:lstStyle/>
           <a:p>
-            <a:pPr indent="0" marL="0">
-              <a:buNone/>
-            </a:pPr>
-            <a:r>
-              <a:rPr lang="en-US" sz="1200" b="1" spc="200" kern="0" dirty="0">
+            <a:pPr marL="0" indent="0">
+              <a:buNone/>
+            </a:pPr>
+            <a:r>
+              <a:rPr lang="en-US" sz="1200" b="1" kern="0" spc="200" dirty="0">
                 <a:solidFill>
                   <a:srgbClr val="3762FF"/>
                 </a:solidFill>
@@ -25634,7 +25175,7 @@
           <a:bodyPr wrap="square" lIns="0" tIns="0" rIns="0" bIns="0" rtlCol="0" anchor="t"/>
           <a:lstStyle/>
           <a:p>
-            <a:pPr indent="0" marL="0">
+            <a:pPr marL="0" indent="0">
               <a:buNone/>
             </a:pPr>
             <a:r>
@@ -25678,7 +25219,7 @@
             <a:prstDash val="solid"/>
           </a:ln>
           <a:effectLst>
-            <a:outerShdw sx="100000" sy="100000" kx="0" ky="0" algn="bl" rotWithShape="0" blurRad="101600" dist="25400" dir="5400000">
+            <a:outerShdw blurRad="101600" dist="25400" dir="5400000" algn="bl" rotWithShape="0">
               <a:srgbClr val="000000">
                 <a:alpha val="10000"/>
               </a:srgbClr>
@@ -25707,7 +25248,7 @@
           <a:bodyPr wrap="square" lIns="0" tIns="0" rIns="0" bIns="0" rtlCol="0" anchor="t"/>
           <a:lstStyle/>
           <a:p>
-            <a:pPr indent="0" marL="0">
+            <a:pPr marL="0" indent="0">
               <a:buNone/>
             </a:pPr>
             <a:r>
@@ -25746,7 +25287,7 @@
           <a:bodyPr wrap="square" lIns="0" tIns="0" rIns="0" bIns="0" rtlCol="0" anchor="t"/>
           <a:lstStyle/>
           <a:p>
-            <a:pPr indent="0" marL="0">
+            <a:pPr marL="0" indent="0">
               <a:lnSpc>
                 <a:spcPct val="115000"/>
               </a:lnSpc>
@@ -25793,7 +25334,7 @@
             <a:prstDash val="solid"/>
           </a:ln>
           <a:effectLst>
-            <a:outerShdw sx="100000" sy="100000" kx="0" ky="0" algn="bl" rotWithShape="0" blurRad="101600" dist="25400" dir="5400000">
+            <a:outerShdw blurRad="101600" dist="25400" dir="5400000" algn="bl" rotWithShape="0">
               <a:srgbClr val="000000">
                 <a:alpha val="10000"/>
               </a:srgbClr>
@@ -25822,7 +25363,7 @@
           <a:bodyPr wrap="square" lIns="0" tIns="0" rIns="0" bIns="0" rtlCol="0" anchor="t"/>
           <a:lstStyle/>
           <a:p>
-            <a:pPr indent="0" marL="0">
+            <a:pPr marL="0" indent="0">
               <a:buNone/>
             </a:pPr>
             <a:r>
@@ -25861,7 +25402,7 @@
           <a:bodyPr wrap="square" lIns="0" tIns="0" rIns="0" bIns="0" rtlCol="0" anchor="t"/>
           <a:lstStyle/>
           <a:p>
-            <a:pPr indent="0" marL="0">
+            <a:pPr marL="0" indent="0">
               <a:lnSpc>
                 <a:spcPct val="115000"/>
               </a:lnSpc>
@@ -25908,7 +25449,7 @@
             <a:prstDash val="solid"/>
           </a:ln>
           <a:effectLst>
-            <a:outerShdw sx="100000" sy="100000" kx="0" ky="0" algn="bl" rotWithShape="0" blurRad="101600" dist="25400" dir="5400000">
+            <a:outerShdw blurRad="101600" dist="25400" dir="5400000" algn="bl" rotWithShape="0">
               <a:srgbClr val="000000">
                 <a:alpha val="10000"/>
               </a:srgbClr>
@@ -25937,7 +25478,7 @@
           <a:bodyPr wrap="square" lIns="0" tIns="0" rIns="0" bIns="0" rtlCol="0" anchor="t"/>
           <a:lstStyle/>
           <a:p>
-            <a:pPr indent="0" marL="0">
+            <a:pPr marL="0" indent="0">
               <a:buNone/>
             </a:pPr>
             <a:r>
@@ -25976,7 +25517,7 @@
           <a:bodyPr wrap="square" lIns="0" tIns="0" rIns="0" bIns="0" rtlCol="0" anchor="t"/>
           <a:lstStyle/>
           <a:p>
-            <a:pPr indent="0" marL="0">
+            <a:pPr marL="0" indent="0">
               <a:lnSpc>
                 <a:spcPct val="115000"/>
               </a:lnSpc>
@@ -26023,7 +25564,7 @@
             <a:prstDash val="solid"/>
           </a:ln>
           <a:effectLst>
-            <a:outerShdw sx="100000" sy="100000" kx="0" ky="0" algn="bl" rotWithShape="0" blurRad="101600" dist="25400" dir="5400000">
+            <a:outerShdw blurRad="101600" dist="25400" dir="5400000" algn="bl" rotWithShape="0">
               <a:srgbClr val="000000">
                 <a:alpha val="10000"/>
               </a:srgbClr>
@@ -26052,7 +25593,7 @@
           <a:bodyPr wrap="square" lIns="0" tIns="0" rIns="0" bIns="0" rtlCol="0" anchor="t"/>
           <a:lstStyle/>
           <a:p>
-            <a:pPr indent="0" marL="0">
+            <a:pPr marL="0" indent="0">
               <a:buNone/>
             </a:pPr>
             <a:r>
@@ -26091,7 +25632,7 @@
           <a:bodyPr wrap="square" lIns="0" tIns="0" rIns="0" bIns="0" rtlCol="0" anchor="t"/>
           <a:lstStyle/>
           <a:p>
-            <a:pPr indent="0" marL="0">
+            <a:pPr marL="0" indent="0">
               <a:lnSpc>
                 <a:spcPct val="115000"/>
               </a:lnSpc>
@@ -26138,7 +25679,7 @@
             <a:prstDash val="solid"/>
           </a:ln>
           <a:effectLst>
-            <a:outerShdw sx="100000" sy="100000" kx="0" ky="0" algn="bl" rotWithShape="0" blurRad="101600" dist="25400" dir="5400000">
+            <a:outerShdw blurRad="101600" dist="25400" dir="5400000" algn="bl" rotWithShape="0">
               <a:srgbClr val="000000">
                 <a:alpha val="10000"/>
               </a:srgbClr>
@@ -26167,7 +25708,7 @@
           <a:bodyPr wrap="square" lIns="0" tIns="0" rIns="0" bIns="0" rtlCol="0" anchor="t"/>
           <a:lstStyle/>
           <a:p>
-            <a:pPr indent="0" marL="0">
+            <a:pPr marL="0" indent="0">
               <a:buNone/>
             </a:pPr>
             <a:r>
@@ -26206,7 +25747,7 @@
           <a:bodyPr wrap="square" lIns="0" tIns="0" rIns="0" bIns="0" rtlCol="0" anchor="t"/>
           <a:lstStyle/>
           <a:p>
-            <a:pPr indent="0" marL="0">
+            <a:pPr marL="0" indent="0">
               <a:lnSpc>
                 <a:spcPct val="115000"/>
               </a:lnSpc>
@@ -26253,7 +25794,7 @@
             <a:prstDash val="solid"/>
           </a:ln>
           <a:effectLst>
-            <a:outerShdw sx="100000" sy="100000" kx="0" ky="0" algn="bl" rotWithShape="0" blurRad="101600" dist="25400" dir="5400000">
+            <a:outerShdw blurRad="101600" dist="25400" dir="5400000" algn="bl" rotWithShape="0">
               <a:srgbClr val="000000">
                 <a:alpha val="10000"/>
               </a:srgbClr>
@@ -26282,7 +25823,7 @@
           <a:bodyPr wrap="square" lIns="0" tIns="0" rIns="0" bIns="0" rtlCol="0" anchor="t"/>
           <a:lstStyle/>
           <a:p>
-            <a:pPr indent="0" marL="0">
+            <a:pPr marL="0" indent="0">
               <a:buNone/>
             </a:pPr>
             <a:r>
@@ -26321,7 +25862,7 @@
           <a:bodyPr wrap="square" lIns="0" tIns="0" rIns="0" bIns="0" rtlCol="0" anchor="t"/>
           <a:lstStyle/>
           <a:p>
-            <a:pPr indent="0" marL="0">
+            <a:pPr marL="0" indent="0">
               <a:lnSpc>
                 <a:spcPct val="115000"/>
               </a:lnSpc>
@@ -26368,7 +25909,7 @@
             <a:prstDash val="solid"/>
           </a:ln>
           <a:effectLst>
-            <a:outerShdw sx="100000" sy="100000" kx="0" ky="0" algn="bl" rotWithShape="0" blurRad="101600" dist="25400" dir="5400000">
+            <a:outerShdw blurRad="101600" dist="25400" dir="5400000" algn="bl" rotWithShape="0">
               <a:srgbClr val="000000">
                 <a:alpha val="10000"/>
               </a:srgbClr>
@@ -26397,7 +25938,7 @@
           <a:bodyPr wrap="square" lIns="0" tIns="0" rIns="0" bIns="0" rtlCol="0" anchor="t"/>
           <a:lstStyle/>
           <a:p>
-            <a:pPr indent="0" marL="0">
+            <a:pPr marL="0" indent="0">
               <a:buNone/>
             </a:pPr>
             <a:r>
@@ -26436,7 +25977,7 @@
           <a:bodyPr wrap="square" lIns="0" tIns="0" rIns="0" bIns="0" rtlCol="0" anchor="t"/>
           <a:lstStyle/>
           <a:p>
-            <a:pPr indent="0" marL="0">
+            <a:pPr marL="0" indent="0">
               <a:lnSpc>
                 <a:spcPct val="115000"/>
               </a:lnSpc>
@@ -26483,7 +26024,7 @@
             <a:prstDash val="solid"/>
           </a:ln>
           <a:effectLst>
-            <a:outerShdw sx="100000" sy="100000" kx="0" ky="0" algn="bl" rotWithShape="0" blurRad="101600" dist="25400" dir="5400000">
+            <a:outerShdw blurRad="101600" dist="25400" dir="5400000" algn="bl" rotWithShape="0">
               <a:srgbClr val="000000">
                 <a:alpha val="10000"/>
               </a:srgbClr>
@@ -26512,7 +26053,7 @@
           <a:bodyPr wrap="square" lIns="0" tIns="0" rIns="0" bIns="0" rtlCol="0" anchor="t"/>
           <a:lstStyle/>
           <a:p>
-            <a:pPr indent="0" marL="0">
+            <a:pPr marL="0" indent="0">
               <a:buNone/>
             </a:pPr>
             <a:r>
@@ -26551,7 +26092,7 @@
           <a:bodyPr wrap="square" lIns="0" tIns="0" rIns="0" bIns="0" rtlCol="0" anchor="t"/>
           <a:lstStyle/>
           <a:p>
-            <a:pPr indent="0" marL="0">
+            <a:pPr marL="0" indent="0">
               <a:lnSpc>
                 <a:spcPct val="115000"/>
               </a:lnSpc>
@@ -26598,7 +26139,7 @@
             <a:prstDash val="solid"/>
           </a:ln>
           <a:effectLst>
-            <a:outerShdw sx="100000" sy="100000" kx="0" ky="0" algn="bl" rotWithShape="0" blurRad="101600" dist="25400" dir="5400000">
+            <a:outerShdw blurRad="101600" dist="25400" dir="5400000" algn="bl" rotWithShape="0">
               <a:srgbClr val="000000">
                 <a:alpha val="10000"/>
               </a:srgbClr>
@@ -26627,7 +26168,7 @@
           <a:bodyPr wrap="square" lIns="0" tIns="0" rIns="0" bIns="0" rtlCol="0" anchor="t"/>
           <a:lstStyle/>
           <a:p>
-            <a:pPr indent="0" marL="0">
+            <a:pPr marL="0" indent="0">
               <a:buNone/>
             </a:pPr>
             <a:r>
@@ -26666,7 +26207,7 @@
           <a:bodyPr wrap="square" lIns="0" tIns="0" rIns="0" bIns="0" rtlCol="0" anchor="t"/>
           <a:lstStyle/>
           <a:p>
-            <a:pPr indent="0" marL="0">
+            <a:pPr marL="0" indent="0">
               <a:lnSpc>
                 <a:spcPct val="115000"/>
               </a:lnSpc>
@@ -26735,7 +26276,7 @@
           <a:bodyPr wrap="square" lIns="0" tIns="0" rIns="0" bIns="0" rtlCol="0" anchor="t"/>
           <a:lstStyle/>
           <a:p>
-            <a:pPr indent="0" marL="0">
+            <a:pPr marL="0" indent="0">
               <a:buNone/>
             </a:pPr>
             <a:r>
@@ -26774,7 +26315,7 @@
           <a:bodyPr wrap="square" lIns="0" tIns="0" rIns="0" bIns="0" rtlCol="0" anchor="t"/>
           <a:lstStyle/>
           <a:p>
-            <a:pPr indent="0" marL="0">
+            <a:pPr marL="0" indent="0">
               <a:lnSpc>
                 <a:spcPct val="115000"/>
               </a:lnSpc>
@@ -26811,6 +26352,7 @@
         <a:solidFill>
           <a:srgbClr val="0F1F33"/>
         </a:solidFill>
+        <a:effectLst/>
       </p:bgPr>
     </p:bg>
     <p:spTree>
@@ -26848,11 +26390,11 @@
           <a:bodyPr wrap="square" lIns="0" tIns="0" rIns="0" bIns="0" rtlCol="0" anchor="ctr"/>
           <a:lstStyle/>
           <a:p>
-            <a:pPr indent="0" marL="0">
-              <a:buNone/>
-            </a:pPr>
-            <a:r>
-              <a:rPr lang="en-US" sz="1200" b="1" spc="200" kern="0" dirty="0">
+            <a:pPr marL="0" indent="0">
+              <a:buNone/>
+            </a:pPr>
+            <a:r>
+              <a:rPr lang="en-US" sz="1200" b="1" kern="0" spc="200" dirty="0">
                 <a:solidFill>
                   <a:srgbClr val="7C9CFF"/>
                 </a:solidFill>
@@ -26887,7 +26429,7 @@
           <a:bodyPr wrap="square" lIns="0" tIns="0" rIns="0" bIns="0" rtlCol="0" anchor="t"/>
           <a:lstStyle/>
           <a:p>
-            <a:pPr indent="0" marL="0">
+            <a:pPr marL="0" indent="0">
               <a:buNone/>
             </a:pPr>
             <a:r>
@@ -26926,7 +26468,7 @@
           <a:bodyPr wrap="square" lIns="0" tIns="0" rIns="0" bIns="0" rtlCol="0" anchor="t"/>
           <a:lstStyle/>
           <a:p>
-            <a:pPr indent="0" marL="0">
+            <a:pPr marL="0" indent="0">
               <a:lnSpc>
                 <a:spcPct val="120000"/>
               </a:lnSpc>
@@ -26995,7 +26537,7 @@
           <a:bodyPr wrap="square" lIns="0" tIns="0" rIns="0" bIns="0" rtlCol="0" anchor="t"/>
           <a:lstStyle/>
           <a:p>
-            <a:pPr indent="0" marL="0">
+            <a:pPr marL="0" indent="0">
               <a:buNone/>
             </a:pPr>
             <a:r>
@@ -27034,7 +26576,7 @@
           <a:bodyPr wrap="square" lIns="0" tIns="0" rIns="0" bIns="0" rtlCol="0" anchor="t"/>
           <a:lstStyle/>
           <a:p>
-            <a:pPr indent="0" marL="0">
+            <a:pPr marL="0" indent="0">
               <a:lnSpc>
                 <a:spcPct val="115000"/>
               </a:lnSpc>
@@ -27103,7 +26645,7 @@
           <a:bodyPr wrap="square" lIns="0" tIns="0" rIns="0" bIns="0" rtlCol="0" anchor="t"/>
           <a:lstStyle/>
           <a:p>
-            <a:pPr indent="0" marL="0">
+            <a:pPr marL="0" indent="0">
               <a:buNone/>
             </a:pPr>
             <a:r>
@@ -27142,7 +26684,7 @@
           <a:bodyPr wrap="square" lIns="0" tIns="0" rIns="0" bIns="0" rtlCol="0" anchor="t"/>
           <a:lstStyle/>
           <a:p>
-            <a:pPr indent="0" marL="0">
+            <a:pPr marL="0" indent="0">
               <a:lnSpc>
                 <a:spcPct val="115000"/>
               </a:lnSpc>
@@ -27211,7 +26753,7 @@
           <a:bodyPr wrap="square" lIns="0" tIns="0" rIns="0" bIns="0" rtlCol="0" anchor="t"/>
           <a:lstStyle/>
           <a:p>
-            <a:pPr indent="0" marL="0">
+            <a:pPr marL="0" indent="0">
               <a:buNone/>
             </a:pPr>
             <a:r>
@@ -27250,7 +26792,7 @@
           <a:bodyPr wrap="square" lIns="0" tIns="0" rIns="0" bIns="0" rtlCol="0" anchor="t"/>
           <a:lstStyle/>
           <a:p>
-            <a:pPr indent="0" marL="0">
+            <a:pPr marL="0" indent="0">
               <a:lnSpc>
                 <a:spcPct val="115000"/>
               </a:lnSpc>
@@ -27319,7 +26861,7 @@
           <a:bodyPr wrap="square" lIns="0" tIns="0" rIns="0" bIns="0" rtlCol="0" anchor="t"/>
           <a:lstStyle/>
           <a:p>
-            <a:pPr indent="0" marL="0">
+            <a:pPr marL="0" indent="0">
               <a:buNone/>
             </a:pPr>
             <a:r>
@@ -27358,7 +26900,7 @@
           <a:bodyPr wrap="square" lIns="0" tIns="0" rIns="0" bIns="0" rtlCol="0" anchor="t"/>
           <a:lstStyle/>
           <a:p>
-            <a:pPr indent="0" marL="0">
+            <a:pPr marL="0" indent="0">
               <a:lnSpc>
                 <a:spcPct val="115000"/>
               </a:lnSpc>
@@ -27427,7 +26969,7 @@
           <a:bodyPr wrap="square" lIns="0" tIns="0" rIns="0" bIns="0" rtlCol="0" anchor="t"/>
           <a:lstStyle/>
           <a:p>
-            <a:pPr indent="0" marL="0">
+            <a:pPr marL="0" indent="0">
               <a:buNone/>
             </a:pPr>
             <a:r>
@@ -27466,7 +27008,7 @@
           <a:bodyPr wrap="square" lIns="0" tIns="0" rIns="0" bIns="0" rtlCol="0" anchor="t"/>
           <a:lstStyle/>
           <a:p>
-            <a:pPr indent="0" marL="0">
+            <a:pPr marL="0" indent="0">
               <a:lnSpc>
                 <a:spcPct val="115000"/>
               </a:lnSpc>
@@ -27535,7 +27077,7 @@
           <a:bodyPr wrap="square" lIns="0" tIns="0" rIns="0" bIns="0" rtlCol="0" anchor="t"/>
           <a:lstStyle/>
           <a:p>
-            <a:pPr indent="0" marL="0">
+            <a:pPr marL="0" indent="0">
               <a:buNone/>
             </a:pPr>
             <a:r>
@@ -27574,7 +27116,7 @@
           <a:bodyPr wrap="square" lIns="0" tIns="0" rIns="0" bIns="0" rtlCol="0" anchor="t"/>
           <a:lstStyle/>
           <a:p>
-            <a:pPr indent="0" marL="0">
+            <a:pPr marL="0" indent="0">
               <a:lnSpc>
                 <a:spcPct val="115000"/>
               </a:lnSpc>
@@ -27643,7 +27185,7 @@
           <a:bodyPr wrap="square" lIns="0" tIns="0" rIns="0" bIns="0" rtlCol="0" anchor="t"/>
           <a:lstStyle/>
           <a:p>
-            <a:pPr indent="0" marL="0">
+            <a:pPr marL="0" indent="0">
               <a:buNone/>
             </a:pPr>
             <a:r>
@@ -27682,7 +27224,7 @@
           <a:bodyPr wrap="square" lIns="0" tIns="0" rIns="0" bIns="0" rtlCol="0" anchor="t"/>
           <a:lstStyle/>
           <a:p>
-            <a:pPr indent="0" marL="0">
+            <a:pPr marL="0" indent="0">
               <a:lnSpc>
                 <a:spcPct val="115000"/>
               </a:lnSpc>
@@ -27751,7 +27293,7 @@
           <a:bodyPr wrap="square" lIns="0" tIns="0" rIns="0" bIns="0" rtlCol="0" anchor="t"/>
           <a:lstStyle/>
           <a:p>
-            <a:pPr indent="0" marL="0">
+            <a:pPr marL="0" indent="0">
               <a:buNone/>
             </a:pPr>
             <a:r>
@@ -27790,7 +27332,7 @@
           <a:bodyPr wrap="square" lIns="0" tIns="0" rIns="0" bIns="0" rtlCol="0" anchor="t"/>
           <a:lstStyle/>
           <a:p>
-            <a:pPr indent="0" marL="0">
+            <a:pPr marL="0" indent="0">
               <a:lnSpc>
                 <a:spcPct val="115000"/>
               </a:lnSpc>
@@ -27827,6 +27369,7 @@
         <a:solidFill>
           <a:srgbClr val="0F1F33"/>
         </a:solidFill>
+        <a:effectLst/>
       </p:bgPr>
     </p:bg>
     <p:spTree>
@@ -27864,11 +27407,11 @@
           <a:bodyPr wrap="square" lIns="0" tIns="0" rIns="0" bIns="0" rtlCol="0" anchor="ctr"/>
           <a:lstStyle/>
           <a:p>
-            <a:pPr indent="0" marL="0">
-              <a:buNone/>
-            </a:pPr>
-            <a:r>
-              <a:rPr lang="en-US" sz="1200" b="1" spc="200" kern="0" dirty="0">
+            <a:pPr marL="0" indent="0">
+              <a:buNone/>
+            </a:pPr>
+            <a:r>
+              <a:rPr lang="en-US" sz="1200" b="1" kern="0" spc="200" dirty="0">
                 <a:solidFill>
                   <a:srgbClr val="7C9CFF"/>
                 </a:solidFill>
@@ -27903,7 +27446,7 @@
           <a:bodyPr wrap="square" lIns="0" tIns="0" rIns="0" bIns="0" rtlCol="0" anchor="ctr"/>
           <a:lstStyle/>
           <a:p>
-            <a:pPr indent="0" marL="0">
+            <a:pPr marL="0" indent="0">
               <a:buNone/>
             </a:pPr>
             <a:r>
@@ -27942,7 +27485,7 @@
           <a:bodyPr wrap="square" lIns="0" tIns="0" rIns="0" bIns="0" rtlCol="0" anchor="t"/>
           <a:lstStyle/>
           <a:p>
-            <a:pPr indent="0" marL="0">
+            <a:pPr marL="0" indent="0">
               <a:lnSpc>
                 <a:spcPct val="120000"/>
               </a:lnSpc>
@@ -27984,7 +27527,7 @@
           <a:bodyPr wrap="square" lIns="0" tIns="0" rIns="0" bIns="0" rtlCol="0" anchor="ctr"/>
           <a:lstStyle/>
           <a:p>
-            <a:pPr indent="0" marL="0">
+            <a:pPr marL="0" indent="0">
               <a:buNone/>
             </a:pPr>
             <a:r>
@@ -28018,6 +27561,7 @@
         <a:solidFill>
           <a:srgbClr val="0F1F33"/>
         </a:solidFill>
+        <a:effectLst/>
       </p:bgPr>
     </p:bg>
     <p:spTree>
@@ -28055,7 +27599,7 @@
           <a:bodyPr wrap="square" lIns="0" tIns="0" rIns="0" bIns="0" rtlCol="0" anchor="ctr"/>
           <a:lstStyle/>
           <a:p>
-            <a:pPr indent="0" marL="0">
+            <a:pPr marL="0" indent="0">
               <a:buNone/>
             </a:pPr>
             <a:r>
@@ -28094,7 +27638,7 @@
           <a:bodyPr wrap="square" lIns="0" tIns="0" rIns="0" bIns="0" rtlCol="0" anchor="ctr"/>
           <a:lstStyle/>
           <a:p>
-            <a:pPr indent="0" marL="0">
+            <a:pPr marL="0" indent="0">
               <a:buNone/>
             </a:pPr>
             <a:r>
@@ -28133,7 +27677,7 @@
           <a:bodyPr wrap="square" lIns="0" tIns="0" rIns="0" bIns="0" rtlCol="0" anchor="t"/>
           <a:lstStyle/>
           <a:p>
-            <a:pPr indent="0" marL="0">
+            <a:pPr marL="0" indent="0">
               <a:lnSpc>
                 <a:spcPct val="120000"/>
               </a:lnSpc>
@@ -28170,6 +27714,7 @@
         <a:solidFill>
           <a:srgbClr val="F7F7F4"/>
         </a:solidFill>
+        <a:effectLst/>
       </p:bgPr>
     </p:bg>
     <p:spTree>
@@ -28207,11 +27752,11 @@
           <a:bodyPr wrap="square" lIns="0" tIns="0" rIns="0" bIns="0" rtlCol="0" anchor="ctr"/>
           <a:lstStyle/>
           <a:p>
-            <a:pPr indent="0" marL="0">
-              <a:buNone/>
-            </a:pPr>
-            <a:r>
-              <a:rPr lang="en-US" sz="1200" b="1" spc="200" kern="0" dirty="0">
+            <a:pPr marL="0" indent="0">
+              <a:buNone/>
+            </a:pPr>
+            <a:r>
+              <a:rPr lang="en-US" sz="1200" b="1" kern="0" spc="200" dirty="0">
                 <a:solidFill>
                   <a:srgbClr val="3762FF"/>
                 </a:solidFill>
@@ -28246,7 +27791,7 @@
           <a:bodyPr wrap="square" lIns="0" tIns="0" rIns="0" bIns="0" rtlCol="0" anchor="t"/>
           <a:lstStyle/>
           <a:p>
-            <a:pPr indent="0" marL="0">
+            <a:pPr marL="0" indent="0">
               <a:buNone/>
             </a:pPr>
             <a:r>
@@ -28285,7 +27830,7 @@
           <a:bodyPr wrap="square" lIns="0" tIns="0" rIns="0" bIns="0" rtlCol="0" anchor="t"/>
           <a:lstStyle/>
           <a:p>
-            <a:pPr indent="0" marL="0">
+            <a:pPr marL="0" indent="0">
               <a:lnSpc>
                 <a:spcPct val="120000"/>
               </a:lnSpc>
@@ -28327,7 +27872,7 @@
           <a:bodyPr wrap="square" lIns="0" tIns="0" rIns="0" bIns="0" rtlCol="0" anchor="t"/>
           <a:lstStyle/>
           <a:p>
-            <a:pPr indent="0" marL="0">
+            <a:pPr marL="0" indent="0">
               <a:lnSpc>
                 <a:spcPct val="120000"/>
               </a:lnSpc>
@@ -28374,7 +27919,7 @@
             <a:prstDash val="solid"/>
           </a:ln>
           <a:effectLst>
-            <a:outerShdw sx="100000" sy="100000" kx="0" ky="0" algn="bl" rotWithShape="0" blurRad="101600" dist="25400" dir="5400000">
+            <a:outerShdw blurRad="101600" dist="25400" dir="5400000" algn="bl" rotWithShape="0">
               <a:srgbClr val="000000">
                 <a:alpha val="10000"/>
               </a:srgbClr>
@@ -28403,11 +27948,11 @@
           <a:bodyPr wrap="square" lIns="0" tIns="0" rIns="0" bIns="0" rtlCol="0" anchor="ctr"/>
           <a:lstStyle/>
           <a:p>
-            <a:pPr indent="0" marL="0">
-              <a:buNone/>
-            </a:pPr>
-            <a:r>
-              <a:rPr lang="en-US" sz="1100" b="1" spc="200" kern="0" dirty="0">
+            <a:pPr marL="0" indent="0">
+              <a:buNone/>
+            </a:pPr>
+            <a:r>
+              <a:rPr lang="en-US" sz="1100" b="1" kern="0" spc="200" dirty="0">
                 <a:solidFill>
                   <a:srgbClr val="3762FF"/>
                 </a:solidFill>
@@ -28469,7 +28014,7 @@
           <a:bodyPr wrap="square" lIns="0" tIns="0" rIns="0" bIns="0" rtlCol="0" anchor="ctr"/>
           <a:lstStyle/>
           <a:p>
-            <a:pPr algn="ctr" indent="0" marL="0">
+            <a:pPr marL="0" indent="0" algn="ctr">
               <a:buNone/>
             </a:pPr>
             <a:r>
@@ -28535,7 +28080,7 @@
           <a:bodyPr wrap="square" lIns="0" tIns="0" rIns="0" bIns="0" rtlCol="0" anchor="ctr"/>
           <a:lstStyle/>
           <a:p>
-            <a:pPr algn="ctr" indent="0" marL="0">
+            <a:pPr marL="0" indent="0" algn="ctr">
               <a:buNone/>
             </a:pPr>
             <a:r>
@@ -28601,7 +28146,7 @@
           <a:bodyPr wrap="square" lIns="0" tIns="0" rIns="0" bIns="0" rtlCol="0" anchor="ctr"/>
           <a:lstStyle/>
           <a:p>
-            <a:pPr algn="ctr" indent="0" marL="0">
+            <a:pPr marL="0" indent="0" algn="ctr">
               <a:buNone/>
             </a:pPr>
             <a:r>
@@ -28667,7 +28212,7 @@
           <a:bodyPr wrap="square" lIns="0" tIns="0" rIns="0" bIns="0" rtlCol="0" anchor="ctr"/>
           <a:lstStyle/>
           <a:p>
-            <a:pPr algn="ctr" indent="0" marL="0">
+            <a:pPr marL="0" indent="0" algn="ctr">
               <a:buNone/>
             </a:pPr>
             <a:r>
@@ -28733,7 +28278,7 @@
           <a:bodyPr wrap="square" lIns="0" tIns="0" rIns="0" bIns="0" rtlCol="0" anchor="ctr"/>
           <a:lstStyle/>
           <a:p>
-            <a:pPr algn="ctr" indent="0" marL="0">
+            <a:pPr marL="0" indent="0" algn="ctr">
               <a:buNone/>
             </a:pPr>
             <a:r>
@@ -28799,7 +28344,7 @@
           <a:bodyPr wrap="square" lIns="0" tIns="0" rIns="0" bIns="0" rtlCol="0" anchor="ctr"/>
           <a:lstStyle/>
           <a:p>
-            <a:pPr algn="ctr" indent="0" marL="0">
+            <a:pPr marL="0" indent="0" algn="ctr">
               <a:buNone/>
             </a:pPr>
             <a:r>
@@ -28865,7 +28410,7 @@
           <a:bodyPr wrap="square" lIns="0" tIns="0" rIns="0" bIns="0" rtlCol="0" anchor="ctr"/>
           <a:lstStyle/>
           <a:p>
-            <a:pPr algn="ctr" indent="0" marL="0">
+            <a:pPr marL="0" indent="0" algn="ctr">
               <a:buNone/>
             </a:pPr>
             <a:r>
@@ -28931,7 +28476,7 @@
           <a:bodyPr wrap="square" lIns="0" tIns="0" rIns="0" bIns="0" rtlCol="0" anchor="ctr"/>
           <a:lstStyle/>
           <a:p>
-            <a:pPr algn="ctr" indent="0" marL="0">
+            <a:pPr marL="0" indent="0" algn="ctr">
               <a:buNone/>
             </a:pPr>
             <a:r>
@@ -28997,7 +28542,7 @@
           <a:bodyPr wrap="square" lIns="0" tIns="0" rIns="0" bIns="0" rtlCol="0" anchor="ctr"/>
           <a:lstStyle/>
           <a:p>
-            <a:pPr algn="ctr" indent="0" marL="0">
+            <a:pPr marL="0" indent="0" algn="ctr">
               <a:buNone/>
             </a:pPr>
             <a:r>
@@ -29063,7 +28608,7 @@
           <a:bodyPr wrap="square" lIns="0" tIns="0" rIns="0" bIns="0" rtlCol="0" anchor="ctr"/>
           <a:lstStyle/>
           <a:p>
-            <a:pPr algn="ctr" indent="0" marL="0">
+            <a:pPr marL="0" indent="0" algn="ctr">
               <a:buNone/>
             </a:pPr>
             <a:r>
@@ -29129,7 +28674,7 @@
           <a:bodyPr wrap="square" lIns="0" tIns="0" rIns="0" bIns="0" rtlCol="0" anchor="ctr"/>
           <a:lstStyle/>
           <a:p>
-            <a:pPr algn="ctr" indent="0" marL="0">
+            <a:pPr marL="0" indent="0" algn="ctr">
               <a:buNone/>
             </a:pPr>
             <a:r>
@@ -29195,7 +28740,7 @@
           <a:bodyPr wrap="square" lIns="0" tIns="0" rIns="0" bIns="0" rtlCol="0" anchor="ctr"/>
           <a:lstStyle/>
           <a:p>
-            <a:pPr algn="ctr" indent="0" marL="0">
+            <a:pPr marL="0" indent="0" algn="ctr">
               <a:buNone/>
             </a:pPr>
             <a:r>
@@ -29234,7 +28779,7 @@
           <a:bodyPr wrap="square" lIns="0" tIns="0" rIns="0" bIns="0" rtlCol="0" anchor="ctr"/>
           <a:lstStyle/>
           <a:p>
-            <a:pPr indent="0" marL="0">
+            <a:pPr marL="0" indent="0">
               <a:buNone/>
             </a:pPr>
             <a:r>
@@ -29268,6 +28813,7 @@
         <a:solidFill>
           <a:srgbClr val="F7F7F4"/>
         </a:solidFill>
+        <a:effectLst/>
       </p:bgPr>
     </p:bg>
     <p:spTree>
@@ -29305,11 +28851,11 @@
           <a:bodyPr wrap="square" lIns="0" tIns="0" rIns="0" bIns="0" rtlCol="0" anchor="ctr"/>
           <a:lstStyle/>
           <a:p>
-            <a:pPr indent="0" marL="0">
-              <a:buNone/>
-            </a:pPr>
-            <a:r>
-              <a:rPr lang="en-US" sz="1200" b="1" spc="200" kern="0" dirty="0">
+            <a:pPr marL="0" indent="0">
+              <a:buNone/>
+            </a:pPr>
+            <a:r>
+              <a:rPr lang="en-US" sz="1200" b="1" kern="0" spc="200" dirty="0">
                 <a:solidFill>
                   <a:srgbClr val="3762FF"/>
                 </a:solidFill>
@@ -29344,7 +28890,7 @@
           <a:bodyPr wrap="square" lIns="0" tIns="0" rIns="0" bIns="0" rtlCol="0" anchor="t"/>
           <a:lstStyle/>
           <a:p>
-            <a:pPr indent="0" marL="0">
+            <a:pPr marL="0" indent="0">
               <a:buNone/>
             </a:pPr>
             <a:r>
@@ -29378,16 +28924,34 @@
         </p:nvGraphicFramePr>
         <p:xfrm>
           <a:off x="548640" y="1600200"/>
-          <a:ext cx="11094415" cy="914400"/>
+          <a:ext cx="11091672" cy="3712464"/>
         </p:xfrm>
         <a:graphic>
           <a:graphicData uri="http://schemas.openxmlformats.org/drawingml/2006/table">
             <a:tbl>
               <a:tblPr/>
               <a:tblGrid>
-                <a:gridCol w="2651760"/>
-                <a:gridCol w="3840480"/>
-                <a:gridCol w="4599432"/>
+                <a:gridCol w="2651760">
+                  <a:extLst>
+                    <a:ext uri="{9D8B030D-6E8A-4147-A177-3AD203B41FA5}">
+                      <a16:colId xmlns:a16="http://schemas.microsoft.com/office/drawing/2014/main" val="20000"/>
+                    </a:ext>
+                  </a:extLst>
+                </a:gridCol>
+                <a:gridCol w="3840480">
+                  <a:extLst>
+                    <a:ext uri="{9D8B030D-6E8A-4147-A177-3AD203B41FA5}">
+                      <a16:colId xmlns:a16="http://schemas.microsoft.com/office/drawing/2014/main" val="20001"/>
+                    </a:ext>
+                  </a:extLst>
+                </a:gridCol>
+                <a:gridCol w="4599432">
+                  <a:extLst>
+                    <a:ext uri="{9D8B030D-6E8A-4147-A177-3AD203B41FA5}">
+                      <a16:colId xmlns:a16="http://schemas.microsoft.com/office/drawing/2014/main" val="20002"/>
+                    </a:ext>
+                  </a:extLst>
+                </a:gridCol>
               </a:tblGrid>
               <a:tr h="530352">
                 <a:tc>
@@ -29395,7 +28959,7 @@
                     <a:bodyPr/>
                     <a:lstStyle/>
                     <a:p>
-                      <a:pPr indent="0" marL="0">
+                      <a:pPr marL="0" indent="0">
                         <a:buNone/>
                       </a:pPr>
                       <a:endParaRPr lang="en-US" sz="1500" dirty="0">
@@ -29405,7 +28969,7 @@
                       </a:endParaRPr>
                     </a:p>
                   </a:txBody>
-                  <a:tcPr marL="109728" marR="109728" marT="45720" marB="45720" anchor="ctr">
+                  <a:tcPr marL="109728" marR="109728" anchor="ctr">
                     <a:lnL w="9525" cap="flat" cmpd="sng" algn="ctr">
                       <a:solidFill>
                         <a:srgbClr val="DDE3EA"/>
@@ -29452,7 +29016,7 @@
                     <a:bodyPr/>
                     <a:lstStyle/>
                     <a:p>
-                      <a:pPr indent="0" marL="0">
+                      <a:pPr marL="0" indent="0">
                         <a:buNone/>
                       </a:pPr>
                       <a:r>
@@ -29473,7 +29037,7 @@
                       </a:endParaRPr>
                     </a:p>
                   </a:txBody>
-                  <a:tcPr marL="109728" marR="109728" marT="45720" marB="45720" anchor="ctr">
+                  <a:tcPr marL="109728" marR="109728" anchor="ctr">
                     <a:lnL w="9525" cap="flat" cmpd="sng" algn="ctr">
                       <a:solidFill>
                         <a:srgbClr val="DDE3EA"/>
@@ -29520,7 +29084,7 @@
                     <a:bodyPr/>
                     <a:lstStyle/>
                     <a:p>
-                      <a:pPr indent="0" marL="0">
+                      <a:pPr marL="0" indent="0">
                         <a:buNone/>
                       </a:pPr>
                       <a:r>
@@ -29541,7 +29105,7 @@
                       </a:endParaRPr>
                     </a:p>
                   </a:txBody>
-                  <a:tcPr marL="109728" marR="109728" marT="45720" marB="45720" anchor="ctr">
+                  <a:tcPr marL="109728" marR="109728" anchor="ctr">
                     <a:lnL w="9525" cap="flat" cmpd="sng" algn="ctr">
                       <a:solidFill>
                         <a:srgbClr val="DDE3EA"/>
@@ -29583,6 +29147,11 @@
                     </a:solidFill>
                   </a:tcPr>
                 </a:tc>
+                <a:extLst>
+                  <a:ext uri="{0D108BD9-81ED-4DB2-BD59-A6C34878D82A}">
+                    <a16:rowId xmlns:a16="http://schemas.microsoft.com/office/drawing/2014/main" val="10000"/>
+                  </a:ext>
+                </a:extLst>
               </a:tr>
               <a:tr h="530352">
                 <a:tc>
@@ -29590,7 +29159,7 @@
                     <a:bodyPr/>
                     <a:lstStyle/>
                     <a:p>
-                      <a:pPr indent="0" marL="0">
+                      <a:pPr marL="0" indent="0">
                         <a:buNone/>
                       </a:pPr>
                       <a:r>
@@ -29611,7 +29180,7 @@
                       </a:endParaRPr>
                     </a:p>
                   </a:txBody>
-                  <a:tcPr marL="109728" marR="109728" marT="45720" marB="45720" anchor="ctr">
+                  <a:tcPr marL="109728" marR="109728" anchor="ctr">
                     <a:lnL w="9525" cap="flat" cmpd="sng" algn="ctr">
                       <a:solidFill>
                         <a:srgbClr val="DDE3EA"/>
@@ -29655,7 +29224,7 @@
                     <a:bodyPr/>
                     <a:lstStyle/>
                     <a:p>
-                      <a:pPr indent="0" marL="0">
+                      <a:pPr marL="0" indent="0">
                         <a:buNone/>
                       </a:pPr>
                       <a:r>
@@ -29676,7 +29245,7 @@
                       </a:endParaRPr>
                     </a:p>
                   </a:txBody>
-                  <a:tcPr marL="109728" marR="109728" marT="45720" marB="45720" anchor="ctr">
+                  <a:tcPr marL="109728" marR="109728" anchor="ctr">
                     <a:lnL w="9525" cap="flat" cmpd="sng" algn="ctr">
                       <a:solidFill>
                         <a:srgbClr val="DDE3EA"/>
@@ -29720,7 +29289,7 @@
                     <a:bodyPr/>
                     <a:lstStyle/>
                     <a:p>
-                      <a:pPr indent="0" marL="0">
+                      <a:pPr marL="0" indent="0">
                         <a:buNone/>
                       </a:pPr>
                       <a:r>
@@ -29741,7 +29310,7 @@
                       </a:endParaRPr>
                     </a:p>
                   </a:txBody>
-                  <a:tcPr marL="109728" marR="109728" marT="45720" marB="45720" anchor="ctr">
+                  <a:tcPr marL="109728" marR="109728" anchor="ctr">
                     <a:lnL w="9525" cap="flat" cmpd="sng" algn="ctr">
                       <a:solidFill>
                         <a:srgbClr val="DDE3EA"/>
@@ -29780,6 +29349,11 @@
                     </a:lnB>
                   </a:tcPr>
                 </a:tc>
+                <a:extLst>
+                  <a:ext uri="{0D108BD9-81ED-4DB2-BD59-A6C34878D82A}">
+                    <a16:rowId xmlns:a16="http://schemas.microsoft.com/office/drawing/2014/main" val="10001"/>
+                  </a:ext>
+                </a:extLst>
               </a:tr>
               <a:tr h="530352">
                 <a:tc>
@@ -29787,7 +29361,7 @@
                     <a:bodyPr/>
                     <a:lstStyle/>
                     <a:p>
-                      <a:pPr indent="0" marL="0">
+                      <a:pPr marL="0" indent="0">
                         <a:buNone/>
                       </a:pPr>
                       <a:r>
@@ -29808,7 +29382,7 @@
                       </a:endParaRPr>
                     </a:p>
                   </a:txBody>
-                  <a:tcPr marL="109728" marR="109728" marT="45720" marB="45720" anchor="ctr">
+                  <a:tcPr marL="109728" marR="109728" anchor="ctr">
                     <a:lnL w="9525" cap="flat" cmpd="sng" algn="ctr">
                       <a:solidFill>
                         <a:srgbClr val="DDE3EA"/>
@@ -29852,7 +29426,7 @@
                     <a:bodyPr/>
                     <a:lstStyle/>
                     <a:p>
-                      <a:pPr indent="0" marL="0">
+                      <a:pPr marL="0" indent="0">
                         <a:buNone/>
                       </a:pPr>
                       <a:r>
@@ -29873,7 +29447,7 @@
                       </a:endParaRPr>
                     </a:p>
                   </a:txBody>
-                  <a:tcPr marL="109728" marR="109728" marT="45720" marB="45720" anchor="ctr">
+                  <a:tcPr marL="109728" marR="109728" anchor="ctr">
                     <a:lnL w="9525" cap="flat" cmpd="sng" algn="ctr">
                       <a:solidFill>
                         <a:srgbClr val="DDE3EA"/>
@@ -29917,7 +29491,7 @@
                     <a:bodyPr/>
                     <a:lstStyle/>
                     <a:p>
-                      <a:pPr indent="0" marL="0">
+                      <a:pPr marL="0" indent="0">
                         <a:buNone/>
                       </a:pPr>
                       <a:r>
@@ -29938,7 +29512,7 @@
                       </a:endParaRPr>
                     </a:p>
                   </a:txBody>
-                  <a:tcPr marL="109728" marR="109728" marT="45720" marB="45720" anchor="ctr">
+                  <a:tcPr marL="109728" marR="109728" anchor="ctr">
                     <a:lnL w="9525" cap="flat" cmpd="sng" algn="ctr">
                       <a:solidFill>
                         <a:srgbClr val="DDE3EA"/>
@@ -29977,6 +29551,11 @@
                     </a:lnB>
                   </a:tcPr>
                 </a:tc>
+                <a:extLst>
+                  <a:ext uri="{0D108BD9-81ED-4DB2-BD59-A6C34878D82A}">
+                    <a16:rowId xmlns:a16="http://schemas.microsoft.com/office/drawing/2014/main" val="10002"/>
+                  </a:ext>
+                </a:extLst>
               </a:tr>
               <a:tr h="530352">
                 <a:tc>
@@ -29984,7 +29563,7 @@
                     <a:bodyPr/>
                     <a:lstStyle/>
                     <a:p>
-                      <a:pPr indent="0" marL="0">
+                      <a:pPr marL="0" indent="0">
                         <a:buNone/>
                       </a:pPr>
                       <a:r>
@@ -30005,7 +29584,7 @@
                       </a:endParaRPr>
                     </a:p>
                   </a:txBody>
-                  <a:tcPr marL="109728" marR="109728" marT="45720" marB="45720" anchor="ctr">
+                  <a:tcPr marL="109728" marR="109728" anchor="ctr">
                     <a:lnL w="9525" cap="flat" cmpd="sng" algn="ctr">
                       <a:solidFill>
                         <a:srgbClr val="DDE3EA"/>
@@ -30049,7 +29628,7 @@
                     <a:bodyPr/>
                     <a:lstStyle/>
                     <a:p>
-                      <a:pPr indent="0" marL="0">
+                      <a:pPr marL="0" indent="0">
                         <a:buNone/>
                       </a:pPr>
                       <a:r>
@@ -30070,7 +29649,7 @@
                       </a:endParaRPr>
                     </a:p>
                   </a:txBody>
-                  <a:tcPr marL="109728" marR="109728" marT="45720" marB="45720" anchor="ctr">
+                  <a:tcPr marL="109728" marR="109728" anchor="ctr">
                     <a:lnL w="9525" cap="flat" cmpd="sng" algn="ctr">
                       <a:solidFill>
                         <a:srgbClr val="DDE3EA"/>
@@ -30114,7 +29693,7 @@
                     <a:bodyPr/>
                     <a:lstStyle/>
                     <a:p>
-                      <a:pPr indent="0" marL="0">
+                      <a:pPr marL="0" indent="0">
                         <a:buNone/>
                       </a:pPr>
                       <a:r>
@@ -30135,7 +29714,7 @@
                       </a:endParaRPr>
                     </a:p>
                   </a:txBody>
-                  <a:tcPr marL="109728" marR="109728" marT="45720" marB="45720" anchor="ctr">
+                  <a:tcPr marL="109728" marR="109728" anchor="ctr">
                     <a:lnL w="9525" cap="flat" cmpd="sng" algn="ctr">
                       <a:solidFill>
                         <a:srgbClr val="DDE3EA"/>
@@ -30174,6 +29753,11 @@
                     </a:lnB>
                   </a:tcPr>
                 </a:tc>
+                <a:extLst>
+                  <a:ext uri="{0D108BD9-81ED-4DB2-BD59-A6C34878D82A}">
+                    <a16:rowId xmlns:a16="http://schemas.microsoft.com/office/drawing/2014/main" val="10003"/>
+                  </a:ext>
+                </a:extLst>
               </a:tr>
               <a:tr h="530352">
                 <a:tc>
@@ -30181,7 +29765,7 @@
                     <a:bodyPr/>
                     <a:lstStyle/>
                     <a:p>
-                      <a:pPr indent="0" marL="0">
+                      <a:pPr marL="0" indent="0">
                         <a:buNone/>
                       </a:pPr>
                       <a:r>
@@ -30202,7 +29786,7 @@
                       </a:endParaRPr>
                     </a:p>
                   </a:txBody>
-                  <a:tcPr marL="109728" marR="109728" marT="45720" marB="45720" anchor="ctr">
+                  <a:tcPr marL="109728" marR="109728" anchor="ctr">
                     <a:lnL w="9525" cap="flat" cmpd="sng" algn="ctr">
                       <a:solidFill>
                         <a:srgbClr val="DDE3EA"/>
@@ -30246,7 +29830,7 @@
                     <a:bodyPr/>
                     <a:lstStyle/>
                     <a:p>
-                      <a:pPr indent="0" marL="0">
+                      <a:pPr marL="0" indent="0">
                         <a:buNone/>
                       </a:pPr>
                       <a:r>
@@ -30267,7 +29851,7 @@
                       </a:endParaRPr>
                     </a:p>
                   </a:txBody>
-                  <a:tcPr marL="109728" marR="109728" marT="45720" marB="45720" anchor="ctr">
+                  <a:tcPr marL="109728" marR="109728" anchor="ctr">
                     <a:lnL w="9525" cap="flat" cmpd="sng" algn="ctr">
                       <a:solidFill>
                         <a:srgbClr val="DDE3EA"/>
@@ -30311,7 +29895,7 @@
                     <a:bodyPr/>
                     <a:lstStyle/>
                     <a:p>
-                      <a:pPr indent="0" marL="0">
+                      <a:pPr marL="0" indent="0">
                         <a:buNone/>
                       </a:pPr>
                       <a:r>
@@ -30332,7 +29916,7 @@
                       </a:endParaRPr>
                     </a:p>
                   </a:txBody>
-                  <a:tcPr marL="109728" marR="109728" marT="45720" marB="45720" anchor="ctr">
+                  <a:tcPr marL="109728" marR="109728" anchor="ctr">
                     <a:lnL w="9525" cap="flat" cmpd="sng" algn="ctr">
                       <a:solidFill>
                         <a:srgbClr val="DDE3EA"/>
@@ -30371,6 +29955,11 @@
                     </a:lnB>
                   </a:tcPr>
                 </a:tc>
+                <a:extLst>
+                  <a:ext uri="{0D108BD9-81ED-4DB2-BD59-A6C34878D82A}">
+                    <a16:rowId xmlns:a16="http://schemas.microsoft.com/office/drawing/2014/main" val="10004"/>
+                  </a:ext>
+                </a:extLst>
               </a:tr>
               <a:tr h="530352">
                 <a:tc>
@@ -30378,7 +29967,7 @@
                     <a:bodyPr/>
                     <a:lstStyle/>
                     <a:p>
-                      <a:pPr indent="0" marL="0">
+                      <a:pPr marL="0" indent="0">
                         <a:buNone/>
                       </a:pPr>
                       <a:r>
@@ -30399,7 +29988,7 @@
                       </a:endParaRPr>
                     </a:p>
                   </a:txBody>
-                  <a:tcPr marL="109728" marR="109728" marT="45720" marB="45720" anchor="ctr">
+                  <a:tcPr marL="109728" marR="109728" anchor="ctr">
                     <a:lnL w="9525" cap="flat" cmpd="sng" algn="ctr">
                       <a:solidFill>
                         <a:srgbClr val="DDE3EA"/>
@@ -30443,7 +30032,7 @@
                     <a:bodyPr/>
                     <a:lstStyle/>
                     <a:p>
-                      <a:pPr indent="0" marL="0">
+                      <a:pPr marL="0" indent="0">
                         <a:buNone/>
                       </a:pPr>
                       <a:r>
@@ -30464,7 +30053,7 @@
                       </a:endParaRPr>
                     </a:p>
                   </a:txBody>
-                  <a:tcPr marL="109728" marR="109728" marT="45720" marB="45720" anchor="ctr">
+                  <a:tcPr marL="109728" marR="109728" anchor="ctr">
                     <a:lnL w="9525" cap="flat" cmpd="sng" algn="ctr">
                       <a:solidFill>
                         <a:srgbClr val="DDE3EA"/>
@@ -30508,7 +30097,7 @@
                     <a:bodyPr/>
                     <a:lstStyle/>
                     <a:p>
-                      <a:pPr indent="0" marL="0">
+                      <a:pPr marL="0" indent="0">
                         <a:buNone/>
                       </a:pPr>
                       <a:r>
@@ -30529,7 +30118,7 @@
                       </a:endParaRPr>
                     </a:p>
                   </a:txBody>
-                  <a:tcPr marL="109728" marR="109728" marT="45720" marB="45720" anchor="ctr">
+                  <a:tcPr marL="109728" marR="109728" anchor="ctr">
                     <a:lnL w="9525" cap="flat" cmpd="sng" algn="ctr">
                       <a:solidFill>
                         <a:srgbClr val="DDE3EA"/>
@@ -30568,6 +30157,11 @@
                     </a:lnB>
                   </a:tcPr>
                 </a:tc>
+                <a:extLst>
+                  <a:ext uri="{0D108BD9-81ED-4DB2-BD59-A6C34878D82A}">
+                    <a16:rowId xmlns:a16="http://schemas.microsoft.com/office/drawing/2014/main" val="10005"/>
+                  </a:ext>
+                </a:extLst>
               </a:tr>
               <a:tr h="530352">
                 <a:tc>
@@ -30575,7 +30169,7 @@
                     <a:bodyPr/>
                     <a:lstStyle/>
                     <a:p>
-                      <a:pPr indent="0" marL="0">
+                      <a:pPr marL="0" indent="0">
                         <a:buNone/>
                       </a:pPr>
                       <a:r>
@@ -30596,7 +30190,7 @@
                       </a:endParaRPr>
                     </a:p>
                   </a:txBody>
-                  <a:tcPr marL="109728" marR="109728" marT="45720" marB="45720" anchor="ctr">
+                  <a:tcPr marL="109728" marR="109728" anchor="ctr">
                     <a:lnL w="9525" cap="flat" cmpd="sng" algn="ctr">
                       <a:solidFill>
                         <a:srgbClr val="DDE3EA"/>
@@ -30640,7 +30234,7 @@
                     <a:bodyPr/>
                     <a:lstStyle/>
                     <a:p>
-                      <a:pPr indent="0" marL="0">
+                      <a:pPr marL="0" indent="0">
                         <a:buNone/>
                       </a:pPr>
                       <a:r>
@@ -30661,7 +30255,7 @@
                       </a:endParaRPr>
                     </a:p>
                   </a:txBody>
-                  <a:tcPr marL="109728" marR="109728" marT="45720" marB="45720" anchor="ctr">
+                  <a:tcPr marL="109728" marR="109728" anchor="ctr">
                     <a:lnL w="9525" cap="flat" cmpd="sng" algn="ctr">
                       <a:solidFill>
                         <a:srgbClr val="DDE3EA"/>
@@ -30705,7 +30299,7 @@
                     <a:bodyPr/>
                     <a:lstStyle/>
                     <a:p>
-                      <a:pPr indent="0" marL="0">
+                      <a:pPr marL="0" indent="0">
                         <a:buNone/>
                       </a:pPr>
                       <a:r>
@@ -30726,7 +30320,7 @@
                       </a:endParaRPr>
                     </a:p>
                   </a:txBody>
-                  <a:tcPr marL="109728" marR="109728" marT="45720" marB="45720" anchor="ctr">
+                  <a:tcPr marL="109728" marR="109728" anchor="ctr">
                     <a:lnL w="9525" cap="flat" cmpd="sng" algn="ctr">
                       <a:solidFill>
                         <a:srgbClr val="DDE3EA"/>
@@ -30765,6 +30359,11 @@
                     </a:lnB>
                   </a:tcPr>
                 </a:tc>
+                <a:extLst>
+                  <a:ext uri="{0D108BD9-81ED-4DB2-BD59-A6C34878D82A}">
+                    <a16:rowId xmlns:a16="http://schemas.microsoft.com/office/drawing/2014/main" val="10006"/>
+                  </a:ext>
+                </a:extLst>
               </a:tr>
             </a:tbl>
           </a:graphicData>
@@ -30786,6 +30385,7 @@
         <a:solidFill>
           <a:srgbClr val="0F1F33"/>
         </a:solidFill>
+        <a:effectLst/>
       </p:bgPr>
     </p:bg>
     <p:spTree>
@@ -30823,11 +30423,11 @@
           <a:bodyPr wrap="square" lIns="0" tIns="0" rIns="0" bIns="0" rtlCol="0" anchor="ctr"/>
           <a:lstStyle/>
           <a:p>
-            <a:pPr indent="0" marL="0">
-              <a:buNone/>
-            </a:pPr>
-            <a:r>
-              <a:rPr lang="en-US" sz="1200" b="1" spc="200" kern="0" dirty="0">
+            <a:pPr marL="0" indent="0">
+              <a:buNone/>
+            </a:pPr>
+            <a:r>
+              <a:rPr lang="en-US" sz="1200" b="1" kern="0" spc="200" dirty="0">
                 <a:solidFill>
                   <a:srgbClr val="7C9CFF"/>
                 </a:solidFill>
@@ -30862,7 +30462,7 @@
           <a:bodyPr wrap="square" lIns="0" tIns="0" rIns="0" bIns="0" rtlCol="0" anchor="t"/>
           <a:lstStyle/>
           <a:p>
-            <a:pPr indent="0" marL="0">
+            <a:pPr marL="0" indent="0">
               <a:buNone/>
             </a:pPr>
             <a:r>
@@ -30928,7 +30528,7 @@
           <a:bodyPr wrap="square" lIns="0" tIns="0" rIns="0" bIns="0" rtlCol="0" anchor="t"/>
           <a:lstStyle/>
           <a:p>
-            <a:pPr indent="0" marL="0">
+            <a:pPr marL="0" indent="0">
               <a:buNone/>
             </a:pPr>
             <a:r>
@@ -30967,7 +30567,7 @@
           <a:bodyPr wrap="square" lIns="0" tIns="0" rIns="0" bIns="0" rtlCol="0" anchor="t"/>
           <a:lstStyle/>
           <a:p>
-            <a:pPr indent="0" marL="0">
+            <a:pPr marL="0" indent="0">
               <a:lnSpc>
                 <a:spcPct val="115000"/>
               </a:lnSpc>
@@ -31036,7 +30636,7 @@
           <a:bodyPr wrap="square" lIns="0" tIns="0" rIns="0" bIns="0" rtlCol="0" anchor="t"/>
           <a:lstStyle/>
           <a:p>
-            <a:pPr indent="0" marL="0">
+            <a:pPr marL="0" indent="0">
               <a:buNone/>
             </a:pPr>
             <a:r>
@@ -31075,7 +30675,7 @@
           <a:bodyPr wrap="square" lIns="0" tIns="0" rIns="0" bIns="0" rtlCol="0" anchor="t"/>
           <a:lstStyle/>
           <a:p>
-            <a:pPr indent="0" marL="0">
+            <a:pPr marL="0" indent="0">
               <a:lnSpc>
                 <a:spcPct val="115000"/>
               </a:lnSpc>
@@ -31144,7 +30744,7 @@
           <a:bodyPr wrap="square" lIns="0" tIns="0" rIns="0" bIns="0" rtlCol="0" anchor="t"/>
           <a:lstStyle/>
           <a:p>
-            <a:pPr indent="0" marL="0">
+            <a:pPr marL="0" indent="0">
               <a:buNone/>
             </a:pPr>
             <a:r>
@@ -31183,7 +30783,7 @@
           <a:bodyPr wrap="square" lIns="0" tIns="0" rIns="0" bIns="0" rtlCol="0" anchor="t"/>
           <a:lstStyle/>
           <a:p>
-            <a:pPr indent="0" marL="0">
+            <a:pPr marL="0" indent="0">
               <a:lnSpc>
                 <a:spcPct val="115000"/>
               </a:lnSpc>
@@ -31252,7 +30852,7 @@
           <a:bodyPr wrap="square" lIns="0" tIns="0" rIns="0" bIns="0" rtlCol="0" anchor="ctr"/>
           <a:lstStyle/>
           <a:p>
-            <a:pPr indent="0" marL="0">
+            <a:pPr marL="0" indent="0">
               <a:buNone/>
             </a:pPr>
             <a:r>
@@ -31286,6 +30886,7 @@
         <a:solidFill>
           <a:srgbClr val="F7F7F4"/>
         </a:solidFill>
+        <a:effectLst/>
       </p:bgPr>
     </p:bg>
     <p:spTree>
@@ -31323,11 +30924,11 @@
           <a:bodyPr wrap="square" lIns="0" tIns="0" rIns="0" bIns="0" rtlCol="0" anchor="ctr"/>
           <a:lstStyle/>
           <a:p>
-            <a:pPr indent="0" marL="0">
-              <a:buNone/>
-            </a:pPr>
-            <a:r>
-              <a:rPr lang="en-US" sz="1200" b="1" spc="200" kern="0" dirty="0">
+            <a:pPr marL="0" indent="0">
+              <a:buNone/>
+            </a:pPr>
+            <a:r>
+              <a:rPr lang="en-US" sz="1200" b="1" kern="0" spc="200" dirty="0">
                 <a:solidFill>
                   <a:srgbClr val="3762FF"/>
                 </a:solidFill>
@@ -31362,7 +30963,7 @@
           <a:bodyPr wrap="square" lIns="0" tIns="0" rIns="0" bIns="0" rtlCol="0" anchor="t"/>
           <a:lstStyle/>
           <a:p>
-            <a:pPr indent="0" marL="0">
+            <a:pPr marL="0" indent="0">
               <a:buNone/>
             </a:pPr>
             <a:r>
@@ -31401,7 +31002,7 @@
           <a:bodyPr wrap="square" lIns="0" tIns="0" rIns="0" bIns="0" rtlCol="0" anchor="t"/>
           <a:lstStyle/>
           <a:p>
-            <a:pPr indent="0" marL="0">
+            <a:pPr marL="0" indent="0">
               <a:lnSpc>
                 <a:spcPct val="120000"/>
               </a:lnSpc>
@@ -31448,7 +31049,7 @@
             <a:prstDash val="solid"/>
           </a:ln>
           <a:effectLst>
-            <a:outerShdw sx="100000" sy="100000" kx="0" ky="0" algn="bl" rotWithShape="0" blurRad="101600" dist="25400" dir="5400000">
+            <a:outerShdw blurRad="101600" dist="25400" dir="5400000" algn="bl" rotWithShape="0">
               <a:srgbClr val="000000">
                 <a:alpha val="10000"/>
               </a:srgbClr>
@@ -31477,11 +31078,11 @@
           <a:bodyPr wrap="square" lIns="0" tIns="0" rIns="0" bIns="0" rtlCol="0" anchor="ctr"/>
           <a:lstStyle/>
           <a:p>
-            <a:pPr indent="0" marL="0">
-              <a:buNone/>
-            </a:pPr>
-            <a:r>
-              <a:rPr lang="en-US" sz="1100" b="1" spc="200" kern="0" dirty="0">
+            <a:pPr marL="0" indent="0">
+              <a:buNone/>
+            </a:pPr>
+            <a:r>
+              <a:rPr lang="en-US" sz="1100" b="1" kern="0" spc="200" dirty="0">
                 <a:solidFill>
                   <a:srgbClr val="3762FF"/>
                 </a:solidFill>
@@ -31543,7 +31144,7 @@
           <a:bodyPr wrap="square" lIns="0" tIns="0" rIns="0" bIns="0" rtlCol="0" anchor="ctr"/>
           <a:lstStyle/>
           <a:p>
-            <a:pPr indent="0" marL="0">
+            <a:pPr marL="0" indent="0">
               <a:buNone/>
             </a:pPr>
             <a:r>
@@ -31582,7 +31183,7 @@
           <a:bodyPr wrap="square" lIns="0" tIns="0" rIns="0" bIns="0" rtlCol="0" anchor="t"/>
           <a:lstStyle/>
           <a:p>
-            <a:pPr indent="0" marL="0">
+            <a:pPr marL="0" indent="0">
               <a:buNone/>
             </a:pPr>
             <a:r>
@@ -31599,7 +31200,7 @@
             <a:endParaRPr lang="en-US" sz="1300" dirty="0"/>
           </a:p>
           <a:p>
-            <a:pPr indent="0" marL="0">
+            <a:pPr marL="0" indent="0">
               <a:buNone/>
             </a:pPr>
             <a:r>
@@ -31665,7 +31266,7 @@
           <a:bodyPr wrap="square" lIns="0" tIns="0" rIns="0" bIns="0" rtlCol="0" anchor="ctr"/>
           <a:lstStyle/>
           <a:p>
-            <a:pPr indent="0" marL="0">
+            <a:pPr marL="0" indent="0">
               <a:buNone/>
             </a:pPr>
             <a:r>
@@ -31704,7 +31305,7 @@
           <a:bodyPr wrap="square" lIns="0" tIns="0" rIns="0" bIns="0" rtlCol="0" anchor="t"/>
           <a:lstStyle/>
           <a:p>
-            <a:pPr indent="0" marL="0">
+            <a:pPr marL="0" indent="0">
               <a:buNone/>
             </a:pPr>
             <a:r>
@@ -31721,7 +31322,7 @@
             <a:endParaRPr lang="en-US" sz="1300" dirty="0"/>
           </a:p>
           <a:p>
-            <a:pPr indent="0" marL="0">
+            <a:pPr marL="0" indent="0">
               <a:buNone/>
             </a:pPr>
             <a:r>
@@ -31787,7 +31388,7 @@
           <a:bodyPr wrap="square" lIns="0" tIns="0" rIns="0" bIns="0" rtlCol="0" anchor="ctr"/>
           <a:lstStyle/>
           <a:p>
-            <a:pPr indent="0" marL="0">
+            <a:pPr marL="0" indent="0">
               <a:buNone/>
             </a:pPr>
             <a:r>
@@ -31826,7 +31427,7 @@
           <a:bodyPr wrap="square" lIns="0" tIns="0" rIns="0" bIns="0" rtlCol="0" anchor="t"/>
           <a:lstStyle/>
           <a:p>
-            <a:pPr indent="0" marL="0">
+            <a:pPr marL="0" indent="0">
               <a:buNone/>
             </a:pPr>
             <a:r>
@@ -31843,7 +31444,7 @@
             <a:endParaRPr lang="en-US" sz="1300" dirty="0"/>
           </a:p>
           <a:p>
-            <a:pPr indent="0" marL="0">
+            <a:pPr marL="0" indent="0">
               <a:buNone/>
             </a:pPr>
             <a:r>
@@ -31906,7 +31507,7 @@
           <a:bodyPr wrap="square" lIns="0" tIns="0" rIns="0" bIns="0" rtlCol="0" anchor="ctr"/>
           <a:lstStyle/>
           <a:p>
-            <a:pPr indent="0" marL="0">
+            <a:pPr marL="0" indent="0">
               <a:buNone/>
             </a:pPr>
             <a:r>
@@ -31945,7 +31546,7 @@
           <a:bodyPr wrap="square" lIns="0" tIns="0" rIns="0" bIns="0" rtlCol="0" anchor="t"/>
           <a:lstStyle/>
           <a:p>
-            <a:pPr indent="0" marL="0">
+            <a:pPr marL="0" indent="0">
               <a:lnSpc>
                 <a:spcPct val="120000"/>
               </a:lnSpc>
@@ -31982,6 +31583,7 @@
         <a:solidFill>
           <a:srgbClr val="0F1F33"/>
         </a:solidFill>
+        <a:effectLst/>
       </p:bgPr>
     </p:bg>
     <p:spTree>
@@ -32019,7 +31621,7 @@
           <a:bodyPr wrap="square" lIns="0" tIns="0" rIns="0" bIns="0" rtlCol="0" anchor="ctr"/>
           <a:lstStyle/>
           <a:p>
-            <a:pPr indent="0" marL="0">
+            <a:pPr marL="0" indent="0">
               <a:buNone/>
             </a:pPr>
             <a:r>
@@ -32058,7 +31660,7 @@
           <a:bodyPr wrap="square" lIns="0" tIns="0" rIns="0" bIns="0" rtlCol="0" anchor="ctr"/>
           <a:lstStyle/>
           <a:p>
-            <a:pPr indent="0" marL="0">
+            <a:pPr marL="0" indent="0">
               <a:buNone/>
             </a:pPr>
             <a:r>
@@ -32097,7 +31699,7 @@
           <a:bodyPr wrap="square" lIns="0" tIns="0" rIns="0" bIns="0" rtlCol="0" anchor="t"/>
           <a:lstStyle/>
           <a:p>
-            <a:pPr indent="0" marL="0">
+            <a:pPr marL="0" indent="0">
               <a:lnSpc>
                 <a:spcPct val="120000"/>
               </a:lnSpc>
@@ -32419,4 +32021,299 @@
     </a:ext>
   </a:extLst>
 </a:theme>
+</file>
+
+<file path=ppt/theme/theme2.xml><?xml version="1.0" encoding="utf-8"?>
+<a:theme xmlns:a="http://schemas.openxmlformats.org/drawingml/2006/main" name="Office Theme">
+  <a:themeElements>
+    <a:clrScheme name="Office">
+      <a:dk1>
+        <a:sysClr val="windowText" lastClr="000000"/>
+      </a:dk1>
+      <a:lt1>
+        <a:sysClr val="window" lastClr="FFFFFF"/>
+      </a:lt1>
+      <a:dk2>
+        <a:srgbClr val="44546A"/>
+      </a:dk2>
+      <a:lt2>
+        <a:srgbClr val="E7E6E6"/>
+      </a:lt2>
+      <a:accent1>
+        <a:srgbClr val="4472C4"/>
+      </a:accent1>
+      <a:accent2>
+        <a:srgbClr val="ED7D31"/>
+      </a:accent2>
+      <a:accent3>
+        <a:srgbClr val="A5A5A5"/>
+      </a:accent3>
+      <a:accent4>
+        <a:srgbClr val="FFC000"/>
+      </a:accent4>
+      <a:accent5>
+        <a:srgbClr val="5B9BD5"/>
+      </a:accent5>
+      <a:accent6>
+        <a:srgbClr val="70AD47"/>
+      </a:accent6>
+      <a:hlink>
+        <a:srgbClr val="0563C1"/>
+      </a:hlink>
+      <a:folHlink>
+        <a:srgbClr val="954F72"/>
+      </a:folHlink>
+    </a:clrScheme>
+    <a:fontScheme name="Office">
+      <a:majorFont>
+        <a:latin typeface="Calibri Light" panose="020F0302020204030204"/>
+        <a:ea typeface=""/>
+        <a:cs typeface=""/>
+        <a:font script="Jpan" typeface="游ゴシック Light"/>
+        <a:font script="Hang" typeface="맑은 고딕"/>
+        <a:font script="Hans" typeface="等线 Light"/>
+        <a:font script="Hant" typeface="新細明體"/>
+        <a:font script="Arab" typeface="Times New Roman"/>
+        <a:font script="Hebr" typeface="Times New Roman"/>
+        <a:font script="Thai" typeface="Angsana New"/>
+        <a:font script="Ethi" typeface="Nyala"/>
+        <a:font script="Beng" typeface="Vrinda"/>
+        <a:font script="Gujr" typeface="Shruti"/>
+        <a:font script="Khmr" typeface="MoolBoran"/>
+        <a:font script="Knda" typeface="Tunga"/>
+        <a:font script="Guru" typeface="Raavi"/>
+        <a:font script="Cans" typeface="Euphemia"/>
+        <a:font script="Cher" typeface="Plantagenet Cherokee"/>
+        <a:font script="Yiii" typeface="Microsoft Yi Baiti"/>
+        <a:font script="Tibt" typeface="Microsoft Himalaya"/>
+        <a:font script="Thaa" typeface="MV Boli"/>
+        <a:font script="Deva" typeface="Mangal"/>
+        <a:font script="Telu" typeface="Gautami"/>
+        <a:font script="Taml" typeface="Latha"/>
+        <a:font script="Syrc" typeface="Estrangelo Edessa"/>
+        <a:font script="Orya" typeface="Kalinga"/>
+        <a:font script="Mlym" typeface="Kartika"/>
+        <a:font script="Laoo" typeface="DokChampa"/>
+        <a:font script="Sinh" typeface="Iskoola Pota"/>
+        <a:font script="Mong" typeface="Mongolian Baiti"/>
+        <a:font script="Viet" typeface="Times New Roman"/>
+        <a:font script="Uigh" typeface="Microsoft Uighur"/>
+        <a:font script="Geor" typeface="Sylfaen"/>
+        <a:font script="Armn" typeface="Arial"/>
+        <a:font script="Bugi" typeface="Leelawadee UI"/>
+        <a:font script="Bopo" typeface="Microsoft JhengHei"/>
+        <a:font script="Java" typeface="Javanese Text"/>
+        <a:font script="Lisu" typeface="Segoe UI"/>
+        <a:font script="Mymr" typeface="Myanmar Text"/>
+        <a:font script="Nkoo" typeface="Ebrima"/>
+        <a:font script="Olck" typeface="Nirmala UI"/>
+        <a:font script="Osma" typeface="Ebrima"/>
+        <a:font script="Phag" typeface="Phagspa"/>
+        <a:font script="Syrn" typeface="Estrangelo Edessa"/>
+        <a:font script="Syrj" typeface="Estrangelo Edessa"/>
+        <a:font script="Syre" typeface="Estrangelo Edessa"/>
+        <a:font script="Sora" typeface="Nirmala UI"/>
+        <a:font script="Tale" typeface="Microsoft Tai Le"/>
+        <a:font script="Talu" typeface="Microsoft New Tai Lue"/>
+        <a:font script="Tfng" typeface="Ebrima"/>
+      </a:majorFont>
+      <a:minorFont>
+        <a:latin typeface="Calibri" panose="020F0502020204030204"/>
+        <a:ea typeface=""/>
+        <a:cs typeface=""/>
+        <a:font script="Jpan" typeface="游ゴシック"/>
+        <a:font script="Hang" typeface="맑은 고딕"/>
+        <a:font script="Hans" typeface="等线"/>
+        <a:font script="Hant" typeface="新細明體"/>
+        <a:font script="Arab" typeface="Arial"/>
+        <a:font script="Hebr" typeface="Arial"/>
+        <a:font script="Thai" typeface="Cordia New"/>
+        <a:font script="Ethi" typeface="Nyala"/>
+        <a:font script="Beng" typeface="Vrinda"/>
+        <a:font script="Gujr" typeface="Shruti"/>
+        <a:font script="Khmr" typeface="DaunPenh"/>
+        <a:font script="Knda" typeface="Tunga"/>
+        <a:font script="Guru" typeface="Raavi"/>
+        <a:font script="Cans" typeface="Euphemia"/>
+        <a:font script="Cher" typeface="Plantagenet Cherokee"/>
+        <a:font script="Yiii" typeface="Microsoft Yi Baiti"/>
+        <a:font script="Tibt" typeface="Microsoft Himalaya"/>
+        <a:font script="Thaa" typeface="MV Boli"/>
+        <a:font script="Deva" typeface="Mangal"/>
+        <a:font script="Telu" typeface="Gautami"/>
+        <a:font script="Taml" typeface="Latha"/>
+        <a:font script="Syrc" typeface="Estrangelo Edessa"/>
+        <a:font script="Orya" typeface="Kalinga"/>
+        <a:font script="Mlym" typeface="Kartika"/>
+        <a:font script="Laoo" typeface="DokChampa"/>
+        <a:font script="Sinh" typeface="Iskoola Pota"/>
+        <a:font script="Mong" typeface="Mongolian Baiti"/>
+        <a:font script="Viet" typeface="Arial"/>
+        <a:font script="Uigh" typeface="Microsoft Uighur"/>
+        <a:font script="Geor" typeface="Sylfaen"/>
+        <a:font script="Armn" typeface="Arial"/>
+        <a:font script="Bugi" typeface="Leelawadee UI"/>
+        <a:font script="Bopo" typeface="Microsoft JhengHei"/>
+        <a:font script="Java" typeface="Javanese Text"/>
+        <a:font script="Lisu" typeface="Segoe UI"/>
+        <a:font script="Mymr" typeface="Myanmar Text"/>
+        <a:font script="Nkoo" typeface="Ebrima"/>
+        <a:font script="Olck" typeface="Nirmala UI"/>
+        <a:font script="Osma" typeface="Ebrima"/>
+        <a:font script="Phag" typeface="Phagspa"/>
+        <a:font script="Syrn" typeface="Estrangelo Edessa"/>
+        <a:font script="Syrj" typeface="Estrangelo Edessa"/>
+        <a:font script="Syre" typeface="Estrangelo Edessa"/>
+        <a:font script="Sora" typeface="Nirmala UI"/>
+        <a:font script="Tale" typeface="Microsoft Tai Le"/>
+        <a:font script="Talu" typeface="Microsoft New Tai Lue"/>
+        <a:font script="Tfng" typeface="Ebrima"/>
+      </a:minorFont>
+    </a:fontScheme>
+    <a:fmtScheme name="Office">
+      <a:fillStyleLst>
+        <a:solidFill>
+          <a:schemeClr val="phClr"/>
+        </a:solidFill>
+        <a:gradFill rotWithShape="1">
+          <a:gsLst>
+            <a:gs pos="0">
+              <a:schemeClr val="phClr">
+                <a:lumMod val="110000"/>
+                <a:satMod val="105000"/>
+                <a:tint val="67000"/>
+              </a:schemeClr>
+            </a:gs>
+            <a:gs pos="50000">
+              <a:schemeClr val="phClr">
+                <a:lumMod val="105000"/>
+                <a:satMod val="103000"/>
+                <a:tint val="73000"/>
+              </a:schemeClr>
+            </a:gs>
+            <a:gs pos="100000">
+              <a:schemeClr val="phClr">
+                <a:lumMod val="105000"/>
+                <a:satMod val="109000"/>
+                <a:tint val="81000"/>
+              </a:schemeClr>
+            </a:gs>
+          </a:gsLst>
+          <a:lin ang="5400000" scaled="0"/>
+        </a:gradFill>
+        <a:gradFill rotWithShape="1">
+          <a:gsLst>
+            <a:gs pos="0">
+              <a:schemeClr val="phClr">
+                <a:satMod val="103000"/>
+                <a:lumMod val="102000"/>
+                <a:tint val="94000"/>
+              </a:schemeClr>
+            </a:gs>
+            <a:gs pos="50000">
+              <a:schemeClr val="phClr">
+                <a:satMod val="110000"/>
+                <a:lumMod val="100000"/>
+                <a:shade val="100000"/>
+              </a:schemeClr>
+            </a:gs>
+            <a:gs pos="100000">
+              <a:schemeClr val="phClr">
+                <a:lumMod val="99000"/>
+                <a:satMod val="120000"/>
+                <a:shade val="78000"/>
+              </a:schemeClr>
+            </a:gs>
+          </a:gsLst>
+          <a:lin ang="5400000" scaled="0"/>
+        </a:gradFill>
+      </a:fillStyleLst>
+      <a:lnStyleLst>
+        <a:ln w="6350" cap="flat" cmpd="sng" algn="ctr">
+          <a:solidFill>
+            <a:schemeClr val="phClr"/>
+          </a:solidFill>
+          <a:prstDash val="solid"/>
+          <a:miter lim="800000"/>
+        </a:ln>
+        <a:ln w="12700" cap="flat" cmpd="sng" algn="ctr">
+          <a:solidFill>
+            <a:schemeClr val="phClr"/>
+          </a:solidFill>
+          <a:prstDash val="solid"/>
+          <a:miter lim="800000"/>
+        </a:ln>
+        <a:ln w="19050" cap="flat" cmpd="sng" algn="ctr">
+          <a:solidFill>
+            <a:schemeClr val="phClr"/>
+          </a:solidFill>
+          <a:prstDash val="solid"/>
+          <a:miter lim="800000"/>
+        </a:ln>
+      </a:lnStyleLst>
+      <a:effectStyleLst>
+        <a:effectStyle>
+          <a:effectLst/>
+        </a:effectStyle>
+        <a:effectStyle>
+          <a:effectLst/>
+        </a:effectStyle>
+        <a:effectStyle>
+          <a:effectLst>
+            <a:outerShdw blurRad="57150" dist="19050" dir="5400000" algn="ctr" rotWithShape="0">
+              <a:srgbClr val="000000">
+                <a:alpha val="63000"/>
+              </a:srgbClr>
+            </a:outerShdw>
+          </a:effectLst>
+        </a:effectStyle>
+      </a:effectStyleLst>
+      <a:bgFillStyleLst>
+        <a:solidFill>
+          <a:schemeClr val="phClr"/>
+        </a:solidFill>
+        <a:solidFill>
+          <a:schemeClr val="phClr">
+            <a:tint val="95000"/>
+            <a:satMod val="170000"/>
+          </a:schemeClr>
+        </a:solidFill>
+        <a:gradFill rotWithShape="1">
+          <a:gsLst>
+            <a:gs pos="0">
+              <a:schemeClr val="phClr">
+                <a:tint val="93000"/>
+                <a:satMod val="150000"/>
+                <a:shade val="98000"/>
+                <a:lumMod val="102000"/>
+              </a:schemeClr>
+            </a:gs>
+            <a:gs pos="50000">
+              <a:schemeClr val="phClr">
+                <a:tint val="98000"/>
+                <a:satMod val="130000"/>
+                <a:shade val="90000"/>
+                <a:lumMod val="103000"/>
+              </a:schemeClr>
+            </a:gs>
+            <a:gs pos="100000">
+              <a:schemeClr val="phClr">
+                <a:shade val="63000"/>
+                <a:satMod val="120000"/>
+              </a:schemeClr>
+            </a:gs>
+          </a:gsLst>
+          <a:lin ang="5400000" scaled="0"/>
+        </a:gradFill>
+      </a:bgFillStyleLst>
+    </a:fmtScheme>
+  </a:themeElements>
+  <a:objectDefaults/>
+  <a:extraClrSchemeLst/>
+  <a:extLst>
+    <a:ext uri="{05A4C25C-085E-4340-85A3-A5531E510DB2}">
+      <thm15:themeFamily xmlns:thm15="http://schemas.microsoft.com/office/thememl/2012/main" name="Office Theme" id="{62F939B6-93AF-4DB8-9C6B-D6C7DFDC589F}" vid="{4A3C46E8-61CC-4603-A589-7422A47A8E4A}"/>
+    </a:ext>
+  </a:extLst>
+</a:theme>
 </file>